--- a/Лекции/pptx/Лекция10-ПГП-2025.pptx
+++ b/Лекции/pptx/Лекция10-ПГП-2025.pptx
@@ -29,9 +29,6 @@
     <p:sldId id="273" r:id="rId25"/>
     <p:sldId id="274" r:id="rId26"/>
     <p:sldId id="275" r:id="rId27"/>
-    <p:sldId id="276" r:id="rId28"/>
-    <p:sldId id="277" r:id="rId29"/>
-    <p:sldId id="278" r:id="rId30"/>
   </p:sldIdLst>
   <p:sldSz cy="5143500" cx="9144000"/>
   <p:notesSz cx="6858000" cy="9144000"/>
@@ -877,7 +874,7 @@
   <p:cSld>
     <p:spTree>
       <p:nvGrpSpPr>
-        <p:cNvPr id="117" name="Shape 117"/>
+        <p:cNvPr id="114" name="Shape 114"/>
         <p:cNvGrpSpPr/>
         <p:nvPr/>
       </p:nvGrpSpPr>
@@ -891,7 +888,7 @@
       </p:grpSpPr>
       <p:sp>
         <p:nvSpPr>
-          <p:cNvPr id="118" name="Google Shape;118;g229f76a6c23_0_40:notes"/>
+          <p:cNvPr id="115" name="Google Shape;115;g2c807a2ddd4_0_0:notes"/>
           <p:cNvSpPr/>
           <p:nvPr>
             <p:ph idx="2" type="sldImg"/>
@@ -926,7 +923,7 @@
       </p:sp>
       <p:sp>
         <p:nvSpPr>
-          <p:cNvPr id="119" name="Google Shape;119;g229f76a6c23_0_40:notes"/>
+          <p:cNvPr id="116" name="Google Shape;116;g2c807a2ddd4_0_0:notes"/>
           <p:cNvSpPr txBox="1"/>
           <p:nvPr>
             <p:ph idx="1" type="body"/>
@@ -976,7 +973,7 @@
   <p:cSld>
     <p:spTree>
       <p:nvGrpSpPr>
-        <p:cNvPr id="122" name="Shape 122"/>
+        <p:cNvPr id="119" name="Shape 119"/>
         <p:cNvGrpSpPr/>
         <p:nvPr/>
       </p:nvGrpSpPr>
@@ -990,7 +987,7 @@
       </p:grpSpPr>
       <p:sp>
         <p:nvSpPr>
-          <p:cNvPr id="123" name="Google Shape;123;g229f76a6c23_0_43:notes"/>
+          <p:cNvPr id="120" name="Google Shape;120;g2c807a2ddd4_0_3:notes"/>
           <p:cNvSpPr/>
           <p:nvPr>
             <p:ph idx="2" type="sldImg"/>
@@ -1025,7 +1022,7 @@
       </p:sp>
       <p:sp>
         <p:nvSpPr>
-          <p:cNvPr id="124" name="Google Shape;124;g229f76a6c23_0_43:notes"/>
+          <p:cNvPr id="121" name="Google Shape;121;g2c807a2ddd4_0_3:notes"/>
           <p:cNvSpPr txBox="1"/>
           <p:nvPr>
             <p:ph idx="1" type="body"/>
@@ -1075,7 +1072,7 @@
   <p:cSld>
     <p:spTree>
       <p:nvGrpSpPr>
-        <p:cNvPr id="127" name="Shape 127"/>
+        <p:cNvPr id="124" name="Shape 124"/>
         <p:cNvGrpSpPr/>
         <p:nvPr/>
       </p:nvGrpSpPr>
@@ -1089,7 +1086,7 @@
       </p:grpSpPr>
       <p:sp>
         <p:nvSpPr>
-          <p:cNvPr id="128" name="Google Shape;128;g229f76a6c23_0_46:notes"/>
+          <p:cNvPr id="125" name="Google Shape;125;g2c807a2ddd4_0_6:notes"/>
           <p:cNvSpPr/>
           <p:nvPr>
             <p:ph idx="2" type="sldImg"/>
@@ -1124,7 +1121,7 @@
       </p:sp>
       <p:sp>
         <p:nvSpPr>
-          <p:cNvPr id="129" name="Google Shape;129;g229f76a6c23_0_46:notes"/>
+          <p:cNvPr id="126" name="Google Shape;126;g2c807a2ddd4_0_6:notes"/>
           <p:cNvSpPr txBox="1"/>
           <p:nvPr>
             <p:ph idx="1" type="body"/>
@@ -1174,7 +1171,7 @@
   <p:cSld>
     <p:spTree>
       <p:nvGrpSpPr>
-        <p:cNvPr id="132" name="Shape 132"/>
+        <p:cNvPr id="129" name="Shape 129"/>
         <p:cNvGrpSpPr/>
         <p:nvPr/>
       </p:nvGrpSpPr>
@@ -1188,7 +1185,7 @@
       </p:grpSpPr>
       <p:sp>
         <p:nvSpPr>
-          <p:cNvPr id="133" name="Google Shape;133;g2c807a2ddd4_0_0:notes"/>
+          <p:cNvPr id="130" name="Google Shape;130;g229f76a6c23_0_12:notes"/>
           <p:cNvSpPr/>
           <p:nvPr>
             <p:ph idx="2" type="sldImg"/>
@@ -1223,7 +1220,7 @@
       </p:sp>
       <p:sp>
         <p:nvSpPr>
-          <p:cNvPr id="134" name="Google Shape;134;g2c807a2ddd4_0_0:notes"/>
+          <p:cNvPr id="131" name="Google Shape;131;g229f76a6c23_0_12:notes"/>
           <p:cNvSpPr txBox="1"/>
           <p:nvPr>
             <p:ph idx="1" type="body"/>
@@ -1273,7 +1270,7 @@
   <p:cSld>
     <p:spTree>
       <p:nvGrpSpPr>
-        <p:cNvPr id="137" name="Shape 137"/>
+        <p:cNvPr id="135" name="Shape 135"/>
         <p:cNvGrpSpPr/>
         <p:nvPr/>
       </p:nvGrpSpPr>
@@ -1287,7 +1284,7 @@
       </p:grpSpPr>
       <p:sp>
         <p:nvSpPr>
-          <p:cNvPr id="138" name="Google Shape;138;g2c807a2ddd4_0_3:notes"/>
+          <p:cNvPr id="136" name="Google Shape;136;g22a1e164a49_0_38:notes"/>
           <p:cNvSpPr/>
           <p:nvPr>
             <p:ph idx="2" type="sldImg"/>
@@ -1322,7 +1319,7 @@
       </p:sp>
       <p:sp>
         <p:nvSpPr>
-          <p:cNvPr id="139" name="Google Shape;139;g2c807a2ddd4_0_3:notes"/>
+          <p:cNvPr id="137" name="Google Shape;137;g22a1e164a49_0_38:notes"/>
           <p:cNvSpPr txBox="1"/>
           <p:nvPr>
             <p:ph idx="1" type="body"/>
@@ -1372,7 +1369,7 @@
   <p:cSld>
     <p:spTree>
       <p:nvGrpSpPr>
-        <p:cNvPr id="142" name="Shape 142"/>
+        <p:cNvPr id="140" name="Shape 140"/>
         <p:cNvGrpSpPr/>
         <p:nvPr/>
       </p:nvGrpSpPr>
@@ -1386,7 +1383,7 @@
       </p:grpSpPr>
       <p:sp>
         <p:nvSpPr>
-          <p:cNvPr id="143" name="Google Shape;143;g2c807a2ddd4_0_6:notes"/>
+          <p:cNvPr id="141" name="Google Shape;141;g22a1e164a49_0_0:notes"/>
           <p:cNvSpPr/>
           <p:nvPr>
             <p:ph idx="2" type="sldImg"/>
@@ -1421,7 +1418,7 @@
       </p:sp>
       <p:sp>
         <p:nvSpPr>
-          <p:cNvPr id="144" name="Google Shape;144;g2c807a2ddd4_0_6:notes"/>
+          <p:cNvPr id="142" name="Google Shape;142;g22a1e164a49_0_0:notes"/>
           <p:cNvSpPr txBox="1"/>
           <p:nvPr>
             <p:ph idx="1" type="body"/>
@@ -1471,7 +1468,7 @@
   <p:cSld>
     <p:spTree>
       <p:nvGrpSpPr>
-        <p:cNvPr id="147" name="Shape 147"/>
+        <p:cNvPr id="145" name="Shape 145"/>
         <p:cNvGrpSpPr/>
         <p:nvPr/>
       </p:nvGrpSpPr>
@@ -1485,7 +1482,7 @@
       </p:grpSpPr>
       <p:sp>
         <p:nvSpPr>
-          <p:cNvPr id="148" name="Google Shape;148;g229f76a6c23_0_12:notes"/>
+          <p:cNvPr id="146" name="Google Shape;146;g22a1e164a49_0_10:notes"/>
           <p:cNvSpPr/>
           <p:nvPr>
             <p:ph idx="2" type="sldImg"/>
@@ -1520,7 +1517,7 @@
       </p:sp>
       <p:sp>
         <p:nvSpPr>
-          <p:cNvPr id="149" name="Google Shape;149;g229f76a6c23_0_12:notes"/>
+          <p:cNvPr id="147" name="Google Shape;147;g22a1e164a49_0_10:notes"/>
           <p:cNvSpPr txBox="1"/>
           <p:nvPr>
             <p:ph idx="1" type="body"/>
@@ -1570,7 +1567,7 @@
   <p:cSld>
     <p:spTree>
       <p:nvGrpSpPr>
-        <p:cNvPr id="153" name="Shape 153"/>
+        <p:cNvPr id="150" name="Shape 150"/>
         <p:cNvGrpSpPr/>
         <p:nvPr/>
       </p:nvGrpSpPr>
@@ -1584,7 +1581,7 @@
       </p:grpSpPr>
       <p:sp>
         <p:nvSpPr>
-          <p:cNvPr id="154" name="Google Shape;154;g22a1e164a49_0_38:notes"/>
+          <p:cNvPr id="151" name="Google Shape;151;g22a1e164a49_0_21:notes"/>
           <p:cNvSpPr/>
           <p:nvPr>
             <p:ph idx="2" type="sldImg"/>
@@ -1619,7 +1616,7 @@
       </p:sp>
       <p:sp>
         <p:nvSpPr>
-          <p:cNvPr id="155" name="Google Shape;155;g22a1e164a49_0_38:notes"/>
+          <p:cNvPr id="152" name="Google Shape;152;g22a1e164a49_0_21:notes"/>
           <p:cNvSpPr txBox="1"/>
           <p:nvPr>
             <p:ph idx="1" type="body"/>
@@ -1669,7 +1666,7 @@
   <p:cSld>
     <p:spTree>
       <p:nvGrpSpPr>
-        <p:cNvPr id="158" name="Shape 158"/>
+        <p:cNvPr id="155" name="Shape 155"/>
         <p:cNvGrpSpPr/>
         <p:nvPr/>
       </p:nvGrpSpPr>
@@ -1683,7 +1680,7 @@
       </p:grpSpPr>
       <p:sp>
         <p:nvSpPr>
-          <p:cNvPr id="159" name="Google Shape;159;g22a1e164a49_0_0:notes"/>
+          <p:cNvPr id="156" name="Google Shape;156;g22a1e164a49_0_26:notes"/>
           <p:cNvSpPr/>
           <p:nvPr>
             <p:ph idx="2" type="sldImg"/>
@@ -1718,7 +1715,7 @@
       </p:sp>
       <p:sp>
         <p:nvSpPr>
-          <p:cNvPr id="160" name="Google Shape;160;g22a1e164a49_0_0:notes"/>
+          <p:cNvPr id="157" name="Google Shape;157;g22a1e164a49_0_26:notes"/>
           <p:cNvSpPr txBox="1"/>
           <p:nvPr>
             <p:ph idx="1" type="body"/>
@@ -1768,7 +1765,7 @@
   <p:cSld>
     <p:spTree>
       <p:nvGrpSpPr>
-        <p:cNvPr id="163" name="Shape 163"/>
+        <p:cNvPr id="160" name="Shape 160"/>
         <p:cNvGrpSpPr/>
         <p:nvPr/>
       </p:nvGrpSpPr>
@@ -1782,7 +1779,7 @@
       </p:grpSpPr>
       <p:sp>
         <p:nvSpPr>
-          <p:cNvPr id="164" name="Google Shape;164;g22a1e164a49_0_10:notes"/>
+          <p:cNvPr id="161" name="Google Shape;161;g229f76a6c23_0_61:notes"/>
           <p:cNvSpPr/>
           <p:nvPr>
             <p:ph idx="2" type="sldImg"/>
@@ -1817,7 +1814,7 @@
       </p:sp>
       <p:sp>
         <p:nvSpPr>
-          <p:cNvPr id="165" name="Google Shape;165;g22a1e164a49_0_10:notes"/>
+          <p:cNvPr id="162" name="Google Shape;162;g229f76a6c23_0_61:notes"/>
           <p:cNvSpPr txBox="1"/>
           <p:nvPr>
             <p:ph idx="1" type="body"/>
@@ -1881,7 +1878,7 @@
       </p:grpSpPr>
       <p:sp>
         <p:nvSpPr>
-          <p:cNvPr id="72" name="Google Shape;72;g229f76a6c23_0_0:notes"/>
+          <p:cNvPr id="72" name="Google Shape;72;g229f76a6c23_0_21:notes"/>
           <p:cNvSpPr/>
           <p:nvPr>
             <p:ph idx="2" type="sldImg"/>
@@ -1916,7 +1913,7 @@
       </p:sp>
       <p:sp>
         <p:nvSpPr>
-          <p:cNvPr id="73" name="Google Shape;73;g229f76a6c23_0_0:notes"/>
+          <p:cNvPr id="73" name="Google Shape;73;g229f76a6c23_0_21:notes"/>
           <p:cNvSpPr txBox="1"/>
           <p:nvPr>
             <p:ph idx="1" type="body"/>
@@ -1966,7 +1963,7 @@
   <p:cSld>
     <p:spTree>
       <p:nvGrpSpPr>
-        <p:cNvPr id="168" name="Shape 168"/>
+        <p:cNvPr id="165" name="Shape 165"/>
         <p:cNvGrpSpPr/>
         <p:nvPr/>
       </p:nvGrpSpPr>
@@ -1980,7 +1977,7 @@
       </p:grpSpPr>
       <p:sp>
         <p:nvSpPr>
-          <p:cNvPr id="169" name="Google Shape;169;g22a1e164a49_0_21:notes"/>
+          <p:cNvPr id="166" name="Google Shape;166;g229f76a6c23_0_64:notes"/>
           <p:cNvSpPr/>
           <p:nvPr>
             <p:ph idx="2" type="sldImg"/>
@@ -2015,7 +2012,7 @@
       </p:sp>
       <p:sp>
         <p:nvSpPr>
-          <p:cNvPr id="170" name="Google Shape;170;g22a1e164a49_0_21:notes"/>
+          <p:cNvPr id="167" name="Google Shape;167;g229f76a6c23_0_64:notes"/>
           <p:cNvSpPr txBox="1"/>
           <p:nvPr>
             <p:ph idx="1" type="body"/>
@@ -2060,12 +2057,12 @@
 </p:notes>
 </file>
 
-<file path=ppt/notesSlides/notesSlide21.xml><?xml version="1.0" encoding="utf-8"?>
+<file path=ppt/notesSlides/notesSlide3.xml><?xml version="1.0" encoding="utf-8"?>
 <p:notes xmlns:a="http://schemas.openxmlformats.org/drawingml/2006/main" xmlns:r="http://schemas.openxmlformats.org/officeDocument/2006/relationships" xmlns:mc="http://schemas.openxmlformats.org/markup-compatibility/2006" xmlns:mv="urn:schemas-microsoft-com:mac:vml" xmlns:p="http://schemas.openxmlformats.org/presentationml/2006/main" xmlns:c="http://schemas.openxmlformats.org/drawingml/2006/chart" xmlns:dgm="http://schemas.openxmlformats.org/drawingml/2006/diagram" xmlns:o="urn:schemas-microsoft-com:office:office" xmlns:v="urn:schemas-microsoft-com:vml" xmlns:pvml="urn:schemas-microsoft-com:office:powerpoint" xmlns:com="http://schemas.openxmlformats.org/drawingml/2006/compatibility" xmlns:p14="http://schemas.microsoft.com/office/powerpoint/2010/main" xmlns:p15="http://schemas.microsoft.com/office/powerpoint/2012/main" xmlns:ahyp="http://schemas.microsoft.com/office/drawing/2018/hyperlinkcolor" showMasterPhAnim="0" showMasterSp="0">
   <p:cSld>
     <p:spTree>
       <p:nvGrpSpPr>
-        <p:cNvPr id="173" name="Shape 173"/>
+        <p:cNvPr id="78" name="Shape 78"/>
         <p:cNvGrpSpPr/>
         <p:nvPr/>
       </p:nvGrpSpPr>
@@ -2079,7 +2076,7 @@
       </p:grpSpPr>
       <p:sp>
         <p:nvSpPr>
-          <p:cNvPr id="174" name="Google Shape;174;g22a1e164a49_0_26:notes"/>
+          <p:cNvPr id="79" name="Google Shape;79;g229f76a6c23_0_24:notes"/>
           <p:cNvSpPr/>
           <p:nvPr>
             <p:ph idx="2" type="sldImg"/>
@@ -2114,7 +2111,7 @@
       </p:sp>
       <p:sp>
         <p:nvSpPr>
-          <p:cNvPr id="175" name="Google Shape;175;g22a1e164a49_0_26:notes"/>
+          <p:cNvPr id="80" name="Google Shape;80;g229f76a6c23_0_24:notes"/>
           <p:cNvSpPr txBox="1"/>
           <p:nvPr>
             <p:ph idx="1" type="body"/>
@@ -2159,12 +2156,12 @@
 </p:notes>
 </file>
 
-<file path=ppt/notesSlides/notesSlide22.xml><?xml version="1.0" encoding="utf-8"?>
+<file path=ppt/notesSlides/notesSlide4.xml><?xml version="1.0" encoding="utf-8"?>
 <p:notes xmlns:a="http://schemas.openxmlformats.org/drawingml/2006/main" xmlns:r="http://schemas.openxmlformats.org/officeDocument/2006/relationships" xmlns:mc="http://schemas.openxmlformats.org/markup-compatibility/2006" xmlns:mv="urn:schemas-microsoft-com:mac:vml" xmlns:p="http://schemas.openxmlformats.org/presentationml/2006/main" xmlns:c="http://schemas.openxmlformats.org/drawingml/2006/chart" xmlns:dgm="http://schemas.openxmlformats.org/drawingml/2006/diagram" xmlns:o="urn:schemas-microsoft-com:office:office" xmlns:v="urn:schemas-microsoft-com:vml" xmlns:pvml="urn:schemas-microsoft-com:office:powerpoint" xmlns:com="http://schemas.openxmlformats.org/drawingml/2006/compatibility" xmlns:p14="http://schemas.microsoft.com/office/powerpoint/2010/main" xmlns:p15="http://schemas.microsoft.com/office/powerpoint/2012/main" xmlns:ahyp="http://schemas.microsoft.com/office/drawing/2018/hyperlinkcolor" showMasterPhAnim="0" showMasterSp="0">
   <p:cSld>
     <p:spTree>
       <p:nvGrpSpPr>
-        <p:cNvPr id="178" name="Shape 178"/>
+        <p:cNvPr id="83" name="Shape 83"/>
         <p:cNvGrpSpPr/>
         <p:nvPr/>
       </p:nvGrpSpPr>
@@ -2178,7 +2175,7 @@
       </p:grpSpPr>
       <p:sp>
         <p:nvSpPr>
-          <p:cNvPr id="179" name="Google Shape;179;g229f76a6c23_0_61:notes"/>
+          <p:cNvPr id="84" name="Google Shape;84;g229f76a6c23_0_29:notes"/>
           <p:cNvSpPr/>
           <p:nvPr>
             <p:ph idx="2" type="sldImg"/>
@@ -2213,7 +2210,7 @@
       </p:sp>
       <p:sp>
         <p:nvSpPr>
-          <p:cNvPr id="180" name="Google Shape;180;g229f76a6c23_0_61:notes"/>
+          <p:cNvPr id="85" name="Google Shape;85;g229f76a6c23_0_29:notes"/>
           <p:cNvSpPr txBox="1"/>
           <p:nvPr>
             <p:ph idx="1" type="body"/>
@@ -2258,12 +2255,12 @@
 </p:notes>
 </file>
 
-<file path=ppt/notesSlides/notesSlide23.xml><?xml version="1.0" encoding="utf-8"?>
+<file path=ppt/notesSlides/notesSlide5.xml><?xml version="1.0" encoding="utf-8"?>
 <p:notes xmlns:a="http://schemas.openxmlformats.org/drawingml/2006/main" xmlns:r="http://schemas.openxmlformats.org/officeDocument/2006/relationships" xmlns:mc="http://schemas.openxmlformats.org/markup-compatibility/2006" xmlns:mv="urn:schemas-microsoft-com:mac:vml" xmlns:p="http://schemas.openxmlformats.org/presentationml/2006/main" xmlns:c="http://schemas.openxmlformats.org/drawingml/2006/chart" xmlns:dgm="http://schemas.openxmlformats.org/drawingml/2006/diagram" xmlns:o="urn:schemas-microsoft-com:office:office" xmlns:v="urn:schemas-microsoft-com:vml" xmlns:pvml="urn:schemas-microsoft-com:office:powerpoint" xmlns:com="http://schemas.openxmlformats.org/drawingml/2006/compatibility" xmlns:p14="http://schemas.microsoft.com/office/powerpoint/2010/main" xmlns:p15="http://schemas.microsoft.com/office/powerpoint/2012/main" xmlns:ahyp="http://schemas.microsoft.com/office/drawing/2018/hyperlinkcolor" showMasterPhAnim="0" showMasterSp="0">
   <p:cSld>
     <p:spTree>
       <p:nvGrpSpPr>
-        <p:cNvPr id="183" name="Shape 183"/>
+        <p:cNvPr id="88" name="Shape 88"/>
         <p:cNvGrpSpPr/>
         <p:nvPr/>
       </p:nvGrpSpPr>
@@ -2277,7 +2274,7 @@
       </p:grpSpPr>
       <p:sp>
         <p:nvSpPr>
-          <p:cNvPr id="184" name="Google Shape;184;g229f76a6c23_0_64:notes"/>
+          <p:cNvPr id="89" name="Google Shape;89;g229f76a6c23_0_32:notes"/>
           <p:cNvSpPr/>
           <p:nvPr>
             <p:ph idx="2" type="sldImg"/>
@@ -2312,7 +2309,7 @@
       </p:sp>
       <p:sp>
         <p:nvSpPr>
-          <p:cNvPr id="185" name="Google Shape;185;g229f76a6c23_0_64:notes"/>
+          <p:cNvPr id="90" name="Google Shape;90;g229f76a6c23_0_32:notes"/>
           <p:cNvSpPr txBox="1"/>
           <p:nvPr>
             <p:ph idx="1" type="body"/>
@@ -2357,12 +2354,12 @@
 </p:notes>
 </file>
 
-<file path=ppt/notesSlides/notesSlide3.xml><?xml version="1.0" encoding="utf-8"?>
+<file path=ppt/notesSlides/notesSlide6.xml><?xml version="1.0" encoding="utf-8"?>
 <p:notes xmlns:a="http://schemas.openxmlformats.org/drawingml/2006/main" xmlns:r="http://schemas.openxmlformats.org/officeDocument/2006/relationships" xmlns:mc="http://schemas.openxmlformats.org/markup-compatibility/2006" xmlns:mv="urn:schemas-microsoft-com:mac:vml" xmlns:p="http://schemas.openxmlformats.org/presentationml/2006/main" xmlns:c="http://schemas.openxmlformats.org/drawingml/2006/chart" xmlns:dgm="http://schemas.openxmlformats.org/drawingml/2006/diagram" xmlns:o="urn:schemas-microsoft-com:office:office" xmlns:v="urn:schemas-microsoft-com:vml" xmlns:pvml="urn:schemas-microsoft-com:office:powerpoint" xmlns:com="http://schemas.openxmlformats.org/drawingml/2006/compatibility" xmlns:p14="http://schemas.microsoft.com/office/powerpoint/2010/main" xmlns:p15="http://schemas.microsoft.com/office/powerpoint/2012/main" xmlns:ahyp="http://schemas.microsoft.com/office/drawing/2018/hyperlinkcolor" showMasterPhAnim="0" showMasterSp="0">
   <p:cSld>
     <p:spTree>
       <p:nvGrpSpPr>
-        <p:cNvPr id="76" name="Shape 76"/>
+        <p:cNvPr id="94" name="Shape 94"/>
         <p:cNvGrpSpPr/>
         <p:nvPr/>
       </p:nvGrpSpPr>
@@ -2376,7 +2373,7 @@
       </p:grpSpPr>
       <p:sp>
         <p:nvSpPr>
-          <p:cNvPr id="77" name="Google Shape;77;g22a1e164a49_0_50:notes"/>
+          <p:cNvPr id="95" name="Google Shape;95;g229f76a6c23_0_37:notes"/>
           <p:cNvSpPr/>
           <p:nvPr>
             <p:ph idx="2" type="sldImg"/>
@@ -2411,7 +2408,7 @@
       </p:sp>
       <p:sp>
         <p:nvSpPr>
-          <p:cNvPr id="78" name="Google Shape;78;g22a1e164a49_0_50:notes"/>
+          <p:cNvPr id="96" name="Google Shape;96;g229f76a6c23_0_37:notes"/>
           <p:cNvSpPr txBox="1"/>
           <p:nvPr>
             <p:ph idx="1" type="body"/>
@@ -2456,12 +2453,12 @@
 </p:notes>
 </file>
 
-<file path=ppt/notesSlides/notesSlide4.xml><?xml version="1.0" encoding="utf-8"?>
+<file path=ppt/notesSlides/notesSlide7.xml><?xml version="1.0" encoding="utf-8"?>
 <p:notes xmlns:a="http://schemas.openxmlformats.org/drawingml/2006/main" xmlns:r="http://schemas.openxmlformats.org/officeDocument/2006/relationships" xmlns:mc="http://schemas.openxmlformats.org/markup-compatibility/2006" xmlns:mv="urn:schemas-microsoft-com:mac:vml" xmlns:p="http://schemas.openxmlformats.org/presentationml/2006/main" xmlns:c="http://schemas.openxmlformats.org/drawingml/2006/chart" xmlns:dgm="http://schemas.openxmlformats.org/drawingml/2006/diagram" xmlns:o="urn:schemas-microsoft-com:office:office" xmlns:v="urn:schemas-microsoft-com:vml" xmlns:pvml="urn:schemas-microsoft-com:office:powerpoint" xmlns:com="http://schemas.openxmlformats.org/drawingml/2006/compatibility" xmlns:p14="http://schemas.microsoft.com/office/powerpoint/2010/main" xmlns:p15="http://schemas.microsoft.com/office/powerpoint/2012/main" xmlns:ahyp="http://schemas.microsoft.com/office/drawing/2018/hyperlinkcolor" showMasterPhAnim="0" showMasterSp="0">
   <p:cSld>
     <p:spTree>
       <p:nvGrpSpPr>
-        <p:cNvPr id="84" name="Shape 84"/>
+        <p:cNvPr id="99" name="Shape 99"/>
         <p:cNvGrpSpPr/>
         <p:nvPr/>
       </p:nvGrpSpPr>
@@ -2475,7 +2472,7 @@
       </p:grpSpPr>
       <p:sp>
         <p:nvSpPr>
-          <p:cNvPr id="85" name="Google Shape;85;g22a1e164a49_0_47:notes"/>
+          <p:cNvPr id="100" name="Google Shape;100;g229f76a6c23_0_40:notes"/>
           <p:cNvSpPr/>
           <p:nvPr>
             <p:ph idx="2" type="sldImg"/>
@@ -2510,7 +2507,7 @@
       </p:sp>
       <p:sp>
         <p:nvSpPr>
-          <p:cNvPr id="86" name="Google Shape;86;g22a1e164a49_0_47:notes"/>
+          <p:cNvPr id="101" name="Google Shape;101;g229f76a6c23_0_40:notes"/>
           <p:cNvSpPr txBox="1"/>
           <p:nvPr>
             <p:ph idx="1" type="body"/>
@@ -2555,12 +2552,12 @@
 </p:notes>
 </file>
 
-<file path=ppt/notesSlides/notesSlide5.xml><?xml version="1.0" encoding="utf-8"?>
+<file path=ppt/notesSlides/notesSlide8.xml><?xml version="1.0" encoding="utf-8"?>
 <p:notes xmlns:a="http://schemas.openxmlformats.org/drawingml/2006/main" xmlns:r="http://schemas.openxmlformats.org/officeDocument/2006/relationships" xmlns:mc="http://schemas.openxmlformats.org/markup-compatibility/2006" xmlns:mv="urn:schemas-microsoft-com:mac:vml" xmlns:p="http://schemas.openxmlformats.org/presentationml/2006/main" xmlns:c="http://schemas.openxmlformats.org/drawingml/2006/chart" xmlns:dgm="http://schemas.openxmlformats.org/drawingml/2006/diagram" xmlns:o="urn:schemas-microsoft-com:office:office" xmlns:v="urn:schemas-microsoft-com:vml" xmlns:pvml="urn:schemas-microsoft-com:office:powerpoint" xmlns:com="http://schemas.openxmlformats.org/drawingml/2006/compatibility" xmlns:p14="http://schemas.microsoft.com/office/powerpoint/2010/main" xmlns:p15="http://schemas.microsoft.com/office/powerpoint/2012/main" xmlns:ahyp="http://schemas.microsoft.com/office/drawing/2018/hyperlinkcolor" showMasterPhAnim="0" showMasterSp="0">
   <p:cSld>
     <p:spTree>
       <p:nvGrpSpPr>
-        <p:cNvPr id="89" name="Shape 89"/>
+        <p:cNvPr id="104" name="Shape 104"/>
         <p:cNvGrpSpPr/>
         <p:nvPr/>
       </p:nvGrpSpPr>
@@ -2574,7 +2571,7 @@
       </p:grpSpPr>
       <p:sp>
         <p:nvSpPr>
-          <p:cNvPr id="90" name="Google Shape;90;g229f76a6c23_0_21:notes"/>
+          <p:cNvPr id="105" name="Google Shape;105;g229f76a6c23_0_43:notes"/>
           <p:cNvSpPr/>
           <p:nvPr>
             <p:ph idx="2" type="sldImg"/>
@@ -2609,7 +2606,7 @@
       </p:sp>
       <p:sp>
         <p:nvSpPr>
-          <p:cNvPr id="91" name="Google Shape;91;g229f76a6c23_0_21:notes"/>
+          <p:cNvPr id="106" name="Google Shape;106;g229f76a6c23_0_43:notes"/>
           <p:cNvSpPr txBox="1"/>
           <p:nvPr>
             <p:ph idx="1" type="body"/>
@@ -2654,12 +2651,12 @@
 </p:notes>
 </file>
 
-<file path=ppt/notesSlides/notesSlide6.xml><?xml version="1.0" encoding="utf-8"?>
+<file path=ppt/notesSlides/notesSlide9.xml><?xml version="1.0" encoding="utf-8"?>
 <p:notes xmlns:a="http://schemas.openxmlformats.org/drawingml/2006/main" xmlns:r="http://schemas.openxmlformats.org/officeDocument/2006/relationships" xmlns:mc="http://schemas.openxmlformats.org/markup-compatibility/2006" xmlns:mv="urn:schemas-microsoft-com:mac:vml" xmlns:p="http://schemas.openxmlformats.org/presentationml/2006/main" xmlns:c="http://schemas.openxmlformats.org/drawingml/2006/chart" xmlns:dgm="http://schemas.openxmlformats.org/drawingml/2006/diagram" xmlns:o="urn:schemas-microsoft-com:office:office" xmlns:v="urn:schemas-microsoft-com:vml" xmlns:pvml="urn:schemas-microsoft-com:office:powerpoint" xmlns:com="http://schemas.openxmlformats.org/drawingml/2006/compatibility" xmlns:p14="http://schemas.microsoft.com/office/powerpoint/2010/main" xmlns:p15="http://schemas.microsoft.com/office/powerpoint/2012/main" xmlns:ahyp="http://schemas.microsoft.com/office/drawing/2018/hyperlinkcolor" showMasterPhAnim="0" showMasterSp="0">
   <p:cSld>
     <p:spTree>
       <p:nvGrpSpPr>
-        <p:cNvPr id="96" name="Shape 96"/>
+        <p:cNvPr id="109" name="Shape 109"/>
         <p:cNvGrpSpPr/>
         <p:nvPr/>
       </p:nvGrpSpPr>
@@ -2673,7 +2670,7 @@
       </p:grpSpPr>
       <p:sp>
         <p:nvSpPr>
-          <p:cNvPr id="97" name="Google Shape;97;g229f76a6c23_0_24:notes"/>
+          <p:cNvPr id="110" name="Google Shape;110;g229f76a6c23_0_46:notes"/>
           <p:cNvSpPr/>
           <p:nvPr>
             <p:ph idx="2" type="sldImg"/>
@@ -2708,304 +2705,7 @@
       </p:sp>
       <p:sp>
         <p:nvSpPr>
-          <p:cNvPr id="98" name="Google Shape;98;g229f76a6c23_0_24:notes"/>
-          <p:cNvSpPr txBox="1"/>
-          <p:nvPr>
-            <p:ph idx="1" type="body"/>
-          </p:nvPr>
-        </p:nvSpPr>
-        <p:spPr>
-          <a:xfrm>
-            <a:off x="685800" y="4343400"/>
-            <a:ext cx="5486400" cy="4114800"/>
-          </a:xfrm>
-          <a:prstGeom prst="rect">
-            <a:avLst/>
-          </a:prstGeom>
-        </p:spPr>
-        <p:txBody>
-          <a:bodyPr anchorCtr="0" anchor="t" bIns="91425" lIns="91425" spcFirstLastPara="1" rIns="91425" wrap="square" tIns="91425">
-            <a:noAutofit/>
-          </a:bodyPr>
-          <a:lstStyle/>
-          <a:p>
-            <a:pPr indent="0" lvl="0" marL="0" rtl="0" algn="l">
-              <a:spcBef>
-                <a:spcPts val="0"/>
-              </a:spcBef>
-              <a:spcAft>
-                <a:spcPts val="0"/>
-              </a:spcAft>
-              <a:buNone/>
-            </a:pPr>
-            <a:r>
-              <a:t/>
-            </a:r>
-            <a:endParaRPr/>
-          </a:p>
-        </p:txBody>
-      </p:sp>
-    </p:spTree>
-  </p:cSld>
-  <p:clrMapOvr>
-    <a:masterClrMapping/>
-  </p:clrMapOvr>
-</p:notes>
-</file>
-
-<file path=ppt/notesSlides/notesSlide7.xml><?xml version="1.0" encoding="utf-8"?>
-<p:notes xmlns:a="http://schemas.openxmlformats.org/drawingml/2006/main" xmlns:r="http://schemas.openxmlformats.org/officeDocument/2006/relationships" xmlns:mc="http://schemas.openxmlformats.org/markup-compatibility/2006" xmlns:mv="urn:schemas-microsoft-com:mac:vml" xmlns:p="http://schemas.openxmlformats.org/presentationml/2006/main" xmlns:c="http://schemas.openxmlformats.org/drawingml/2006/chart" xmlns:dgm="http://schemas.openxmlformats.org/drawingml/2006/diagram" xmlns:o="urn:schemas-microsoft-com:office:office" xmlns:v="urn:schemas-microsoft-com:vml" xmlns:pvml="urn:schemas-microsoft-com:office:powerpoint" xmlns:com="http://schemas.openxmlformats.org/drawingml/2006/compatibility" xmlns:p14="http://schemas.microsoft.com/office/powerpoint/2010/main" xmlns:p15="http://schemas.microsoft.com/office/powerpoint/2012/main" xmlns:ahyp="http://schemas.microsoft.com/office/drawing/2018/hyperlinkcolor" showMasterPhAnim="0" showMasterSp="0">
-  <p:cSld>
-    <p:spTree>
-      <p:nvGrpSpPr>
-        <p:cNvPr id="101" name="Shape 101"/>
-        <p:cNvGrpSpPr/>
-        <p:nvPr/>
-      </p:nvGrpSpPr>
-      <p:grpSpPr>
-        <a:xfrm>
-          <a:off x="0" y="0"/>
-          <a:ext cx="0" cy="0"/>
-          <a:chOff x="0" y="0"/>
-          <a:chExt cx="0" cy="0"/>
-        </a:xfrm>
-      </p:grpSpPr>
-      <p:sp>
-        <p:nvSpPr>
-          <p:cNvPr id="102" name="Google Shape;102;g229f76a6c23_0_29:notes"/>
-          <p:cNvSpPr/>
-          <p:nvPr>
-            <p:ph idx="2" type="sldImg"/>
-          </p:nvPr>
-        </p:nvSpPr>
-        <p:spPr>
-          <a:xfrm>
-            <a:off x="381300" y="685800"/>
-            <a:ext cx="6096000" cy="3429000"/>
-          </a:xfrm>
-          <a:custGeom>
-            <a:rect b="b" l="l" r="r" t="t"/>
-            <a:pathLst>
-              <a:path extrusionOk="0" h="120000" w="120000">
-                <a:moveTo>
-                  <a:pt x="0" y="0"/>
-                </a:moveTo>
-                <a:lnTo>
-                  <a:pt x="120000" y="0"/>
-                </a:lnTo>
-                <a:lnTo>
-                  <a:pt x="120000" y="120000"/>
-                </a:lnTo>
-                <a:lnTo>
-                  <a:pt x="0" y="120000"/>
-                </a:lnTo>
-                <a:close/>
-              </a:path>
-            </a:pathLst>
-          </a:custGeom>
-        </p:spPr>
-      </p:sp>
-      <p:sp>
-        <p:nvSpPr>
-          <p:cNvPr id="103" name="Google Shape;103;g229f76a6c23_0_29:notes"/>
-          <p:cNvSpPr txBox="1"/>
-          <p:nvPr>
-            <p:ph idx="1" type="body"/>
-          </p:nvPr>
-        </p:nvSpPr>
-        <p:spPr>
-          <a:xfrm>
-            <a:off x="685800" y="4343400"/>
-            <a:ext cx="5486400" cy="4114800"/>
-          </a:xfrm>
-          <a:prstGeom prst="rect">
-            <a:avLst/>
-          </a:prstGeom>
-        </p:spPr>
-        <p:txBody>
-          <a:bodyPr anchorCtr="0" anchor="t" bIns="91425" lIns="91425" spcFirstLastPara="1" rIns="91425" wrap="square" tIns="91425">
-            <a:noAutofit/>
-          </a:bodyPr>
-          <a:lstStyle/>
-          <a:p>
-            <a:pPr indent="0" lvl="0" marL="0" rtl="0" algn="l">
-              <a:spcBef>
-                <a:spcPts val="0"/>
-              </a:spcBef>
-              <a:spcAft>
-                <a:spcPts val="0"/>
-              </a:spcAft>
-              <a:buNone/>
-            </a:pPr>
-            <a:r>
-              <a:t/>
-            </a:r>
-            <a:endParaRPr/>
-          </a:p>
-        </p:txBody>
-      </p:sp>
-    </p:spTree>
-  </p:cSld>
-  <p:clrMapOvr>
-    <a:masterClrMapping/>
-  </p:clrMapOvr>
-</p:notes>
-</file>
-
-<file path=ppt/notesSlides/notesSlide8.xml><?xml version="1.0" encoding="utf-8"?>
-<p:notes xmlns:a="http://schemas.openxmlformats.org/drawingml/2006/main" xmlns:r="http://schemas.openxmlformats.org/officeDocument/2006/relationships" xmlns:mc="http://schemas.openxmlformats.org/markup-compatibility/2006" xmlns:mv="urn:schemas-microsoft-com:mac:vml" xmlns:p="http://schemas.openxmlformats.org/presentationml/2006/main" xmlns:c="http://schemas.openxmlformats.org/drawingml/2006/chart" xmlns:dgm="http://schemas.openxmlformats.org/drawingml/2006/diagram" xmlns:o="urn:schemas-microsoft-com:office:office" xmlns:v="urn:schemas-microsoft-com:vml" xmlns:pvml="urn:schemas-microsoft-com:office:powerpoint" xmlns:com="http://schemas.openxmlformats.org/drawingml/2006/compatibility" xmlns:p14="http://schemas.microsoft.com/office/powerpoint/2010/main" xmlns:p15="http://schemas.microsoft.com/office/powerpoint/2012/main" xmlns:ahyp="http://schemas.microsoft.com/office/drawing/2018/hyperlinkcolor" showMasterPhAnim="0" showMasterSp="0">
-  <p:cSld>
-    <p:spTree>
-      <p:nvGrpSpPr>
-        <p:cNvPr id="106" name="Shape 106"/>
-        <p:cNvGrpSpPr/>
-        <p:nvPr/>
-      </p:nvGrpSpPr>
-      <p:grpSpPr>
-        <a:xfrm>
-          <a:off x="0" y="0"/>
-          <a:ext cx="0" cy="0"/>
-          <a:chOff x="0" y="0"/>
-          <a:chExt cx="0" cy="0"/>
-        </a:xfrm>
-      </p:grpSpPr>
-      <p:sp>
-        <p:nvSpPr>
-          <p:cNvPr id="107" name="Google Shape;107;g229f76a6c23_0_32:notes"/>
-          <p:cNvSpPr/>
-          <p:nvPr>
-            <p:ph idx="2" type="sldImg"/>
-          </p:nvPr>
-        </p:nvSpPr>
-        <p:spPr>
-          <a:xfrm>
-            <a:off x="381300" y="685800"/>
-            <a:ext cx="6096000" cy="3429000"/>
-          </a:xfrm>
-          <a:custGeom>
-            <a:rect b="b" l="l" r="r" t="t"/>
-            <a:pathLst>
-              <a:path extrusionOk="0" h="120000" w="120000">
-                <a:moveTo>
-                  <a:pt x="0" y="0"/>
-                </a:moveTo>
-                <a:lnTo>
-                  <a:pt x="120000" y="0"/>
-                </a:lnTo>
-                <a:lnTo>
-                  <a:pt x="120000" y="120000"/>
-                </a:lnTo>
-                <a:lnTo>
-                  <a:pt x="0" y="120000"/>
-                </a:lnTo>
-                <a:close/>
-              </a:path>
-            </a:pathLst>
-          </a:custGeom>
-        </p:spPr>
-      </p:sp>
-      <p:sp>
-        <p:nvSpPr>
-          <p:cNvPr id="108" name="Google Shape;108;g229f76a6c23_0_32:notes"/>
-          <p:cNvSpPr txBox="1"/>
-          <p:nvPr>
-            <p:ph idx="1" type="body"/>
-          </p:nvPr>
-        </p:nvSpPr>
-        <p:spPr>
-          <a:xfrm>
-            <a:off x="685800" y="4343400"/>
-            <a:ext cx="5486400" cy="4114800"/>
-          </a:xfrm>
-          <a:prstGeom prst="rect">
-            <a:avLst/>
-          </a:prstGeom>
-        </p:spPr>
-        <p:txBody>
-          <a:bodyPr anchorCtr="0" anchor="t" bIns="91425" lIns="91425" spcFirstLastPara="1" rIns="91425" wrap="square" tIns="91425">
-            <a:noAutofit/>
-          </a:bodyPr>
-          <a:lstStyle/>
-          <a:p>
-            <a:pPr indent="0" lvl="0" marL="0" rtl="0" algn="l">
-              <a:spcBef>
-                <a:spcPts val="0"/>
-              </a:spcBef>
-              <a:spcAft>
-                <a:spcPts val="0"/>
-              </a:spcAft>
-              <a:buNone/>
-            </a:pPr>
-            <a:r>
-              <a:t/>
-            </a:r>
-            <a:endParaRPr/>
-          </a:p>
-        </p:txBody>
-      </p:sp>
-    </p:spTree>
-  </p:cSld>
-  <p:clrMapOvr>
-    <a:masterClrMapping/>
-  </p:clrMapOvr>
-</p:notes>
-</file>
-
-<file path=ppt/notesSlides/notesSlide9.xml><?xml version="1.0" encoding="utf-8"?>
-<p:notes xmlns:a="http://schemas.openxmlformats.org/drawingml/2006/main" xmlns:r="http://schemas.openxmlformats.org/officeDocument/2006/relationships" xmlns:mc="http://schemas.openxmlformats.org/markup-compatibility/2006" xmlns:mv="urn:schemas-microsoft-com:mac:vml" xmlns:p="http://schemas.openxmlformats.org/presentationml/2006/main" xmlns:c="http://schemas.openxmlformats.org/drawingml/2006/chart" xmlns:dgm="http://schemas.openxmlformats.org/drawingml/2006/diagram" xmlns:o="urn:schemas-microsoft-com:office:office" xmlns:v="urn:schemas-microsoft-com:vml" xmlns:pvml="urn:schemas-microsoft-com:office:powerpoint" xmlns:com="http://schemas.openxmlformats.org/drawingml/2006/compatibility" xmlns:p14="http://schemas.microsoft.com/office/powerpoint/2010/main" xmlns:p15="http://schemas.microsoft.com/office/powerpoint/2012/main" xmlns:ahyp="http://schemas.microsoft.com/office/drawing/2018/hyperlinkcolor" showMasterPhAnim="0" showMasterSp="0">
-  <p:cSld>
-    <p:spTree>
-      <p:nvGrpSpPr>
-        <p:cNvPr id="112" name="Shape 112"/>
-        <p:cNvGrpSpPr/>
-        <p:nvPr/>
-      </p:nvGrpSpPr>
-      <p:grpSpPr>
-        <a:xfrm>
-          <a:off x="0" y="0"/>
-          <a:ext cx="0" cy="0"/>
-          <a:chOff x="0" y="0"/>
-          <a:chExt cx="0" cy="0"/>
-        </a:xfrm>
-      </p:grpSpPr>
-      <p:sp>
-        <p:nvSpPr>
-          <p:cNvPr id="113" name="Google Shape;113;g229f76a6c23_0_37:notes"/>
-          <p:cNvSpPr/>
-          <p:nvPr>
-            <p:ph idx="2" type="sldImg"/>
-          </p:nvPr>
-        </p:nvSpPr>
-        <p:spPr>
-          <a:xfrm>
-            <a:off x="381300" y="685800"/>
-            <a:ext cx="6096000" cy="3429000"/>
-          </a:xfrm>
-          <a:custGeom>
-            <a:rect b="b" l="l" r="r" t="t"/>
-            <a:pathLst>
-              <a:path extrusionOk="0" h="120000" w="120000">
-                <a:moveTo>
-                  <a:pt x="0" y="0"/>
-                </a:moveTo>
-                <a:lnTo>
-                  <a:pt x="120000" y="0"/>
-                </a:lnTo>
-                <a:lnTo>
-                  <a:pt x="120000" y="120000"/>
-                </a:lnTo>
-                <a:lnTo>
-                  <a:pt x="0" y="120000"/>
-                </a:lnTo>
-                <a:close/>
-              </a:path>
-            </a:pathLst>
-          </a:custGeom>
-        </p:spPr>
-      </p:sp>
-      <p:sp>
-        <p:nvSpPr>
-          <p:cNvPr id="114" name="Google Shape;114;g229f76a6c23_0_37:notes"/>
+          <p:cNvPr id="111" name="Google Shape;111;g229f76a6c23_0_46:notes"/>
           <p:cNvSpPr txBox="1"/>
           <p:nvPr>
             <p:ph idx="1" type="body"/>
@@ -10648,7 +10348,7 @@
             </a:pPr>
             <a:r>
               <a:rPr b="1" lang="en" sz="2400"/>
-              <a:t>● [PyCUDA: https://mathema.tician.de/software/pycuda/ ]</a:t>
+              <a:t>● [PyCUDA: https://documen.tician.de/pycuda]</a:t>
             </a:r>
             <a:endParaRPr b="1" sz="2400"/>
           </a:p>
@@ -10717,7 +10417,7 @@
   <p:cSld>
     <p:spTree>
       <p:nvGrpSpPr>
-        <p:cNvPr id="120" name="Shape 120"/>
+        <p:cNvPr id="117" name="Shape 117"/>
         <p:cNvGrpSpPr/>
         <p:nvPr/>
       </p:nvGrpSpPr>
@@ -10731,964 +10431,7 @@
       </p:grpSpPr>
       <p:sp>
         <p:nvSpPr>
-          <p:cNvPr id="121" name="Google Shape;121;p25"/>
-          <p:cNvSpPr txBox="1"/>
-          <p:nvPr/>
-        </p:nvSpPr>
-        <p:spPr>
-          <a:xfrm>
-            <a:off x="100800" y="67250"/>
-            <a:ext cx="8959500" cy="4436100"/>
-          </a:xfrm>
-          <a:prstGeom prst="rect">
-            <a:avLst/>
-          </a:prstGeom>
-          <a:solidFill>
-            <a:srgbClr val="D9EAD3"/>
-          </a:solidFill>
-          <a:ln>
-            <a:noFill/>
-          </a:ln>
-        </p:spPr>
-        <p:txBody>
-          <a:bodyPr anchorCtr="0" anchor="t" bIns="91425" lIns="91425" spcFirstLastPara="1" rIns="91425" wrap="square" tIns="91425">
-            <a:spAutoFit/>
-          </a:bodyPr>
-          <a:lstStyle/>
-          <a:p>
-            <a:pPr indent="0" lvl="0" marL="0" rtl="0" algn="l">
-              <a:lnSpc>
-                <a:spcPct val="115000"/>
-              </a:lnSpc>
-              <a:spcBef>
-                <a:spcPts val="0"/>
-              </a:spcBef>
-              <a:spcAft>
-                <a:spcPts val="0"/>
-              </a:spcAft>
-              <a:buClr>
-                <a:schemeClr val="dk1"/>
-              </a:buClr>
-              <a:buSzPts val="1100"/>
-              <a:buFont typeface="Arial"/>
-              <a:buNone/>
-            </a:pPr>
-            <a:r>
-              <a:rPr b="1" lang="en" sz="1900">
-                <a:solidFill>
-                  <a:schemeClr val="dk1"/>
-                </a:solidFill>
-              </a:rPr>
-              <a:t>@jit</a:t>
-            </a:r>
-            <a:endParaRPr b="1" sz="1900">
-              <a:solidFill>
-                <a:schemeClr val="dk1"/>
-              </a:solidFill>
-            </a:endParaRPr>
-          </a:p>
-          <a:p>
-            <a:pPr indent="0" lvl="0" marL="0" rtl="0" algn="l">
-              <a:lnSpc>
-                <a:spcPct val="115000"/>
-              </a:lnSpc>
-              <a:spcBef>
-                <a:spcPts val="0"/>
-              </a:spcBef>
-              <a:spcAft>
-                <a:spcPts val="0"/>
-              </a:spcAft>
-              <a:buClr>
-                <a:schemeClr val="dk1"/>
-              </a:buClr>
-              <a:buSzPts val="1100"/>
-              <a:buFont typeface="Arial"/>
-              <a:buNone/>
-            </a:pPr>
-            <a:r>
-              <a:rPr lang="en" sz="1900">
-                <a:solidFill>
-                  <a:schemeClr val="dk1"/>
-                </a:solidFill>
-              </a:rPr>
-              <a:t>def create_fractal(min_x, max_x, min_y, max_y, image, iters):</a:t>
-            </a:r>
-            <a:endParaRPr sz="1900">
-              <a:solidFill>
-                <a:schemeClr val="dk1"/>
-              </a:solidFill>
-            </a:endParaRPr>
-          </a:p>
-          <a:p>
-            <a:pPr indent="0" lvl="0" marL="0" rtl="0" algn="l">
-              <a:lnSpc>
-                <a:spcPct val="115000"/>
-              </a:lnSpc>
-              <a:spcBef>
-                <a:spcPts val="0"/>
-              </a:spcBef>
-              <a:spcAft>
-                <a:spcPts val="0"/>
-              </a:spcAft>
-              <a:buClr>
-                <a:schemeClr val="dk1"/>
-              </a:buClr>
-              <a:buSzPts val="1100"/>
-              <a:buFont typeface="Arial"/>
-              <a:buNone/>
-            </a:pPr>
-            <a:r>
-              <a:rPr lang="en" sz="1900">
-                <a:solidFill>
-                  <a:schemeClr val="dk1"/>
-                </a:solidFill>
-              </a:rPr>
-              <a:t>  height = image.shape[0]</a:t>
-            </a:r>
-            <a:endParaRPr sz="1900">
-              <a:solidFill>
-                <a:schemeClr val="dk1"/>
-              </a:solidFill>
-            </a:endParaRPr>
-          </a:p>
-          <a:p>
-            <a:pPr indent="0" lvl="0" marL="0" rtl="0" algn="l">
-              <a:lnSpc>
-                <a:spcPct val="115000"/>
-              </a:lnSpc>
-              <a:spcBef>
-                <a:spcPts val="0"/>
-              </a:spcBef>
-              <a:spcAft>
-                <a:spcPts val="0"/>
-              </a:spcAft>
-              <a:buClr>
-                <a:schemeClr val="dk1"/>
-              </a:buClr>
-              <a:buSzPts val="1100"/>
-              <a:buFont typeface="Arial"/>
-              <a:buNone/>
-            </a:pPr>
-            <a:r>
-              <a:rPr lang="en" sz="1900">
-                <a:solidFill>
-                  <a:schemeClr val="dk1"/>
-                </a:solidFill>
-              </a:rPr>
-              <a:t>  width = image.shape[1]</a:t>
-            </a:r>
-            <a:endParaRPr sz="1900">
-              <a:solidFill>
-                <a:schemeClr val="dk1"/>
-              </a:solidFill>
-            </a:endParaRPr>
-          </a:p>
-          <a:p>
-            <a:pPr indent="0" lvl="0" marL="0" rtl="0" algn="l">
-              <a:lnSpc>
-                <a:spcPct val="115000"/>
-              </a:lnSpc>
-              <a:spcBef>
-                <a:spcPts val="0"/>
-              </a:spcBef>
-              <a:spcAft>
-                <a:spcPts val="0"/>
-              </a:spcAft>
-              <a:buClr>
-                <a:schemeClr val="dk1"/>
-              </a:buClr>
-              <a:buSzPts val="1100"/>
-              <a:buFont typeface="Arial"/>
-              <a:buNone/>
-            </a:pPr>
-            <a:r>
-              <a:rPr lang="en" sz="1900">
-                <a:solidFill>
-                  <a:schemeClr val="dk1"/>
-                </a:solidFill>
-              </a:rPr>
-              <a:t>  pixel_size_x = (max_x - min_x) / width</a:t>
-            </a:r>
-            <a:endParaRPr sz="1900">
-              <a:solidFill>
-                <a:schemeClr val="dk1"/>
-              </a:solidFill>
-            </a:endParaRPr>
-          </a:p>
-          <a:p>
-            <a:pPr indent="0" lvl="0" marL="0" rtl="0" algn="l">
-              <a:lnSpc>
-                <a:spcPct val="115000"/>
-              </a:lnSpc>
-              <a:spcBef>
-                <a:spcPts val="0"/>
-              </a:spcBef>
-              <a:spcAft>
-                <a:spcPts val="0"/>
-              </a:spcAft>
-              <a:buClr>
-                <a:schemeClr val="dk1"/>
-              </a:buClr>
-              <a:buSzPts val="1100"/>
-              <a:buFont typeface="Arial"/>
-              <a:buNone/>
-            </a:pPr>
-            <a:r>
-              <a:rPr lang="en" sz="1900">
-                <a:solidFill>
-                  <a:schemeClr val="dk1"/>
-                </a:solidFill>
-              </a:rPr>
-              <a:t>  pixel_size_y = (max_y - min_y) / height</a:t>
-            </a:r>
-            <a:endParaRPr sz="1900">
-              <a:solidFill>
-                <a:schemeClr val="dk1"/>
-              </a:solidFill>
-            </a:endParaRPr>
-          </a:p>
-          <a:p>
-            <a:pPr indent="0" lvl="0" marL="0" rtl="0" algn="l">
-              <a:lnSpc>
-                <a:spcPct val="115000"/>
-              </a:lnSpc>
-              <a:spcBef>
-                <a:spcPts val="0"/>
-              </a:spcBef>
-              <a:spcAft>
-                <a:spcPts val="0"/>
-              </a:spcAft>
-              <a:buClr>
-                <a:schemeClr val="dk1"/>
-              </a:buClr>
-              <a:buSzPts val="1100"/>
-              <a:buFont typeface="Arial"/>
-              <a:buNone/>
-            </a:pPr>
-            <a:r>
-              <a:rPr lang="en" sz="1900">
-                <a:solidFill>
-                  <a:schemeClr val="dk1"/>
-                </a:solidFill>
-              </a:rPr>
-              <a:t>  for x in range(width):</a:t>
-            </a:r>
-            <a:endParaRPr sz="1900">
-              <a:solidFill>
-                <a:schemeClr val="dk1"/>
-              </a:solidFill>
-            </a:endParaRPr>
-          </a:p>
-          <a:p>
-            <a:pPr indent="0" lvl="0" marL="0" rtl="0" algn="l">
-              <a:lnSpc>
-                <a:spcPct val="115000"/>
-              </a:lnSpc>
-              <a:spcBef>
-                <a:spcPts val="0"/>
-              </a:spcBef>
-              <a:spcAft>
-                <a:spcPts val="0"/>
-              </a:spcAft>
-              <a:buClr>
-                <a:schemeClr val="dk1"/>
-              </a:buClr>
-              <a:buSzPts val="1100"/>
-              <a:buFont typeface="Arial"/>
-              <a:buNone/>
-            </a:pPr>
-            <a:r>
-              <a:rPr lang="en" sz="1900">
-                <a:solidFill>
-                  <a:schemeClr val="dk1"/>
-                </a:solidFill>
-              </a:rPr>
-              <a:t>    real = min_x + x * pixel_size_x</a:t>
-            </a:r>
-            <a:endParaRPr sz="1900">
-              <a:solidFill>
-                <a:schemeClr val="dk1"/>
-              </a:solidFill>
-            </a:endParaRPr>
-          </a:p>
-          <a:p>
-            <a:pPr indent="0" lvl="0" marL="0" rtl="0" algn="l">
-              <a:lnSpc>
-                <a:spcPct val="115000"/>
-              </a:lnSpc>
-              <a:spcBef>
-                <a:spcPts val="0"/>
-              </a:spcBef>
-              <a:spcAft>
-                <a:spcPts val="0"/>
-              </a:spcAft>
-              <a:buClr>
-                <a:schemeClr val="dk1"/>
-              </a:buClr>
-              <a:buSzPts val="1100"/>
-              <a:buFont typeface="Arial"/>
-              <a:buNone/>
-            </a:pPr>
-            <a:r>
-              <a:rPr lang="en" sz="1900">
-                <a:solidFill>
-                  <a:schemeClr val="dk1"/>
-                </a:solidFill>
-              </a:rPr>
-              <a:t>    for y in range(height):</a:t>
-            </a:r>
-            <a:endParaRPr sz="1900">
-              <a:solidFill>
-                <a:schemeClr val="dk1"/>
-              </a:solidFill>
-            </a:endParaRPr>
-          </a:p>
-          <a:p>
-            <a:pPr indent="0" lvl="0" marL="0" rtl="0" algn="l">
-              <a:lnSpc>
-                <a:spcPct val="115000"/>
-              </a:lnSpc>
-              <a:spcBef>
-                <a:spcPts val="0"/>
-              </a:spcBef>
-              <a:spcAft>
-                <a:spcPts val="0"/>
-              </a:spcAft>
-              <a:buClr>
-                <a:schemeClr val="dk1"/>
-              </a:buClr>
-              <a:buSzPts val="1100"/>
-              <a:buFont typeface="Arial"/>
-              <a:buNone/>
-            </a:pPr>
-            <a:r>
-              <a:rPr lang="en" sz="1900">
-                <a:solidFill>
-                  <a:schemeClr val="dk1"/>
-                </a:solidFill>
-              </a:rPr>
-              <a:t>      imag = min_y + y * pixel_size_y</a:t>
-            </a:r>
-            <a:endParaRPr sz="1900">
-              <a:solidFill>
-                <a:schemeClr val="dk1"/>
-              </a:solidFill>
-            </a:endParaRPr>
-          </a:p>
-          <a:p>
-            <a:pPr indent="0" lvl="0" marL="0" rtl="0" algn="l">
-              <a:lnSpc>
-                <a:spcPct val="115000"/>
-              </a:lnSpc>
-              <a:spcBef>
-                <a:spcPts val="0"/>
-              </a:spcBef>
-              <a:spcAft>
-                <a:spcPts val="0"/>
-              </a:spcAft>
-              <a:buClr>
-                <a:schemeClr val="dk1"/>
-              </a:buClr>
-              <a:buSzPts val="1100"/>
-              <a:buFont typeface="Arial"/>
-              <a:buNone/>
-            </a:pPr>
-            <a:r>
-              <a:rPr lang="en" sz="1900">
-                <a:solidFill>
-                  <a:schemeClr val="dk1"/>
-                </a:solidFill>
-              </a:rPr>
-              <a:t>      color = mandel(real, imag, iters)</a:t>
-            </a:r>
-            <a:endParaRPr sz="1900">
-              <a:solidFill>
-                <a:schemeClr val="dk1"/>
-              </a:solidFill>
-            </a:endParaRPr>
-          </a:p>
-          <a:p>
-            <a:pPr indent="0" lvl="0" marL="0" rtl="0" algn="l">
-              <a:lnSpc>
-                <a:spcPct val="115000"/>
-              </a:lnSpc>
-              <a:spcBef>
-                <a:spcPts val="0"/>
-              </a:spcBef>
-              <a:spcAft>
-                <a:spcPts val="0"/>
-              </a:spcAft>
-              <a:buClr>
-                <a:schemeClr val="dk1"/>
-              </a:buClr>
-              <a:buSzPts val="1100"/>
-              <a:buFont typeface="Arial"/>
-              <a:buNone/>
-            </a:pPr>
-            <a:r>
-              <a:rPr lang="en" sz="1900">
-                <a:solidFill>
-                  <a:schemeClr val="dk1"/>
-                </a:solidFill>
-              </a:rPr>
-              <a:t>      image[y, x] = color</a:t>
-            </a:r>
-            <a:endParaRPr sz="1900">
-              <a:solidFill>
-                <a:schemeClr val="dk1"/>
-              </a:solidFill>
-            </a:endParaRPr>
-          </a:p>
-          <a:p>
-            <a:pPr indent="0" lvl="0" marL="0" rtl="0" algn="l">
-              <a:spcBef>
-                <a:spcPts val="0"/>
-              </a:spcBef>
-              <a:spcAft>
-                <a:spcPts val="0"/>
-              </a:spcAft>
-              <a:buNone/>
-            </a:pPr>
-            <a:r>
-              <a:t/>
-            </a:r>
-            <a:endParaRPr/>
-          </a:p>
-        </p:txBody>
-      </p:sp>
-    </p:spTree>
-  </p:cSld>
-  <p:clrMapOvr>
-    <a:masterClrMapping/>
-  </p:clrMapOvr>
-</p:sld>
-</file>
-
-<file path=ppt/slides/slide11.xml><?xml version="1.0" encoding="utf-8"?>
-<p:sld xmlns:a="http://schemas.openxmlformats.org/drawingml/2006/main" xmlns:r="http://schemas.openxmlformats.org/officeDocument/2006/relationships" xmlns:mc="http://schemas.openxmlformats.org/markup-compatibility/2006" xmlns:mv="urn:schemas-microsoft-com:mac:vml" xmlns:p="http://schemas.openxmlformats.org/presentationml/2006/main" xmlns:c="http://schemas.openxmlformats.org/drawingml/2006/chart" xmlns:dgm="http://schemas.openxmlformats.org/drawingml/2006/diagram" xmlns:o="urn:schemas-microsoft-com:office:office" xmlns:v="urn:schemas-microsoft-com:vml" xmlns:pvml="urn:schemas-microsoft-com:office:powerpoint" xmlns:com="http://schemas.openxmlformats.org/drawingml/2006/compatibility" xmlns:p14="http://schemas.microsoft.com/office/powerpoint/2010/main" xmlns:p15="http://schemas.microsoft.com/office/powerpoint/2012/main" xmlns:ahyp="http://schemas.microsoft.com/office/drawing/2018/hyperlinkcolor">
-  <p:cSld>
-    <p:spTree>
-      <p:nvGrpSpPr>
-        <p:cNvPr id="125" name="Shape 125"/>
-        <p:cNvGrpSpPr/>
-        <p:nvPr/>
-      </p:nvGrpSpPr>
-      <p:grpSpPr>
-        <a:xfrm>
-          <a:off x="0" y="0"/>
-          <a:ext cx="0" cy="0"/>
-          <a:chOff x="0" y="0"/>
-          <a:chExt cx="0" cy="0"/>
-        </a:xfrm>
-      </p:grpSpPr>
-      <p:sp>
-        <p:nvSpPr>
-          <p:cNvPr id="126" name="Google Shape;126;p26"/>
-          <p:cNvSpPr txBox="1"/>
-          <p:nvPr/>
-        </p:nvSpPr>
-        <p:spPr>
-          <a:xfrm>
-            <a:off x="100800" y="465025"/>
-            <a:ext cx="8925900" cy="4099800"/>
-          </a:xfrm>
-          <a:prstGeom prst="rect">
-            <a:avLst/>
-          </a:prstGeom>
-          <a:solidFill>
-            <a:srgbClr val="D9EAD3"/>
-          </a:solidFill>
-          <a:ln>
-            <a:noFill/>
-          </a:ln>
-        </p:spPr>
-        <p:txBody>
-          <a:bodyPr anchorCtr="0" anchor="t" bIns="91425" lIns="91425" spcFirstLastPara="1" rIns="91425" wrap="square" tIns="91425">
-            <a:spAutoFit/>
-          </a:bodyPr>
-          <a:lstStyle/>
-          <a:p>
-            <a:pPr indent="0" lvl="0" marL="0" rtl="0" algn="l">
-              <a:lnSpc>
-                <a:spcPct val="115000"/>
-              </a:lnSpc>
-              <a:spcBef>
-                <a:spcPts val="0"/>
-              </a:spcBef>
-              <a:spcAft>
-                <a:spcPts val="0"/>
-              </a:spcAft>
-              <a:buClr>
-                <a:schemeClr val="dk1"/>
-              </a:buClr>
-              <a:buSzPts val="1100"/>
-              <a:buFont typeface="Arial"/>
-              <a:buNone/>
-            </a:pPr>
-            <a:r>
-              <a:rPr lang="en" sz="1900">
-                <a:solidFill>
-                  <a:schemeClr val="dk1"/>
-                </a:solidFill>
-              </a:rPr>
-              <a:t>image = np.zeros((1024, 1536), dtype = np.uint8)</a:t>
-            </a:r>
-            <a:endParaRPr sz="1900">
-              <a:solidFill>
-                <a:schemeClr val="dk1"/>
-              </a:solidFill>
-            </a:endParaRPr>
-          </a:p>
-          <a:p>
-            <a:pPr indent="0" lvl="0" marL="0" rtl="0" algn="l">
-              <a:lnSpc>
-                <a:spcPct val="115000"/>
-              </a:lnSpc>
-              <a:spcBef>
-                <a:spcPts val="0"/>
-              </a:spcBef>
-              <a:spcAft>
-                <a:spcPts val="0"/>
-              </a:spcAft>
-              <a:buNone/>
-            </a:pPr>
-            <a:r>
-              <a:t/>
-            </a:r>
-            <a:endParaRPr sz="1900">
-              <a:solidFill>
-                <a:schemeClr val="dk1"/>
-              </a:solidFill>
-            </a:endParaRPr>
-          </a:p>
-          <a:p>
-            <a:pPr indent="0" lvl="0" marL="0" rtl="0" algn="l">
-              <a:lnSpc>
-                <a:spcPct val="115000"/>
-              </a:lnSpc>
-              <a:spcBef>
-                <a:spcPts val="0"/>
-              </a:spcBef>
-              <a:spcAft>
-                <a:spcPts val="0"/>
-              </a:spcAft>
-              <a:buClr>
-                <a:schemeClr val="dk1"/>
-              </a:buClr>
-              <a:buSzPts val="1100"/>
-              <a:buFont typeface="Arial"/>
-              <a:buNone/>
-            </a:pPr>
-            <a:r>
-              <a:rPr lang="en" sz="1900">
-                <a:solidFill>
-                  <a:schemeClr val="dk1"/>
-                </a:solidFill>
-              </a:rPr>
-              <a:t>start = timer()</a:t>
-            </a:r>
-            <a:endParaRPr sz="1900">
-              <a:solidFill>
-                <a:schemeClr val="dk1"/>
-              </a:solidFill>
-            </a:endParaRPr>
-          </a:p>
-          <a:p>
-            <a:pPr indent="0" lvl="0" marL="0" rtl="0" algn="l">
-              <a:lnSpc>
-                <a:spcPct val="115000"/>
-              </a:lnSpc>
-              <a:spcBef>
-                <a:spcPts val="0"/>
-              </a:spcBef>
-              <a:spcAft>
-                <a:spcPts val="0"/>
-              </a:spcAft>
-              <a:buClr>
-                <a:schemeClr val="dk1"/>
-              </a:buClr>
-              <a:buSzPts val="1100"/>
-              <a:buFont typeface="Arial"/>
-              <a:buNone/>
-            </a:pPr>
-            <a:r>
-              <a:rPr lang="en" sz="1900">
-                <a:solidFill>
-                  <a:schemeClr val="dk1"/>
-                </a:solidFill>
-              </a:rPr>
-              <a:t>create_fractal(-2.0, 1.0, -1.0, 1.0, image, 20)</a:t>
-            </a:r>
-            <a:endParaRPr sz="1900">
-              <a:solidFill>
-                <a:schemeClr val="dk1"/>
-              </a:solidFill>
-            </a:endParaRPr>
-          </a:p>
-          <a:p>
-            <a:pPr indent="0" lvl="0" marL="0" rtl="0" algn="l">
-              <a:lnSpc>
-                <a:spcPct val="115000"/>
-              </a:lnSpc>
-              <a:spcBef>
-                <a:spcPts val="0"/>
-              </a:spcBef>
-              <a:spcAft>
-                <a:spcPts val="0"/>
-              </a:spcAft>
-              <a:buClr>
-                <a:schemeClr val="dk1"/>
-              </a:buClr>
-              <a:buSzPts val="1100"/>
-              <a:buFont typeface="Arial"/>
-              <a:buNone/>
-            </a:pPr>
-            <a:r>
-              <a:rPr lang="en" sz="1900">
-                <a:solidFill>
-                  <a:schemeClr val="dk1"/>
-                </a:solidFill>
-              </a:rPr>
-              <a:t>dt = timer() - start</a:t>
-            </a:r>
-            <a:endParaRPr sz="1900">
-              <a:solidFill>
-                <a:schemeClr val="dk1"/>
-              </a:solidFill>
-            </a:endParaRPr>
-          </a:p>
-          <a:p>
-            <a:pPr indent="0" lvl="0" marL="0" rtl="0" algn="l">
-              <a:lnSpc>
-                <a:spcPct val="115000"/>
-              </a:lnSpc>
-              <a:spcBef>
-                <a:spcPts val="0"/>
-              </a:spcBef>
-              <a:spcAft>
-                <a:spcPts val="0"/>
-              </a:spcAft>
-              <a:buNone/>
-            </a:pPr>
-            <a:r>
-              <a:t/>
-            </a:r>
-            <a:endParaRPr sz="1900">
-              <a:solidFill>
-                <a:schemeClr val="dk1"/>
-              </a:solidFill>
-            </a:endParaRPr>
-          </a:p>
-          <a:p>
-            <a:pPr indent="0" lvl="0" marL="0" rtl="0" algn="l">
-              <a:lnSpc>
-                <a:spcPct val="115000"/>
-              </a:lnSpc>
-              <a:spcBef>
-                <a:spcPts val="0"/>
-              </a:spcBef>
-              <a:spcAft>
-                <a:spcPts val="0"/>
-              </a:spcAft>
-              <a:buClr>
-                <a:schemeClr val="dk1"/>
-              </a:buClr>
-              <a:buSzPts val="1100"/>
-              <a:buFont typeface="Arial"/>
-              <a:buNone/>
-            </a:pPr>
-            <a:r>
-              <a:rPr lang="en" sz="1900">
-                <a:solidFill>
-                  <a:schemeClr val="dk1"/>
-                </a:solidFill>
-              </a:rPr>
-              <a:t>dt/=1000000</a:t>
-            </a:r>
-            <a:endParaRPr sz="1900">
-              <a:solidFill>
-                <a:schemeClr val="dk1"/>
-              </a:solidFill>
-            </a:endParaRPr>
-          </a:p>
-          <a:p>
-            <a:pPr indent="0" lvl="0" marL="0" rtl="0" algn="l">
-              <a:lnSpc>
-                <a:spcPct val="115000"/>
-              </a:lnSpc>
-              <a:spcBef>
-                <a:spcPts val="0"/>
-              </a:spcBef>
-              <a:spcAft>
-                <a:spcPts val="0"/>
-              </a:spcAft>
-              <a:buClr>
-                <a:schemeClr val="dk1"/>
-              </a:buClr>
-              <a:buSzPts val="1100"/>
-              <a:buFont typeface="Arial"/>
-              <a:buNone/>
-            </a:pPr>
-            <a:r>
-              <a:rPr lang="en" sz="1900">
-                <a:solidFill>
-                  <a:schemeClr val="dk1"/>
-                </a:solidFill>
-              </a:rPr>
-              <a:t>print ("Mandelbrot created in %f ms" % dt)</a:t>
-            </a:r>
-            <a:endParaRPr sz="1900">
-              <a:solidFill>
-                <a:schemeClr val="dk1"/>
-              </a:solidFill>
-            </a:endParaRPr>
-          </a:p>
-          <a:p>
-            <a:pPr indent="0" lvl="0" marL="0" rtl="0" algn="l">
-              <a:lnSpc>
-                <a:spcPct val="115000"/>
-              </a:lnSpc>
-              <a:spcBef>
-                <a:spcPts val="0"/>
-              </a:spcBef>
-              <a:spcAft>
-                <a:spcPts val="0"/>
-              </a:spcAft>
-              <a:buNone/>
-            </a:pPr>
-            <a:r>
-              <a:t/>
-            </a:r>
-            <a:endParaRPr sz="1900">
-              <a:solidFill>
-                <a:schemeClr val="dk1"/>
-              </a:solidFill>
-            </a:endParaRPr>
-          </a:p>
-          <a:p>
-            <a:pPr indent="0" lvl="0" marL="0" rtl="0" algn="l">
-              <a:lnSpc>
-                <a:spcPct val="115000"/>
-              </a:lnSpc>
-              <a:spcBef>
-                <a:spcPts val="0"/>
-              </a:spcBef>
-              <a:spcAft>
-                <a:spcPts val="0"/>
-              </a:spcAft>
-              <a:buClr>
-                <a:schemeClr val="dk1"/>
-              </a:buClr>
-              <a:buSzPts val="1100"/>
-              <a:buFont typeface="Arial"/>
-              <a:buNone/>
-            </a:pPr>
-            <a:r>
-              <a:rPr lang="en" sz="1900">
-                <a:solidFill>
-                  <a:schemeClr val="dk1"/>
-                </a:solidFill>
-              </a:rPr>
-              <a:t>imshow(image)</a:t>
-            </a:r>
-            <a:endParaRPr sz="1900">
-              <a:solidFill>
-                <a:schemeClr val="dk1"/>
-              </a:solidFill>
-            </a:endParaRPr>
-          </a:p>
-          <a:p>
-            <a:pPr indent="0" lvl="0" marL="0" rtl="0" algn="l">
-              <a:lnSpc>
-                <a:spcPct val="115000"/>
-              </a:lnSpc>
-              <a:spcBef>
-                <a:spcPts val="0"/>
-              </a:spcBef>
-              <a:spcAft>
-                <a:spcPts val="0"/>
-              </a:spcAft>
-              <a:buClr>
-                <a:schemeClr val="dk1"/>
-              </a:buClr>
-              <a:buSzPts val="1100"/>
-              <a:buFont typeface="Arial"/>
-              <a:buNone/>
-            </a:pPr>
-            <a:r>
-              <a:rPr lang="en" sz="1900">
-                <a:solidFill>
-                  <a:schemeClr val="dk1"/>
-                </a:solidFill>
-              </a:rPr>
-              <a:t>show()</a:t>
-            </a:r>
-            <a:endParaRPr sz="1900">
-              <a:solidFill>
-                <a:schemeClr val="dk1"/>
-              </a:solidFill>
-            </a:endParaRPr>
-          </a:p>
-          <a:p>
-            <a:pPr indent="0" lvl="0" marL="0" rtl="0" algn="l">
-              <a:spcBef>
-                <a:spcPts val="0"/>
-              </a:spcBef>
-              <a:spcAft>
-                <a:spcPts val="0"/>
-              </a:spcAft>
-              <a:buNone/>
-            </a:pPr>
-            <a:r>
-              <a:t/>
-            </a:r>
-            <a:endParaRPr/>
-          </a:p>
-        </p:txBody>
-      </p:sp>
-    </p:spTree>
-  </p:cSld>
-  <p:clrMapOvr>
-    <a:masterClrMapping/>
-  </p:clrMapOvr>
-</p:sld>
-</file>
-
-<file path=ppt/slides/slide12.xml><?xml version="1.0" encoding="utf-8"?>
-<p:sld xmlns:a="http://schemas.openxmlformats.org/drawingml/2006/main" xmlns:r="http://schemas.openxmlformats.org/officeDocument/2006/relationships" xmlns:mc="http://schemas.openxmlformats.org/markup-compatibility/2006" xmlns:mv="urn:schemas-microsoft-com:mac:vml" xmlns:p="http://schemas.openxmlformats.org/presentationml/2006/main" xmlns:c="http://schemas.openxmlformats.org/drawingml/2006/chart" xmlns:dgm="http://schemas.openxmlformats.org/drawingml/2006/diagram" xmlns:o="urn:schemas-microsoft-com:office:office" xmlns:v="urn:schemas-microsoft-com:vml" xmlns:pvml="urn:schemas-microsoft-com:office:powerpoint" xmlns:com="http://schemas.openxmlformats.org/drawingml/2006/compatibility" xmlns:p14="http://schemas.microsoft.com/office/powerpoint/2010/main" xmlns:p15="http://schemas.microsoft.com/office/powerpoint/2012/main" xmlns:ahyp="http://schemas.microsoft.com/office/drawing/2018/hyperlinkcolor">
-  <p:cSld>
-    <p:spTree>
-      <p:nvGrpSpPr>
-        <p:cNvPr id="130" name="Shape 130"/>
-        <p:cNvGrpSpPr/>
-        <p:nvPr/>
-      </p:nvGrpSpPr>
-      <p:grpSpPr>
-        <a:xfrm>
-          <a:off x="0" y="0"/>
-          <a:ext cx="0" cy="0"/>
-          <a:chOff x="0" y="0"/>
-          <a:chExt cx="0" cy="0"/>
-        </a:xfrm>
-      </p:grpSpPr>
-      <p:sp>
-        <p:nvSpPr>
-          <p:cNvPr id="131" name="Google Shape;131;p27"/>
-          <p:cNvSpPr txBox="1"/>
-          <p:nvPr/>
-        </p:nvSpPr>
-        <p:spPr>
-          <a:xfrm>
-            <a:off x="100800" y="1251500"/>
-            <a:ext cx="8808600" cy="800400"/>
-          </a:xfrm>
-          <a:prstGeom prst="rect">
-            <a:avLst/>
-          </a:prstGeom>
-          <a:solidFill>
-            <a:srgbClr val="D9D9D9"/>
-          </a:solidFill>
-          <a:ln>
-            <a:noFill/>
-          </a:ln>
-        </p:spPr>
-        <p:txBody>
-          <a:bodyPr anchorCtr="0" anchor="t" bIns="91425" lIns="91425" spcFirstLastPara="1" rIns="91425" wrap="square" tIns="91425">
-            <a:spAutoFit/>
-          </a:bodyPr>
-          <a:lstStyle/>
-          <a:p>
-            <a:pPr indent="0" lvl="0" marL="0" rtl="0" algn="l">
-              <a:spcBef>
-                <a:spcPts val="0"/>
-              </a:spcBef>
-              <a:spcAft>
-                <a:spcPts val="0"/>
-              </a:spcAft>
-              <a:buClr>
-                <a:schemeClr val="dk1"/>
-              </a:buClr>
-              <a:buSzPts val="1100"/>
-              <a:buFont typeface="Arial"/>
-              <a:buNone/>
-            </a:pPr>
-            <a:r>
-              <a:rPr lang="en" sz="2000">
-                <a:solidFill>
-                  <a:schemeClr val="dk1"/>
-                </a:solidFill>
-                <a:highlight>
-                  <a:srgbClr val="D9D9D9"/>
-                </a:highlight>
-              </a:rPr>
-              <a:t>Lab10&gt; python mandel_numba.py</a:t>
-            </a:r>
-            <a:endParaRPr sz="2000">
-              <a:solidFill>
-                <a:schemeClr val="dk1"/>
-              </a:solidFill>
-              <a:highlight>
-                <a:srgbClr val="D9D9D9"/>
-              </a:highlight>
-            </a:endParaRPr>
-          </a:p>
-          <a:p>
-            <a:pPr indent="0" lvl="0" marL="0" rtl="0" algn="l">
-              <a:spcBef>
-                <a:spcPts val="0"/>
-              </a:spcBef>
-              <a:spcAft>
-                <a:spcPts val="0"/>
-              </a:spcAft>
-              <a:buNone/>
-            </a:pPr>
-            <a:r>
-              <a:rPr lang="en" sz="2000">
-                <a:solidFill>
-                  <a:schemeClr val="dk1"/>
-                </a:solidFill>
-                <a:highlight>
-                  <a:srgbClr val="D9D9D9"/>
-                </a:highlight>
-              </a:rPr>
-              <a:t>Mandelbrot created in 250.150089 ms</a:t>
-            </a:r>
-            <a:endParaRPr sz="2300">
-              <a:highlight>
-                <a:srgbClr val="D9D9D9"/>
-              </a:highlight>
-            </a:endParaRPr>
-          </a:p>
-        </p:txBody>
-      </p:sp>
-    </p:spTree>
-  </p:cSld>
-  <p:clrMapOvr>
-    <a:masterClrMapping/>
-  </p:clrMapOvr>
-</p:sld>
-</file>
-
-<file path=ppt/slides/slide13.xml><?xml version="1.0" encoding="utf-8"?>
-<p:sld xmlns:a="http://schemas.openxmlformats.org/drawingml/2006/main" xmlns:r="http://schemas.openxmlformats.org/officeDocument/2006/relationships" xmlns:mc="http://schemas.openxmlformats.org/markup-compatibility/2006" xmlns:mv="urn:schemas-microsoft-com:mac:vml" xmlns:p="http://schemas.openxmlformats.org/presentationml/2006/main" xmlns:c="http://schemas.openxmlformats.org/drawingml/2006/chart" xmlns:dgm="http://schemas.openxmlformats.org/drawingml/2006/diagram" xmlns:o="urn:schemas-microsoft-com:office:office" xmlns:v="urn:schemas-microsoft-com:vml" xmlns:pvml="urn:schemas-microsoft-com:office:powerpoint" xmlns:com="http://schemas.openxmlformats.org/drawingml/2006/compatibility" xmlns:p14="http://schemas.microsoft.com/office/powerpoint/2010/main" xmlns:p15="http://schemas.microsoft.com/office/powerpoint/2012/main" xmlns:ahyp="http://schemas.microsoft.com/office/drawing/2018/hyperlinkcolor">
-  <p:cSld>
-    <p:spTree>
-      <p:nvGrpSpPr>
-        <p:cNvPr id="135" name="Shape 135"/>
-        <p:cNvGrpSpPr/>
-        <p:nvPr/>
-      </p:nvGrpSpPr>
-      <p:grpSpPr>
-        <a:xfrm>
-          <a:off x="0" y="0"/>
-          <a:ext cx="0" cy="0"/>
-          <a:chOff x="0" y="0"/>
-          <a:chExt cx="0" cy="0"/>
-        </a:xfrm>
-      </p:grpSpPr>
-      <p:sp>
-        <p:nvSpPr>
-          <p:cNvPr id="136" name="Google Shape;136;p28"/>
+          <p:cNvPr id="118" name="Google Shape;118;p25"/>
           <p:cNvSpPr txBox="1"/>
           <p:nvPr/>
         </p:nvSpPr>
@@ -12092,12 +10835,12 @@
 </p:sld>
 </file>
 
-<file path=ppt/slides/slide14.xml><?xml version="1.0" encoding="utf-8"?>
+<file path=ppt/slides/slide11.xml><?xml version="1.0" encoding="utf-8"?>
 <p:sld xmlns:a="http://schemas.openxmlformats.org/drawingml/2006/main" xmlns:r="http://schemas.openxmlformats.org/officeDocument/2006/relationships" xmlns:mc="http://schemas.openxmlformats.org/markup-compatibility/2006" xmlns:mv="urn:schemas-microsoft-com:mac:vml" xmlns:p="http://schemas.openxmlformats.org/presentationml/2006/main" xmlns:c="http://schemas.openxmlformats.org/drawingml/2006/chart" xmlns:dgm="http://schemas.openxmlformats.org/drawingml/2006/diagram" xmlns:o="urn:schemas-microsoft-com:office:office" xmlns:v="urn:schemas-microsoft-com:vml" xmlns:pvml="urn:schemas-microsoft-com:office:powerpoint" xmlns:com="http://schemas.openxmlformats.org/drawingml/2006/compatibility" xmlns:p14="http://schemas.microsoft.com/office/powerpoint/2010/main" xmlns:p15="http://schemas.microsoft.com/office/powerpoint/2012/main" xmlns:ahyp="http://schemas.microsoft.com/office/drawing/2018/hyperlinkcolor">
   <p:cSld>
     <p:spTree>
       <p:nvGrpSpPr>
-        <p:cNvPr id="140" name="Shape 140"/>
+        <p:cNvPr id="122" name="Shape 122"/>
         <p:cNvGrpSpPr/>
         <p:nvPr/>
       </p:nvGrpSpPr>
@@ -12111,7 +10854,7 @@
       </p:grpSpPr>
       <p:sp>
         <p:nvSpPr>
-          <p:cNvPr id="141" name="Google Shape;141;p29"/>
+          <p:cNvPr id="123" name="Google Shape;123;p26"/>
           <p:cNvSpPr txBox="1"/>
           <p:nvPr/>
         </p:nvSpPr>
@@ -12535,12 +11278,12 @@
 </p:sld>
 </file>
 
-<file path=ppt/slides/slide15.xml><?xml version="1.0" encoding="utf-8"?>
+<file path=ppt/slides/slide12.xml><?xml version="1.0" encoding="utf-8"?>
 <p:sld xmlns:a="http://schemas.openxmlformats.org/drawingml/2006/main" xmlns:r="http://schemas.openxmlformats.org/officeDocument/2006/relationships" xmlns:mc="http://schemas.openxmlformats.org/markup-compatibility/2006" xmlns:mv="urn:schemas-microsoft-com:mac:vml" xmlns:p="http://schemas.openxmlformats.org/presentationml/2006/main" xmlns:c="http://schemas.openxmlformats.org/drawingml/2006/chart" xmlns:dgm="http://schemas.openxmlformats.org/drawingml/2006/diagram" xmlns:o="urn:schemas-microsoft-com:office:office" xmlns:v="urn:schemas-microsoft-com:vml" xmlns:pvml="urn:schemas-microsoft-com:office:powerpoint" xmlns:com="http://schemas.openxmlformats.org/drawingml/2006/compatibility" xmlns:p14="http://schemas.microsoft.com/office/powerpoint/2010/main" xmlns:p15="http://schemas.microsoft.com/office/powerpoint/2012/main" xmlns:ahyp="http://schemas.microsoft.com/office/drawing/2018/hyperlinkcolor">
   <p:cSld>
     <p:spTree>
       <p:nvGrpSpPr>
-        <p:cNvPr id="145" name="Shape 145"/>
+        <p:cNvPr id="127" name="Shape 127"/>
         <p:cNvGrpSpPr/>
         <p:nvPr/>
       </p:nvGrpSpPr>
@@ -12554,7 +11297,7 @@
       </p:grpSpPr>
       <p:sp>
         <p:nvSpPr>
-          <p:cNvPr id="146" name="Google Shape;146;p30"/>
+          <p:cNvPr id="128" name="Google Shape;128;p27"/>
           <p:cNvSpPr txBox="1"/>
           <p:nvPr/>
         </p:nvSpPr>
@@ -12993,12 +11736,12 @@
 </p:sld>
 </file>
 
-<file path=ppt/slides/slide16.xml><?xml version="1.0" encoding="utf-8"?>
+<file path=ppt/slides/slide13.xml><?xml version="1.0" encoding="utf-8"?>
 <p:sld xmlns:a="http://schemas.openxmlformats.org/drawingml/2006/main" xmlns:r="http://schemas.openxmlformats.org/officeDocument/2006/relationships" xmlns:mc="http://schemas.openxmlformats.org/markup-compatibility/2006" xmlns:mv="urn:schemas-microsoft-com:mac:vml" xmlns:p="http://schemas.openxmlformats.org/presentationml/2006/main" xmlns:c="http://schemas.openxmlformats.org/drawingml/2006/chart" xmlns:dgm="http://schemas.openxmlformats.org/drawingml/2006/diagram" xmlns:o="urn:schemas-microsoft-com:office:office" xmlns:v="urn:schemas-microsoft-com:vml" xmlns:pvml="urn:schemas-microsoft-com:office:powerpoint" xmlns:com="http://schemas.openxmlformats.org/drawingml/2006/compatibility" xmlns:p14="http://schemas.microsoft.com/office/powerpoint/2010/main" xmlns:p15="http://schemas.microsoft.com/office/powerpoint/2012/main" xmlns:ahyp="http://schemas.microsoft.com/office/drawing/2018/hyperlinkcolor">
   <p:cSld>
     <p:spTree>
       <p:nvGrpSpPr>
-        <p:cNvPr id="150" name="Shape 150"/>
+        <p:cNvPr id="132" name="Shape 132"/>
         <p:cNvGrpSpPr/>
         <p:nvPr/>
       </p:nvGrpSpPr>
@@ -13012,7 +11755,7 @@
       </p:grpSpPr>
       <p:sp>
         <p:nvSpPr>
-          <p:cNvPr id="151" name="Google Shape;151;p31"/>
+          <p:cNvPr id="133" name="Google Shape;133;p28"/>
           <p:cNvSpPr txBox="1"/>
           <p:nvPr/>
         </p:nvSpPr>
@@ -13147,7 +11890,7 @@
       </p:sp>
       <p:sp>
         <p:nvSpPr>
-          <p:cNvPr id="152" name="Google Shape;152;p31"/>
+          <p:cNvPr id="134" name="Google Shape;134;p28"/>
           <p:cNvSpPr txBox="1"/>
           <p:nvPr/>
         </p:nvSpPr>
@@ -13346,12 +12089,12 @@
 </p:sld>
 </file>
 
-<file path=ppt/slides/slide17.xml><?xml version="1.0" encoding="utf-8"?>
+<file path=ppt/slides/slide14.xml><?xml version="1.0" encoding="utf-8"?>
 <p:sld xmlns:a="http://schemas.openxmlformats.org/drawingml/2006/main" xmlns:r="http://schemas.openxmlformats.org/officeDocument/2006/relationships" xmlns:mc="http://schemas.openxmlformats.org/markup-compatibility/2006" xmlns:mv="urn:schemas-microsoft-com:mac:vml" xmlns:p="http://schemas.openxmlformats.org/presentationml/2006/main" xmlns:c="http://schemas.openxmlformats.org/drawingml/2006/chart" xmlns:dgm="http://schemas.openxmlformats.org/drawingml/2006/diagram" xmlns:o="urn:schemas-microsoft-com:office:office" xmlns:v="urn:schemas-microsoft-com:vml" xmlns:pvml="urn:schemas-microsoft-com:office:powerpoint" xmlns:com="http://schemas.openxmlformats.org/drawingml/2006/compatibility" xmlns:p14="http://schemas.microsoft.com/office/powerpoint/2010/main" xmlns:p15="http://schemas.microsoft.com/office/powerpoint/2012/main" xmlns:ahyp="http://schemas.microsoft.com/office/drawing/2018/hyperlinkcolor">
   <p:cSld>
     <p:spTree>
       <p:nvGrpSpPr>
-        <p:cNvPr id="156" name="Shape 156"/>
+        <p:cNvPr id="138" name="Shape 138"/>
         <p:cNvGrpSpPr/>
         <p:nvPr/>
       </p:nvGrpSpPr>
@@ -13365,7 +12108,7 @@
       </p:grpSpPr>
       <p:graphicFrame>
         <p:nvGraphicFramePr>
-          <p:cNvPr id="157" name="Google Shape;157;p32"/>
+          <p:cNvPr id="139" name="Google Shape;139;p29"/>
           <p:cNvGraphicFramePr/>
           <p:nvPr/>
         </p:nvGraphicFramePr>
@@ -13378,7 +12121,7 @@
             <a:tbl>
               <a:tblPr>
                 <a:noFill/>
-                <a:tableStyleId>{963A9C31-2D00-47A8-8B41-21EFFD2772EF}</a:tableStyleId>
+                <a:tableStyleId>{96A4487F-C8FF-4787-9DA8-CCFB90FB1DBC}</a:tableStyleId>
               </a:tblPr>
               <a:tblGrid>
                 <a:gridCol w="2716775"/>
@@ -13778,12 +12521,12 @@
 </p:sld>
 </file>
 
-<file path=ppt/slides/slide18.xml><?xml version="1.0" encoding="utf-8"?>
+<file path=ppt/slides/slide15.xml><?xml version="1.0" encoding="utf-8"?>
 <p:sld xmlns:a="http://schemas.openxmlformats.org/drawingml/2006/main" xmlns:r="http://schemas.openxmlformats.org/officeDocument/2006/relationships" xmlns:mc="http://schemas.openxmlformats.org/markup-compatibility/2006" xmlns:mv="urn:schemas-microsoft-com:mac:vml" xmlns:p="http://schemas.openxmlformats.org/presentationml/2006/main" xmlns:c="http://schemas.openxmlformats.org/drawingml/2006/chart" xmlns:dgm="http://schemas.openxmlformats.org/drawingml/2006/diagram" xmlns:o="urn:schemas-microsoft-com:office:office" xmlns:v="urn:schemas-microsoft-com:vml" xmlns:pvml="urn:schemas-microsoft-com:office:powerpoint" xmlns:com="http://schemas.openxmlformats.org/drawingml/2006/compatibility" xmlns:p14="http://schemas.microsoft.com/office/powerpoint/2010/main" xmlns:p15="http://schemas.microsoft.com/office/powerpoint/2012/main" xmlns:ahyp="http://schemas.microsoft.com/office/drawing/2018/hyperlinkcolor">
   <p:cSld>
     <p:spTree>
       <p:nvGrpSpPr>
-        <p:cNvPr id="161" name="Shape 161"/>
+        <p:cNvPr id="143" name="Shape 143"/>
         <p:cNvGrpSpPr/>
         <p:nvPr/>
       </p:nvGrpSpPr>
@@ -13797,7 +12540,7 @@
       </p:grpSpPr>
       <p:sp>
         <p:nvSpPr>
-          <p:cNvPr id="162" name="Google Shape;162;p33"/>
+          <p:cNvPr id="144" name="Google Shape;144;p30"/>
           <p:cNvSpPr txBox="1"/>
           <p:nvPr/>
         </p:nvSpPr>
@@ -14270,12 +13013,12 @@
 </p:sld>
 </file>
 
-<file path=ppt/slides/slide19.xml><?xml version="1.0" encoding="utf-8"?>
+<file path=ppt/slides/slide16.xml><?xml version="1.0" encoding="utf-8"?>
 <p:sld xmlns:a="http://schemas.openxmlformats.org/drawingml/2006/main" xmlns:r="http://schemas.openxmlformats.org/officeDocument/2006/relationships" xmlns:mc="http://schemas.openxmlformats.org/markup-compatibility/2006" xmlns:mv="urn:schemas-microsoft-com:mac:vml" xmlns:p="http://schemas.openxmlformats.org/presentationml/2006/main" xmlns:c="http://schemas.openxmlformats.org/drawingml/2006/chart" xmlns:dgm="http://schemas.openxmlformats.org/drawingml/2006/diagram" xmlns:o="urn:schemas-microsoft-com:office:office" xmlns:v="urn:schemas-microsoft-com:vml" xmlns:pvml="urn:schemas-microsoft-com:office:powerpoint" xmlns:com="http://schemas.openxmlformats.org/drawingml/2006/compatibility" xmlns:p14="http://schemas.microsoft.com/office/powerpoint/2010/main" xmlns:p15="http://schemas.microsoft.com/office/powerpoint/2012/main" xmlns:ahyp="http://schemas.microsoft.com/office/drawing/2018/hyperlinkcolor">
   <p:cSld>
     <p:spTree>
       <p:nvGrpSpPr>
-        <p:cNvPr id="166" name="Shape 166"/>
+        <p:cNvPr id="148" name="Shape 148"/>
         <p:cNvGrpSpPr/>
         <p:nvPr/>
       </p:nvGrpSpPr>
@@ -14289,7 +13032,7 @@
       </p:grpSpPr>
       <p:sp>
         <p:nvSpPr>
-          <p:cNvPr id="167" name="Google Shape;167;p34"/>
+          <p:cNvPr id="149" name="Google Shape;149;p31"/>
           <p:cNvSpPr txBox="1"/>
           <p:nvPr/>
         </p:nvSpPr>
@@ -14652,6 +13395,961 @@
               <a:t>print(C)</a:t>
             </a:r>
             <a:endParaRPr/>
+          </a:p>
+        </p:txBody>
+      </p:sp>
+    </p:spTree>
+  </p:cSld>
+  <p:clrMapOvr>
+    <a:masterClrMapping/>
+  </p:clrMapOvr>
+</p:sld>
+</file>
+
+<file path=ppt/slides/slide17.xml><?xml version="1.0" encoding="utf-8"?>
+<p:sld xmlns:a="http://schemas.openxmlformats.org/drawingml/2006/main" xmlns:r="http://schemas.openxmlformats.org/officeDocument/2006/relationships" xmlns:mc="http://schemas.openxmlformats.org/markup-compatibility/2006" xmlns:mv="urn:schemas-microsoft-com:mac:vml" xmlns:p="http://schemas.openxmlformats.org/presentationml/2006/main" xmlns:c="http://schemas.openxmlformats.org/drawingml/2006/chart" xmlns:dgm="http://schemas.openxmlformats.org/drawingml/2006/diagram" xmlns:o="urn:schemas-microsoft-com:office:office" xmlns:v="urn:schemas-microsoft-com:vml" xmlns:pvml="urn:schemas-microsoft-com:office:powerpoint" xmlns:com="http://schemas.openxmlformats.org/drawingml/2006/compatibility" xmlns:p14="http://schemas.microsoft.com/office/powerpoint/2010/main" xmlns:p15="http://schemas.microsoft.com/office/powerpoint/2012/main" xmlns:ahyp="http://schemas.microsoft.com/office/drawing/2018/hyperlinkcolor">
+  <p:cSld>
+    <p:spTree>
+      <p:nvGrpSpPr>
+        <p:cNvPr id="153" name="Shape 153"/>
+        <p:cNvGrpSpPr/>
+        <p:nvPr/>
+      </p:nvGrpSpPr>
+      <p:grpSpPr>
+        <a:xfrm>
+          <a:off x="0" y="0"/>
+          <a:ext cx="0" cy="0"/>
+          <a:chOff x="0" y="0"/>
+          <a:chExt cx="0" cy="0"/>
+        </a:xfrm>
+      </p:grpSpPr>
+      <p:sp>
+        <p:nvSpPr>
+          <p:cNvPr id="154" name="Google Shape;154;p32"/>
+          <p:cNvSpPr txBox="1"/>
+          <p:nvPr/>
+        </p:nvSpPr>
+        <p:spPr>
+          <a:xfrm>
+            <a:off x="133875" y="719425"/>
+            <a:ext cx="8926800" cy="2754300"/>
+          </a:xfrm>
+          <a:prstGeom prst="rect">
+            <a:avLst/>
+          </a:prstGeom>
+          <a:solidFill>
+            <a:srgbClr val="D0E0E3"/>
+          </a:solidFill>
+          <a:ln>
+            <a:noFill/>
+          </a:ln>
+        </p:spPr>
+        <p:txBody>
+          <a:bodyPr anchorCtr="0" anchor="t" bIns="91425" lIns="91425" spcFirstLastPara="1" rIns="91425" wrap="square" tIns="91425">
+            <a:spAutoFit/>
+          </a:bodyPr>
+          <a:lstStyle/>
+          <a:p>
+            <a:pPr indent="0" lvl="0" marL="0" rtl="0" algn="l">
+              <a:lnSpc>
+                <a:spcPct val="115000"/>
+              </a:lnSpc>
+              <a:spcBef>
+                <a:spcPts val="0"/>
+              </a:spcBef>
+              <a:spcAft>
+                <a:spcPts val="0"/>
+              </a:spcAft>
+              <a:buClr>
+                <a:schemeClr val="dk1"/>
+              </a:buClr>
+              <a:buSzPts val="1100"/>
+              <a:buFont typeface="Arial"/>
+              <a:buNone/>
+            </a:pPr>
+            <a:r>
+              <a:rPr lang="en" sz="1900"/>
+              <a:t>A=np.float32(A)</a:t>
+            </a:r>
+            <a:endParaRPr sz="1900"/>
+          </a:p>
+          <a:p>
+            <a:pPr indent="0" lvl="0" marL="0" rtl="0" algn="l">
+              <a:lnSpc>
+                <a:spcPct val="115000"/>
+              </a:lnSpc>
+              <a:spcBef>
+                <a:spcPts val="0"/>
+              </a:spcBef>
+              <a:spcAft>
+                <a:spcPts val="0"/>
+              </a:spcAft>
+              <a:buClr>
+                <a:schemeClr val="dk1"/>
+              </a:buClr>
+              <a:buSzPts val="1100"/>
+              <a:buFont typeface="Arial"/>
+              <a:buNone/>
+            </a:pPr>
+            <a:r>
+              <a:rPr lang="en" sz="1900"/>
+              <a:t>B=np.float32(B)</a:t>
+            </a:r>
+            <a:endParaRPr sz="1900"/>
+          </a:p>
+          <a:p>
+            <a:pPr indent="0" lvl="0" marL="0" rtl="0" algn="l">
+              <a:lnSpc>
+                <a:spcPct val="115000"/>
+              </a:lnSpc>
+              <a:spcBef>
+                <a:spcPts val="0"/>
+              </a:spcBef>
+              <a:spcAft>
+                <a:spcPts val="0"/>
+              </a:spcAft>
+              <a:buClr>
+                <a:schemeClr val="dk1"/>
+              </a:buClr>
+              <a:buSzPts val="1100"/>
+              <a:buFont typeface="Arial"/>
+              <a:buNone/>
+            </a:pPr>
+            <a:r>
+              <a:rPr lang="en" sz="1900"/>
+              <a:t>C=np.float32(C)</a:t>
+            </a:r>
+            <a:endParaRPr sz="1900"/>
+          </a:p>
+          <a:p>
+            <a:pPr indent="0" lvl="0" marL="0" rtl="0" algn="l">
+              <a:lnSpc>
+                <a:spcPct val="115000"/>
+              </a:lnSpc>
+              <a:spcBef>
+                <a:spcPts val="0"/>
+              </a:spcBef>
+              <a:spcAft>
+                <a:spcPts val="0"/>
+              </a:spcAft>
+              <a:buClr>
+                <a:schemeClr val="dk1"/>
+              </a:buClr>
+              <a:buSzPts val="1100"/>
+              <a:buFont typeface="Arial"/>
+              <a:buNone/>
+            </a:pPr>
+            <a:r>
+              <a:t/>
+            </a:r>
+            <a:endParaRPr sz="1900"/>
+          </a:p>
+          <a:p>
+            <a:pPr indent="0" lvl="0" marL="0" rtl="0" algn="l">
+              <a:lnSpc>
+                <a:spcPct val="115000"/>
+              </a:lnSpc>
+              <a:spcBef>
+                <a:spcPts val="0"/>
+              </a:spcBef>
+              <a:spcAft>
+                <a:spcPts val="0"/>
+              </a:spcAft>
+              <a:buClr>
+                <a:schemeClr val="dk1"/>
+              </a:buClr>
+              <a:buSzPts val="1100"/>
+              <a:buFont typeface="Arial"/>
+              <a:buNone/>
+            </a:pPr>
+            <a:r>
+              <a:rPr lang="en" sz="1900"/>
+              <a:t>dA=cuda.to_device(A)</a:t>
+            </a:r>
+            <a:endParaRPr sz="1900"/>
+          </a:p>
+          <a:p>
+            <a:pPr indent="0" lvl="0" marL="0" rtl="0" algn="l">
+              <a:lnSpc>
+                <a:spcPct val="115000"/>
+              </a:lnSpc>
+              <a:spcBef>
+                <a:spcPts val="0"/>
+              </a:spcBef>
+              <a:spcAft>
+                <a:spcPts val="0"/>
+              </a:spcAft>
+              <a:buClr>
+                <a:schemeClr val="dk1"/>
+              </a:buClr>
+              <a:buSzPts val="1100"/>
+              <a:buFont typeface="Arial"/>
+              <a:buNone/>
+            </a:pPr>
+            <a:r>
+              <a:rPr lang="en" sz="1900"/>
+              <a:t>dB=cuda.to_device(B)</a:t>
+            </a:r>
+            <a:endParaRPr sz="1900"/>
+          </a:p>
+          <a:p>
+            <a:pPr indent="0" lvl="0" marL="0" rtl="0" algn="l">
+              <a:lnSpc>
+                <a:spcPct val="115000"/>
+              </a:lnSpc>
+              <a:spcBef>
+                <a:spcPts val="0"/>
+              </a:spcBef>
+              <a:spcAft>
+                <a:spcPts val="0"/>
+              </a:spcAft>
+              <a:buClr>
+                <a:schemeClr val="dk1"/>
+              </a:buClr>
+              <a:buSzPts val="1100"/>
+              <a:buFont typeface="Arial"/>
+              <a:buNone/>
+            </a:pPr>
+            <a:r>
+              <a:rPr lang="en" sz="1900"/>
+              <a:t>dC=cuda.to_device(C)</a:t>
+            </a:r>
+            <a:endParaRPr sz="1900"/>
+          </a:p>
+          <a:p>
+            <a:pPr indent="0" lvl="0" marL="0" rtl="0" algn="l">
+              <a:spcBef>
+                <a:spcPts val="0"/>
+              </a:spcBef>
+              <a:spcAft>
+                <a:spcPts val="0"/>
+              </a:spcAft>
+              <a:buNone/>
+            </a:pPr>
+            <a:r>
+              <a:t/>
+            </a:r>
+            <a:endParaRPr/>
+          </a:p>
+        </p:txBody>
+      </p:sp>
+    </p:spTree>
+  </p:cSld>
+  <p:clrMapOvr>
+    <a:masterClrMapping/>
+  </p:clrMapOvr>
+</p:sld>
+</file>
+
+<file path=ppt/slides/slide18.xml><?xml version="1.0" encoding="utf-8"?>
+<p:sld xmlns:a="http://schemas.openxmlformats.org/drawingml/2006/main" xmlns:r="http://schemas.openxmlformats.org/officeDocument/2006/relationships" xmlns:mc="http://schemas.openxmlformats.org/markup-compatibility/2006" xmlns:mv="urn:schemas-microsoft-com:mac:vml" xmlns:p="http://schemas.openxmlformats.org/presentationml/2006/main" xmlns:c="http://schemas.openxmlformats.org/drawingml/2006/chart" xmlns:dgm="http://schemas.openxmlformats.org/drawingml/2006/diagram" xmlns:o="urn:schemas-microsoft-com:office:office" xmlns:v="urn:schemas-microsoft-com:vml" xmlns:pvml="urn:schemas-microsoft-com:office:powerpoint" xmlns:com="http://schemas.openxmlformats.org/drawingml/2006/compatibility" xmlns:p14="http://schemas.microsoft.com/office/powerpoint/2010/main" xmlns:p15="http://schemas.microsoft.com/office/powerpoint/2012/main" xmlns:ahyp="http://schemas.microsoft.com/office/drawing/2018/hyperlinkcolor">
+  <p:cSld>
+    <p:spTree>
+      <p:nvGrpSpPr>
+        <p:cNvPr id="158" name="Shape 158"/>
+        <p:cNvGrpSpPr/>
+        <p:nvPr/>
+      </p:nvGrpSpPr>
+      <p:grpSpPr>
+        <a:xfrm>
+          <a:off x="0" y="0"/>
+          <a:ext cx="0" cy="0"/>
+          <a:chOff x="0" y="0"/>
+          <a:chExt cx="0" cy="0"/>
+        </a:xfrm>
+      </p:grpSpPr>
+      <p:sp>
+        <p:nvSpPr>
+          <p:cNvPr id="159" name="Google Shape;159;p33"/>
+          <p:cNvSpPr txBox="1"/>
+          <p:nvPr/>
+        </p:nvSpPr>
+        <p:spPr>
+          <a:xfrm>
+            <a:off x="100425" y="117200"/>
+            <a:ext cx="8910000" cy="3427200"/>
+          </a:xfrm>
+          <a:prstGeom prst="rect">
+            <a:avLst/>
+          </a:prstGeom>
+          <a:solidFill>
+            <a:srgbClr val="D0E0E3"/>
+          </a:solidFill>
+          <a:ln>
+            <a:noFill/>
+          </a:ln>
+        </p:spPr>
+        <p:txBody>
+          <a:bodyPr anchorCtr="0" anchor="t" bIns="91425" lIns="91425" spcFirstLastPara="1" rIns="91425" wrap="square" tIns="91425">
+            <a:spAutoFit/>
+          </a:bodyPr>
+          <a:lstStyle/>
+          <a:p>
+            <a:pPr indent="0" lvl="0" marL="0" rtl="0" algn="l">
+              <a:lnSpc>
+                <a:spcPct val="115000"/>
+              </a:lnSpc>
+              <a:spcBef>
+                <a:spcPts val="0"/>
+              </a:spcBef>
+              <a:spcAft>
+                <a:spcPts val="0"/>
+              </a:spcAft>
+              <a:buClr>
+                <a:schemeClr val="dk1"/>
+              </a:buClr>
+              <a:buSzPts val="1100"/>
+              <a:buFont typeface="Arial"/>
+              <a:buNone/>
+            </a:pPr>
+            <a:r>
+              <a:rPr lang="en" sz="1900">
+                <a:solidFill>
+                  <a:schemeClr val="dk1"/>
+                </a:solidFill>
+              </a:rPr>
+              <a:t>start = timer()</a:t>
+            </a:r>
+            <a:endParaRPr sz="1900">
+              <a:solidFill>
+                <a:schemeClr val="dk1"/>
+              </a:solidFill>
+            </a:endParaRPr>
+          </a:p>
+          <a:p>
+            <a:pPr indent="0" lvl="0" marL="0" rtl="0" algn="l">
+              <a:lnSpc>
+                <a:spcPct val="115000"/>
+              </a:lnSpc>
+              <a:spcBef>
+                <a:spcPts val="0"/>
+              </a:spcBef>
+              <a:spcAft>
+                <a:spcPts val="0"/>
+              </a:spcAft>
+              <a:buClr>
+                <a:schemeClr val="dk1"/>
+              </a:buClr>
+              <a:buSzPts val="1100"/>
+              <a:buFont typeface="Arial"/>
+              <a:buNone/>
+            </a:pPr>
+            <a:r>
+              <a:rPr lang="en" sz="1900">
+                <a:solidFill>
+                  <a:schemeClr val="dk1"/>
+                </a:solidFill>
+              </a:rPr>
+              <a:t>matmul[(64,64),(16,16)](dA,dB,dC)</a:t>
+            </a:r>
+            <a:endParaRPr sz="1900">
+              <a:solidFill>
+                <a:schemeClr val="dk1"/>
+              </a:solidFill>
+            </a:endParaRPr>
+          </a:p>
+          <a:p>
+            <a:pPr indent="0" lvl="0" marL="0" rtl="0" algn="l">
+              <a:lnSpc>
+                <a:spcPct val="115000"/>
+              </a:lnSpc>
+              <a:spcBef>
+                <a:spcPts val="0"/>
+              </a:spcBef>
+              <a:spcAft>
+                <a:spcPts val="0"/>
+              </a:spcAft>
+              <a:buClr>
+                <a:schemeClr val="dk1"/>
+              </a:buClr>
+              <a:buSzPts val="1100"/>
+              <a:buFont typeface="Arial"/>
+              <a:buNone/>
+            </a:pPr>
+            <a:r>
+              <a:rPr lang="en" sz="1900">
+                <a:solidFill>
+                  <a:schemeClr val="dk1"/>
+                </a:solidFill>
+              </a:rPr>
+              <a:t>cuda.synchronize()  </a:t>
+            </a:r>
+            <a:endParaRPr sz="1900">
+              <a:solidFill>
+                <a:schemeClr val="dk1"/>
+              </a:solidFill>
+            </a:endParaRPr>
+          </a:p>
+          <a:p>
+            <a:pPr indent="0" lvl="0" marL="0" rtl="0" algn="l">
+              <a:lnSpc>
+                <a:spcPct val="115000"/>
+              </a:lnSpc>
+              <a:spcBef>
+                <a:spcPts val="0"/>
+              </a:spcBef>
+              <a:spcAft>
+                <a:spcPts val="0"/>
+              </a:spcAft>
+              <a:buClr>
+                <a:schemeClr val="dk1"/>
+              </a:buClr>
+              <a:buSzPts val="1100"/>
+              <a:buFont typeface="Arial"/>
+              <a:buNone/>
+            </a:pPr>
+            <a:r>
+              <a:rPr lang="en" sz="1900">
+                <a:solidFill>
+                  <a:schemeClr val="dk1"/>
+                </a:solidFill>
+              </a:rPr>
+              <a:t>dt = timer() - start</a:t>
+            </a:r>
+            <a:endParaRPr sz="1900">
+              <a:solidFill>
+                <a:schemeClr val="dk1"/>
+              </a:solidFill>
+            </a:endParaRPr>
+          </a:p>
+          <a:p>
+            <a:pPr indent="0" lvl="0" marL="0" rtl="0" algn="l">
+              <a:lnSpc>
+                <a:spcPct val="115000"/>
+              </a:lnSpc>
+              <a:spcBef>
+                <a:spcPts val="0"/>
+              </a:spcBef>
+              <a:spcAft>
+                <a:spcPts val="0"/>
+              </a:spcAft>
+              <a:buClr>
+                <a:schemeClr val="dk1"/>
+              </a:buClr>
+              <a:buSzPts val="1100"/>
+              <a:buFont typeface="Arial"/>
+              <a:buNone/>
+            </a:pPr>
+            <a:r>
+              <a:t/>
+            </a:r>
+            <a:endParaRPr sz="1900">
+              <a:solidFill>
+                <a:schemeClr val="dk1"/>
+              </a:solidFill>
+            </a:endParaRPr>
+          </a:p>
+          <a:p>
+            <a:pPr indent="0" lvl="0" marL="0" rtl="0" algn="l">
+              <a:lnSpc>
+                <a:spcPct val="115000"/>
+              </a:lnSpc>
+              <a:spcBef>
+                <a:spcPts val="0"/>
+              </a:spcBef>
+              <a:spcAft>
+                <a:spcPts val="0"/>
+              </a:spcAft>
+              <a:buClr>
+                <a:schemeClr val="dk1"/>
+              </a:buClr>
+              <a:buSzPts val="1100"/>
+              <a:buFont typeface="Arial"/>
+              <a:buNone/>
+            </a:pPr>
+            <a:r>
+              <a:rPr lang="en" sz="1900">
+                <a:solidFill>
+                  <a:schemeClr val="dk1"/>
+                </a:solidFill>
+              </a:rPr>
+              <a:t>#dC.to_host()</a:t>
+            </a:r>
+            <a:endParaRPr sz="1900">
+              <a:solidFill>
+                <a:schemeClr val="dk1"/>
+              </a:solidFill>
+            </a:endParaRPr>
+          </a:p>
+          <a:p>
+            <a:pPr indent="0" lvl="0" marL="0" rtl="0" algn="l">
+              <a:lnSpc>
+                <a:spcPct val="115000"/>
+              </a:lnSpc>
+              <a:spcBef>
+                <a:spcPts val="0"/>
+              </a:spcBef>
+              <a:spcAft>
+                <a:spcPts val="0"/>
+              </a:spcAft>
+              <a:buNone/>
+            </a:pPr>
+            <a:r>
+              <a:rPr lang="en" sz="1900">
+                <a:solidFill>
+                  <a:schemeClr val="dk1"/>
+                </a:solidFill>
+              </a:rPr>
+              <a:t>dt=dt/1000000.0</a:t>
+            </a:r>
+            <a:endParaRPr sz="1900">
+              <a:solidFill>
+                <a:schemeClr val="dk1"/>
+              </a:solidFill>
+            </a:endParaRPr>
+          </a:p>
+          <a:p>
+            <a:pPr indent="0" lvl="0" marL="0" rtl="0" algn="l">
+              <a:lnSpc>
+                <a:spcPct val="115000"/>
+              </a:lnSpc>
+              <a:spcBef>
+                <a:spcPts val="0"/>
+              </a:spcBef>
+              <a:spcAft>
+                <a:spcPts val="0"/>
+              </a:spcAft>
+              <a:buClr>
+                <a:schemeClr val="dk1"/>
+              </a:buClr>
+              <a:buSzPts val="1100"/>
+              <a:buFont typeface="Arial"/>
+              <a:buNone/>
+            </a:pPr>
+            <a:r>
+              <a:rPr lang="en" sz="1900">
+                <a:solidFill>
+                  <a:schemeClr val="dk1"/>
+                </a:solidFill>
+              </a:rPr>
+              <a:t>print ("matmul time %f ms" % dt)</a:t>
+            </a:r>
+            <a:endParaRPr sz="1900">
+              <a:solidFill>
+                <a:schemeClr val="dk1"/>
+              </a:solidFill>
+            </a:endParaRPr>
+          </a:p>
+          <a:p>
+            <a:pPr indent="0" lvl="0" marL="0" rtl="0" algn="l">
+              <a:lnSpc>
+                <a:spcPct val="115000"/>
+              </a:lnSpc>
+              <a:spcBef>
+                <a:spcPts val="0"/>
+              </a:spcBef>
+              <a:spcAft>
+                <a:spcPts val="0"/>
+              </a:spcAft>
+              <a:buClr>
+                <a:schemeClr val="dk1"/>
+              </a:buClr>
+              <a:buSzPts val="1100"/>
+              <a:buFont typeface="Arial"/>
+              <a:buNone/>
+            </a:pPr>
+            <a:r>
+              <a:rPr lang="en" sz="1900">
+                <a:solidFill>
+                  <a:schemeClr val="dk1"/>
+                </a:solidFill>
+              </a:rPr>
+              <a:t>print(dC)</a:t>
+            </a:r>
+            <a:endParaRPr sz="1900">
+              <a:solidFill>
+                <a:schemeClr val="dk1"/>
+              </a:solidFill>
+            </a:endParaRPr>
+          </a:p>
+          <a:p>
+            <a:pPr indent="0" lvl="0" marL="0" rtl="0" algn="l">
+              <a:spcBef>
+                <a:spcPts val="0"/>
+              </a:spcBef>
+              <a:spcAft>
+                <a:spcPts val="0"/>
+              </a:spcAft>
+              <a:buNone/>
+            </a:pPr>
+            <a:r>
+              <a:t/>
+            </a:r>
+            <a:endParaRPr/>
+          </a:p>
+        </p:txBody>
+      </p:sp>
+    </p:spTree>
+  </p:cSld>
+  <p:clrMapOvr>
+    <a:masterClrMapping/>
+  </p:clrMapOvr>
+</p:sld>
+</file>
+
+<file path=ppt/slides/slide19.xml><?xml version="1.0" encoding="utf-8"?>
+<p:sld xmlns:a="http://schemas.openxmlformats.org/drawingml/2006/main" xmlns:r="http://schemas.openxmlformats.org/officeDocument/2006/relationships" xmlns:mc="http://schemas.openxmlformats.org/markup-compatibility/2006" xmlns:mv="urn:schemas-microsoft-com:mac:vml" xmlns:p="http://schemas.openxmlformats.org/presentationml/2006/main" xmlns:c="http://schemas.openxmlformats.org/drawingml/2006/chart" xmlns:dgm="http://schemas.openxmlformats.org/drawingml/2006/diagram" xmlns:o="urn:schemas-microsoft-com:office:office" xmlns:v="urn:schemas-microsoft-com:vml" xmlns:pvml="urn:schemas-microsoft-com:office:powerpoint" xmlns:com="http://schemas.openxmlformats.org/drawingml/2006/compatibility" xmlns:p14="http://schemas.microsoft.com/office/powerpoint/2010/main" xmlns:p15="http://schemas.microsoft.com/office/powerpoint/2012/main" xmlns:ahyp="http://schemas.microsoft.com/office/drawing/2018/hyperlinkcolor">
+  <p:cSld>
+    <p:spTree>
+      <p:nvGrpSpPr>
+        <p:cNvPr id="163" name="Shape 163"/>
+        <p:cNvGrpSpPr/>
+        <p:nvPr/>
+      </p:nvGrpSpPr>
+      <p:grpSpPr>
+        <a:xfrm>
+          <a:off x="0" y="0"/>
+          <a:ext cx="0" cy="0"/>
+          <a:chOff x="0" y="0"/>
+          <a:chExt cx="0" cy="0"/>
+        </a:xfrm>
+      </p:grpSpPr>
+      <p:sp>
+        <p:nvSpPr>
+          <p:cNvPr id="164" name="Google Shape;164;p34"/>
+          <p:cNvSpPr txBox="1"/>
+          <p:nvPr/>
+        </p:nvSpPr>
+        <p:spPr>
+          <a:xfrm>
+            <a:off x="184700" y="574775"/>
+            <a:ext cx="8775000" cy="3232500"/>
+          </a:xfrm>
+          <a:prstGeom prst="rect">
+            <a:avLst/>
+          </a:prstGeom>
+          <a:solidFill>
+            <a:srgbClr val="D9D9D9"/>
+          </a:solidFill>
+          <a:ln>
+            <a:noFill/>
+          </a:ln>
+        </p:spPr>
+        <p:txBody>
+          <a:bodyPr anchorCtr="0" anchor="t" bIns="91425" lIns="91425" spcFirstLastPara="1" rIns="91425" wrap="square" tIns="91425">
+            <a:spAutoFit/>
+          </a:bodyPr>
+          <a:lstStyle/>
+          <a:p>
+            <a:pPr indent="0" lvl="0" marL="0" rtl="0" algn="l">
+              <a:spcBef>
+                <a:spcPts val="0"/>
+              </a:spcBef>
+              <a:spcAft>
+                <a:spcPts val="0"/>
+              </a:spcAft>
+              <a:buClr>
+                <a:schemeClr val="dk1"/>
+              </a:buClr>
+              <a:buSzPts val="1100"/>
+              <a:buFont typeface="Arial"/>
+              <a:buNone/>
+            </a:pPr>
+            <a:r>
+              <a:rPr lang="en" sz="1800">
+                <a:solidFill>
+                  <a:schemeClr val="dk1"/>
+                </a:solidFill>
+                <a:highlight>
+                  <a:srgbClr val="D9D9D9"/>
+                </a:highlight>
+              </a:rPr>
+              <a:t>/Lab10&gt; python cuda-gemm3.py</a:t>
+            </a:r>
+            <a:endParaRPr sz="1800">
+              <a:solidFill>
+                <a:schemeClr val="dk1"/>
+              </a:solidFill>
+              <a:highlight>
+                <a:srgbClr val="D9D9D9"/>
+              </a:highlight>
+            </a:endParaRPr>
+          </a:p>
+          <a:p>
+            <a:pPr indent="0" lvl="0" marL="0" rtl="0" algn="l">
+              <a:spcBef>
+                <a:spcPts val="0"/>
+              </a:spcBef>
+              <a:spcAft>
+                <a:spcPts val="0"/>
+              </a:spcAft>
+              <a:buClr>
+                <a:schemeClr val="dk1"/>
+              </a:buClr>
+              <a:buSzPts val="1100"/>
+              <a:buFont typeface="Arial"/>
+              <a:buNone/>
+            </a:pPr>
+            <a:r>
+              <a:rPr b="1" lang="en" sz="1800">
+                <a:solidFill>
+                  <a:schemeClr val="dk1"/>
+                </a:solidFill>
+              </a:rPr>
+              <a:t>np.matmul time 20.236182 ms</a:t>
+            </a:r>
+            <a:endParaRPr b="1" sz="1800">
+              <a:solidFill>
+                <a:schemeClr val="dk1"/>
+              </a:solidFill>
+            </a:endParaRPr>
+          </a:p>
+          <a:p>
+            <a:pPr indent="0" lvl="0" marL="0" rtl="0" algn="l">
+              <a:spcBef>
+                <a:spcPts val="0"/>
+              </a:spcBef>
+              <a:spcAft>
+                <a:spcPts val="0"/>
+              </a:spcAft>
+              <a:buClr>
+                <a:schemeClr val="dk1"/>
+              </a:buClr>
+              <a:buSzPts val="1100"/>
+              <a:buFont typeface="Arial"/>
+              <a:buNone/>
+            </a:pPr>
+            <a:r>
+              <a:rPr lang="en" sz="1800">
+                <a:solidFill>
+                  <a:schemeClr val="dk1"/>
+                </a:solidFill>
+              </a:rPr>
+              <a:t>[[ 5.24e+05  5.24e+05  5.24e+05 ...  5.24e+05  5.24e+05  5.24e+05]</a:t>
+            </a:r>
+            <a:endParaRPr sz="1800">
+              <a:solidFill>
+                <a:schemeClr val="dk1"/>
+              </a:solidFill>
+            </a:endParaRPr>
+          </a:p>
+          <a:p>
+            <a:pPr indent="0" lvl="0" marL="0" rtl="0" algn="l">
+              <a:spcBef>
+                <a:spcPts val="0"/>
+              </a:spcBef>
+              <a:spcAft>
+                <a:spcPts val="0"/>
+              </a:spcAft>
+              <a:buClr>
+                <a:schemeClr val="dk1"/>
+              </a:buClr>
+              <a:buSzPts val="1100"/>
+              <a:buFont typeface="Arial"/>
+              <a:buNone/>
+            </a:pPr>
+            <a:r>
+              <a:rPr lang="en" sz="1800">
+                <a:solidFill>
+                  <a:schemeClr val="dk1"/>
+                </a:solidFill>
+              </a:rPr>
+              <a:t>[ 1.57e+06  1.57e+06  1.57e+06 ...  1.57e+06  1.57e+06  1.57e+06]</a:t>
+            </a:r>
+            <a:endParaRPr sz="1800">
+              <a:solidFill>
+                <a:schemeClr val="dk1"/>
+              </a:solidFill>
+            </a:endParaRPr>
+          </a:p>
+          <a:p>
+            <a:pPr indent="0" lvl="0" marL="0" rtl="0" algn="l">
+              <a:spcBef>
+                <a:spcPts val="0"/>
+              </a:spcBef>
+              <a:spcAft>
+                <a:spcPts val="0"/>
+              </a:spcAft>
+              <a:buClr>
+                <a:schemeClr val="dk1"/>
+              </a:buClr>
+              <a:buSzPts val="1100"/>
+              <a:buFont typeface="Arial"/>
+              <a:buNone/>
+            </a:pPr>
+            <a:r>
+              <a:rPr lang="en" sz="1800">
+                <a:solidFill>
+                  <a:schemeClr val="dk1"/>
+                </a:solidFill>
+              </a:rPr>
+              <a:t>...</a:t>
+            </a:r>
+            <a:endParaRPr sz="1800">
+              <a:solidFill>
+                <a:schemeClr val="dk1"/>
+              </a:solidFill>
+            </a:endParaRPr>
+          </a:p>
+          <a:p>
+            <a:pPr indent="0" lvl="0" marL="0" rtl="0" algn="l">
+              <a:spcBef>
+                <a:spcPts val="0"/>
+              </a:spcBef>
+              <a:spcAft>
+                <a:spcPts val="0"/>
+              </a:spcAft>
+              <a:buClr>
+                <a:schemeClr val="dk1"/>
+              </a:buClr>
+              <a:buSzPts val="1100"/>
+              <a:buFont typeface="Arial"/>
+              <a:buNone/>
+            </a:pPr>
+            <a:r>
+              <a:rPr lang="en" sz="1800">
+                <a:solidFill>
+                  <a:schemeClr val="dk1"/>
+                </a:solidFill>
+              </a:rPr>
+              <a:t>[ 1.07e+09  1.07e+09  1.07e+09 ...  1.07e+09  1.07e+09  1.07e+09]]</a:t>
+            </a:r>
+            <a:endParaRPr sz="1800">
+              <a:solidFill>
+                <a:schemeClr val="dk1"/>
+              </a:solidFill>
+            </a:endParaRPr>
+          </a:p>
+          <a:p>
+            <a:pPr indent="0" lvl="0" marL="0" rtl="0" algn="l">
+              <a:spcBef>
+                <a:spcPts val="0"/>
+              </a:spcBef>
+              <a:spcAft>
+                <a:spcPts val="0"/>
+              </a:spcAft>
+              <a:buClr>
+                <a:schemeClr val="dk1"/>
+              </a:buClr>
+              <a:buSzPts val="1100"/>
+              <a:buFont typeface="Arial"/>
+              <a:buNone/>
+            </a:pPr>
+            <a:r>
+              <a:rPr b="1" lang="en" sz="1800">
+                <a:solidFill>
+                  <a:schemeClr val="dk1"/>
+                </a:solidFill>
+              </a:rPr>
+              <a:t>matmul time 30.242027 ms</a:t>
+            </a:r>
+            <a:endParaRPr b="1" sz="1800">
+              <a:solidFill>
+                <a:schemeClr val="dk1"/>
+              </a:solidFill>
+            </a:endParaRPr>
+          </a:p>
+          <a:p>
+            <a:pPr indent="0" lvl="0" marL="0" rtl="0" algn="l">
+              <a:spcBef>
+                <a:spcPts val="0"/>
+              </a:spcBef>
+              <a:spcAft>
+                <a:spcPts val="0"/>
+              </a:spcAft>
+              <a:buClr>
+                <a:schemeClr val="dk1"/>
+              </a:buClr>
+              <a:buSzPts val="1100"/>
+              <a:buFont typeface="Arial"/>
+              <a:buNone/>
+            </a:pPr>
+            <a:r>
+              <a:rPr lang="en" sz="1800">
+                <a:solidFill>
+                  <a:schemeClr val="dk1"/>
+                </a:solidFill>
+              </a:rPr>
+              <a:t>[[ 5.24e+05  5.24e+05  5.24e+05 ...  5.24e+05  5.24e+05  5.24e+05]</a:t>
+            </a:r>
+            <a:endParaRPr sz="1800">
+              <a:solidFill>
+                <a:schemeClr val="dk1"/>
+              </a:solidFill>
+            </a:endParaRPr>
+          </a:p>
+          <a:p>
+            <a:pPr indent="0" lvl="0" marL="0" rtl="0" algn="l">
+              <a:spcBef>
+                <a:spcPts val="0"/>
+              </a:spcBef>
+              <a:spcAft>
+                <a:spcPts val="0"/>
+              </a:spcAft>
+              <a:buClr>
+                <a:schemeClr val="dk1"/>
+              </a:buClr>
+              <a:buSzPts val="1100"/>
+              <a:buFont typeface="Arial"/>
+              <a:buNone/>
+            </a:pPr>
+            <a:r>
+              <a:rPr lang="en" sz="1800">
+                <a:solidFill>
+                  <a:schemeClr val="dk1"/>
+                </a:solidFill>
+              </a:rPr>
+              <a:t>[ 1.57e+06  1.57e+06  1.57e+06 ...  1.57e+06  1.57e+06  1.57e+06]</a:t>
+            </a:r>
+            <a:endParaRPr sz="1800">
+              <a:solidFill>
+                <a:schemeClr val="dk1"/>
+              </a:solidFill>
+            </a:endParaRPr>
+          </a:p>
+          <a:p>
+            <a:pPr indent="0" lvl="0" marL="0" rtl="0" algn="l">
+              <a:spcBef>
+                <a:spcPts val="0"/>
+              </a:spcBef>
+              <a:spcAft>
+                <a:spcPts val="0"/>
+              </a:spcAft>
+              <a:buClr>
+                <a:schemeClr val="dk1"/>
+              </a:buClr>
+              <a:buSzPts val="1100"/>
+              <a:buFont typeface="Arial"/>
+              <a:buNone/>
+            </a:pPr>
+            <a:r>
+              <a:rPr lang="en" sz="1800">
+                <a:solidFill>
+                  <a:schemeClr val="dk1"/>
+                </a:solidFill>
+              </a:rPr>
+              <a:t>...</a:t>
+            </a:r>
+            <a:endParaRPr sz="1800">
+              <a:solidFill>
+                <a:schemeClr val="dk1"/>
+              </a:solidFill>
+            </a:endParaRPr>
+          </a:p>
+          <a:p>
+            <a:pPr indent="0" lvl="0" marL="0" rtl="0" algn="l">
+              <a:spcBef>
+                <a:spcPts val="0"/>
+              </a:spcBef>
+              <a:spcAft>
+                <a:spcPts val="0"/>
+              </a:spcAft>
+              <a:buClr>
+                <a:schemeClr val="dk1"/>
+              </a:buClr>
+              <a:buSzPts val="1100"/>
+              <a:buFont typeface="Arial"/>
+              <a:buNone/>
+            </a:pPr>
+            <a:r>
+              <a:rPr lang="en" sz="1800">
+                <a:solidFill>
+                  <a:schemeClr val="dk1"/>
+                </a:solidFill>
+              </a:rPr>
+              <a:t>[ 1.07e+09  1.07e+09  1.07e+09 ...  1.07e+09  1.07e+09  1.07e+09]]</a:t>
+            </a:r>
+            <a:endParaRPr sz="2100"/>
           </a:p>
         </p:txBody>
       </p:sp>
@@ -14688,21 +14386,17 @@
         </p:nvSpPr>
         <p:spPr>
           <a:xfrm>
-            <a:off x="176625" y="-1767"/>
-            <a:ext cx="8859900" cy="5141100"/>
+            <a:off x="221225" y="813467"/>
+            <a:ext cx="8701800" cy="3879000"/>
           </a:xfrm>
           <a:prstGeom prst="rect">
             <a:avLst/>
           </a:prstGeom>
-          <a:noFill/>
-          <a:ln cap="flat" cmpd="sng" w="9525">
-            <a:solidFill>
-              <a:srgbClr val="C0C3A1"/>
-            </a:solidFill>
-            <a:prstDash val="solid"/>
-            <a:round/>
-            <a:headEnd len="sm" w="sm" type="none"/>
-            <a:tailEnd len="sm" w="sm" type="none"/>
+          <a:solidFill>
+            <a:srgbClr val="FFFF00"/>
+          </a:solidFill>
+          <a:ln>
+            <a:noFill/>
           </a:ln>
         </p:spPr>
         <p:txBody>
@@ -14711,7 +14405,7 @@
           </a:bodyPr>
           <a:lstStyle/>
           <a:p>
-            <a:pPr indent="0" lvl="0" marL="0" rtl="0" algn="ctr">
+            <a:pPr indent="0" lvl="0" marL="0" rtl="0" algn="l">
               <a:spcBef>
                 <a:spcPts val="0"/>
               </a:spcBef>
@@ -14726,10 +14420,10 @@
               <a:buNone/>
             </a:pPr>
             <a:r>
-              <a:rPr b="1" lang="en" sz="2200"/>
-              <a:t>Глоссарий</a:t>
-            </a:r>
-            <a:endParaRPr b="1" sz="2200"/>
+              <a:rPr lang="en" sz="2000"/>
+              <a:t>import numpy as np</a:t>
+            </a:r>
+            <a:endParaRPr sz="2000"/>
           </a:p>
           <a:p>
             <a:pPr indent="0" lvl="0" marL="0" rtl="0" algn="l">
@@ -14747,12 +14441,8 @@
               <a:buNone/>
             </a:pPr>
             <a:r>
-              <a:rPr b="1" lang="en" sz="2000"/>
-              <a:t>Anaconda </a:t>
-            </a:r>
-            <a:r>
               <a:rPr lang="en" sz="2000"/>
-              <a:t>— (Free Open Source Software) дистрибутив python для</a:t>
+              <a:t>from pylab import imshow, show</a:t>
             </a:r>
             <a:endParaRPr sz="2000"/>
           </a:p>
@@ -14768,7 +14458,7 @@
             </a:pPr>
             <a:r>
               <a:rPr lang="en" sz="2000"/>
-              <a:t>научных вычислений.</a:t>
+              <a:t>from time import  perf_counter_ns  as timer</a:t>
             </a:r>
             <a:endParaRPr sz="2000"/>
           </a:p>
@@ -14800,26 +14490,6 @@
               <a:spcAft>
                 <a:spcPts val="0"/>
               </a:spcAft>
-              <a:buNone/>
-            </a:pPr>
-            <a:r>
-              <a:rPr b="1" lang="en" sz="2000"/>
-              <a:t>NumPy</a:t>
-            </a:r>
-            <a:r>
-              <a:rPr lang="en" sz="2000"/>
-              <a:t> — библиотека python для поддержки численных расчетов.</a:t>
-            </a:r>
-            <a:endParaRPr sz="2000"/>
-          </a:p>
-          <a:p>
-            <a:pPr indent="0" lvl="0" marL="0" rtl="0" algn="l">
-              <a:spcBef>
-                <a:spcPts val="0"/>
-              </a:spcBef>
-              <a:spcAft>
-                <a:spcPts val="0"/>
-              </a:spcAft>
               <a:buClr>
                 <a:schemeClr val="dk1"/>
               </a:buClr>
@@ -14828,27 +14498,8 @@
               <a:buNone/>
             </a:pPr>
             <a:r>
-              <a:t/>
-            </a:r>
-            <a:endParaRPr sz="2000"/>
-          </a:p>
-          <a:p>
-            <a:pPr indent="0" lvl="0" marL="0" rtl="0" algn="l">
-              <a:spcBef>
-                <a:spcPts val="0"/>
-              </a:spcBef>
-              <a:spcAft>
-                <a:spcPts val="0"/>
-              </a:spcAft>
-              <a:buNone/>
-            </a:pPr>
-            <a:r>
-              <a:rPr b="1" lang="en" sz="2000"/>
-              <a:t>Numba</a:t>
-            </a:r>
-            <a:r>
               <a:rPr lang="en" sz="2000"/>
-              <a:t> — оптимизирующий компилятор python для CPU и GPU.</a:t>
+              <a:t>def mandel(x, y, max_iters):</a:t>
             </a:r>
             <a:endParaRPr sz="2000"/>
           </a:p>
@@ -14868,27 +14519,8 @@
               <a:buNone/>
             </a:pPr>
             <a:r>
-              <a:t/>
-            </a:r>
-            <a:endParaRPr sz="2000"/>
-          </a:p>
-          <a:p>
-            <a:pPr indent="0" lvl="0" marL="0" rtl="0" algn="l">
-              <a:spcBef>
-                <a:spcPts val="0"/>
-              </a:spcBef>
-              <a:spcAft>
-                <a:spcPts val="0"/>
-              </a:spcAft>
-              <a:buNone/>
-            </a:pPr>
-            <a:r>
-              <a:rPr b="1" lang="en" sz="2000"/>
-              <a:t>Matplotlib</a:t>
-            </a:r>
-            <a:r>
               <a:rPr lang="en" sz="2000"/>
-              <a:t> — графическая библиотека python.</a:t>
+              <a:t>  c = complex(x, y)</a:t>
             </a:r>
             <a:endParaRPr sz="2000"/>
           </a:p>
@@ -14908,27 +14540,8 @@
               <a:buNone/>
             </a:pPr>
             <a:r>
-              <a:t/>
-            </a:r>
-            <a:endParaRPr sz="2000"/>
-          </a:p>
-          <a:p>
-            <a:pPr indent="0" lvl="0" marL="0" rtl="0" algn="l">
-              <a:spcBef>
-                <a:spcPts val="0"/>
-              </a:spcBef>
-              <a:spcAft>
-                <a:spcPts val="0"/>
-              </a:spcAft>
-              <a:buNone/>
-            </a:pPr>
-            <a:r>
-              <a:rPr b="1" lang="en" sz="2000"/>
-              <a:t>PyLab</a:t>
-            </a:r>
-            <a:r>
               <a:rPr lang="en" sz="2000"/>
-              <a:t> — процедурный интерфейс Matplotlib.</a:t>
+              <a:t>  z = 0.0j</a:t>
             </a:r>
             <a:endParaRPr sz="2000"/>
           </a:p>
@@ -14948,27 +14561,8 @@
               <a:buNone/>
             </a:pPr>
             <a:r>
-              <a:t/>
-            </a:r>
-            <a:endParaRPr sz="2000"/>
-          </a:p>
-          <a:p>
-            <a:pPr indent="0" lvl="0" marL="0" rtl="0" algn="l">
-              <a:spcBef>
-                <a:spcPts val="0"/>
-              </a:spcBef>
-              <a:spcAft>
-                <a:spcPts val="0"/>
-              </a:spcAft>
-              <a:buNone/>
-            </a:pPr>
-            <a:r>
-              <a:rPr b="1" lang="en" sz="2000"/>
-              <a:t>Module</a:t>
-            </a:r>
-            <a:r>
               <a:rPr lang="en" sz="2000"/>
-              <a:t> — файл .py</a:t>
+              <a:t>  for i in range(max_iters):</a:t>
             </a:r>
             <a:endParaRPr sz="2000"/>
           </a:p>
@@ -14988,7 +14582,8 @@
               <a:buNone/>
             </a:pPr>
             <a:r>
-              <a:t/>
+              <a:rPr lang="en" sz="2000"/>
+              <a:t>    z = z*z + c</a:t>
             </a:r>
             <a:endParaRPr sz="2000"/>
           </a:p>
@@ -15008,12 +14603,8 @@
               <a:buNone/>
             </a:pPr>
             <a:r>
-              <a:rPr b="1" lang="en" sz="2000"/>
-              <a:t>Package</a:t>
-            </a:r>
-            <a:r>
               <a:rPr lang="en" sz="2000"/>
-              <a:t> — коллекция модулей со структурированным</a:t>
+              <a:t>    if (z.real*z.real + z.imag*z.imag) &gt;= 4:</a:t>
             </a:r>
             <a:endParaRPr sz="2000"/>
           </a:p>
@@ -15025,13 +14616,162 @@
               <a:spcAft>
                 <a:spcPts val="0"/>
               </a:spcAft>
+              <a:buClr>
+                <a:schemeClr val="dk1"/>
+              </a:buClr>
+              <a:buSzPts val="1100"/>
+              <a:buFont typeface="Arial"/>
               <a:buNone/>
             </a:pPr>
             <a:r>
               <a:rPr lang="en" sz="2000"/>
-              <a:t>пространством имён.</a:t>
+              <a:t>      return i</a:t>
+            </a:r>
+            <a:endParaRPr sz="2000"/>
+          </a:p>
+          <a:p>
+            <a:pPr indent="0" lvl="0" marL="0" rtl="0" algn="l">
+              <a:spcBef>
+                <a:spcPts val="0"/>
+              </a:spcBef>
+              <a:spcAft>
+                <a:spcPts val="0"/>
+              </a:spcAft>
+              <a:buNone/>
+            </a:pPr>
+            <a:r>
+              <a:rPr lang="en" sz="2000"/>
+              <a:t> return max_iters</a:t>
+            </a:r>
+            <a:r>
+              <a:rPr lang="en"/>
+              <a:t> </a:t>
             </a:r>
             <a:endParaRPr/>
+          </a:p>
+        </p:txBody>
+      </p:sp>
+      <p:sp>
+        <p:nvSpPr>
+          <p:cNvPr id="76" name="Google Shape;76;p17"/>
+          <p:cNvSpPr txBox="1"/>
+          <p:nvPr/>
+        </p:nvSpPr>
+        <p:spPr>
+          <a:xfrm>
+            <a:off x="1471200" y="4695608"/>
+            <a:ext cx="6169800" cy="431100"/>
+          </a:xfrm>
+          <a:prstGeom prst="rect">
+            <a:avLst/>
+          </a:prstGeom>
+          <a:noFill/>
+          <a:ln>
+            <a:noFill/>
+          </a:ln>
+        </p:spPr>
+        <p:txBody>
+          <a:bodyPr anchorCtr="0" anchor="t" bIns="91425" lIns="91425" spcFirstLastPara="1" rIns="91425" wrap="square" tIns="91425">
+            <a:spAutoFit/>
+          </a:bodyPr>
+          <a:lstStyle/>
+          <a:p>
+            <a:pPr indent="0" lvl="0" marL="0" rtl="0" algn="l">
+              <a:spcBef>
+                <a:spcPts val="0"/>
+              </a:spcBef>
+              <a:spcAft>
+                <a:spcPts val="0"/>
+              </a:spcAft>
+              <a:buNone/>
+            </a:pPr>
+            <a:r>
+              <a:rPr lang="en" sz="1600"/>
+              <a:t>http://nbviewer.jupyter.org/gist/harrism/f5707335f40af9463c43</a:t>
+            </a:r>
+            <a:endParaRPr sz="1600"/>
+          </a:p>
+        </p:txBody>
+      </p:sp>
+      <p:sp>
+        <p:nvSpPr>
+          <p:cNvPr id="77" name="Google Shape;77;p17"/>
+          <p:cNvSpPr txBox="1"/>
+          <p:nvPr/>
+        </p:nvSpPr>
+        <p:spPr>
+          <a:xfrm>
+            <a:off x="221225" y="26425"/>
+            <a:ext cx="8701800" cy="710100"/>
+          </a:xfrm>
+          <a:prstGeom prst="rect">
+            <a:avLst/>
+          </a:prstGeom>
+          <a:solidFill>
+            <a:srgbClr val="FFCC00"/>
+          </a:solidFill>
+          <a:ln>
+            <a:noFill/>
+          </a:ln>
+        </p:spPr>
+        <p:txBody>
+          <a:bodyPr anchorCtr="0" anchor="t" bIns="46800" lIns="90000" spcFirstLastPara="1" rIns="90000" wrap="square" tIns="46800">
+            <a:spAutoFit/>
+          </a:bodyPr>
+          <a:lstStyle/>
+          <a:p>
+            <a:pPr indent="0" lvl="0" marL="0" rtl="0" algn="ctr">
+              <a:spcBef>
+                <a:spcPts val="0"/>
+              </a:spcBef>
+              <a:spcAft>
+                <a:spcPts val="0"/>
+              </a:spcAft>
+              <a:buClr>
+                <a:schemeClr val="dk1"/>
+              </a:buClr>
+              <a:buSzPts val="1100"/>
+              <a:buFont typeface="Arial"/>
+              <a:buNone/>
+            </a:pPr>
+            <a:r>
+              <a:rPr b="1" lang="en" sz="2000">
+                <a:solidFill>
+                  <a:schemeClr val="dk1"/>
+                </a:solidFill>
+              </a:rPr>
+              <a:t>Сравненние производительности кодов, генерируемых</a:t>
+            </a:r>
+            <a:endParaRPr b="1" sz="2000">
+              <a:solidFill>
+                <a:schemeClr val="dk1"/>
+              </a:solidFill>
+            </a:endParaRPr>
+          </a:p>
+          <a:p>
+            <a:pPr indent="0" lvl="0" marL="0" rtl="0" algn="ctr">
+              <a:spcBef>
+                <a:spcPts val="0"/>
+              </a:spcBef>
+              <a:spcAft>
+                <a:spcPts val="0"/>
+              </a:spcAft>
+              <a:buClr>
+                <a:schemeClr val="dk1"/>
+              </a:buClr>
+              <a:buSzPts val="1100"/>
+              <a:buFont typeface="Arial"/>
+              <a:buNone/>
+            </a:pPr>
+            <a:r>
+              <a:rPr b="1" lang="en" sz="2000">
+                <a:solidFill>
+                  <a:schemeClr val="dk1"/>
+                </a:solidFill>
+              </a:rPr>
+              <a:t>компилятором Numba</a:t>
+            </a:r>
+            <a:endParaRPr b="1" sz="2200"/>
           </a:p>
         </p:txBody>
       </p:sp>
@@ -15048,7 +14788,7 @@
   <p:cSld>
     <p:spTree>
       <p:nvGrpSpPr>
-        <p:cNvPr id="171" name="Shape 171"/>
+        <p:cNvPr id="168" name="Shape 168"/>
         <p:cNvGrpSpPr/>
         <p:nvPr/>
       </p:nvGrpSpPr>
@@ -15062,962 +14802,7 @@
       </p:grpSpPr>
       <p:sp>
         <p:nvSpPr>
-          <p:cNvPr id="172" name="Google Shape;172;p35"/>
-          <p:cNvSpPr txBox="1"/>
-          <p:nvPr/>
-        </p:nvSpPr>
-        <p:spPr>
-          <a:xfrm>
-            <a:off x="133875" y="719425"/>
-            <a:ext cx="8926800" cy="2754300"/>
-          </a:xfrm>
-          <a:prstGeom prst="rect">
-            <a:avLst/>
-          </a:prstGeom>
-          <a:solidFill>
-            <a:srgbClr val="D0E0E3"/>
-          </a:solidFill>
-          <a:ln>
-            <a:noFill/>
-          </a:ln>
-        </p:spPr>
-        <p:txBody>
-          <a:bodyPr anchorCtr="0" anchor="t" bIns="91425" lIns="91425" spcFirstLastPara="1" rIns="91425" wrap="square" tIns="91425">
-            <a:spAutoFit/>
-          </a:bodyPr>
-          <a:lstStyle/>
-          <a:p>
-            <a:pPr indent="0" lvl="0" marL="0" rtl="0" algn="l">
-              <a:lnSpc>
-                <a:spcPct val="115000"/>
-              </a:lnSpc>
-              <a:spcBef>
-                <a:spcPts val="0"/>
-              </a:spcBef>
-              <a:spcAft>
-                <a:spcPts val="0"/>
-              </a:spcAft>
-              <a:buClr>
-                <a:schemeClr val="dk1"/>
-              </a:buClr>
-              <a:buSzPts val="1100"/>
-              <a:buFont typeface="Arial"/>
-              <a:buNone/>
-            </a:pPr>
-            <a:r>
-              <a:rPr lang="en" sz="1900"/>
-              <a:t>A=np.float32(A)</a:t>
-            </a:r>
-            <a:endParaRPr sz="1900"/>
-          </a:p>
-          <a:p>
-            <a:pPr indent="0" lvl="0" marL="0" rtl="0" algn="l">
-              <a:lnSpc>
-                <a:spcPct val="115000"/>
-              </a:lnSpc>
-              <a:spcBef>
-                <a:spcPts val="0"/>
-              </a:spcBef>
-              <a:spcAft>
-                <a:spcPts val="0"/>
-              </a:spcAft>
-              <a:buClr>
-                <a:schemeClr val="dk1"/>
-              </a:buClr>
-              <a:buSzPts val="1100"/>
-              <a:buFont typeface="Arial"/>
-              <a:buNone/>
-            </a:pPr>
-            <a:r>
-              <a:rPr lang="en" sz="1900"/>
-              <a:t>B=np.float32(B)</a:t>
-            </a:r>
-            <a:endParaRPr sz="1900"/>
-          </a:p>
-          <a:p>
-            <a:pPr indent="0" lvl="0" marL="0" rtl="0" algn="l">
-              <a:lnSpc>
-                <a:spcPct val="115000"/>
-              </a:lnSpc>
-              <a:spcBef>
-                <a:spcPts val="0"/>
-              </a:spcBef>
-              <a:spcAft>
-                <a:spcPts val="0"/>
-              </a:spcAft>
-              <a:buClr>
-                <a:schemeClr val="dk1"/>
-              </a:buClr>
-              <a:buSzPts val="1100"/>
-              <a:buFont typeface="Arial"/>
-              <a:buNone/>
-            </a:pPr>
-            <a:r>
-              <a:rPr lang="en" sz="1900"/>
-              <a:t>C=np.float32(C)</a:t>
-            </a:r>
-            <a:endParaRPr sz="1900"/>
-          </a:p>
-          <a:p>
-            <a:pPr indent="0" lvl="0" marL="0" rtl="0" algn="l">
-              <a:lnSpc>
-                <a:spcPct val="115000"/>
-              </a:lnSpc>
-              <a:spcBef>
-                <a:spcPts val="0"/>
-              </a:spcBef>
-              <a:spcAft>
-                <a:spcPts val="0"/>
-              </a:spcAft>
-              <a:buClr>
-                <a:schemeClr val="dk1"/>
-              </a:buClr>
-              <a:buSzPts val="1100"/>
-              <a:buFont typeface="Arial"/>
-              <a:buNone/>
-            </a:pPr>
-            <a:r>
-              <a:t/>
-            </a:r>
-            <a:endParaRPr sz="1900"/>
-          </a:p>
-          <a:p>
-            <a:pPr indent="0" lvl="0" marL="0" rtl="0" algn="l">
-              <a:lnSpc>
-                <a:spcPct val="115000"/>
-              </a:lnSpc>
-              <a:spcBef>
-                <a:spcPts val="0"/>
-              </a:spcBef>
-              <a:spcAft>
-                <a:spcPts val="0"/>
-              </a:spcAft>
-              <a:buClr>
-                <a:schemeClr val="dk1"/>
-              </a:buClr>
-              <a:buSzPts val="1100"/>
-              <a:buFont typeface="Arial"/>
-              <a:buNone/>
-            </a:pPr>
-            <a:r>
-              <a:rPr lang="en" sz="1900"/>
-              <a:t>dA=cuda.to_device(A)</a:t>
-            </a:r>
-            <a:endParaRPr sz="1900"/>
-          </a:p>
-          <a:p>
-            <a:pPr indent="0" lvl="0" marL="0" rtl="0" algn="l">
-              <a:lnSpc>
-                <a:spcPct val="115000"/>
-              </a:lnSpc>
-              <a:spcBef>
-                <a:spcPts val="0"/>
-              </a:spcBef>
-              <a:spcAft>
-                <a:spcPts val="0"/>
-              </a:spcAft>
-              <a:buClr>
-                <a:schemeClr val="dk1"/>
-              </a:buClr>
-              <a:buSzPts val="1100"/>
-              <a:buFont typeface="Arial"/>
-              <a:buNone/>
-            </a:pPr>
-            <a:r>
-              <a:rPr lang="en" sz="1900"/>
-              <a:t>dB=cuda.to_device(B)</a:t>
-            </a:r>
-            <a:endParaRPr sz="1900"/>
-          </a:p>
-          <a:p>
-            <a:pPr indent="0" lvl="0" marL="0" rtl="0" algn="l">
-              <a:lnSpc>
-                <a:spcPct val="115000"/>
-              </a:lnSpc>
-              <a:spcBef>
-                <a:spcPts val="0"/>
-              </a:spcBef>
-              <a:spcAft>
-                <a:spcPts val="0"/>
-              </a:spcAft>
-              <a:buClr>
-                <a:schemeClr val="dk1"/>
-              </a:buClr>
-              <a:buSzPts val="1100"/>
-              <a:buFont typeface="Arial"/>
-              <a:buNone/>
-            </a:pPr>
-            <a:r>
-              <a:rPr lang="en" sz="1900"/>
-              <a:t>dC=cuda.to_device(C)</a:t>
-            </a:r>
-            <a:endParaRPr sz="1900"/>
-          </a:p>
-          <a:p>
-            <a:pPr indent="0" lvl="0" marL="0" rtl="0" algn="l">
-              <a:spcBef>
-                <a:spcPts val="0"/>
-              </a:spcBef>
-              <a:spcAft>
-                <a:spcPts val="0"/>
-              </a:spcAft>
-              <a:buNone/>
-            </a:pPr>
-            <a:r>
-              <a:t/>
-            </a:r>
-            <a:endParaRPr/>
-          </a:p>
-        </p:txBody>
-      </p:sp>
-    </p:spTree>
-  </p:cSld>
-  <p:clrMapOvr>
-    <a:masterClrMapping/>
-  </p:clrMapOvr>
-</p:sld>
-</file>
-
-<file path=ppt/slides/slide21.xml><?xml version="1.0" encoding="utf-8"?>
-<p:sld xmlns:a="http://schemas.openxmlformats.org/drawingml/2006/main" xmlns:r="http://schemas.openxmlformats.org/officeDocument/2006/relationships" xmlns:mc="http://schemas.openxmlformats.org/markup-compatibility/2006" xmlns:mv="urn:schemas-microsoft-com:mac:vml" xmlns:p="http://schemas.openxmlformats.org/presentationml/2006/main" xmlns:c="http://schemas.openxmlformats.org/drawingml/2006/chart" xmlns:dgm="http://schemas.openxmlformats.org/drawingml/2006/diagram" xmlns:o="urn:schemas-microsoft-com:office:office" xmlns:v="urn:schemas-microsoft-com:vml" xmlns:pvml="urn:schemas-microsoft-com:office:powerpoint" xmlns:com="http://schemas.openxmlformats.org/drawingml/2006/compatibility" xmlns:p14="http://schemas.microsoft.com/office/powerpoint/2010/main" xmlns:p15="http://schemas.microsoft.com/office/powerpoint/2012/main" xmlns:ahyp="http://schemas.microsoft.com/office/drawing/2018/hyperlinkcolor">
-  <p:cSld>
-    <p:spTree>
-      <p:nvGrpSpPr>
-        <p:cNvPr id="176" name="Shape 176"/>
-        <p:cNvGrpSpPr/>
-        <p:nvPr/>
-      </p:nvGrpSpPr>
-      <p:grpSpPr>
-        <a:xfrm>
-          <a:off x="0" y="0"/>
-          <a:ext cx="0" cy="0"/>
-          <a:chOff x="0" y="0"/>
-          <a:chExt cx="0" cy="0"/>
-        </a:xfrm>
-      </p:grpSpPr>
-      <p:sp>
-        <p:nvSpPr>
-          <p:cNvPr id="177" name="Google Shape;177;p36"/>
-          <p:cNvSpPr txBox="1"/>
-          <p:nvPr/>
-        </p:nvSpPr>
-        <p:spPr>
-          <a:xfrm>
-            <a:off x="100425" y="117200"/>
-            <a:ext cx="8910000" cy="3427200"/>
-          </a:xfrm>
-          <a:prstGeom prst="rect">
-            <a:avLst/>
-          </a:prstGeom>
-          <a:solidFill>
-            <a:srgbClr val="D0E0E3"/>
-          </a:solidFill>
-          <a:ln>
-            <a:noFill/>
-          </a:ln>
-        </p:spPr>
-        <p:txBody>
-          <a:bodyPr anchorCtr="0" anchor="t" bIns="91425" lIns="91425" spcFirstLastPara="1" rIns="91425" wrap="square" tIns="91425">
-            <a:spAutoFit/>
-          </a:bodyPr>
-          <a:lstStyle/>
-          <a:p>
-            <a:pPr indent="0" lvl="0" marL="0" rtl="0" algn="l">
-              <a:lnSpc>
-                <a:spcPct val="115000"/>
-              </a:lnSpc>
-              <a:spcBef>
-                <a:spcPts val="0"/>
-              </a:spcBef>
-              <a:spcAft>
-                <a:spcPts val="0"/>
-              </a:spcAft>
-              <a:buClr>
-                <a:schemeClr val="dk1"/>
-              </a:buClr>
-              <a:buSzPts val="1100"/>
-              <a:buFont typeface="Arial"/>
-              <a:buNone/>
-            </a:pPr>
-            <a:r>
-              <a:rPr lang="en" sz="1900">
-                <a:solidFill>
-                  <a:schemeClr val="dk1"/>
-                </a:solidFill>
-              </a:rPr>
-              <a:t>start = timer()</a:t>
-            </a:r>
-            <a:endParaRPr sz="1900">
-              <a:solidFill>
-                <a:schemeClr val="dk1"/>
-              </a:solidFill>
-            </a:endParaRPr>
-          </a:p>
-          <a:p>
-            <a:pPr indent="0" lvl="0" marL="0" rtl="0" algn="l">
-              <a:lnSpc>
-                <a:spcPct val="115000"/>
-              </a:lnSpc>
-              <a:spcBef>
-                <a:spcPts val="0"/>
-              </a:spcBef>
-              <a:spcAft>
-                <a:spcPts val="0"/>
-              </a:spcAft>
-              <a:buClr>
-                <a:schemeClr val="dk1"/>
-              </a:buClr>
-              <a:buSzPts val="1100"/>
-              <a:buFont typeface="Arial"/>
-              <a:buNone/>
-            </a:pPr>
-            <a:r>
-              <a:rPr lang="en" sz="1900">
-                <a:solidFill>
-                  <a:schemeClr val="dk1"/>
-                </a:solidFill>
-              </a:rPr>
-              <a:t>matmul[(64,64),(16,16)](dA,dB,dC)</a:t>
-            </a:r>
-            <a:endParaRPr sz="1900">
-              <a:solidFill>
-                <a:schemeClr val="dk1"/>
-              </a:solidFill>
-            </a:endParaRPr>
-          </a:p>
-          <a:p>
-            <a:pPr indent="0" lvl="0" marL="0" rtl="0" algn="l">
-              <a:lnSpc>
-                <a:spcPct val="115000"/>
-              </a:lnSpc>
-              <a:spcBef>
-                <a:spcPts val="0"/>
-              </a:spcBef>
-              <a:spcAft>
-                <a:spcPts val="0"/>
-              </a:spcAft>
-              <a:buClr>
-                <a:schemeClr val="dk1"/>
-              </a:buClr>
-              <a:buSzPts val="1100"/>
-              <a:buFont typeface="Arial"/>
-              <a:buNone/>
-            </a:pPr>
-            <a:r>
-              <a:rPr lang="en" sz="1900">
-                <a:solidFill>
-                  <a:schemeClr val="dk1"/>
-                </a:solidFill>
-              </a:rPr>
-              <a:t>cuda.synchronize()  </a:t>
-            </a:r>
-            <a:endParaRPr sz="1900">
-              <a:solidFill>
-                <a:schemeClr val="dk1"/>
-              </a:solidFill>
-            </a:endParaRPr>
-          </a:p>
-          <a:p>
-            <a:pPr indent="0" lvl="0" marL="0" rtl="0" algn="l">
-              <a:lnSpc>
-                <a:spcPct val="115000"/>
-              </a:lnSpc>
-              <a:spcBef>
-                <a:spcPts val="0"/>
-              </a:spcBef>
-              <a:spcAft>
-                <a:spcPts val="0"/>
-              </a:spcAft>
-              <a:buClr>
-                <a:schemeClr val="dk1"/>
-              </a:buClr>
-              <a:buSzPts val="1100"/>
-              <a:buFont typeface="Arial"/>
-              <a:buNone/>
-            </a:pPr>
-            <a:r>
-              <a:rPr lang="en" sz="1900">
-                <a:solidFill>
-                  <a:schemeClr val="dk1"/>
-                </a:solidFill>
-              </a:rPr>
-              <a:t>dt = timer() - start</a:t>
-            </a:r>
-            <a:endParaRPr sz="1900">
-              <a:solidFill>
-                <a:schemeClr val="dk1"/>
-              </a:solidFill>
-            </a:endParaRPr>
-          </a:p>
-          <a:p>
-            <a:pPr indent="0" lvl="0" marL="0" rtl="0" algn="l">
-              <a:lnSpc>
-                <a:spcPct val="115000"/>
-              </a:lnSpc>
-              <a:spcBef>
-                <a:spcPts val="0"/>
-              </a:spcBef>
-              <a:spcAft>
-                <a:spcPts val="0"/>
-              </a:spcAft>
-              <a:buClr>
-                <a:schemeClr val="dk1"/>
-              </a:buClr>
-              <a:buSzPts val="1100"/>
-              <a:buFont typeface="Arial"/>
-              <a:buNone/>
-            </a:pPr>
-            <a:r>
-              <a:t/>
-            </a:r>
-            <a:endParaRPr sz="1900">
-              <a:solidFill>
-                <a:schemeClr val="dk1"/>
-              </a:solidFill>
-            </a:endParaRPr>
-          </a:p>
-          <a:p>
-            <a:pPr indent="0" lvl="0" marL="0" rtl="0" algn="l">
-              <a:lnSpc>
-                <a:spcPct val="115000"/>
-              </a:lnSpc>
-              <a:spcBef>
-                <a:spcPts val="0"/>
-              </a:spcBef>
-              <a:spcAft>
-                <a:spcPts val="0"/>
-              </a:spcAft>
-              <a:buClr>
-                <a:schemeClr val="dk1"/>
-              </a:buClr>
-              <a:buSzPts val="1100"/>
-              <a:buFont typeface="Arial"/>
-              <a:buNone/>
-            </a:pPr>
-            <a:r>
-              <a:rPr lang="en" sz="1900">
-                <a:solidFill>
-                  <a:schemeClr val="dk1"/>
-                </a:solidFill>
-              </a:rPr>
-              <a:t>#dC.to_host()</a:t>
-            </a:r>
-            <a:endParaRPr sz="1900">
-              <a:solidFill>
-                <a:schemeClr val="dk1"/>
-              </a:solidFill>
-            </a:endParaRPr>
-          </a:p>
-          <a:p>
-            <a:pPr indent="0" lvl="0" marL="0" rtl="0" algn="l">
-              <a:lnSpc>
-                <a:spcPct val="115000"/>
-              </a:lnSpc>
-              <a:spcBef>
-                <a:spcPts val="0"/>
-              </a:spcBef>
-              <a:spcAft>
-                <a:spcPts val="0"/>
-              </a:spcAft>
-              <a:buNone/>
-            </a:pPr>
-            <a:r>
-              <a:rPr lang="en" sz="1900">
-                <a:solidFill>
-                  <a:schemeClr val="dk1"/>
-                </a:solidFill>
-              </a:rPr>
-              <a:t>dt=dt/1000000.0</a:t>
-            </a:r>
-            <a:endParaRPr sz="1900">
-              <a:solidFill>
-                <a:schemeClr val="dk1"/>
-              </a:solidFill>
-            </a:endParaRPr>
-          </a:p>
-          <a:p>
-            <a:pPr indent="0" lvl="0" marL="0" rtl="0" algn="l">
-              <a:lnSpc>
-                <a:spcPct val="115000"/>
-              </a:lnSpc>
-              <a:spcBef>
-                <a:spcPts val="0"/>
-              </a:spcBef>
-              <a:spcAft>
-                <a:spcPts val="0"/>
-              </a:spcAft>
-              <a:buClr>
-                <a:schemeClr val="dk1"/>
-              </a:buClr>
-              <a:buSzPts val="1100"/>
-              <a:buFont typeface="Arial"/>
-              <a:buNone/>
-            </a:pPr>
-            <a:r>
-              <a:rPr lang="en" sz="1900">
-                <a:solidFill>
-                  <a:schemeClr val="dk1"/>
-                </a:solidFill>
-              </a:rPr>
-              <a:t>print ("matmul time %f ms" % dt)</a:t>
-            </a:r>
-            <a:endParaRPr sz="1900">
-              <a:solidFill>
-                <a:schemeClr val="dk1"/>
-              </a:solidFill>
-            </a:endParaRPr>
-          </a:p>
-          <a:p>
-            <a:pPr indent="0" lvl="0" marL="0" rtl="0" algn="l">
-              <a:lnSpc>
-                <a:spcPct val="115000"/>
-              </a:lnSpc>
-              <a:spcBef>
-                <a:spcPts val="0"/>
-              </a:spcBef>
-              <a:spcAft>
-                <a:spcPts val="0"/>
-              </a:spcAft>
-              <a:buClr>
-                <a:schemeClr val="dk1"/>
-              </a:buClr>
-              <a:buSzPts val="1100"/>
-              <a:buFont typeface="Arial"/>
-              <a:buNone/>
-            </a:pPr>
-            <a:r>
-              <a:rPr lang="en" sz="1900">
-                <a:solidFill>
-                  <a:schemeClr val="dk1"/>
-                </a:solidFill>
-              </a:rPr>
-              <a:t>print(dC)</a:t>
-            </a:r>
-            <a:endParaRPr sz="1900">
-              <a:solidFill>
-                <a:schemeClr val="dk1"/>
-              </a:solidFill>
-            </a:endParaRPr>
-          </a:p>
-          <a:p>
-            <a:pPr indent="0" lvl="0" marL="0" rtl="0" algn="l">
-              <a:spcBef>
-                <a:spcPts val="0"/>
-              </a:spcBef>
-              <a:spcAft>
-                <a:spcPts val="0"/>
-              </a:spcAft>
-              <a:buNone/>
-            </a:pPr>
-            <a:r>
-              <a:t/>
-            </a:r>
-            <a:endParaRPr/>
-          </a:p>
-        </p:txBody>
-      </p:sp>
-    </p:spTree>
-  </p:cSld>
-  <p:clrMapOvr>
-    <a:masterClrMapping/>
-  </p:clrMapOvr>
-</p:sld>
-</file>
-
-<file path=ppt/slides/slide22.xml><?xml version="1.0" encoding="utf-8"?>
-<p:sld xmlns:a="http://schemas.openxmlformats.org/drawingml/2006/main" xmlns:r="http://schemas.openxmlformats.org/officeDocument/2006/relationships" xmlns:mc="http://schemas.openxmlformats.org/markup-compatibility/2006" xmlns:mv="urn:schemas-microsoft-com:mac:vml" xmlns:p="http://schemas.openxmlformats.org/presentationml/2006/main" xmlns:c="http://schemas.openxmlformats.org/drawingml/2006/chart" xmlns:dgm="http://schemas.openxmlformats.org/drawingml/2006/diagram" xmlns:o="urn:schemas-microsoft-com:office:office" xmlns:v="urn:schemas-microsoft-com:vml" xmlns:pvml="urn:schemas-microsoft-com:office:powerpoint" xmlns:com="http://schemas.openxmlformats.org/drawingml/2006/compatibility" xmlns:p14="http://schemas.microsoft.com/office/powerpoint/2010/main" xmlns:p15="http://schemas.microsoft.com/office/powerpoint/2012/main" xmlns:ahyp="http://schemas.microsoft.com/office/drawing/2018/hyperlinkcolor">
-  <p:cSld>
-    <p:spTree>
-      <p:nvGrpSpPr>
-        <p:cNvPr id="181" name="Shape 181"/>
-        <p:cNvGrpSpPr/>
-        <p:nvPr/>
-      </p:nvGrpSpPr>
-      <p:grpSpPr>
-        <a:xfrm>
-          <a:off x="0" y="0"/>
-          <a:ext cx="0" cy="0"/>
-          <a:chOff x="0" y="0"/>
-          <a:chExt cx="0" cy="0"/>
-        </a:xfrm>
-      </p:grpSpPr>
-      <p:sp>
-        <p:nvSpPr>
-          <p:cNvPr id="182" name="Google Shape;182;p37"/>
-          <p:cNvSpPr txBox="1"/>
-          <p:nvPr/>
-        </p:nvSpPr>
-        <p:spPr>
-          <a:xfrm>
-            <a:off x="184700" y="574775"/>
-            <a:ext cx="8775000" cy="3232500"/>
-          </a:xfrm>
-          <a:prstGeom prst="rect">
-            <a:avLst/>
-          </a:prstGeom>
-          <a:solidFill>
-            <a:srgbClr val="D9D9D9"/>
-          </a:solidFill>
-          <a:ln>
-            <a:noFill/>
-          </a:ln>
-        </p:spPr>
-        <p:txBody>
-          <a:bodyPr anchorCtr="0" anchor="t" bIns="91425" lIns="91425" spcFirstLastPara="1" rIns="91425" wrap="square" tIns="91425">
-            <a:spAutoFit/>
-          </a:bodyPr>
-          <a:lstStyle/>
-          <a:p>
-            <a:pPr indent="0" lvl="0" marL="0" rtl="0" algn="l">
-              <a:spcBef>
-                <a:spcPts val="0"/>
-              </a:spcBef>
-              <a:spcAft>
-                <a:spcPts val="0"/>
-              </a:spcAft>
-              <a:buClr>
-                <a:schemeClr val="dk1"/>
-              </a:buClr>
-              <a:buSzPts val="1100"/>
-              <a:buFont typeface="Arial"/>
-              <a:buNone/>
-            </a:pPr>
-            <a:r>
-              <a:rPr lang="en" sz="1800">
-                <a:solidFill>
-                  <a:schemeClr val="dk1"/>
-                </a:solidFill>
-                <a:highlight>
-                  <a:srgbClr val="D9D9D9"/>
-                </a:highlight>
-              </a:rPr>
-              <a:t>/Lab10&gt; python cuda-gemm3.py</a:t>
-            </a:r>
-            <a:endParaRPr sz="1800">
-              <a:solidFill>
-                <a:schemeClr val="dk1"/>
-              </a:solidFill>
-              <a:highlight>
-                <a:srgbClr val="D9D9D9"/>
-              </a:highlight>
-            </a:endParaRPr>
-          </a:p>
-          <a:p>
-            <a:pPr indent="0" lvl="0" marL="0" rtl="0" algn="l">
-              <a:spcBef>
-                <a:spcPts val="0"/>
-              </a:spcBef>
-              <a:spcAft>
-                <a:spcPts val="0"/>
-              </a:spcAft>
-              <a:buClr>
-                <a:schemeClr val="dk1"/>
-              </a:buClr>
-              <a:buSzPts val="1100"/>
-              <a:buFont typeface="Arial"/>
-              <a:buNone/>
-            </a:pPr>
-            <a:r>
-              <a:rPr b="1" lang="en" sz="1800">
-                <a:solidFill>
-                  <a:schemeClr val="dk1"/>
-                </a:solidFill>
-              </a:rPr>
-              <a:t>np.matmul time 20.236182 ms</a:t>
-            </a:r>
-            <a:endParaRPr b="1" sz="1800">
-              <a:solidFill>
-                <a:schemeClr val="dk1"/>
-              </a:solidFill>
-            </a:endParaRPr>
-          </a:p>
-          <a:p>
-            <a:pPr indent="0" lvl="0" marL="0" rtl="0" algn="l">
-              <a:spcBef>
-                <a:spcPts val="0"/>
-              </a:spcBef>
-              <a:spcAft>
-                <a:spcPts val="0"/>
-              </a:spcAft>
-              <a:buClr>
-                <a:schemeClr val="dk1"/>
-              </a:buClr>
-              <a:buSzPts val="1100"/>
-              <a:buFont typeface="Arial"/>
-              <a:buNone/>
-            </a:pPr>
-            <a:r>
-              <a:rPr lang="en" sz="1800">
-                <a:solidFill>
-                  <a:schemeClr val="dk1"/>
-                </a:solidFill>
-              </a:rPr>
-              <a:t>[[ 5.24e+05  5.24e+05  5.24e+05 ...  5.24e+05  5.24e+05  5.24e+05]</a:t>
-            </a:r>
-            <a:endParaRPr sz="1800">
-              <a:solidFill>
-                <a:schemeClr val="dk1"/>
-              </a:solidFill>
-            </a:endParaRPr>
-          </a:p>
-          <a:p>
-            <a:pPr indent="0" lvl="0" marL="0" rtl="0" algn="l">
-              <a:spcBef>
-                <a:spcPts val="0"/>
-              </a:spcBef>
-              <a:spcAft>
-                <a:spcPts val="0"/>
-              </a:spcAft>
-              <a:buClr>
-                <a:schemeClr val="dk1"/>
-              </a:buClr>
-              <a:buSzPts val="1100"/>
-              <a:buFont typeface="Arial"/>
-              <a:buNone/>
-            </a:pPr>
-            <a:r>
-              <a:rPr lang="en" sz="1800">
-                <a:solidFill>
-                  <a:schemeClr val="dk1"/>
-                </a:solidFill>
-              </a:rPr>
-              <a:t>[ 1.57e+06  1.57e+06  1.57e+06 ...  1.57e+06  1.57e+06  1.57e+06]</a:t>
-            </a:r>
-            <a:endParaRPr sz="1800">
-              <a:solidFill>
-                <a:schemeClr val="dk1"/>
-              </a:solidFill>
-            </a:endParaRPr>
-          </a:p>
-          <a:p>
-            <a:pPr indent="0" lvl="0" marL="0" rtl="0" algn="l">
-              <a:spcBef>
-                <a:spcPts val="0"/>
-              </a:spcBef>
-              <a:spcAft>
-                <a:spcPts val="0"/>
-              </a:spcAft>
-              <a:buClr>
-                <a:schemeClr val="dk1"/>
-              </a:buClr>
-              <a:buSzPts val="1100"/>
-              <a:buFont typeface="Arial"/>
-              <a:buNone/>
-            </a:pPr>
-            <a:r>
-              <a:rPr lang="en" sz="1800">
-                <a:solidFill>
-                  <a:schemeClr val="dk1"/>
-                </a:solidFill>
-              </a:rPr>
-              <a:t>...</a:t>
-            </a:r>
-            <a:endParaRPr sz="1800">
-              <a:solidFill>
-                <a:schemeClr val="dk1"/>
-              </a:solidFill>
-            </a:endParaRPr>
-          </a:p>
-          <a:p>
-            <a:pPr indent="0" lvl="0" marL="0" rtl="0" algn="l">
-              <a:spcBef>
-                <a:spcPts val="0"/>
-              </a:spcBef>
-              <a:spcAft>
-                <a:spcPts val="0"/>
-              </a:spcAft>
-              <a:buClr>
-                <a:schemeClr val="dk1"/>
-              </a:buClr>
-              <a:buSzPts val="1100"/>
-              <a:buFont typeface="Arial"/>
-              <a:buNone/>
-            </a:pPr>
-            <a:r>
-              <a:rPr lang="en" sz="1800">
-                <a:solidFill>
-                  <a:schemeClr val="dk1"/>
-                </a:solidFill>
-              </a:rPr>
-              <a:t>[ 1.07e+09  1.07e+09  1.07e+09 ...  1.07e+09  1.07e+09  1.07e+09]]</a:t>
-            </a:r>
-            <a:endParaRPr sz="1800">
-              <a:solidFill>
-                <a:schemeClr val="dk1"/>
-              </a:solidFill>
-            </a:endParaRPr>
-          </a:p>
-          <a:p>
-            <a:pPr indent="0" lvl="0" marL="0" rtl="0" algn="l">
-              <a:spcBef>
-                <a:spcPts val="0"/>
-              </a:spcBef>
-              <a:spcAft>
-                <a:spcPts val="0"/>
-              </a:spcAft>
-              <a:buClr>
-                <a:schemeClr val="dk1"/>
-              </a:buClr>
-              <a:buSzPts val="1100"/>
-              <a:buFont typeface="Arial"/>
-              <a:buNone/>
-            </a:pPr>
-            <a:r>
-              <a:rPr b="1" lang="en" sz="1800">
-                <a:solidFill>
-                  <a:schemeClr val="dk1"/>
-                </a:solidFill>
-              </a:rPr>
-              <a:t>matmul time 30.242027 ms</a:t>
-            </a:r>
-            <a:endParaRPr b="1" sz="1800">
-              <a:solidFill>
-                <a:schemeClr val="dk1"/>
-              </a:solidFill>
-            </a:endParaRPr>
-          </a:p>
-          <a:p>
-            <a:pPr indent="0" lvl="0" marL="0" rtl="0" algn="l">
-              <a:spcBef>
-                <a:spcPts val="0"/>
-              </a:spcBef>
-              <a:spcAft>
-                <a:spcPts val="0"/>
-              </a:spcAft>
-              <a:buClr>
-                <a:schemeClr val="dk1"/>
-              </a:buClr>
-              <a:buSzPts val="1100"/>
-              <a:buFont typeface="Arial"/>
-              <a:buNone/>
-            </a:pPr>
-            <a:r>
-              <a:rPr lang="en" sz="1800">
-                <a:solidFill>
-                  <a:schemeClr val="dk1"/>
-                </a:solidFill>
-              </a:rPr>
-              <a:t>[[ 5.24e+05  5.24e+05  5.24e+05 ...  5.24e+05  5.24e+05  5.24e+05]</a:t>
-            </a:r>
-            <a:endParaRPr sz="1800">
-              <a:solidFill>
-                <a:schemeClr val="dk1"/>
-              </a:solidFill>
-            </a:endParaRPr>
-          </a:p>
-          <a:p>
-            <a:pPr indent="0" lvl="0" marL="0" rtl="0" algn="l">
-              <a:spcBef>
-                <a:spcPts val="0"/>
-              </a:spcBef>
-              <a:spcAft>
-                <a:spcPts val="0"/>
-              </a:spcAft>
-              <a:buClr>
-                <a:schemeClr val="dk1"/>
-              </a:buClr>
-              <a:buSzPts val="1100"/>
-              <a:buFont typeface="Arial"/>
-              <a:buNone/>
-            </a:pPr>
-            <a:r>
-              <a:rPr lang="en" sz="1800">
-                <a:solidFill>
-                  <a:schemeClr val="dk1"/>
-                </a:solidFill>
-              </a:rPr>
-              <a:t>[ 1.57e+06  1.57e+06  1.57e+06 ...  1.57e+06  1.57e+06  1.57e+06]</a:t>
-            </a:r>
-            <a:endParaRPr sz="1800">
-              <a:solidFill>
-                <a:schemeClr val="dk1"/>
-              </a:solidFill>
-            </a:endParaRPr>
-          </a:p>
-          <a:p>
-            <a:pPr indent="0" lvl="0" marL="0" rtl="0" algn="l">
-              <a:spcBef>
-                <a:spcPts val="0"/>
-              </a:spcBef>
-              <a:spcAft>
-                <a:spcPts val="0"/>
-              </a:spcAft>
-              <a:buClr>
-                <a:schemeClr val="dk1"/>
-              </a:buClr>
-              <a:buSzPts val="1100"/>
-              <a:buFont typeface="Arial"/>
-              <a:buNone/>
-            </a:pPr>
-            <a:r>
-              <a:rPr lang="en" sz="1800">
-                <a:solidFill>
-                  <a:schemeClr val="dk1"/>
-                </a:solidFill>
-              </a:rPr>
-              <a:t>...</a:t>
-            </a:r>
-            <a:endParaRPr sz="1800">
-              <a:solidFill>
-                <a:schemeClr val="dk1"/>
-              </a:solidFill>
-            </a:endParaRPr>
-          </a:p>
-          <a:p>
-            <a:pPr indent="0" lvl="0" marL="0" rtl="0" algn="l">
-              <a:spcBef>
-                <a:spcPts val="0"/>
-              </a:spcBef>
-              <a:spcAft>
-                <a:spcPts val="0"/>
-              </a:spcAft>
-              <a:buClr>
-                <a:schemeClr val="dk1"/>
-              </a:buClr>
-              <a:buSzPts val="1100"/>
-              <a:buFont typeface="Arial"/>
-              <a:buNone/>
-            </a:pPr>
-            <a:r>
-              <a:rPr lang="en" sz="1800">
-                <a:solidFill>
-                  <a:schemeClr val="dk1"/>
-                </a:solidFill>
-              </a:rPr>
-              <a:t>[ 1.07e+09  1.07e+09  1.07e+09 ...  1.07e+09  1.07e+09  1.07e+09]]</a:t>
-            </a:r>
-            <a:endParaRPr sz="2100"/>
-          </a:p>
-        </p:txBody>
-      </p:sp>
-    </p:spTree>
-  </p:cSld>
-  <p:clrMapOvr>
-    <a:masterClrMapping/>
-  </p:clrMapOvr>
-</p:sld>
-</file>
-
-<file path=ppt/slides/slide23.xml><?xml version="1.0" encoding="utf-8"?>
-<p:sld xmlns:a="http://schemas.openxmlformats.org/drawingml/2006/main" xmlns:r="http://schemas.openxmlformats.org/officeDocument/2006/relationships" xmlns:mc="http://schemas.openxmlformats.org/markup-compatibility/2006" xmlns:mv="urn:schemas-microsoft-com:mac:vml" xmlns:p="http://schemas.openxmlformats.org/presentationml/2006/main" xmlns:c="http://schemas.openxmlformats.org/drawingml/2006/chart" xmlns:dgm="http://schemas.openxmlformats.org/drawingml/2006/diagram" xmlns:o="urn:schemas-microsoft-com:office:office" xmlns:v="urn:schemas-microsoft-com:vml" xmlns:pvml="urn:schemas-microsoft-com:office:powerpoint" xmlns:com="http://schemas.openxmlformats.org/drawingml/2006/compatibility" xmlns:p14="http://schemas.microsoft.com/office/powerpoint/2010/main" xmlns:p15="http://schemas.microsoft.com/office/powerpoint/2012/main" xmlns:ahyp="http://schemas.microsoft.com/office/drawing/2018/hyperlinkcolor">
-  <p:cSld>
-    <p:spTree>
-      <p:nvGrpSpPr>
-        <p:cNvPr id="186" name="Shape 186"/>
-        <p:cNvGrpSpPr/>
-        <p:nvPr/>
-      </p:nvGrpSpPr>
-      <p:grpSpPr>
-        <a:xfrm>
-          <a:off x="0" y="0"/>
-          <a:ext cx="0" cy="0"/>
-          <a:chOff x="0" y="0"/>
-          <a:chExt cx="0" cy="0"/>
-        </a:xfrm>
-      </p:grpSpPr>
-      <p:sp>
-        <p:nvSpPr>
-          <p:cNvPr id="187" name="Google Shape;187;p38"/>
+          <p:cNvPr id="169" name="Google Shape;169;p35"/>
           <p:cNvSpPr txBox="1"/>
           <p:nvPr/>
         </p:nvSpPr>
@@ -16235,7 +15020,7 @@
       </p:sp>
       <p:sp>
         <p:nvSpPr>
-          <p:cNvPr id="188" name="Google Shape;188;p38"/>
+          <p:cNvPr id="170" name="Google Shape;170;p35"/>
           <p:cNvSpPr txBox="1"/>
           <p:nvPr/>
         </p:nvSpPr>
@@ -16303,7 +15088,7 @@
   <p:cSld>
     <p:spTree>
       <p:nvGrpSpPr>
-        <p:cNvPr id="79" name="Shape 79"/>
+        <p:cNvPr id="81" name="Shape 81"/>
         <p:cNvGrpSpPr/>
         <p:nvPr/>
       </p:nvGrpSpPr>
@@ -16317,1199 +15102,7 @@
       </p:grpSpPr>
       <p:sp>
         <p:nvSpPr>
-          <p:cNvPr id="80" name="Google Shape;80;p18"/>
-          <p:cNvSpPr txBox="1"/>
-          <p:nvPr/>
-        </p:nvSpPr>
-        <p:spPr>
-          <a:xfrm>
-            <a:off x="184025" y="100475"/>
-            <a:ext cx="8859900" cy="4525200"/>
-          </a:xfrm>
-          <a:prstGeom prst="rect">
-            <a:avLst/>
-          </a:prstGeom>
-          <a:noFill/>
-          <a:ln>
-            <a:noFill/>
-          </a:ln>
-        </p:spPr>
-        <p:txBody>
-          <a:bodyPr anchorCtr="0" anchor="t" bIns="91425" lIns="91425" spcFirstLastPara="1" rIns="91425" wrap="square" tIns="91425">
-            <a:spAutoFit/>
-          </a:bodyPr>
-          <a:lstStyle/>
-          <a:p>
-            <a:pPr indent="0" lvl="0" marL="0" rtl="0" algn="ctr">
-              <a:spcBef>
-                <a:spcPts val="0"/>
-              </a:spcBef>
-              <a:spcAft>
-                <a:spcPts val="0"/>
-              </a:spcAft>
-              <a:buClr>
-                <a:schemeClr val="dk1"/>
-              </a:buClr>
-              <a:buSzPts val="1100"/>
-              <a:buFont typeface="Arial"/>
-              <a:buNone/>
-            </a:pPr>
-            <a:r>
-              <a:rPr b="1" lang="en" sz="2200"/>
-              <a:t>Пакеты и модули</a:t>
-            </a:r>
-            <a:endParaRPr b="1" sz="2200"/>
-          </a:p>
-          <a:p>
-            <a:pPr indent="0" lvl="0" marL="0" rtl="0" algn="l">
-              <a:spcBef>
-                <a:spcPts val="0"/>
-              </a:spcBef>
-              <a:spcAft>
-                <a:spcPts val="0"/>
-              </a:spcAft>
-              <a:buClr>
-                <a:schemeClr val="dk1"/>
-              </a:buClr>
-              <a:buSzPts val="1100"/>
-              <a:buFont typeface="Arial"/>
-              <a:buNone/>
-            </a:pPr>
-            <a:r>
-              <a:rPr lang="en" sz="2000"/>
-              <a:t>...ws/numsch&gt; ls -l</a:t>
-            </a:r>
-            <a:endParaRPr sz="2000"/>
-          </a:p>
-          <a:p>
-            <a:pPr indent="0" lvl="0" marL="0" rtl="0" algn="l">
-              <a:spcBef>
-                <a:spcPts val="0"/>
-              </a:spcBef>
-              <a:spcAft>
-                <a:spcPts val="0"/>
-              </a:spcAft>
-              <a:buClr>
-                <a:schemeClr val="dk1"/>
-              </a:buClr>
-              <a:buSzPts val="1100"/>
-              <a:buFont typeface="Arial"/>
-              <a:buNone/>
-            </a:pPr>
-            <a:r>
-              <a:rPr lang="en" sz="2000"/>
-              <a:t>total 16</a:t>
-            </a:r>
-            <a:endParaRPr sz="2000"/>
-          </a:p>
-          <a:p>
-            <a:pPr indent="0" lvl="0" marL="0" rtl="0" algn="l">
-              <a:spcBef>
-                <a:spcPts val="0"/>
-              </a:spcBef>
-              <a:spcAft>
-                <a:spcPts val="0"/>
-              </a:spcAft>
-              <a:buClr>
-                <a:schemeClr val="dk1"/>
-              </a:buClr>
-              <a:buSzPts val="1100"/>
-              <a:buFont typeface="Arial"/>
-              <a:buNone/>
-            </a:pPr>
-            <a:r>
-              <a:rPr lang="en" sz="2000"/>
-              <a:t>-rw-r--r-- 1 malkov users 2 Apr 2 13:07 __init__.py</a:t>
-            </a:r>
-            <a:endParaRPr sz="2000"/>
-          </a:p>
-          <a:p>
-            <a:pPr indent="0" lvl="0" marL="0" rtl="0" algn="l">
-              <a:spcBef>
-                <a:spcPts val="0"/>
-              </a:spcBef>
-              <a:spcAft>
-                <a:spcPts val="0"/>
-              </a:spcAft>
-              <a:buClr>
-                <a:schemeClr val="dk1"/>
-              </a:buClr>
-              <a:buSzPts val="1100"/>
-              <a:buFont typeface="Arial"/>
-              <a:buNone/>
-            </a:pPr>
-            <a:r>
-              <a:rPr lang="en" sz="2000"/>
-              <a:t>drwxr-xr-x 3 malkov users 4096 Apr 2 13:15 interpol</a:t>
-            </a:r>
-            <a:endParaRPr sz="2000"/>
-          </a:p>
-          <a:p>
-            <a:pPr indent="0" lvl="0" marL="0" rtl="0" algn="l">
-              <a:spcBef>
-                <a:spcPts val="0"/>
-              </a:spcBef>
-              <a:spcAft>
-                <a:spcPts val="0"/>
-              </a:spcAft>
-              <a:buClr>
-                <a:schemeClr val="dk1"/>
-              </a:buClr>
-              <a:buSzPts val="1100"/>
-              <a:buFont typeface="Arial"/>
-              <a:buNone/>
-            </a:pPr>
-            <a:r>
-              <a:rPr lang="en" sz="2000"/>
-              <a:t>drwxr-xr-x 2 malkov users 4096 Apr 2 13:09 __pycache__</a:t>
-            </a:r>
-            <a:endParaRPr sz="2000"/>
-          </a:p>
-          <a:p>
-            <a:pPr indent="0" lvl="0" marL="0" rtl="0" algn="l">
-              <a:spcBef>
-                <a:spcPts val="0"/>
-              </a:spcBef>
-              <a:spcAft>
-                <a:spcPts val="0"/>
-              </a:spcAft>
-              <a:buNone/>
-            </a:pPr>
-            <a:r>
-              <a:rPr lang="en" sz="2000"/>
-              <a:t>drwxr-xr-x 3 malkov users 4096 Apr 2 13:09 weno</a:t>
-            </a:r>
-            <a:endParaRPr sz="2000"/>
-          </a:p>
-          <a:p>
-            <a:pPr indent="0" lvl="0" marL="0" rtl="0" algn="l">
-              <a:spcBef>
-                <a:spcPts val="0"/>
-              </a:spcBef>
-              <a:spcAft>
-                <a:spcPts val="0"/>
-              </a:spcAft>
-              <a:buClr>
-                <a:schemeClr val="dk1"/>
-              </a:buClr>
-              <a:buSzPts val="1100"/>
-              <a:buFont typeface="Arial"/>
-              <a:buNone/>
-            </a:pPr>
-            <a:r>
-              <a:t/>
-            </a:r>
-            <a:endParaRPr sz="2000"/>
-          </a:p>
-          <a:p>
-            <a:pPr indent="0" lvl="0" marL="0" rtl="0" algn="l">
-              <a:spcBef>
-                <a:spcPts val="0"/>
-              </a:spcBef>
-              <a:spcAft>
-                <a:spcPts val="0"/>
-              </a:spcAft>
-              <a:buClr>
-                <a:schemeClr val="dk1"/>
-              </a:buClr>
-              <a:buSzPts val="1100"/>
-              <a:buFont typeface="Arial"/>
-              <a:buNone/>
-            </a:pPr>
-            <a:r>
-              <a:rPr lang="en" sz="2000"/>
-              <a:t>...ws/numsch&gt; ls -l interpol</a:t>
-            </a:r>
-            <a:endParaRPr sz="2000"/>
-          </a:p>
-          <a:p>
-            <a:pPr indent="0" lvl="0" marL="0" rtl="0" algn="l">
-              <a:spcBef>
-                <a:spcPts val="0"/>
-              </a:spcBef>
-              <a:spcAft>
-                <a:spcPts val="0"/>
-              </a:spcAft>
-              <a:buClr>
-                <a:schemeClr val="dk1"/>
-              </a:buClr>
-              <a:buSzPts val="1100"/>
-              <a:buFont typeface="Arial"/>
-              <a:buNone/>
-            </a:pPr>
-            <a:r>
-              <a:rPr lang="en" sz="2000"/>
-              <a:t>total 16</a:t>
-            </a:r>
-            <a:endParaRPr sz="2000"/>
-          </a:p>
-          <a:p>
-            <a:pPr indent="0" lvl="0" marL="0" rtl="0" algn="l">
-              <a:spcBef>
-                <a:spcPts val="0"/>
-              </a:spcBef>
-              <a:spcAft>
-                <a:spcPts val="0"/>
-              </a:spcAft>
-              <a:buClr>
-                <a:schemeClr val="dk1"/>
-              </a:buClr>
-              <a:buSzPts val="1100"/>
-              <a:buFont typeface="Arial"/>
-              <a:buNone/>
-            </a:pPr>
-            <a:r>
-              <a:rPr lang="en" sz="2000"/>
-              <a:t>-rw-r--r-- 1 malkov users 2 Apr 2 13:08 __init__.py</a:t>
-            </a:r>
-            <a:endParaRPr sz="2000"/>
-          </a:p>
-          <a:p>
-            <a:pPr indent="0" lvl="0" marL="0" rtl="0" algn="l">
-              <a:spcBef>
-                <a:spcPts val="0"/>
-              </a:spcBef>
-              <a:spcAft>
-                <a:spcPts val="0"/>
-              </a:spcAft>
-              <a:buClr>
-                <a:schemeClr val="dk1"/>
-              </a:buClr>
-              <a:buSzPts val="1100"/>
-              <a:buFont typeface="Arial"/>
-              <a:buNone/>
-            </a:pPr>
-            <a:r>
-              <a:rPr lang="en" sz="2000"/>
-              <a:t>-rw-r--r-- 1 malkov users 2458 Apr 2 13:14 interpoly.py</a:t>
-            </a:r>
-            <a:endParaRPr sz="2000"/>
-          </a:p>
-          <a:p>
-            <a:pPr indent="0" lvl="0" marL="0" rtl="0" algn="l">
-              <a:spcBef>
-                <a:spcPts val="0"/>
-              </a:spcBef>
-              <a:spcAft>
-                <a:spcPts val="0"/>
-              </a:spcAft>
-              <a:buClr>
-                <a:schemeClr val="dk1"/>
-              </a:buClr>
-              <a:buSzPts val="1100"/>
-              <a:buFont typeface="Arial"/>
-              <a:buNone/>
-            </a:pPr>
-            <a:r>
-              <a:rPr lang="en" sz="2000"/>
-              <a:t>drwxr-xr-x 2 malkov users 4096 Apr 2 13:18 __pycache__</a:t>
-            </a:r>
-            <a:endParaRPr sz="2000"/>
-          </a:p>
-          <a:p>
-            <a:pPr indent="0" lvl="0" marL="0" rtl="0" algn="l">
-              <a:spcBef>
-                <a:spcPts val="0"/>
-              </a:spcBef>
-              <a:spcAft>
-                <a:spcPts val="0"/>
-              </a:spcAft>
-              <a:buNone/>
-            </a:pPr>
-            <a:r>
-              <a:rPr lang="en" sz="2000"/>
-              <a:t>-rw-r--r-- 1 malkov users 150 Apr 2 13:18 test.py</a:t>
-            </a:r>
-            <a:endParaRPr/>
-          </a:p>
-        </p:txBody>
-      </p:sp>
-      <p:sp>
-        <p:nvSpPr>
-          <p:cNvPr id="81" name="Google Shape;81;p18"/>
-          <p:cNvSpPr txBox="1"/>
-          <p:nvPr/>
-        </p:nvSpPr>
-        <p:spPr>
-          <a:xfrm>
-            <a:off x="6235450" y="2340500"/>
-            <a:ext cx="2206500" cy="1062000"/>
-          </a:xfrm>
-          <a:prstGeom prst="rect">
-            <a:avLst/>
-          </a:prstGeom>
-          <a:solidFill>
-            <a:srgbClr val="FFFF00"/>
-          </a:solidFill>
-          <a:ln>
-            <a:noFill/>
-          </a:ln>
-        </p:spPr>
-        <p:txBody>
-          <a:bodyPr anchorCtr="0" anchor="t" bIns="91425" lIns="91425" spcFirstLastPara="1" rIns="91425" wrap="square" tIns="91425">
-            <a:spAutoFit/>
-          </a:bodyPr>
-          <a:lstStyle/>
-          <a:p>
-            <a:pPr indent="0" lvl="0" marL="0" rtl="0" algn="l">
-              <a:spcBef>
-                <a:spcPts val="0"/>
-              </a:spcBef>
-              <a:spcAft>
-                <a:spcPts val="0"/>
-              </a:spcAft>
-              <a:buNone/>
-            </a:pPr>
-            <a:r>
-              <a:rPr lang="en" sz="1900"/>
-              <a:t>def tt(s):</a:t>
-            </a:r>
-            <a:endParaRPr sz="1900"/>
-          </a:p>
-          <a:p>
-            <a:pPr indent="0" lvl="0" marL="0" rtl="0" algn="l">
-              <a:spcBef>
-                <a:spcPts val="0"/>
-              </a:spcBef>
-              <a:spcAft>
-                <a:spcPts val="0"/>
-              </a:spcAft>
-              <a:buNone/>
-            </a:pPr>
-            <a:r>
-              <a:rPr lang="en" sz="1900"/>
-              <a:t>  print(s)</a:t>
-            </a:r>
-            <a:endParaRPr sz="1900"/>
-          </a:p>
-          <a:p>
-            <a:pPr indent="0" lvl="0" marL="0" rtl="0" algn="l">
-              <a:spcBef>
-                <a:spcPts val="0"/>
-              </a:spcBef>
-              <a:spcAft>
-                <a:spcPts val="0"/>
-              </a:spcAft>
-              <a:buNone/>
-            </a:pPr>
-            <a:r>
-              <a:rPr lang="en" sz="1900"/>
-              <a:t>  return</a:t>
-            </a:r>
-            <a:endParaRPr sz="1900"/>
-          </a:p>
-        </p:txBody>
-      </p:sp>
-      <p:cxnSp>
-        <p:nvCxnSpPr>
           <p:cNvPr id="82" name="Google Shape;82;p18"/>
-          <p:cNvCxnSpPr>
-            <a:stCxn id="81" idx="2"/>
-          </p:cNvCxnSpPr>
-          <p:nvPr/>
-        </p:nvCxnSpPr>
-        <p:spPr>
-          <a:xfrm rot="5400000">
-            <a:off x="6206500" y="3247700"/>
-            <a:ext cx="977400" cy="1287000"/>
-          </a:xfrm>
-          <a:prstGeom prst="bentConnector2">
-            <a:avLst/>
-          </a:prstGeom>
-          <a:noFill/>
-          <a:ln cap="flat" cmpd="sng" w="28575">
-            <a:solidFill>
-              <a:schemeClr val="dk2"/>
-            </a:solidFill>
-            <a:prstDash val="solid"/>
-            <a:round/>
-            <a:headEnd len="med" w="med" type="none"/>
-            <a:tailEnd len="med" w="med" type="none"/>
-          </a:ln>
-        </p:spPr>
-      </p:cxnSp>
-      <p:cxnSp>
-        <p:nvCxnSpPr>
-          <p:cNvPr id="83" name="Google Shape;83;p18"/>
-          <p:cNvCxnSpPr/>
-          <p:nvPr/>
-        </p:nvCxnSpPr>
-        <p:spPr>
-          <a:xfrm flipH="1">
-            <a:off x="5856692" y="4379942"/>
-            <a:ext cx="228300" cy="27600"/>
-          </a:xfrm>
-          <a:prstGeom prst="straightConnector1">
-            <a:avLst/>
-          </a:prstGeom>
-          <a:noFill/>
-          <a:ln cap="flat" cmpd="sng" w="28575">
-            <a:solidFill>
-              <a:schemeClr val="dk2"/>
-            </a:solidFill>
-            <a:prstDash val="solid"/>
-            <a:round/>
-            <a:headEnd len="med" w="med" type="none"/>
-            <a:tailEnd len="med" w="med" type="triangle"/>
-          </a:ln>
-        </p:spPr>
-      </p:cxnSp>
-    </p:spTree>
-  </p:cSld>
-  <p:clrMapOvr>
-    <a:masterClrMapping/>
-  </p:clrMapOvr>
-</p:sld>
-</file>
-
-<file path=ppt/slides/slide4.xml><?xml version="1.0" encoding="utf-8"?>
-<p:sld xmlns:a="http://schemas.openxmlformats.org/drawingml/2006/main" xmlns:r="http://schemas.openxmlformats.org/officeDocument/2006/relationships" xmlns:mc="http://schemas.openxmlformats.org/markup-compatibility/2006" xmlns:mv="urn:schemas-microsoft-com:mac:vml" xmlns:p="http://schemas.openxmlformats.org/presentationml/2006/main" xmlns:c="http://schemas.openxmlformats.org/drawingml/2006/chart" xmlns:dgm="http://schemas.openxmlformats.org/drawingml/2006/diagram" xmlns:o="urn:schemas-microsoft-com:office:office" xmlns:v="urn:schemas-microsoft-com:vml" xmlns:pvml="urn:schemas-microsoft-com:office:powerpoint" xmlns:com="http://schemas.openxmlformats.org/drawingml/2006/compatibility" xmlns:p14="http://schemas.microsoft.com/office/powerpoint/2010/main" xmlns:p15="http://schemas.microsoft.com/office/powerpoint/2012/main" xmlns:ahyp="http://schemas.microsoft.com/office/drawing/2018/hyperlinkcolor">
-  <p:cSld>
-    <p:spTree>
-      <p:nvGrpSpPr>
-        <p:cNvPr id="87" name="Shape 87"/>
-        <p:cNvGrpSpPr/>
-        <p:nvPr/>
-      </p:nvGrpSpPr>
-      <p:grpSpPr>
-        <a:xfrm>
-          <a:off x="0" y="0"/>
-          <a:ext cx="0" cy="0"/>
-          <a:chOff x="0" y="0"/>
-          <a:chExt cx="0" cy="0"/>
-        </a:xfrm>
-      </p:grpSpPr>
-      <p:sp>
-        <p:nvSpPr>
-          <p:cNvPr id="88" name="Google Shape;88;p19"/>
-          <p:cNvSpPr txBox="1"/>
-          <p:nvPr/>
-        </p:nvSpPr>
-        <p:spPr>
-          <a:xfrm>
-            <a:off x="150575" y="557675"/>
-            <a:ext cx="8859900" cy="2862900"/>
-          </a:xfrm>
-          <a:prstGeom prst="rect">
-            <a:avLst/>
-          </a:prstGeom>
-          <a:noFill/>
-          <a:ln>
-            <a:noFill/>
-          </a:ln>
-        </p:spPr>
-        <p:txBody>
-          <a:bodyPr anchorCtr="0" anchor="t" bIns="91425" lIns="91425" spcFirstLastPara="1" rIns="91425" wrap="square" tIns="91425">
-            <a:spAutoFit/>
-          </a:bodyPr>
-          <a:lstStyle/>
-          <a:p>
-            <a:pPr indent="0" lvl="0" marL="0" rtl="0" algn="l">
-              <a:spcBef>
-                <a:spcPts val="0"/>
-              </a:spcBef>
-              <a:spcAft>
-                <a:spcPts val="0"/>
-              </a:spcAft>
-              <a:buClr>
-                <a:schemeClr val="dk1"/>
-              </a:buClr>
-              <a:buSzPts val="1100"/>
-              <a:buFont typeface="Arial"/>
-              <a:buNone/>
-            </a:pPr>
-            <a:r>
-              <a:rPr lang="en" sz="2000">
-                <a:solidFill>
-                  <a:schemeClr val="dk1"/>
-                </a:solidFill>
-              </a:rPr>
-              <a:t>...ws&gt; python</a:t>
-            </a:r>
-            <a:endParaRPr sz="2000">
-              <a:solidFill>
-                <a:schemeClr val="dk1"/>
-              </a:solidFill>
-            </a:endParaRPr>
-          </a:p>
-          <a:p>
-            <a:pPr indent="0" lvl="0" marL="0" rtl="0" algn="l">
-              <a:spcBef>
-                <a:spcPts val="0"/>
-              </a:spcBef>
-              <a:spcAft>
-                <a:spcPts val="0"/>
-              </a:spcAft>
-              <a:buClr>
-                <a:schemeClr val="dk1"/>
-              </a:buClr>
-              <a:buSzPts val="1100"/>
-              <a:buFont typeface="Arial"/>
-              <a:buNone/>
-            </a:pPr>
-            <a:r>
-              <a:rPr lang="en" sz="2000">
-                <a:solidFill>
-                  <a:schemeClr val="dk1"/>
-                </a:solidFill>
-              </a:rPr>
-              <a:t>Python 3.5.2 |Anaconda custom (64-bit)| (default, Jul 2 2016, 17:53:06)</a:t>
-            </a:r>
-            <a:endParaRPr sz="2000">
-              <a:solidFill>
-                <a:schemeClr val="dk1"/>
-              </a:solidFill>
-            </a:endParaRPr>
-          </a:p>
-          <a:p>
-            <a:pPr indent="0" lvl="0" marL="0" rtl="0" algn="l">
-              <a:spcBef>
-                <a:spcPts val="0"/>
-              </a:spcBef>
-              <a:spcAft>
-                <a:spcPts val="0"/>
-              </a:spcAft>
-              <a:buClr>
-                <a:schemeClr val="dk1"/>
-              </a:buClr>
-              <a:buSzPts val="1100"/>
-              <a:buFont typeface="Arial"/>
-              <a:buNone/>
-            </a:pPr>
-            <a:r>
-              <a:rPr lang="en" sz="2000">
-                <a:solidFill>
-                  <a:schemeClr val="dk1"/>
-                </a:solidFill>
-              </a:rPr>
-              <a:t>[GCC 4.4.7 20120313 (Red Hat 4.4.7-1)] on linux</a:t>
-            </a:r>
-            <a:endParaRPr sz="2000">
-              <a:solidFill>
-                <a:schemeClr val="dk1"/>
-              </a:solidFill>
-            </a:endParaRPr>
-          </a:p>
-          <a:p>
-            <a:pPr indent="0" lvl="0" marL="0" rtl="0" algn="l">
-              <a:spcBef>
-                <a:spcPts val="0"/>
-              </a:spcBef>
-              <a:spcAft>
-                <a:spcPts val="0"/>
-              </a:spcAft>
-              <a:buClr>
-                <a:schemeClr val="dk1"/>
-              </a:buClr>
-              <a:buSzPts val="1100"/>
-              <a:buFont typeface="Arial"/>
-              <a:buNone/>
-            </a:pPr>
-            <a:r>
-              <a:rPr lang="en" sz="2000">
-                <a:solidFill>
-                  <a:schemeClr val="dk1"/>
-                </a:solidFill>
-              </a:rPr>
-              <a:t>Type "help", "copyright", "credits" or "license" for more information.</a:t>
-            </a:r>
-            <a:endParaRPr sz="2000">
-              <a:solidFill>
-                <a:schemeClr val="dk1"/>
-              </a:solidFill>
-            </a:endParaRPr>
-          </a:p>
-          <a:p>
-            <a:pPr indent="0" lvl="0" marL="0" rtl="0" algn="l">
-              <a:spcBef>
-                <a:spcPts val="0"/>
-              </a:spcBef>
-              <a:spcAft>
-                <a:spcPts val="0"/>
-              </a:spcAft>
-              <a:buClr>
-                <a:schemeClr val="dk1"/>
-              </a:buClr>
-              <a:buSzPts val="1100"/>
-              <a:buFont typeface="Arial"/>
-              <a:buNone/>
-            </a:pPr>
-            <a:r>
-              <a:rPr lang="en" sz="2000">
-                <a:solidFill>
-                  <a:schemeClr val="dk1"/>
-                </a:solidFill>
-              </a:rPr>
-              <a:t>&gt;&gt;&gt;</a:t>
-            </a:r>
-            <a:r>
-              <a:rPr b="1" lang="en" sz="2000">
-                <a:solidFill>
-                  <a:schemeClr val="dk1"/>
-                </a:solidFill>
-              </a:rPr>
-              <a:t> import numsch.interpol.test as t</a:t>
-            </a:r>
-            <a:endParaRPr b="1" sz="2000">
-              <a:solidFill>
-                <a:schemeClr val="dk1"/>
-              </a:solidFill>
-            </a:endParaRPr>
-          </a:p>
-          <a:p>
-            <a:pPr indent="0" lvl="0" marL="0" rtl="0" algn="l">
-              <a:spcBef>
-                <a:spcPts val="0"/>
-              </a:spcBef>
-              <a:spcAft>
-                <a:spcPts val="0"/>
-              </a:spcAft>
-              <a:buClr>
-                <a:schemeClr val="dk1"/>
-              </a:buClr>
-              <a:buSzPts val="1100"/>
-              <a:buFont typeface="Arial"/>
-              <a:buNone/>
-            </a:pPr>
-            <a:r>
-              <a:rPr lang="en" sz="2000">
-                <a:solidFill>
-                  <a:schemeClr val="dk1"/>
-                </a:solidFill>
-              </a:rPr>
-              <a:t>&gt;&gt;&gt; t.tt(34.8)</a:t>
-            </a:r>
-            <a:endParaRPr sz="2000">
-              <a:solidFill>
-                <a:schemeClr val="dk1"/>
-              </a:solidFill>
-            </a:endParaRPr>
-          </a:p>
-          <a:p>
-            <a:pPr indent="0" lvl="0" marL="0" rtl="0" algn="l">
-              <a:spcBef>
-                <a:spcPts val="0"/>
-              </a:spcBef>
-              <a:spcAft>
-                <a:spcPts val="0"/>
-              </a:spcAft>
-              <a:buClr>
-                <a:schemeClr val="dk1"/>
-              </a:buClr>
-              <a:buSzPts val="1100"/>
-              <a:buFont typeface="Arial"/>
-              <a:buNone/>
-            </a:pPr>
-            <a:r>
-              <a:rPr lang="en" sz="2000">
-                <a:solidFill>
-                  <a:schemeClr val="dk1"/>
-                </a:solidFill>
-              </a:rPr>
-              <a:t>34.8</a:t>
-            </a:r>
-            <a:endParaRPr sz="2000">
-              <a:solidFill>
-                <a:schemeClr val="dk1"/>
-              </a:solidFill>
-            </a:endParaRPr>
-          </a:p>
-          <a:p>
-            <a:pPr indent="0" lvl="0" marL="0" rtl="0" algn="l">
-              <a:spcBef>
-                <a:spcPts val="0"/>
-              </a:spcBef>
-              <a:spcAft>
-                <a:spcPts val="0"/>
-              </a:spcAft>
-              <a:buClr>
-                <a:schemeClr val="dk1"/>
-              </a:buClr>
-              <a:buSzPts val="1100"/>
-              <a:buFont typeface="Arial"/>
-              <a:buNone/>
-            </a:pPr>
-            <a:r>
-              <a:rPr lang="en" sz="2000">
-                <a:solidFill>
-                  <a:schemeClr val="dk1"/>
-                </a:solidFill>
-              </a:rPr>
-              <a:t>&gt;&gt;&gt;</a:t>
-            </a:r>
-            <a:endParaRPr sz="2000">
-              <a:solidFill>
-                <a:schemeClr val="dk1"/>
-              </a:solidFill>
-            </a:endParaRPr>
-          </a:p>
-          <a:p>
-            <a:pPr indent="0" lvl="0" marL="0" rtl="0" algn="l">
-              <a:spcBef>
-                <a:spcPts val="0"/>
-              </a:spcBef>
-              <a:spcAft>
-                <a:spcPts val="0"/>
-              </a:spcAft>
-              <a:buNone/>
-            </a:pPr>
-            <a:r>
-              <a:t/>
-            </a:r>
-            <a:endParaRPr/>
-          </a:p>
-        </p:txBody>
-      </p:sp>
-    </p:spTree>
-  </p:cSld>
-  <p:clrMapOvr>
-    <a:masterClrMapping/>
-  </p:clrMapOvr>
-</p:sld>
-</file>
-
-<file path=ppt/slides/slide5.xml><?xml version="1.0" encoding="utf-8"?>
-<p:sld xmlns:a="http://schemas.openxmlformats.org/drawingml/2006/main" xmlns:r="http://schemas.openxmlformats.org/officeDocument/2006/relationships" xmlns:mc="http://schemas.openxmlformats.org/markup-compatibility/2006" xmlns:mv="urn:schemas-microsoft-com:mac:vml" xmlns:p="http://schemas.openxmlformats.org/presentationml/2006/main" xmlns:c="http://schemas.openxmlformats.org/drawingml/2006/chart" xmlns:dgm="http://schemas.openxmlformats.org/drawingml/2006/diagram" xmlns:o="urn:schemas-microsoft-com:office:office" xmlns:v="urn:schemas-microsoft-com:vml" xmlns:pvml="urn:schemas-microsoft-com:office:powerpoint" xmlns:com="http://schemas.openxmlformats.org/drawingml/2006/compatibility" xmlns:p14="http://schemas.microsoft.com/office/powerpoint/2010/main" xmlns:p15="http://schemas.microsoft.com/office/powerpoint/2012/main" xmlns:ahyp="http://schemas.microsoft.com/office/drawing/2018/hyperlinkcolor">
-  <p:cSld>
-    <p:spTree>
-      <p:nvGrpSpPr>
-        <p:cNvPr id="92" name="Shape 92"/>
-        <p:cNvGrpSpPr/>
-        <p:nvPr/>
-      </p:nvGrpSpPr>
-      <p:grpSpPr>
-        <a:xfrm>
-          <a:off x="0" y="0"/>
-          <a:ext cx="0" cy="0"/>
-          <a:chOff x="0" y="0"/>
-          <a:chExt cx="0" cy="0"/>
-        </a:xfrm>
-      </p:grpSpPr>
-      <p:sp>
-        <p:nvSpPr>
-          <p:cNvPr id="93" name="Google Shape;93;p20"/>
-          <p:cNvSpPr txBox="1"/>
-          <p:nvPr/>
-        </p:nvSpPr>
-        <p:spPr>
-          <a:xfrm>
-            <a:off x="221225" y="813467"/>
-            <a:ext cx="8701800" cy="3879000"/>
-          </a:xfrm>
-          <a:prstGeom prst="rect">
-            <a:avLst/>
-          </a:prstGeom>
-          <a:solidFill>
-            <a:srgbClr val="FFFF00"/>
-          </a:solidFill>
-          <a:ln>
-            <a:noFill/>
-          </a:ln>
-        </p:spPr>
-        <p:txBody>
-          <a:bodyPr anchorCtr="0" anchor="t" bIns="91425" lIns="91425" spcFirstLastPara="1" rIns="91425" wrap="square" tIns="91425">
-            <a:spAutoFit/>
-          </a:bodyPr>
-          <a:lstStyle/>
-          <a:p>
-            <a:pPr indent="0" lvl="0" marL="0" rtl="0" algn="l">
-              <a:spcBef>
-                <a:spcPts val="0"/>
-              </a:spcBef>
-              <a:spcAft>
-                <a:spcPts val="0"/>
-              </a:spcAft>
-              <a:buClr>
-                <a:schemeClr val="dk1"/>
-              </a:buClr>
-              <a:buSzPts val="1100"/>
-              <a:buFont typeface="Arial"/>
-              <a:buNone/>
-            </a:pPr>
-            <a:r>
-              <a:rPr lang="en" sz="2000"/>
-              <a:t>import numpy as np</a:t>
-            </a:r>
-            <a:endParaRPr sz="2000"/>
-          </a:p>
-          <a:p>
-            <a:pPr indent="0" lvl="0" marL="0" rtl="0" algn="l">
-              <a:spcBef>
-                <a:spcPts val="0"/>
-              </a:spcBef>
-              <a:spcAft>
-                <a:spcPts val="0"/>
-              </a:spcAft>
-              <a:buClr>
-                <a:schemeClr val="dk1"/>
-              </a:buClr>
-              <a:buSzPts val="1100"/>
-              <a:buFont typeface="Arial"/>
-              <a:buNone/>
-            </a:pPr>
-            <a:r>
-              <a:rPr lang="en" sz="2000"/>
-              <a:t>from pylab import imshow, show</a:t>
-            </a:r>
-            <a:endParaRPr sz="2000"/>
-          </a:p>
-          <a:p>
-            <a:pPr indent="0" lvl="0" marL="0" rtl="0" algn="l">
-              <a:spcBef>
-                <a:spcPts val="0"/>
-              </a:spcBef>
-              <a:spcAft>
-                <a:spcPts val="0"/>
-              </a:spcAft>
-              <a:buNone/>
-            </a:pPr>
-            <a:r>
-              <a:rPr lang="en" sz="2000"/>
-              <a:t>from time import  perf_counter_ns  as timer</a:t>
-            </a:r>
-            <a:endParaRPr sz="2000"/>
-          </a:p>
-          <a:p>
-            <a:pPr indent="0" lvl="0" marL="0" rtl="0" algn="l">
-              <a:spcBef>
-                <a:spcPts val="0"/>
-              </a:spcBef>
-              <a:spcAft>
-                <a:spcPts val="0"/>
-              </a:spcAft>
-              <a:buClr>
-                <a:schemeClr val="dk1"/>
-              </a:buClr>
-              <a:buSzPts val="1100"/>
-              <a:buFont typeface="Arial"/>
-              <a:buNone/>
-            </a:pPr>
-            <a:r>
-              <a:t/>
-            </a:r>
-            <a:endParaRPr sz="2000"/>
-          </a:p>
-          <a:p>
-            <a:pPr indent="0" lvl="0" marL="0" rtl="0" algn="l">
-              <a:spcBef>
-                <a:spcPts val="0"/>
-              </a:spcBef>
-              <a:spcAft>
-                <a:spcPts val="0"/>
-              </a:spcAft>
-              <a:buClr>
-                <a:schemeClr val="dk1"/>
-              </a:buClr>
-              <a:buSzPts val="1100"/>
-              <a:buFont typeface="Arial"/>
-              <a:buNone/>
-            </a:pPr>
-            <a:r>
-              <a:rPr lang="en" sz="2000"/>
-              <a:t>def mandel(x, y, max_iters):</a:t>
-            </a:r>
-            <a:endParaRPr sz="2000"/>
-          </a:p>
-          <a:p>
-            <a:pPr indent="0" lvl="0" marL="0" rtl="0" algn="l">
-              <a:spcBef>
-                <a:spcPts val="0"/>
-              </a:spcBef>
-              <a:spcAft>
-                <a:spcPts val="0"/>
-              </a:spcAft>
-              <a:buClr>
-                <a:schemeClr val="dk1"/>
-              </a:buClr>
-              <a:buSzPts val="1100"/>
-              <a:buFont typeface="Arial"/>
-              <a:buNone/>
-            </a:pPr>
-            <a:r>
-              <a:rPr lang="en" sz="2000"/>
-              <a:t>  c = complex(x, y)</a:t>
-            </a:r>
-            <a:endParaRPr sz="2000"/>
-          </a:p>
-          <a:p>
-            <a:pPr indent="0" lvl="0" marL="0" rtl="0" algn="l">
-              <a:spcBef>
-                <a:spcPts val="0"/>
-              </a:spcBef>
-              <a:spcAft>
-                <a:spcPts val="0"/>
-              </a:spcAft>
-              <a:buClr>
-                <a:schemeClr val="dk1"/>
-              </a:buClr>
-              <a:buSzPts val="1100"/>
-              <a:buFont typeface="Arial"/>
-              <a:buNone/>
-            </a:pPr>
-            <a:r>
-              <a:rPr lang="en" sz="2000"/>
-              <a:t>  z = 0.0j</a:t>
-            </a:r>
-            <a:endParaRPr sz="2000"/>
-          </a:p>
-          <a:p>
-            <a:pPr indent="0" lvl="0" marL="0" rtl="0" algn="l">
-              <a:spcBef>
-                <a:spcPts val="0"/>
-              </a:spcBef>
-              <a:spcAft>
-                <a:spcPts val="0"/>
-              </a:spcAft>
-              <a:buClr>
-                <a:schemeClr val="dk1"/>
-              </a:buClr>
-              <a:buSzPts val="1100"/>
-              <a:buFont typeface="Arial"/>
-              <a:buNone/>
-            </a:pPr>
-            <a:r>
-              <a:rPr lang="en" sz="2000"/>
-              <a:t>  for i in range(max_iters):</a:t>
-            </a:r>
-            <a:endParaRPr sz="2000"/>
-          </a:p>
-          <a:p>
-            <a:pPr indent="0" lvl="0" marL="0" rtl="0" algn="l">
-              <a:spcBef>
-                <a:spcPts val="0"/>
-              </a:spcBef>
-              <a:spcAft>
-                <a:spcPts val="0"/>
-              </a:spcAft>
-              <a:buClr>
-                <a:schemeClr val="dk1"/>
-              </a:buClr>
-              <a:buSzPts val="1100"/>
-              <a:buFont typeface="Arial"/>
-              <a:buNone/>
-            </a:pPr>
-            <a:r>
-              <a:rPr lang="en" sz="2000"/>
-              <a:t>    z = z*z + c</a:t>
-            </a:r>
-            <a:endParaRPr sz="2000"/>
-          </a:p>
-          <a:p>
-            <a:pPr indent="0" lvl="0" marL="0" rtl="0" algn="l">
-              <a:spcBef>
-                <a:spcPts val="0"/>
-              </a:spcBef>
-              <a:spcAft>
-                <a:spcPts val="0"/>
-              </a:spcAft>
-              <a:buClr>
-                <a:schemeClr val="dk1"/>
-              </a:buClr>
-              <a:buSzPts val="1100"/>
-              <a:buFont typeface="Arial"/>
-              <a:buNone/>
-            </a:pPr>
-            <a:r>
-              <a:rPr lang="en" sz="2000"/>
-              <a:t>    if (z.real*z.real + z.imag*z.imag) &gt;= 4:</a:t>
-            </a:r>
-            <a:endParaRPr sz="2000"/>
-          </a:p>
-          <a:p>
-            <a:pPr indent="0" lvl="0" marL="0" rtl="0" algn="l">
-              <a:spcBef>
-                <a:spcPts val="0"/>
-              </a:spcBef>
-              <a:spcAft>
-                <a:spcPts val="0"/>
-              </a:spcAft>
-              <a:buClr>
-                <a:schemeClr val="dk1"/>
-              </a:buClr>
-              <a:buSzPts val="1100"/>
-              <a:buFont typeface="Arial"/>
-              <a:buNone/>
-            </a:pPr>
-            <a:r>
-              <a:rPr lang="en" sz="2000"/>
-              <a:t>      return i</a:t>
-            </a:r>
-            <a:endParaRPr sz="2000"/>
-          </a:p>
-          <a:p>
-            <a:pPr indent="0" lvl="0" marL="0" rtl="0" algn="l">
-              <a:spcBef>
-                <a:spcPts val="0"/>
-              </a:spcBef>
-              <a:spcAft>
-                <a:spcPts val="0"/>
-              </a:spcAft>
-              <a:buNone/>
-            </a:pPr>
-            <a:r>
-              <a:rPr lang="en" sz="2000"/>
-              <a:t> return max_iters</a:t>
-            </a:r>
-            <a:r>
-              <a:rPr lang="en"/>
-              <a:t> </a:t>
-            </a:r>
-            <a:endParaRPr/>
-          </a:p>
-        </p:txBody>
-      </p:sp>
-      <p:sp>
-        <p:nvSpPr>
-          <p:cNvPr id="94" name="Google Shape;94;p20"/>
-          <p:cNvSpPr txBox="1"/>
-          <p:nvPr/>
-        </p:nvSpPr>
-        <p:spPr>
-          <a:xfrm>
-            <a:off x="1471200" y="4695608"/>
-            <a:ext cx="6169800" cy="431100"/>
-          </a:xfrm>
-          <a:prstGeom prst="rect">
-            <a:avLst/>
-          </a:prstGeom>
-          <a:noFill/>
-          <a:ln>
-            <a:noFill/>
-          </a:ln>
-        </p:spPr>
-        <p:txBody>
-          <a:bodyPr anchorCtr="0" anchor="t" bIns="91425" lIns="91425" spcFirstLastPara="1" rIns="91425" wrap="square" tIns="91425">
-            <a:spAutoFit/>
-          </a:bodyPr>
-          <a:lstStyle/>
-          <a:p>
-            <a:pPr indent="0" lvl="0" marL="0" rtl="0" algn="l">
-              <a:spcBef>
-                <a:spcPts val="0"/>
-              </a:spcBef>
-              <a:spcAft>
-                <a:spcPts val="0"/>
-              </a:spcAft>
-              <a:buNone/>
-            </a:pPr>
-            <a:r>
-              <a:rPr lang="en" sz="1600"/>
-              <a:t>http://nbviewer.jupyter.org/gist/harrism/f5707335f40af9463c43</a:t>
-            </a:r>
-            <a:endParaRPr sz="1600"/>
-          </a:p>
-        </p:txBody>
-      </p:sp>
-      <p:sp>
-        <p:nvSpPr>
-          <p:cNvPr id="95" name="Google Shape;95;p20"/>
-          <p:cNvSpPr txBox="1"/>
-          <p:nvPr/>
-        </p:nvSpPr>
-        <p:spPr>
-          <a:xfrm>
-            <a:off x="221225" y="26425"/>
-            <a:ext cx="8701800" cy="710100"/>
-          </a:xfrm>
-          <a:prstGeom prst="rect">
-            <a:avLst/>
-          </a:prstGeom>
-          <a:solidFill>
-            <a:srgbClr val="FFCC00"/>
-          </a:solidFill>
-          <a:ln>
-            <a:noFill/>
-          </a:ln>
-        </p:spPr>
-        <p:txBody>
-          <a:bodyPr anchorCtr="0" anchor="t" bIns="46800" lIns="90000" spcFirstLastPara="1" rIns="90000" wrap="square" tIns="46800">
-            <a:spAutoFit/>
-          </a:bodyPr>
-          <a:lstStyle/>
-          <a:p>
-            <a:pPr indent="0" lvl="0" marL="0" rtl="0" algn="ctr">
-              <a:spcBef>
-                <a:spcPts val="0"/>
-              </a:spcBef>
-              <a:spcAft>
-                <a:spcPts val="0"/>
-              </a:spcAft>
-              <a:buClr>
-                <a:schemeClr val="dk1"/>
-              </a:buClr>
-              <a:buSzPts val="1100"/>
-              <a:buFont typeface="Arial"/>
-              <a:buNone/>
-            </a:pPr>
-            <a:r>
-              <a:rPr b="1" lang="en" sz="2000">
-                <a:solidFill>
-                  <a:schemeClr val="dk1"/>
-                </a:solidFill>
-              </a:rPr>
-              <a:t>Сравненние производительности кодов, генерируемых</a:t>
-            </a:r>
-            <a:endParaRPr b="1" sz="2000">
-              <a:solidFill>
-                <a:schemeClr val="dk1"/>
-              </a:solidFill>
-            </a:endParaRPr>
-          </a:p>
-          <a:p>
-            <a:pPr indent="0" lvl="0" marL="0" rtl="0" algn="ctr">
-              <a:spcBef>
-                <a:spcPts val="0"/>
-              </a:spcBef>
-              <a:spcAft>
-                <a:spcPts val="0"/>
-              </a:spcAft>
-              <a:buClr>
-                <a:schemeClr val="dk1"/>
-              </a:buClr>
-              <a:buSzPts val="1100"/>
-              <a:buFont typeface="Arial"/>
-              <a:buNone/>
-            </a:pPr>
-            <a:r>
-              <a:rPr b="1" lang="en" sz="2000">
-                <a:solidFill>
-                  <a:schemeClr val="dk1"/>
-                </a:solidFill>
-              </a:rPr>
-              <a:t>компилятором Numba</a:t>
-            </a:r>
-            <a:endParaRPr b="1" sz="2200"/>
-          </a:p>
-        </p:txBody>
-      </p:sp>
-    </p:spTree>
-  </p:cSld>
-  <p:clrMapOvr>
-    <a:masterClrMapping/>
-  </p:clrMapOvr>
-</p:sld>
-</file>
-
-<file path=ppt/slides/slide6.xml><?xml version="1.0" encoding="utf-8"?>
-<p:sld xmlns:a="http://schemas.openxmlformats.org/drawingml/2006/main" xmlns:r="http://schemas.openxmlformats.org/officeDocument/2006/relationships" xmlns:mc="http://schemas.openxmlformats.org/markup-compatibility/2006" xmlns:mv="urn:schemas-microsoft-com:mac:vml" xmlns:p="http://schemas.openxmlformats.org/presentationml/2006/main" xmlns:c="http://schemas.openxmlformats.org/drawingml/2006/chart" xmlns:dgm="http://schemas.openxmlformats.org/drawingml/2006/diagram" xmlns:o="urn:schemas-microsoft-com:office:office" xmlns:v="urn:schemas-microsoft-com:vml" xmlns:pvml="urn:schemas-microsoft-com:office:powerpoint" xmlns:com="http://schemas.openxmlformats.org/drawingml/2006/compatibility" xmlns:p14="http://schemas.microsoft.com/office/powerpoint/2010/main" xmlns:p15="http://schemas.microsoft.com/office/powerpoint/2012/main" xmlns:ahyp="http://schemas.microsoft.com/office/drawing/2018/hyperlinkcolor">
-  <p:cSld>
-    <p:spTree>
-      <p:nvGrpSpPr>
-        <p:cNvPr id="99" name="Shape 99"/>
-        <p:cNvGrpSpPr/>
-        <p:nvPr/>
-      </p:nvGrpSpPr>
-      <p:grpSpPr>
-        <a:xfrm>
-          <a:off x="0" y="0"/>
-          <a:ext cx="0" cy="0"/>
-          <a:chOff x="0" y="0"/>
-          <a:chExt cx="0" cy="0"/>
-        </a:xfrm>
-      </p:grpSpPr>
-      <p:sp>
-        <p:nvSpPr>
-          <p:cNvPr id="100" name="Google Shape;100;p21"/>
           <p:cNvSpPr txBox="1"/>
           <p:nvPr/>
         </p:nvSpPr>
@@ -17911,12 +15504,12 @@
 </p:sld>
 </file>
 
-<file path=ppt/slides/slide7.xml><?xml version="1.0" encoding="utf-8"?>
+<file path=ppt/slides/slide4.xml><?xml version="1.0" encoding="utf-8"?>
 <p:sld xmlns:a="http://schemas.openxmlformats.org/drawingml/2006/main" xmlns:r="http://schemas.openxmlformats.org/officeDocument/2006/relationships" xmlns:mc="http://schemas.openxmlformats.org/markup-compatibility/2006" xmlns:mv="urn:schemas-microsoft-com:mac:vml" xmlns:p="http://schemas.openxmlformats.org/presentationml/2006/main" xmlns:c="http://schemas.openxmlformats.org/drawingml/2006/chart" xmlns:dgm="http://schemas.openxmlformats.org/drawingml/2006/diagram" xmlns:o="urn:schemas-microsoft-com:office:office" xmlns:v="urn:schemas-microsoft-com:vml" xmlns:pvml="urn:schemas-microsoft-com:office:powerpoint" xmlns:com="http://schemas.openxmlformats.org/drawingml/2006/compatibility" xmlns:p14="http://schemas.microsoft.com/office/powerpoint/2010/main" xmlns:p15="http://schemas.microsoft.com/office/powerpoint/2012/main" xmlns:ahyp="http://schemas.microsoft.com/office/drawing/2018/hyperlinkcolor">
   <p:cSld>
     <p:spTree>
       <p:nvGrpSpPr>
-        <p:cNvPr id="104" name="Shape 104"/>
+        <p:cNvPr id="86" name="Shape 86"/>
         <p:cNvGrpSpPr/>
         <p:nvPr/>
       </p:nvGrpSpPr>
@@ -17930,7 +15523,7 @@
       </p:grpSpPr>
       <p:sp>
         <p:nvSpPr>
-          <p:cNvPr id="105" name="Google Shape;105;p22"/>
+          <p:cNvPr id="87" name="Google Shape;87;p19"/>
           <p:cNvSpPr txBox="1"/>
           <p:nvPr/>
         </p:nvSpPr>
@@ -18254,12 +15847,12 @@
 </p:sld>
 </file>
 
-<file path=ppt/slides/slide8.xml><?xml version="1.0" encoding="utf-8"?>
+<file path=ppt/slides/slide5.xml><?xml version="1.0" encoding="utf-8"?>
 <p:sld xmlns:a="http://schemas.openxmlformats.org/drawingml/2006/main" xmlns:r="http://schemas.openxmlformats.org/officeDocument/2006/relationships" xmlns:mc="http://schemas.openxmlformats.org/markup-compatibility/2006" xmlns:mv="urn:schemas-microsoft-com:mac:vml" xmlns:p="http://schemas.openxmlformats.org/presentationml/2006/main" xmlns:c="http://schemas.openxmlformats.org/drawingml/2006/chart" xmlns:dgm="http://schemas.openxmlformats.org/drawingml/2006/diagram" xmlns:o="urn:schemas-microsoft-com:office:office" xmlns:v="urn:schemas-microsoft-com:vml" xmlns:pvml="urn:schemas-microsoft-com:office:powerpoint" xmlns:com="http://schemas.openxmlformats.org/drawingml/2006/compatibility" xmlns:p14="http://schemas.microsoft.com/office/powerpoint/2010/main" xmlns:p15="http://schemas.microsoft.com/office/powerpoint/2012/main" xmlns:ahyp="http://schemas.microsoft.com/office/drawing/2018/hyperlinkcolor">
   <p:cSld>
     <p:spTree>
       <p:nvGrpSpPr>
-        <p:cNvPr id="109" name="Shape 109"/>
+        <p:cNvPr id="91" name="Shape 91"/>
         <p:cNvGrpSpPr/>
         <p:nvPr/>
       </p:nvGrpSpPr>
@@ -18273,7 +15866,7 @@
       </p:grpSpPr>
       <p:pic>
         <p:nvPicPr>
-          <p:cNvPr id="110" name="Google Shape;110;p23"/>
+          <p:cNvPr id="92" name="Google Shape;92;p20"/>
           <p:cNvPicPr preferRelativeResize="0"/>
           <p:nvPr/>
         </p:nvPicPr>
@@ -18301,7 +15894,7 @@
       </p:pic>
       <p:sp>
         <p:nvSpPr>
-          <p:cNvPr id="111" name="Google Shape;111;p23"/>
+          <p:cNvPr id="93" name="Google Shape;93;p20"/>
           <p:cNvSpPr txBox="1"/>
           <p:nvPr/>
         </p:nvSpPr>
@@ -18403,12 +15996,12 @@
 </p:sld>
 </file>
 
-<file path=ppt/slides/slide9.xml><?xml version="1.0" encoding="utf-8"?>
+<file path=ppt/slides/slide6.xml><?xml version="1.0" encoding="utf-8"?>
 <p:sld xmlns:a="http://schemas.openxmlformats.org/drawingml/2006/main" xmlns:r="http://schemas.openxmlformats.org/officeDocument/2006/relationships" xmlns:mc="http://schemas.openxmlformats.org/markup-compatibility/2006" xmlns:mv="urn:schemas-microsoft-com:mac:vml" xmlns:p="http://schemas.openxmlformats.org/presentationml/2006/main" xmlns:c="http://schemas.openxmlformats.org/drawingml/2006/chart" xmlns:dgm="http://schemas.openxmlformats.org/drawingml/2006/diagram" xmlns:o="urn:schemas-microsoft-com:office:office" xmlns:v="urn:schemas-microsoft-com:vml" xmlns:pvml="urn:schemas-microsoft-com:office:powerpoint" xmlns:com="http://schemas.openxmlformats.org/drawingml/2006/compatibility" xmlns:p14="http://schemas.microsoft.com/office/powerpoint/2010/main" xmlns:p15="http://schemas.microsoft.com/office/powerpoint/2012/main" xmlns:ahyp="http://schemas.microsoft.com/office/drawing/2018/hyperlinkcolor">
   <p:cSld>
     <p:spTree>
       <p:nvGrpSpPr>
-        <p:cNvPr id="115" name="Shape 115"/>
+        <p:cNvPr id="97" name="Shape 97"/>
         <p:cNvGrpSpPr/>
         <p:nvPr/>
       </p:nvGrpSpPr>
@@ -18422,7 +16015,7 @@
       </p:grpSpPr>
       <p:sp>
         <p:nvSpPr>
-          <p:cNvPr id="116" name="Google Shape;116;p24"/>
+          <p:cNvPr id="98" name="Google Shape;98;p21"/>
           <p:cNvSpPr txBox="1"/>
           <p:nvPr/>
         </p:nvSpPr>
@@ -18783,10 +16376,967 @@
 </p:sld>
 </file>
 
+<file path=ppt/slides/slide7.xml><?xml version="1.0" encoding="utf-8"?>
+<p:sld xmlns:a="http://schemas.openxmlformats.org/drawingml/2006/main" xmlns:r="http://schemas.openxmlformats.org/officeDocument/2006/relationships" xmlns:mc="http://schemas.openxmlformats.org/markup-compatibility/2006" xmlns:mv="urn:schemas-microsoft-com:mac:vml" xmlns:p="http://schemas.openxmlformats.org/presentationml/2006/main" xmlns:c="http://schemas.openxmlformats.org/drawingml/2006/chart" xmlns:dgm="http://schemas.openxmlformats.org/drawingml/2006/diagram" xmlns:o="urn:schemas-microsoft-com:office:office" xmlns:v="urn:schemas-microsoft-com:vml" xmlns:pvml="urn:schemas-microsoft-com:office:powerpoint" xmlns:com="http://schemas.openxmlformats.org/drawingml/2006/compatibility" xmlns:p14="http://schemas.microsoft.com/office/powerpoint/2010/main" xmlns:p15="http://schemas.microsoft.com/office/powerpoint/2012/main" xmlns:ahyp="http://schemas.microsoft.com/office/drawing/2018/hyperlinkcolor">
+  <p:cSld>
+    <p:spTree>
+      <p:nvGrpSpPr>
+        <p:cNvPr id="102" name="Shape 102"/>
+        <p:cNvGrpSpPr/>
+        <p:nvPr/>
+      </p:nvGrpSpPr>
+      <p:grpSpPr>
+        <a:xfrm>
+          <a:off x="0" y="0"/>
+          <a:ext cx="0" cy="0"/>
+          <a:chOff x="0" y="0"/>
+          <a:chExt cx="0" cy="0"/>
+        </a:xfrm>
+      </p:grpSpPr>
+      <p:sp>
+        <p:nvSpPr>
+          <p:cNvPr id="103" name="Google Shape;103;p22"/>
+          <p:cNvSpPr txBox="1"/>
+          <p:nvPr/>
+        </p:nvSpPr>
+        <p:spPr>
+          <a:xfrm>
+            <a:off x="100800" y="67250"/>
+            <a:ext cx="8959500" cy="4436100"/>
+          </a:xfrm>
+          <a:prstGeom prst="rect">
+            <a:avLst/>
+          </a:prstGeom>
+          <a:solidFill>
+            <a:srgbClr val="D9EAD3"/>
+          </a:solidFill>
+          <a:ln>
+            <a:noFill/>
+          </a:ln>
+        </p:spPr>
+        <p:txBody>
+          <a:bodyPr anchorCtr="0" anchor="t" bIns="91425" lIns="91425" spcFirstLastPara="1" rIns="91425" wrap="square" tIns="91425">
+            <a:spAutoFit/>
+          </a:bodyPr>
+          <a:lstStyle/>
+          <a:p>
+            <a:pPr indent="0" lvl="0" marL="0" rtl="0" algn="l">
+              <a:lnSpc>
+                <a:spcPct val="115000"/>
+              </a:lnSpc>
+              <a:spcBef>
+                <a:spcPts val="0"/>
+              </a:spcBef>
+              <a:spcAft>
+                <a:spcPts val="0"/>
+              </a:spcAft>
+              <a:buClr>
+                <a:schemeClr val="dk1"/>
+              </a:buClr>
+              <a:buSzPts val="1100"/>
+              <a:buFont typeface="Arial"/>
+              <a:buNone/>
+            </a:pPr>
+            <a:r>
+              <a:rPr b="1" lang="en" sz="1900">
+                <a:solidFill>
+                  <a:schemeClr val="dk1"/>
+                </a:solidFill>
+              </a:rPr>
+              <a:t>@jit</a:t>
+            </a:r>
+            <a:endParaRPr b="1" sz="1900">
+              <a:solidFill>
+                <a:schemeClr val="dk1"/>
+              </a:solidFill>
+            </a:endParaRPr>
+          </a:p>
+          <a:p>
+            <a:pPr indent="0" lvl="0" marL="0" rtl="0" algn="l">
+              <a:lnSpc>
+                <a:spcPct val="115000"/>
+              </a:lnSpc>
+              <a:spcBef>
+                <a:spcPts val="0"/>
+              </a:spcBef>
+              <a:spcAft>
+                <a:spcPts val="0"/>
+              </a:spcAft>
+              <a:buClr>
+                <a:schemeClr val="dk1"/>
+              </a:buClr>
+              <a:buSzPts val="1100"/>
+              <a:buFont typeface="Arial"/>
+              <a:buNone/>
+            </a:pPr>
+            <a:r>
+              <a:rPr lang="en" sz="1900">
+                <a:solidFill>
+                  <a:schemeClr val="dk1"/>
+                </a:solidFill>
+              </a:rPr>
+              <a:t>def create_fractal(min_x, max_x, min_y, max_y, image, iters):</a:t>
+            </a:r>
+            <a:endParaRPr sz="1900">
+              <a:solidFill>
+                <a:schemeClr val="dk1"/>
+              </a:solidFill>
+            </a:endParaRPr>
+          </a:p>
+          <a:p>
+            <a:pPr indent="0" lvl="0" marL="0" rtl="0" algn="l">
+              <a:lnSpc>
+                <a:spcPct val="115000"/>
+              </a:lnSpc>
+              <a:spcBef>
+                <a:spcPts val="0"/>
+              </a:spcBef>
+              <a:spcAft>
+                <a:spcPts val="0"/>
+              </a:spcAft>
+              <a:buClr>
+                <a:schemeClr val="dk1"/>
+              </a:buClr>
+              <a:buSzPts val="1100"/>
+              <a:buFont typeface="Arial"/>
+              <a:buNone/>
+            </a:pPr>
+            <a:r>
+              <a:rPr lang="en" sz="1900">
+                <a:solidFill>
+                  <a:schemeClr val="dk1"/>
+                </a:solidFill>
+              </a:rPr>
+              <a:t>  height = image.shape[0]</a:t>
+            </a:r>
+            <a:endParaRPr sz="1900">
+              <a:solidFill>
+                <a:schemeClr val="dk1"/>
+              </a:solidFill>
+            </a:endParaRPr>
+          </a:p>
+          <a:p>
+            <a:pPr indent="0" lvl="0" marL="0" rtl="0" algn="l">
+              <a:lnSpc>
+                <a:spcPct val="115000"/>
+              </a:lnSpc>
+              <a:spcBef>
+                <a:spcPts val="0"/>
+              </a:spcBef>
+              <a:spcAft>
+                <a:spcPts val="0"/>
+              </a:spcAft>
+              <a:buClr>
+                <a:schemeClr val="dk1"/>
+              </a:buClr>
+              <a:buSzPts val="1100"/>
+              <a:buFont typeface="Arial"/>
+              <a:buNone/>
+            </a:pPr>
+            <a:r>
+              <a:rPr lang="en" sz="1900">
+                <a:solidFill>
+                  <a:schemeClr val="dk1"/>
+                </a:solidFill>
+              </a:rPr>
+              <a:t>  width = image.shape[1]</a:t>
+            </a:r>
+            <a:endParaRPr sz="1900">
+              <a:solidFill>
+                <a:schemeClr val="dk1"/>
+              </a:solidFill>
+            </a:endParaRPr>
+          </a:p>
+          <a:p>
+            <a:pPr indent="0" lvl="0" marL="0" rtl="0" algn="l">
+              <a:lnSpc>
+                <a:spcPct val="115000"/>
+              </a:lnSpc>
+              <a:spcBef>
+                <a:spcPts val="0"/>
+              </a:spcBef>
+              <a:spcAft>
+                <a:spcPts val="0"/>
+              </a:spcAft>
+              <a:buClr>
+                <a:schemeClr val="dk1"/>
+              </a:buClr>
+              <a:buSzPts val="1100"/>
+              <a:buFont typeface="Arial"/>
+              <a:buNone/>
+            </a:pPr>
+            <a:r>
+              <a:rPr lang="en" sz="1900">
+                <a:solidFill>
+                  <a:schemeClr val="dk1"/>
+                </a:solidFill>
+              </a:rPr>
+              <a:t>  pixel_size_x = (max_x - min_x) / width</a:t>
+            </a:r>
+            <a:endParaRPr sz="1900">
+              <a:solidFill>
+                <a:schemeClr val="dk1"/>
+              </a:solidFill>
+            </a:endParaRPr>
+          </a:p>
+          <a:p>
+            <a:pPr indent="0" lvl="0" marL="0" rtl="0" algn="l">
+              <a:lnSpc>
+                <a:spcPct val="115000"/>
+              </a:lnSpc>
+              <a:spcBef>
+                <a:spcPts val="0"/>
+              </a:spcBef>
+              <a:spcAft>
+                <a:spcPts val="0"/>
+              </a:spcAft>
+              <a:buClr>
+                <a:schemeClr val="dk1"/>
+              </a:buClr>
+              <a:buSzPts val="1100"/>
+              <a:buFont typeface="Arial"/>
+              <a:buNone/>
+            </a:pPr>
+            <a:r>
+              <a:rPr lang="en" sz="1900">
+                <a:solidFill>
+                  <a:schemeClr val="dk1"/>
+                </a:solidFill>
+              </a:rPr>
+              <a:t>  pixel_size_y = (max_y - min_y) / height</a:t>
+            </a:r>
+            <a:endParaRPr sz="1900">
+              <a:solidFill>
+                <a:schemeClr val="dk1"/>
+              </a:solidFill>
+            </a:endParaRPr>
+          </a:p>
+          <a:p>
+            <a:pPr indent="0" lvl="0" marL="0" rtl="0" algn="l">
+              <a:lnSpc>
+                <a:spcPct val="115000"/>
+              </a:lnSpc>
+              <a:spcBef>
+                <a:spcPts val="0"/>
+              </a:spcBef>
+              <a:spcAft>
+                <a:spcPts val="0"/>
+              </a:spcAft>
+              <a:buClr>
+                <a:schemeClr val="dk1"/>
+              </a:buClr>
+              <a:buSzPts val="1100"/>
+              <a:buFont typeface="Arial"/>
+              <a:buNone/>
+            </a:pPr>
+            <a:r>
+              <a:rPr lang="en" sz="1900">
+                <a:solidFill>
+                  <a:schemeClr val="dk1"/>
+                </a:solidFill>
+              </a:rPr>
+              <a:t>  for x in range(width):</a:t>
+            </a:r>
+            <a:endParaRPr sz="1900">
+              <a:solidFill>
+                <a:schemeClr val="dk1"/>
+              </a:solidFill>
+            </a:endParaRPr>
+          </a:p>
+          <a:p>
+            <a:pPr indent="0" lvl="0" marL="0" rtl="0" algn="l">
+              <a:lnSpc>
+                <a:spcPct val="115000"/>
+              </a:lnSpc>
+              <a:spcBef>
+                <a:spcPts val="0"/>
+              </a:spcBef>
+              <a:spcAft>
+                <a:spcPts val="0"/>
+              </a:spcAft>
+              <a:buClr>
+                <a:schemeClr val="dk1"/>
+              </a:buClr>
+              <a:buSzPts val="1100"/>
+              <a:buFont typeface="Arial"/>
+              <a:buNone/>
+            </a:pPr>
+            <a:r>
+              <a:rPr lang="en" sz="1900">
+                <a:solidFill>
+                  <a:schemeClr val="dk1"/>
+                </a:solidFill>
+              </a:rPr>
+              <a:t>    real = min_x + x * pixel_size_x</a:t>
+            </a:r>
+            <a:endParaRPr sz="1900">
+              <a:solidFill>
+                <a:schemeClr val="dk1"/>
+              </a:solidFill>
+            </a:endParaRPr>
+          </a:p>
+          <a:p>
+            <a:pPr indent="0" lvl="0" marL="0" rtl="0" algn="l">
+              <a:lnSpc>
+                <a:spcPct val="115000"/>
+              </a:lnSpc>
+              <a:spcBef>
+                <a:spcPts val="0"/>
+              </a:spcBef>
+              <a:spcAft>
+                <a:spcPts val="0"/>
+              </a:spcAft>
+              <a:buClr>
+                <a:schemeClr val="dk1"/>
+              </a:buClr>
+              <a:buSzPts val="1100"/>
+              <a:buFont typeface="Arial"/>
+              <a:buNone/>
+            </a:pPr>
+            <a:r>
+              <a:rPr lang="en" sz="1900">
+                <a:solidFill>
+                  <a:schemeClr val="dk1"/>
+                </a:solidFill>
+              </a:rPr>
+              <a:t>    for y in range(height):</a:t>
+            </a:r>
+            <a:endParaRPr sz="1900">
+              <a:solidFill>
+                <a:schemeClr val="dk1"/>
+              </a:solidFill>
+            </a:endParaRPr>
+          </a:p>
+          <a:p>
+            <a:pPr indent="0" lvl="0" marL="0" rtl="0" algn="l">
+              <a:lnSpc>
+                <a:spcPct val="115000"/>
+              </a:lnSpc>
+              <a:spcBef>
+                <a:spcPts val="0"/>
+              </a:spcBef>
+              <a:spcAft>
+                <a:spcPts val="0"/>
+              </a:spcAft>
+              <a:buClr>
+                <a:schemeClr val="dk1"/>
+              </a:buClr>
+              <a:buSzPts val="1100"/>
+              <a:buFont typeface="Arial"/>
+              <a:buNone/>
+            </a:pPr>
+            <a:r>
+              <a:rPr lang="en" sz="1900">
+                <a:solidFill>
+                  <a:schemeClr val="dk1"/>
+                </a:solidFill>
+              </a:rPr>
+              <a:t>      imag = min_y + y * pixel_size_y</a:t>
+            </a:r>
+            <a:endParaRPr sz="1900">
+              <a:solidFill>
+                <a:schemeClr val="dk1"/>
+              </a:solidFill>
+            </a:endParaRPr>
+          </a:p>
+          <a:p>
+            <a:pPr indent="0" lvl="0" marL="0" rtl="0" algn="l">
+              <a:lnSpc>
+                <a:spcPct val="115000"/>
+              </a:lnSpc>
+              <a:spcBef>
+                <a:spcPts val="0"/>
+              </a:spcBef>
+              <a:spcAft>
+                <a:spcPts val="0"/>
+              </a:spcAft>
+              <a:buClr>
+                <a:schemeClr val="dk1"/>
+              </a:buClr>
+              <a:buSzPts val="1100"/>
+              <a:buFont typeface="Arial"/>
+              <a:buNone/>
+            </a:pPr>
+            <a:r>
+              <a:rPr lang="en" sz="1900">
+                <a:solidFill>
+                  <a:schemeClr val="dk1"/>
+                </a:solidFill>
+              </a:rPr>
+              <a:t>      color = mandel(real, imag, iters)</a:t>
+            </a:r>
+            <a:endParaRPr sz="1900">
+              <a:solidFill>
+                <a:schemeClr val="dk1"/>
+              </a:solidFill>
+            </a:endParaRPr>
+          </a:p>
+          <a:p>
+            <a:pPr indent="0" lvl="0" marL="0" rtl="0" algn="l">
+              <a:lnSpc>
+                <a:spcPct val="115000"/>
+              </a:lnSpc>
+              <a:spcBef>
+                <a:spcPts val="0"/>
+              </a:spcBef>
+              <a:spcAft>
+                <a:spcPts val="0"/>
+              </a:spcAft>
+              <a:buClr>
+                <a:schemeClr val="dk1"/>
+              </a:buClr>
+              <a:buSzPts val="1100"/>
+              <a:buFont typeface="Arial"/>
+              <a:buNone/>
+            </a:pPr>
+            <a:r>
+              <a:rPr lang="en" sz="1900">
+                <a:solidFill>
+                  <a:schemeClr val="dk1"/>
+                </a:solidFill>
+              </a:rPr>
+              <a:t>      image[y, x] = color</a:t>
+            </a:r>
+            <a:endParaRPr sz="1900">
+              <a:solidFill>
+                <a:schemeClr val="dk1"/>
+              </a:solidFill>
+            </a:endParaRPr>
+          </a:p>
+          <a:p>
+            <a:pPr indent="0" lvl="0" marL="0" rtl="0" algn="l">
+              <a:spcBef>
+                <a:spcPts val="0"/>
+              </a:spcBef>
+              <a:spcAft>
+                <a:spcPts val="0"/>
+              </a:spcAft>
+              <a:buNone/>
+            </a:pPr>
+            <a:r>
+              <a:t/>
+            </a:r>
+            <a:endParaRPr/>
+          </a:p>
+        </p:txBody>
+      </p:sp>
+    </p:spTree>
+  </p:cSld>
+  <p:clrMapOvr>
+    <a:masterClrMapping/>
+  </p:clrMapOvr>
+</p:sld>
+</file>
+
+<file path=ppt/slides/slide8.xml><?xml version="1.0" encoding="utf-8"?>
+<p:sld xmlns:a="http://schemas.openxmlformats.org/drawingml/2006/main" xmlns:r="http://schemas.openxmlformats.org/officeDocument/2006/relationships" xmlns:mc="http://schemas.openxmlformats.org/markup-compatibility/2006" xmlns:mv="urn:schemas-microsoft-com:mac:vml" xmlns:p="http://schemas.openxmlformats.org/presentationml/2006/main" xmlns:c="http://schemas.openxmlformats.org/drawingml/2006/chart" xmlns:dgm="http://schemas.openxmlformats.org/drawingml/2006/diagram" xmlns:o="urn:schemas-microsoft-com:office:office" xmlns:v="urn:schemas-microsoft-com:vml" xmlns:pvml="urn:schemas-microsoft-com:office:powerpoint" xmlns:com="http://schemas.openxmlformats.org/drawingml/2006/compatibility" xmlns:p14="http://schemas.microsoft.com/office/powerpoint/2010/main" xmlns:p15="http://schemas.microsoft.com/office/powerpoint/2012/main" xmlns:ahyp="http://schemas.microsoft.com/office/drawing/2018/hyperlinkcolor">
+  <p:cSld>
+    <p:spTree>
+      <p:nvGrpSpPr>
+        <p:cNvPr id="107" name="Shape 107"/>
+        <p:cNvGrpSpPr/>
+        <p:nvPr/>
+      </p:nvGrpSpPr>
+      <p:grpSpPr>
+        <a:xfrm>
+          <a:off x="0" y="0"/>
+          <a:ext cx="0" cy="0"/>
+          <a:chOff x="0" y="0"/>
+          <a:chExt cx="0" cy="0"/>
+        </a:xfrm>
+      </p:grpSpPr>
+      <p:sp>
+        <p:nvSpPr>
+          <p:cNvPr id="108" name="Google Shape;108;p23"/>
+          <p:cNvSpPr txBox="1"/>
+          <p:nvPr/>
+        </p:nvSpPr>
+        <p:spPr>
+          <a:xfrm>
+            <a:off x="100800" y="465025"/>
+            <a:ext cx="8925900" cy="4099800"/>
+          </a:xfrm>
+          <a:prstGeom prst="rect">
+            <a:avLst/>
+          </a:prstGeom>
+          <a:solidFill>
+            <a:srgbClr val="D9EAD3"/>
+          </a:solidFill>
+          <a:ln>
+            <a:noFill/>
+          </a:ln>
+        </p:spPr>
+        <p:txBody>
+          <a:bodyPr anchorCtr="0" anchor="t" bIns="91425" lIns="91425" spcFirstLastPara="1" rIns="91425" wrap="square" tIns="91425">
+            <a:spAutoFit/>
+          </a:bodyPr>
+          <a:lstStyle/>
+          <a:p>
+            <a:pPr indent="0" lvl="0" marL="0" rtl="0" algn="l">
+              <a:lnSpc>
+                <a:spcPct val="115000"/>
+              </a:lnSpc>
+              <a:spcBef>
+                <a:spcPts val="0"/>
+              </a:spcBef>
+              <a:spcAft>
+                <a:spcPts val="0"/>
+              </a:spcAft>
+              <a:buClr>
+                <a:schemeClr val="dk1"/>
+              </a:buClr>
+              <a:buSzPts val="1100"/>
+              <a:buFont typeface="Arial"/>
+              <a:buNone/>
+            </a:pPr>
+            <a:r>
+              <a:rPr lang="en" sz="1900">
+                <a:solidFill>
+                  <a:schemeClr val="dk1"/>
+                </a:solidFill>
+              </a:rPr>
+              <a:t>image = np.zeros((1024, 1536), dtype = np.uint8)</a:t>
+            </a:r>
+            <a:endParaRPr sz="1900">
+              <a:solidFill>
+                <a:schemeClr val="dk1"/>
+              </a:solidFill>
+            </a:endParaRPr>
+          </a:p>
+          <a:p>
+            <a:pPr indent="0" lvl="0" marL="0" rtl="0" algn="l">
+              <a:lnSpc>
+                <a:spcPct val="115000"/>
+              </a:lnSpc>
+              <a:spcBef>
+                <a:spcPts val="0"/>
+              </a:spcBef>
+              <a:spcAft>
+                <a:spcPts val="0"/>
+              </a:spcAft>
+              <a:buNone/>
+            </a:pPr>
+            <a:r>
+              <a:t/>
+            </a:r>
+            <a:endParaRPr sz="1900">
+              <a:solidFill>
+                <a:schemeClr val="dk1"/>
+              </a:solidFill>
+            </a:endParaRPr>
+          </a:p>
+          <a:p>
+            <a:pPr indent="0" lvl="0" marL="0" rtl="0" algn="l">
+              <a:lnSpc>
+                <a:spcPct val="115000"/>
+              </a:lnSpc>
+              <a:spcBef>
+                <a:spcPts val="0"/>
+              </a:spcBef>
+              <a:spcAft>
+                <a:spcPts val="0"/>
+              </a:spcAft>
+              <a:buClr>
+                <a:schemeClr val="dk1"/>
+              </a:buClr>
+              <a:buSzPts val="1100"/>
+              <a:buFont typeface="Arial"/>
+              <a:buNone/>
+            </a:pPr>
+            <a:r>
+              <a:rPr lang="en" sz="1900">
+                <a:solidFill>
+                  <a:schemeClr val="dk1"/>
+                </a:solidFill>
+              </a:rPr>
+              <a:t>start = timer()</a:t>
+            </a:r>
+            <a:endParaRPr sz="1900">
+              <a:solidFill>
+                <a:schemeClr val="dk1"/>
+              </a:solidFill>
+            </a:endParaRPr>
+          </a:p>
+          <a:p>
+            <a:pPr indent="0" lvl="0" marL="0" rtl="0" algn="l">
+              <a:lnSpc>
+                <a:spcPct val="115000"/>
+              </a:lnSpc>
+              <a:spcBef>
+                <a:spcPts val="0"/>
+              </a:spcBef>
+              <a:spcAft>
+                <a:spcPts val="0"/>
+              </a:spcAft>
+              <a:buClr>
+                <a:schemeClr val="dk1"/>
+              </a:buClr>
+              <a:buSzPts val="1100"/>
+              <a:buFont typeface="Arial"/>
+              <a:buNone/>
+            </a:pPr>
+            <a:r>
+              <a:rPr lang="en" sz="1900">
+                <a:solidFill>
+                  <a:schemeClr val="dk1"/>
+                </a:solidFill>
+              </a:rPr>
+              <a:t>create_fractal(-2.0, 1.0, -1.0, 1.0, image, 20)</a:t>
+            </a:r>
+            <a:endParaRPr sz="1900">
+              <a:solidFill>
+                <a:schemeClr val="dk1"/>
+              </a:solidFill>
+            </a:endParaRPr>
+          </a:p>
+          <a:p>
+            <a:pPr indent="0" lvl="0" marL="0" rtl="0" algn="l">
+              <a:lnSpc>
+                <a:spcPct val="115000"/>
+              </a:lnSpc>
+              <a:spcBef>
+                <a:spcPts val="0"/>
+              </a:spcBef>
+              <a:spcAft>
+                <a:spcPts val="0"/>
+              </a:spcAft>
+              <a:buClr>
+                <a:schemeClr val="dk1"/>
+              </a:buClr>
+              <a:buSzPts val="1100"/>
+              <a:buFont typeface="Arial"/>
+              <a:buNone/>
+            </a:pPr>
+            <a:r>
+              <a:rPr lang="en" sz="1900">
+                <a:solidFill>
+                  <a:schemeClr val="dk1"/>
+                </a:solidFill>
+              </a:rPr>
+              <a:t>dt = timer() - start</a:t>
+            </a:r>
+            <a:endParaRPr sz="1900">
+              <a:solidFill>
+                <a:schemeClr val="dk1"/>
+              </a:solidFill>
+            </a:endParaRPr>
+          </a:p>
+          <a:p>
+            <a:pPr indent="0" lvl="0" marL="0" rtl="0" algn="l">
+              <a:lnSpc>
+                <a:spcPct val="115000"/>
+              </a:lnSpc>
+              <a:spcBef>
+                <a:spcPts val="0"/>
+              </a:spcBef>
+              <a:spcAft>
+                <a:spcPts val="0"/>
+              </a:spcAft>
+              <a:buNone/>
+            </a:pPr>
+            <a:r>
+              <a:t/>
+            </a:r>
+            <a:endParaRPr sz="1900">
+              <a:solidFill>
+                <a:schemeClr val="dk1"/>
+              </a:solidFill>
+            </a:endParaRPr>
+          </a:p>
+          <a:p>
+            <a:pPr indent="0" lvl="0" marL="0" rtl="0" algn="l">
+              <a:lnSpc>
+                <a:spcPct val="115000"/>
+              </a:lnSpc>
+              <a:spcBef>
+                <a:spcPts val="0"/>
+              </a:spcBef>
+              <a:spcAft>
+                <a:spcPts val="0"/>
+              </a:spcAft>
+              <a:buClr>
+                <a:schemeClr val="dk1"/>
+              </a:buClr>
+              <a:buSzPts val="1100"/>
+              <a:buFont typeface="Arial"/>
+              <a:buNone/>
+            </a:pPr>
+            <a:r>
+              <a:rPr lang="en" sz="1900">
+                <a:solidFill>
+                  <a:schemeClr val="dk1"/>
+                </a:solidFill>
+              </a:rPr>
+              <a:t>dt/=1000000</a:t>
+            </a:r>
+            <a:endParaRPr sz="1900">
+              <a:solidFill>
+                <a:schemeClr val="dk1"/>
+              </a:solidFill>
+            </a:endParaRPr>
+          </a:p>
+          <a:p>
+            <a:pPr indent="0" lvl="0" marL="0" rtl="0" algn="l">
+              <a:lnSpc>
+                <a:spcPct val="115000"/>
+              </a:lnSpc>
+              <a:spcBef>
+                <a:spcPts val="0"/>
+              </a:spcBef>
+              <a:spcAft>
+                <a:spcPts val="0"/>
+              </a:spcAft>
+              <a:buClr>
+                <a:schemeClr val="dk1"/>
+              </a:buClr>
+              <a:buSzPts val="1100"/>
+              <a:buFont typeface="Arial"/>
+              <a:buNone/>
+            </a:pPr>
+            <a:r>
+              <a:rPr lang="en" sz="1900">
+                <a:solidFill>
+                  <a:schemeClr val="dk1"/>
+                </a:solidFill>
+              </a:rPr>
+              <a:t>print ("Mandelbrot created in %f ms" % dt)</a:t>
+            </a:r>
+            <a:endParaRPr sz="1900">
+              <a:solidFill>
+                <a:schemeClr val="dk1"/>
+              </a:solidFill>
+            </a:endParaRPr>
+          </a:p>
+          <a:p>
+            <a:pPr indent="0" lvl="0" marL="0" rtl="0" algn="l">
+              <a:lnSpc>
+                <a:spcPct val="115000"/>
+              </a:lnSpc>
+              <a:spcBef>
+                <a:spcPts val="0"/>
+              </a:spcBef>
+              <a:spcAft>
+                <a:spcPts val="0"/>
+              </a:spcAft>
+              <a:buNone/>
+            </a:pPr>
+            <a:r>
+              <a:t/>
+            </a:r>
+            <a:endParaRPr sz="1900">
+              <a:solidFill>
+                <a:schemeClr val="dk1"/>
+              </a:solidFill>
+            </a:endParaRPr>
+          </a:p>
+          <a:p>
+            <a:pPr indent="0" lvl="0" marL="0" rtl="0" algn="l">
+              <a:lnSpc>
+                <a:spcPct val="115000"/>
+              </a:lnSpc>
+              <a:spcBef>
+                <a:spcPts val="0"/>
+              </a:spcBef>
+              <a:spcAft>
+                <a:spcPts val="0"/>
+              </a:spcAft>
+              <a:buClr>
+                <a:schemeClr val="dk1"/>
+              </a:buClr>
+              <a:buSzPts val="1100"/>
+              <a:buFont typeface="Arial"/>
+              <a:buNone/>
+            </a:pPr>
+            <a:r>
+              <a:rPr lang="en" sz="1900">
+                <a:solidFill>
+                  <a:schemeClr val="dk1"/>
+                </a:solidFill>
+              </a:rPr>
+              <a:t>imshow(image)</a:t>
+            </a:r>
+            <a:endParaRPr sz="1900">
+              <a:solidFill>
+                <a:schemeClr val="dk1"/>
+              </a:solidFill>
+            </a:endParaRPr>
+          </a:p>
+          <a:p>
+            <a:pPr indent="0" lvl="0" marL="0" rtl="0" algn="l">
+              <a:lnSpc>
+                <a:spcPct val="115000"/>
+              </a:lnSpc>
+              <a:spcBef>
+                <a:spcPts val="0"/>
+              </a:spcBef>
+              <a:spcAft>
+                <a:spcPts val="0"/>
+              </a:spcAft>
+              <a:buClr>
+                <a:schemeClr val="dk1"/>
+              </a:buClr>
+              <a:buSzPts val="1100"/>
+              <a:buFont typeface="Arial"/>
+              <a:buNone/>
+            </a:pPr>
+            <a:r>
+              <a:rPr lang="en" sz="1900">
+                <a:solidFill>
+                  <a:schemeClr val="dk1"/>
+                </a:solidFill>
+              </a:rPr>
+              <a:t>show()</a:t>
+            </a:r>
+            <a:endParaRPr sz="1900">
+              <a:solidFill>
+                <a:schemeClr val="dk1"/>
+              </a:solidFill>
+            </a:endParaRPr>
+          </a:p>
+          <a:p>
+            <a:pPr indent="0" lvl="0" marL="0" rtl="0" algn="l">
+              <a:spcBef>
+                <a:spcPts val="0"/>
+              </a:spcBef>
+              <a:spcAft>
+                <a:spcPts val="0"/>
+              </a:spcAft>
+              <a:buNone/>
+            </a:pPr>
+            <a:r>
+              <a:t/>
+            </a:r>
+            <a:endParaRPr/>
+          </a:p>
+        </p:txBody>
+      </p:sp>
+    </p:spTree>
+  </p:cSld>
+  <p:clrMapOvr>
+    <a:masterClrMapping/>
+  </p:clrMapOvr>
+</p:sld>
+</file>
+
+<file path=ppt/slides/slide9.xml><?xml version="1.0" encoding="utf-8"?>
+<p:sld xmlns:a="http://schemas.openxmlformats.org/drawingml/2006/main" xmlns:r="http://schemas.openxmlformats.org/officeDocument/2006/relationships" xmlns:mc="http://schemas.openxmlformats.org/markup-compatibility/2006" xmlns:mv="urn:schemas-microsoft-com:mac:vml" xmlns:p="http://schemas.openxmlformats.org/presentationml/2006/main" xmlns:c="http://schemas.openxmlformats.org/drawingml/2006/chart" xmlns:dgm="http://schemas.openxmlformats.org/drawingml/2006/diagram" xmlns:o="urn:schemas-microsoft-com:office:office" xmlns:v="urn:schemas-microsoft-com:vml" xmlns:pvml="urn:schemas-microsoft-com:office:powerpoint" xmlns:com="http://schemas.openxmlformats.org/drawingml/2006/compatibility" xmlns:p14="http://schemas.microsoft.com/office/powerpoint/2010/main" xmlns:p15="http://schemas.microsoft.com/office/powerpoint/2012/main" xmlns:ahyp="http://schemas.microsoft.com/office/drawing/2018/hyperlinkcolor">
+  <p:cSld>
+    <p:spTree>
+      <p:nvGrpSpPr>
+        <p:cNvPr id="112" name="Shape 112"/>
+        <p:cNvGrpSpPr/>
+        <p:nvPr/>
+      </p:nvGrpSpPr>
+      <p:grpSpPr>
+        <a:xfrm>
+          <a:off x="0" y="0"/>
+          <a:ext cx="0" cy="0"/>
+          <a:chOff x="0" y="0"/>
+          <a:chExt cx="0" cy="0"/>
+        </a:xfrm>
+      </p:grpSpPr>
+      <p:sp>
+        <p:nvSpPr>
+          <p:cNvPr id="113" name="Google Shape;113;p24"/>
+          <p:cNvSpPr txBox="1"/>
+          <p:nvPr/>
+        </p:nvSpPr>
+        <p:spPr>
+          <a:xfrm>
+            <a:off x="100800" y="1251500"/>
+            <a:ext cx="8808600" cy="800400"/>
+          </a:xfrm>
+          <a:prstGeom prst="rect">
+            <a:avLst/>
+          </a:prstGeom>
+          <a:solidFill>
+            <a:srgbClr val="D9D9D9"/>
+          </a:solidFill>
+          <a:ln>
+            <a:noFill/>
+          </a:ln>
+        </p:spPr>
+        <p:txBody>
+          <a:bodyPr anchorCtr="0" anchor="t" bIns="91425" lIns="91425" spcFirstLastPara="1" rIns="91425" wrap="square" tIns="91425">
+            <a:spAutoFit/>
+          </a:bodyPr>
+          <a:lstStyle/>
+          <a:p>
+            <a:pPr indent="0" lvl="0" marL="0" rtl="0" algn="l">
+              <a:spcBef>
+                <a:spcPts val="0"/>
+              </a:spcBef>
+              <a:spcAft>
+                <a:spcPts val="0"/>
+              </a:spcAft>
+              <a:buClr>
+                <a:schemeClr val="dk1"/>
+              </a:buClr>
+              <a:buSzPts val="1100"/>
+              <a:buFont typeface="Arial"/>
+              <a:buNone/>
+            </a:pPr>
+            <a:r>
+              <a:rPr lang="en" sz="2000">
+                <a:solidFill>
+                  <a:schemeClr val="dk1"/>
+                </a:solidFill>
+                <a:highlight>
+                  <a:srgbClr val="D9D9D9"/>
+                </a:highlight>
+              </a:rPr>
+              <a:t>Lab10&gt; python mandel_numba.py</a:t>
+            </a:r>
+            <a:endParaRPr sz="2000">
+              <a:solidFill>
+                <a:schemeClr val="dk1"/>
+              </a:solidFill>
+              <a:highlight>
+                <a:srgbClr val="D9D9D9"/>
+              </a:highlight>
+            </a:endParaRPr>
+          </a:p>
+          <a:p>
+            <a:pPr indent="0" lvl="0" marL="0" rtl="0" algn="l">
+              <a:spcBef>
+                <a:spcPts val="0"/>
+              </a:spcBef>
+              <a:spcAft>
+                <a:spcPts val="0"/>
+              </a:spcAft>
+              <a:buNone/>
+            </a:pPr>
+            <a:r>
+              <a:rPr lang="en" sz="2000">
+                <a:solidFill>
+                  <a:schemeClr val="dk1"/>
+                </a:solidFill>
+                <a:highlight>
+                  <a:srgbClr val="D9D9D9"/>
+                </a:highlight>
+              </a:rPr>
+              <a:t>Mandelbrot created in 250.150089 ms</a:t>
+            </a:r>
+            <a:endParaRPr sz="2300">
+              <a:highlight>
+                <a:srgbClr val="D9D9D9"/>
+              </a:highlight>
+            </a:endParaRPr>
+          </a:p>
+        </p:txBody>
+      </p:sp>
+    </p:spTree>
+  </p:cSld>
+  <p:clrMapOvr>
+    <a:masterClrMapping/>
+  </p:clrMapOvr>
+</p:sld>
+</file>
+
 <file path=ppt/theme/theme1.xml><?xml version="1.0" encoding="utf-8"?>
-<a:theme xmlns:a="http://schemas.openxmlformats.org/drawingml/2006/main" xmlns:r="http://schemas.openxmlformats.org/officeDocument/2006/relationships" name="Simple Light">
+<a:theme xmlns:a="http://schemas.openxmlformats.org/drawingml/2006/main" xmlns:r="http://schemas.openxmlformats.org/officeDocument/2006/relationships">
   <a:themeElements>
-    <a:clrScheme name="Simple Light">
+    <a:clrScheme name="Default">
       <a:dk1>
         <a:srgbClr val="000000"/>
       </a:dk1>
@@ -18794,34 +17344,34 @@
         <a:srgbClr val="FFFFFF"/>
       </a:lt1>
       <a:dk2>
-        <a:srgbClr val="595959"/>
+        <a:srgbClr val="158158"/>
       </a:dk2>
       <a:lt2>
-        <a:srgbClr val="EEEEEE"/>
+        <a:srgbClr val="F3F3F3"/>
       </a:lt2>
       <a:accent1>
-        <a:srgbClr val="4285F4"/>
+        <a:srgbClr val="058DC7"/>
       </a:accent1>
       <a:accent2>
-        <a:srgbClr val="212121"/>
+        <a:srgbClr val="50B432"/>
       </a:accent2>
       <a:accent3>
-        <a:srgbClr val="78909C"/>
+        <a:srgbClr val="ED561B"/>
       </a:accent3>
       <a:accent4>
-        <a:srgbClr val="FFAB40"/>
+        <a:srgbClr val="EDEF00"/>
       </a:accent4>
       <a:accent5>
-        <a:srgbClr val="0097A7"/>
+        <a:srgbClr val="24CBE5"/>
       </a:accent5>
       <a:accent6>
-        <a:srgbClr val="EEFF41"/>
+        <a:srgbClr val="64E572"/>
       </a:accent6>
       <a:hlink>
-        <a:srgbClr val="0097A7"/>
+        <a:srgbClr val="2200CC"/>
       </a:hlink>
       <a:folHlink>
-        <a:srgbClr val="0097A7"/>
+        <a:srgbClr val="551A8B"/>
       </a:folHlink>
     </a:clrScheme>
     <a:fontScheme name="Office">
@@ -19342,9 +17892,9 @@
 </file>
 
 <file path=ppt/theme/theme3.xml><?xml version="1.0" encoding="utf-8"?>
-<a:theme xmlns:a="http://schemas.openxmlformats.org/drawingml/2006/main" xmlns:r="http://schemas.openxmlformats.org/officeDocument/2006/relationships">
+<a:theme xmlns:a="http://schemas.openxmlformats.org/drawingml/2006/main" xmlns:r="http://schemas.openxmlformats.org/officeDocument/2006/relationships" name="Simple Light">
   <a:themeElements>
-    <a:clrScheme name="Default">
+    <a:clrScheme name="Simple Light">
       <a:dk1>
         <a:srgbClr val="000000"/>
       </a:dk1>
@@ -19352,34 +17902,34 @@
         <a:srgbClr val="FFFFFF"/>
       </a:lt1>
       <a:dk2>
-        <a:srgbClr val="158158"/>
+        <a:srgbClr val="595959"/>
       </a:dk2>
       <a:lt2>
-        <a:srgbClr val="F3F3F3"/>
+        <a:srgbClr val="EEEEEE"/>
       </a:lt2>
       <a:accent1>
-        <a:srgbClr val="058DC7"/>
+        <a:srgbClr val="4285F4"/>
       </a:accent1>
       <a:accent2>
-        <a:srgbClr val="50B432"/>
+        <a:srgbClr val="212121"/>
       </a:accent2>
       <a:accent3>
-        <a:srgbClr val="ED561B"/>
+        <a:srgbClr val="78909C"/>
       </a:accent3>
       <a:accent4>
-        <a:srgbClr val="EDEF00"/>
+        <a:srgbClr val="FFAB40"/>
       </a:accent4>
       <a:accent5>
-        <a:srgbClr val="24CBE5"/>
+        <a:srgbClr val="0097A7"/>
       </a:accent5>
       <a:accent6>
-        <a:srgbClr val="64E572"/>
+        <a:srgbClr val="EEFF41"/>
       </a:accent6>
       <a:hlink>
-        <a:srgbClr val="2200CC"/>
+        <a:srgbClr val="0097A7"/>
       </a:hlink>
       <a:folHlink>
-        <a:srgbClr val="551A8B"/>
+        <a:srgbClr val="0097A7"/>
       </a:folHlink>
     </a:clrScheme>
     <a:fontScheme name="Office">

--- a/Лекции/pptx/Лекция10-ПГП-2025.pptx
+++ b/Лекции/pptx/Лекция10-ПГП-2025.pptx
@@ -23,12 +23,6 @@
     <p:sldId id="267" r:id="rId19"/>
     <p:sldId id="268" r:id="rId20"/>
     <p:sldId id="269" r:id="rId21"/>
-    <p:sldId id="270" r:id="rId22"/>
-    <p:sldId id="271" r:id="rId23"/>
-    <p:sldId id="272" r:id="rId24"/>
-    <p:sldId id="273" r:id="rId25"/>
-    <p:sldId id="274" r:id="rId26"/>
-    <p:sldId id="275" r:id="rId27"/>
   </p:sldIdLst>
   <p:sldSz cy="5143500" cx="9144000"/>
   <p:notesSz cx="6858000" cy="9144000"/>
@@ -1364,501 +1358,6 @@
 </p:notes>
 </file>
 
-<file path=ppt/notesSlides/notesSlide15.xml><?xml version="1.0" encoding="utf-8"?>
-<p:notes xmlns:a="http://schemas.openxmlformats.org/drawingml/2006/main" xmlns:r="http://schemas.openxmlformats.org/officeDocument/2006/relationships" xmlns:mc="http://schemas.openxmlformats.org/markup-compatibility/2006" xmlns:mv="urn:schemas-microsoft-com:mac:vml" xmlns:p="http://schemas.openxmlformats.org/presentationml/2006/main" xmlns:c="http://schemas.openxmlformats.org/drawingml/2006/chart" xmlns:dgm="http://schemas.openxmlformats.org/drawingml/2006/diagram" xmlns:o="urn:schemas-microsoft-com:office:office" xmlns:v="urn:schemas-microsoft-com:vml" xmlns:pvml="urn:schemas-microsoft-com:office:powerpoint" xmlns:com="http://schemas.openxmlformats.org/drawingml/2006/compatibility" xmlns:p14="http://schemas.microsoft.com/office/powerpoint/2010/main" xmlns:p15="http://schemas.microsoft.com/office/powerpoint/2012/main" xmlns:ahyp="http://schemas.microsoft.com/office/drawing/2018/hyperlinkcolor" showMasterPhAnim="0" showMasterSp="0">
-  <p:cSld>
-    <p:spTree>
-      <p:nvGrpSpPr>
-        <p:cNvPr id="140" name="Shape 140"/>
-        <p:cNvGrpSpPr/>
-        <p:nvPr/>
-      </p:nvGrpSpPr>
-      <p:grpSpPr>
-        <a:xfrm>
-          <a:off x="0" y="0"/>
-          <a:ext cx="0" cy="0"/>
-          <a:chOff x="0" y="0"/>
-          <a:chExt cx="0" cy="0"/>
-        </a:xfrm>
-      </p:grpSpPr>
-      <p:sp>
-        <p:nvSpPr>
-          <p:cNvPr id="141" name="Google Shape;141;g22a1e164a49_0_0:notes"/>
-          <p:cNvSpPr/>
-          <p:nvPr>
-            <p:ph idx="2" type="sldImg"/>
-          </p:nvPr>
-        </p:nvSpPr>
-        <p:spPr>
-          <a:xfrm>
-            <a:off x="381300" y="685800"/>
-            <a:ext cx="6096000" cy="3429000"/>
-          </a:xfrm>
-          <a:custGeom>
-            <a:rect b="b" l="l" r="r" t="t"/>
-            <a:pathLst>
-              <a:path extrusionOk="0" h="120000" w="120000">
-                <a:moveTo>
-                  <a:pt x="0" y="0"/>
-                </a:moveTo>
-                <a:lnTo>
-                  <a:pt x="120000" y="0"/>
-                </a:lnTo>
-                <a:lnTo>
-                  <a:pt x="120000" y="120000"/>
-                </a:lnTo>
-                <a:lnTo>
-                  <a:pt x="0" y="120000"/>
-                </a:lnTo>
-                <a:close/>
-              </a:path>
-            </a:pathLst>
-          </a:custGeom>
-        </p:spPr>
-      </p:sp>
-      <p:sp>
-        <p:nvSpPr>
-          <p:cNvPr id="142" name="Google Shape;142;g22a1e164a49_0_0:notes"/>
-          <p:cNvSpPr txBox="1"/>
-          <p:nvPr>
-            <p:ph idx="1" type="body"/>
-          </p:nvPr>
-        </p:nvSpPr>
-        <p:spPr>
-          <a:xfrm>
-            <a:off x="685800" y="4343400"/>
-            <a:ext cx="5486400" cy="4114800"/>
-          </a:xfrm>
-          <a:prstGeom prst="rect">
-            <a:avLst/>
-          </a:prstGeom>
-        </p:spPr>
-        <p:txBody>
-          <a:bodyPr anchorCtr="0" anchor="t" bIns="91425" lIns="91425" spcFirstLastPara="1" rIns="91425" wrap="square" tIns="91425">
-            <a:noAutofit/>
-          </a:bodyPr>
-          <a:lstStyle/>
-          <a:p>
-            <a:pPr indent="0" lvl="0" marL="0" rtl="0" algn="l">
-              <a:spcBef>
-                <a:spcPts val="0"/>
-              </a:spcBef>
-              <a:spcAft>
-                <a:spcPts val="0"/>
-              </a:spcAft>
-              <a:buNone/>
-            </a:pPr>
-            <a:r>
-              <a:t/>
-            </a:r>
-            <a:endParaRPr/>
-          </a:p>
-        </p:txBody>
-      </p:sp>
-    </p:spTree>
-  </p:cSld>
-  <p:clrMapOvr>
-    <a:masterClrMapping/>
-  </p:clrMapOvr>
-</p:notes>
-</file>
-
-<file path=ppt/notesSlides/notesSlide16.xml><?xml version="1.0" encoding="utf-8"?>
-<p:notes xmlns:a="http://schemas.openxmlformats.org/drawingml/2006/main" xmlns:r="http://schemas.openxmlformats.org/officeDocument/2006/relationships" xmlns:mc="http://schemas.openxmlformats.org/markup-compatibility/2006" xmlns:mv="urn:schemas-microsoft-com:mac:vml" xmlns:p="http://schemas.openxmlformats.org/presentationml/2006/main" xmlns:c="http://schemas.openxmlformats.org/drawingml/2006/chart" xmlns:dgm="http://schemas.openxmlformats.org/drawingml/2006/diagram" xmlns:o="urn:schemas-microsoft-com:office:office" xmlns:v="urn:schemas-microsoft-com:vml" xmlns:pvml="urn:schemas-microsoft-com:office:powerpoint" xmlns:com="http://schemas.openxmlformats.org/drawingml/2006/compatibility" xmlns:p14="http://schemas.microsoft.com/office/powerpoint/2010/main" xmlns:p15="http://schemas.microsoft.com/office/powerpoint/2012/main" xmlns:ahyp="http://schemas.microsoft.com/office/drawing/2018/hyperlinkcolor" showMasterPhAnim="0" showMasterSp="0">
-  <p:cSld>
-    <p:spTree>
-      <p:nvGrpSpPr>
-        <p:cNvPr id="145" name="Shape 145"/>
-        <p:cNvGrpSpPr/>
-        <p:nvPr/>
-      </p:nvGrpSpPr>
-      <p:grpSpPr>
-        <a:xfrm>
-          <a:off x="0" y="0"/>
-          <a:ext cx="0" cy="0"/>
-          <a:chOff x="0" y="0"/>
-          <a:chExt cx="0" cy="0"/>
-        </a:xfrm>
-      </p:grpSpPr>
-      <p:sp>
-        <p:nvSpPr>
-          <p:cNvPr id="146" name="Google Shape;146;g22a1e164a49_0_10:notes"/>
-          <p:cNvSpPr/>
-          <p:nvPr>
-            <p:ph idx="2" type="sldImg"/>
-          </p:nvPr>
-        </p:nvSpPr>
-        <p:spPr>
-          <a:xfrm>
-            <a:off x="381300" y="685800"/>
-            <a:ext cx="6096000" cy="3429000"/>
-          </a:xfrm>
-          <a:custGeom>
-            <a:rect b="b" l="l" r="r" t="t"/>
-            <a:pathLst>
-              <a:path extrusionOk="0" h="120000" w="120000">
-                <a:moveTo>
-                  <a:pt x="0" y="0"/>
-                </a:moveTo>
-                <a:lnTo>
-                  <a:pt x="120000" y="0"/>
-                </a:lnTo>
-                <a:lnTo>
-                  <a:pt x="120000" y="120000"/>
-                </a:lnTo>
-                <a:lnTo>
-                  <a:pt x="0" y="120000"/>
-                </a:lnTo>
-                <a:close/>
-              </a:path>
-            </a:pathLst>
-          </a:custGeom>
-        </p:spPr>
-      </p:sp>
-      <p:sp>
-        <p:nvSpPr>
-          <p:cNvPr id="147" name="Google Shape;147;g22a1e164a49_0_10:notes"/>
-          <p:cNvSpPr txBox="1"/>
-          <p:nvPr>
-            <p:ph idx="1" type="body"/>
-          </p:nvPr>
-        </p:nvSpPr>
-        <p:spPr>
-          <a:xfrm>
-            <a:off x="685800" y="4343400"/>
-            <a:ext cx="5486400" cy="4114800"/>
-          </a:xfrm>
-          <a:prstGeom prst="rect">
-            <a:avLst/>
-          </a:prstGeom>
-        </p:spPr>
-        <p:txBody>
-          <a:bodyPr anchorCtr="0" anchor="t" bIns="91425" lIns="91425" spcFirstLastPara="1" rIns="91425" wrap="square" tIns="91425">
-            <a:noAutofit/>
-          </a:bodyPr>
-          <a:lstStyle/>
-          <a:p>
-            <a:pPr indent="0" lvl="0" marL="0" rtl="0" algn="l">
-              <a:spcBef>
-                <a:spcPts val="0"/>
-              </a:spcBef>
-              <a:spcAft>
-                <a:spcPts val="0"/>
-              </a:spcAft>
-              <a:buNone/>
-            </a:pPr>
-            <a:r>
-              <a:t/>
-            </a:r>
-            <a:endParaRPr/>
-          </a:p>
-        </p:txBody>
-      </p:sp>
-    </p:spTree>
-  </p:cSld>
-  <p:clrMapOvr>
-    <a:masterClrMapping/>
-  </p:clrMapOvr>
-</p:notes>
-</file>
-
-<file path=ppt/notesSlides/notesSlide17.xml><?xml version="1.0" encoding="utf-8"?>
-<p:notes xmlns:a="http://schemas.openxmlformats.org/drawingml/2006/main" xmlns:r="http://schemas.openxmlformats.org/officeDocument/2006/relationships" xmlns:mc="http://schemas.openxmlformats.org/markup-compatibility/2006" xmlns:mv="urn:schemas-microsoft-com:mac:vml" xmlns:p="http://schemas.openxmlformats.org/presentationml/2006/main" xmlns:c="http://schemas.openxmlformats.org/drawingml/2006/chart" xmlns:dgm="http://schemas.openxmlformats.org/drawingml/2006/diagram" xmlns:o="urn:schemas-microsoft-com:office:office" xmlns:v="urn:schemas-microsoft-com:vml" xmlns:pvml="urn:schemas-microsoft-com:office:powerpoint" xmlns:com="http://schemas.openxmlformats.org/drawingml/2006/compatibility" xmlns:p14="http://schemas.microsoft.com/office/powerpoint/2010/main" xmlns:p15="http://schemas.microsoft.com/office/powerpoint/2012/main" xmlns:ahyp="http://schemas.microsoft.com/office/drawing/2018/hyperlinkcolor" showMasterPhAnim="0" showMasterSp="0">
-  <p:cSld>
-    <p:spTree>
-      <p:nvGrpSpPr>
-        <p:cNvPr id="150" name="Shape 150"/>
-        <p:cNvGrpSpPr/>
-        <p:nvPr/>
-      </p:nvGrpSpPr>
-      <p:grpSpPr>
-        <a:xfrm>
-          <a:off x="0" y="0"/>
-          <a:ext cx="0" cy="0"/>
-          <a:chOff x="0" y="0"/>
-          <a:chExt cx="0" cy="0"/>
-        </a:xfrm>
-      </p:grpSpPr>
-      <p:sp>
-        <p:nvSpPr>
-          <p:cNvPr id="151" name="Google Shape;151;g22a1e164a49_0_21:notes"/>
-          <p:cNvSpPr/>
-          <p:nvPr>
-            <p:ph idx="2" type="sldImg"/>
-          </p:nvPr>
-        </p:nvSpPr>
-        <p:spPr>
-          <a:xfrm>
-            <a:off x="381300" y="685800"/>
-            <a:ext cx="6096000" cy="3429000"/>
-          </a:xfrm>
-          <a:custGeom>
-            <a:rect b="b" l="l" r="r" t="t"/>
-            <a:pathLst>
-              <a:path extrusionOk="0" h="120000" w="120000">
-                <a:moveTo>
-                  <a:pt x="0" y="0"/>
-                </a:moveTo>
-                <a:lnTo>
-                  <a:pt x="120000" y="0"/>
-                </a:lnTo>
-                <a:lnTo>
-                  <a:pt x="120000" y="120000"/>
-                </a:lnTo>
-                <a:lnTo>
-                  <a:pt x="0" y="120000"/>
-                </a:lnTo>
-                <a:close/>
-              </a:path>
-            </a:pathLst>
-          </a:custGeom>
-        </p:spPr>
-      </p:sp>
-      <p:sp>
-        <p:nvSpPr>
-          <p:cNvPr id="152" name="Google Shape;152;g22a1e164a49_0_21:notes"/>
-          <p:cNvSpPr txBox="1"/>
-          <p:nvPr>
-            <p:ph idx="1" type="body"/>
-          </p:nvPr>
-        </p:nvSpPr>
-        <p:spPr>
-          <a:xfrm>
-            <a:off x="685800" y="4343400"/>
-            <a:ext cx="5486400" cy="4114800"/>
-          </a:xfrm>
-          <a:prstGeom prst="rect">
-            <a:avLst/>
-          </a:prstGeom>
-        </p:spPr>
-        <p:txBody>
-          <a:bodyPr anchorCtr="0" anchor="t" bIns="91425" lIns="91425" spcFirstLastPara="1" rIns="91425" wrap="square" tIns="91425">
-            <a:noAutofit/>
-          </a:bodyPr>
-          <a:lstStyle/>
-          <a:p>
-            <a:pPr indent="0" lvl="0" marL="0" rtl="0" algn="l">
-              <a:spcBef>
-                <a:spcPts val="0"/>
-              </a:spcBef>
-              <a:spcAft>
-                <a:spcPts val="0"/>
-              </a:spcAft>
-              <a:buNone/>
-            </a:pPr>
-            <a:r>
-              <a:t/>
-            </a:r>
-            <a:endParaRPr/>
-          </a:p>
-        </p:txBody>
-      </p:sp>
-    </p:spTree>
-  </p:cSld>
-  <p:clrMapOvr>
-    <a:masterClrMapping/>
-  </p:clrMapOvr>
-</p:notes>
-</file>
-
-<file path=ppt/notesSlides/notesSlide18.xml><?xml version="1.0" encoding="utf-8"?>
-<p:notes xmlns:a="http://schemas.openxmlformats.org/drawingml/2006/main" xmlns:r="http://schemas.openxmlformats.org/officeDocument/2006/relationships" xmlns:mc="http://schemas.openxmlformats.org/markup-compatibility/2006" xmlns:mv="urn:schemas-microsoft-com:mac:vml" xmlns:p="http://schemas.openxmlformats.org/presentationml/2006/main" xmlns:c="http://schemas.openxmlformats.org/drawingml/2006/chart" xmlns:dgm="http://schemas.openxmlformats.org/drawingml/2006/diagram" xmlns:o="urn:schemas-microsoft-com:office:office" xmlns:v="urn:schemas-microsoft-com:vml" xmlns:pvml="urn:schemas-microsoft-com:office:powerpoint" xmlns:com="http://schemas.openxmlformats.org/drawingml/2006/compatibility" xmlns:p14="http://schemas.microsoft.com/office/powerpoint/2010/main" xmlns:p15="http://schemas.microsoft.com/office/powerpoint/2012/main" xmlns:ahyp="http://schemas.microsoft.com/office/drawing/2018/hyperlinkcolor" showMasterPhAnim="0" showMasterSp="0">
-  <p:cSld>
-    <p:spTree>
-      <p:nvGrpSpPr>
-        <p:cNvPr id="155" name="Shape 155"/>
-        <p:cNvGrpSpPr/>
-        <p:nvPr/>
-      </p:nvGrpSpPr>
-      <p:grpSpPr>
-        <a:xfrm>
-          <a:off x="0" y="0"/>
-          <a:ext cx="0" cy="0"/>
-          <a:chOff x="0" y="0"/>
-          <a:chExt cx="0" cy="0"/>
-        </a:xfrm>
-      </p:grpSpPr>
-      <p:sp>
-        <p:nvSpPr>
-          <p:cNvPr id="156" name="Google Shape;156;g22a1e164a49_0_26:notes"/>
-          <p:cNvSpPr/>
-          <p:nvPr>
-            <p:ph idx="2" type="sldImg"/>
-          </p:nvPr>
-        </p:nvSpPr>
-        <p:spPr>
-          <a:xfrm>
-            <a:off x="381300" y="685800"/>
-            <a:ext cx="6096000" cy="3429000"/>
-          </a:xfrm>
-          <a:custGeom>
-            <a:rect b="b" l="l" r="r" t="t"/>
-            <a:pathLst>
-              <a:path extrusionOk="0" h="120000" w="120000">
-                <a:moveTo>
-                  <a:pt x="0" y="0"/>
-                </a:moveTo>
-                <a:lnTo>
-                  <a:pt x="120000" y="0"/>
-                </a:lnTo>
-                <a:lnTo>
-                  <a:pt x="120000" y="120000"/>
-                </a:lnTo>
-                <a:lnTo>
-                  <a:pt x="0" y="120000"/>
-                </a:lnTo>
-                <a:close/>
-              </a:path>
-            </a:pathLst>
-          </a:custGeom>
-        </p:spPr>
-      </p:sp>
-      <p:sp>
-        <p:nvSpPr>
-          <p:cNvPr id="157" name="Google Shape;157;g22a1e164a49_0_26:notes"/>
-          <p:cNvSpPr txBox="1"/>
-          <p:nvPr>
-            <p:ph idx="1" type="body"/>
-          </p:nvPr>
-        </p:nvSpPr>
-        <p:spPr>
-          <a:xfrm>
-            <a:off x="685800" y="4343400"/>
-            <a:ext cx="5486400" cy="4114800"/>
-          </a:xfrm>
-          <a:prstGeom prst="rect">
-            <a:avLst/>
-          </a:prstGeom>
-        </p:spPr>
-        <p:txBody>
-          <a:bodyPr anchorCtr="0" anchor="t" bIns="91425" lIns="91425" spcFirstLastPara="1" rIns="91425" wrap="square" tIns="91425">
-            <a:noAutofit/>
-          </a:bodyPr>
-          <a:lstStyle/>
-          <a:p>
-            <a:pPr indent="0" lvl="0" marL="0" rtl="0" algn="l">
-              <a:spcBef>
-                <a:spcPts val="0"/>
-              </a:spcBef>
-              <a:spcAft>
-                <a:spcPts val="0"/>
-              </a:spcAft>
-              <a:buNone/>
-            </a:pPr>
-            <a:r>
-              <a:t/>
-            </a:r>
-            <a:endParaRPr/>
-          </a:p>
-        </p:txBody>
-      </p:sp>
-    </p:spTree>
-  </p:cSld>
-  <p:clrMapOvr>
-    <a:masterClrMapping/>
-  </p:clrMapOvr>
-</p:notes>
-</file>
-
-<file path=ppt/notesSlides/notesSlide19.xml><?xml version="1.0" encoding="utf-8"?>
-<p:notes xmlns:a="http://schemas.openxmlformats.org/drawingml/2006/main" xmlns:r="http://schemas.openxmlformats.org/officeDocument/2006/relationships" xmlns:mc="http://schemas.openxmlformats.org/markup-compatibility/2006" xmlns:mv="urn:schemas-microsoft-com:mac:vml" xmlns:p="http://schemas.openxmlformats.org/presentationml/2006/main" xmlns:c="http://schemas.openxmlformats.org/drawingml/2006/chart" xmlns:dgm="http://schemas.openxmlformats.org/drawingml/2006/diagram" xmlns:o="urn:schemas-microsoft-com:office:office" xmlns:v="urn:schemas-microsoft-com:vml" xmlns:pvml="urn:schemas-microsoft-com:office:powerpoint" xmlns:com="http://schemas.openxmlformats.org/drawingml/2006/compatibility" xmlns:p14="http://schemas.microsoft.com/office/powerpoint/2010/main" xmlns:p15="http://schemas.microsoft.com/office/powerpoint/2012/main" xmlns:ahyp="http://schemas.microsoft.com/office/drawing/2018/hyperlinkcolor" showMasterPhAnim="0" showMasterSp="0">
-  <p:cSld>
-    <p:spTree>
-      <p:nvGrpSpPr>
-        <p:cNvPr id="160" name="Shape 160"/>
-        <p:cNvGrpSpPr/>
-        <p:nvPr/>
-      </p:nvGrpSpPr>
-      <p:grpSpPr>
-        <a:xfrm>
-          <a:off x="0" y="0"/>
-          <a:ext cx="0" cy="0"/>
-          <a:chOff x="0" y="0"/>
-          <a:chExt cx="0" cy="0"/>
-        </a:xfrm>
-      </p:grpSpPr>
-      <p:sp>
-        <p:nvSpPr>
-          <p:cNvPr id="161" name="Google Shape;161;g229f76a6c23_0_61:notes"/>
-          <p:cNvSpPr/>
-          <p:nvPr>
-            <p:ph idx="2" type="sldImg"/>
-          </p:nvPr>
-        </p:nvSpPr>
-        <p:spPr>
-          <a:xfrm>
-            <a:off x="381300" y="685800"/>
-            <a:ext cx="6096000" cy="3429000"/>
-          </a:xfrm>
-          <a:custGeom>
-            <a:rect b="b" l="l" r="r" t="t"/>
-            <a:pathLst>
-              <a:path extrusionOk="0" h="120000" w="120000">
-                <a:moveTo>
-                  <a:pt x="0" y="0"/>
-                </a:moveTo>
-                <a:lnTo>
-                  <a:pt x="120000" y="0"/>
-                </a:lnTo>
-                <a:lnTo>
-                  <a:pt x="120000" y="120000"/>
-                </a:lnTo>
-                <a:lnTo>
-                  <a:pt x="0" y="120000"/>
-                </a:lnTo>
-                <a:close/>
-              </a:path>
-            </a:pathLst>
-          </a:custGeom>
-        </p:spPr>
-      </p:sp>
-      <p:sp>
-        <p:nvSpPr>
-          <p:cNvPr id="162" name="Google Shape;162;g229f76a6c23_0_61:notes"/>
-          <p:cNvSpPr txBox="1"/>
-          <p:nvPr>
-            <p:ph idx="1" type="body"/>
-          </p:nvPr>
-        </p:nvSpPr>
-        <p:spPr>
-          <a:xfrm>
-            <a:off x="685800" y="4343400"/>
-            <a:ext cx="5486400" cy="4114800"/>
-          </a:xfrm>
-          <a:prstGeom prst="rect">
-            <a:avLst/>
-          </a:prstGeom>
-        </p:spPr>
-        <p:txBody>
-          <a:bodyPr anchorCtr="0" anchor="t" bIns="91425" lIns="91425" spcFirstLastPara="1" rIns="91425" wrap="square" tIns="91425">
-            <a:noAutofit/>
-          </a:bodyPr>
-          <a:lstStyle/>
-          <a:p>
-            <a:pPr indent="0" lvl="0" marL="0" rtl="0" algn="l">
-              <a:spcBef>
-                <a:spcPts val="0"/>
-              </a:spcBef>
-              <a:spcAft>
-                <a:spcPts val="0"/>
-              </a:spcAft>
-              <a:buNone/>
-            </a:pPr>
-            <a:r>
-              <a:t/>
-            </a:r>
-            <a:endParaRPr/>
-          </a:p>
-        </p:txBody>
-      </p:sp>
-    </p:spTree>
-  </p:cSld>
-  <p:clrMapOvr>
-    <a:masterClrMapping/>
-  </p:clrMapOvr>
-</p:notes>
-</file>
-
 <file path=ppt/notesSlides/notesSlide2.xml><?xml version="1.0" encoding="utf-8"?>
 <p:notes xmlns:a="http://schemas.openxmlformats.org/drawingml/2006/main" xmlns:r="http://schemas.openxmlformats.org/officeDocument/2006/relationships" xmlns:mc="http://schemas.openxmlformats.org/markup-compatibility/2006" xmlns:mv="urn:schemas-microsoft-com:mac:vml" xmlns:p="http://schemas.openxmlformats.org/presentationml/2006/main" xmlns:c="http://schemas.openxmlformats.org/drawingml/2006/chart" xmlns:dgm="http://schemas.openxmlformats.org/drawingml/2006/diagram" xmlns:o="urn:schemas-microsoft-com:office:office" xmlns:v="urn:schemas-microsoft-com:vml" xmlns:pvml="urn:schemas-microsoft-com:office:powerpoint" xmlns:com="http://schemas.openxmlformats.org/drawingml/2006/compatibility" xmlns:p14="http://schemas.microsoft.com/office/powerpoint/2010/main" xmlns:p15="http://schemas.microsoft.com/office/powerpoint/2012/main" xmlns:ahyp="http://schemas.microsoft.com/office/drawing/2018/hyperlinkcolor" showMasterPhAnim="0" showMasterSp="0">
   <p:cSld>
@@ -1914,105 +1413,6 @@
       <p:sp>
         <p:nvSpPr>
           <p:cNvPr id="73" name="Google Shape;73;g229f76a6c23_0_21:notes"/>
-          <p:cNvSpPr txBox="1"/>
-          <p:nvPr>
-            <p:ph idx="1" type="body"/>
-          </p:nvPr>
-        </p:nvSpPr>
-        <p:spPr>
-          <a:xfrm>
-            <a:off x="685800" y="4343400"/>
-            <a:ext cx="5486400" cy="4114800"/>
-          </a:xfrm>
-          <a:prstGeom prst="rect">
-            <a:avLst/>
-          </a:prstGeom>
-        </p:spPr>
-        <p:txBody>
-          <a:bodyPr anchorCtr="0" anchor="t" bIns="91425" lIns="91425" spcFirstLastPara="1" rIns="91425" wrap="square" tIns="91425">
-            <a:noAutofit/>
-          </a:bodyPr>
-          <a:lstStyle/>
-          <a:p>
-            <a:pPr indent="0" lvl="0" marL="0" rtl="0" algn="l">
-              <a:spcBef>
-                <a:spcPts val="0"/>
-              </a:spcBef>
-              <a:spcAft>
-                <a:spcPts val="0"/>
-              </a:spcAft>
-              <a:buNone/>
-            </a:pPr>
-            <a:r>
-              <a:t/>
-            </a:r>
-            <a:endParaRPr/>
-          </a:p>
-        </p:txBody>
-      </p:sp>
-    </p:spTree>
-  </p:cSld>
-  <p:clrMapOvr>
-    <a:masterClrMapping/>
-  </p:clrMapOvr>
-</p:notes>
-</file>
-
-<file path=ppt/notesSlides/notesSlide20.xml><?xml version="1.0" encoding="utf-8"?>
-<p:notes xmlns:a="http://schemas.openxmlformats.org/drawingml/2006/main" xmlns:r="http://schemas.openxmlformats.org/officeDocument/2006/relationships" xmlns:mc="http://schemas.openxmlformats.org/markup-compatibility/2006" xmlns:mv="urn:schemas-microsoft-com:mac:vml" xmlns:p="http://schemas.openxmlformats.org/presentationml/2006/main" xmlns:c="http://schemas.openxmlformats.org/drawingml/2006/chart" xmlns:dgm="http://schemas.openxmlformats.org/drawingml/2006/diagram" xmlns:o="urn:schemas-microsoft-com:office:office" xmlns:v="urn:schemas-microsoft-com:vml" xmlns:pvml="urn:schemas-microsoft-com:office:powerpoint" xmlns:com="http://schemas.openxmlformats.org/drawingml/2006/compatibility" xmlns:p14="http://schemas.microsoft.com/office/powerpoint/2010/main" xmlns:p15="http://schemas.microsoft.com/office/powerpoint/2012/main" xmlns:ahyp="http://schemas.microsoft.com/office/drawing/2018/hyperlinkcolor" showMasterPhAnim="0" showMasterSp="0">
-  <p:cSld>
-    <p:spTree>
-      <p:nvGrpSpPr>
-        <p:cNvPr id="165" name="Shape 165"/>
-        <p:cNvGrpSpPr/>
-        <p:nvPr/>
-      </p:nvGrpSpPr>
-      <p:grpSpPr>
-        <a:xfrm>
-          <a:off x="0" y="0"/>
-          <a:ext cx="0" cy="0"/>
-          <a:chOff x="0" y="0"/>
-          <a:chExt cx="0" cy="0"/>
-        </a:xfrm>
-      </p:grpSpPr>
-      <p:sp>
-        <p:nvSpPr>
-          <p:cNvPr id="166" name="Google Shape;166;g229f76a6c23_0_64:notes"/>
-          <p:cNvSpPr/>
-          <p:nvPr>
-            <p:ph idx="2" type="sldImg"/>
-          </p:nvPr>
-        </p:nvSpPr>
-        <p:spPr>
-          <a:xfrm>
-            <a:off x="381300" y="685800"/>
-            <a:ext cx="6096000" cy="3429000"/>
-          </a:xfrm>
-          <a:custGeom>
-            <a:rect b="b" l="l" r="r" t="t"/>
-            <a:pathLst>
-              <a:path extrusionOk="0" h="120000" w="120000">
-                <a:moveTo>
-                  <a:pt x="0" y="0"/>
-                </a:moveTo>
-                <a:lnTo>
-                  <a:pt x="120000" y="0"/>
-                </a:lnTo>
-                <a:lnTo>
-                  <a:pt x="120000" y="120000"/>
-                </a:lnTo>
-                <a:lnTo>
-                  <a:pt x="0" y="120000"/>
-                </a:lnTo>
-                <a:close/>
-              </a:path>
-            </a:pathLst>
-          </a:custGeom>
-        </p:spPr>
-      </p:sp>
-      <p:sp>
-        <p:nvSpPr>
-          <p:cNvPr id="167" name="Google Shape;167;g229f76a6c23_0_64:notes"/>
           <p:cNvSpPr txBox="1"/>
           <p:nvPr>
             <p:ph idx="1" type="body"/>
@@ -12121,7 +11521,7 @@
             <a:tbl>
               <a:tblPr>
                 <a:noFill/>
-                <a:tableStyleId>{96A4487F-C8FF-4787-9DA8-CCFB90FB1DBC}</a:tableStyleId>
+                <a:tableStyleId>{565912C6-7A2B-4274-8E4C-CFBD94822C2C}</a:tableStyleId>
               </a:tblPr>
               <a:tblGrid>
                 <a:gridCol w="2716775"/>
@@ -12521,1846 +11921,6 @@
 </p:sld>
 </file>
 
-<file path=ppt/slides/slide15.xml><?xml version="1.0" encoding="utf-8"?>
-<p:sld xmlns:a="http://schemas.openxmlformats.org/drawingml/2006/main" xmlns:r="http://schemas.openxmlformats.org/officeDocument/2006/relationships" xmlns:mc="http://schemas.openxmlformats.org/markup-compatibility/2006" xmlns:mv="urn:schemas-microsoft-com:mac:vml" xmlns:p="http://schemas.openxmlformats.org/presentationml/2006/main" xmlns:c="http://schemas.openxmlformats.org/drawingml/2006/chart" xmlns:dgm="http://schemas.openxmlformats.org/drawingml/2006/diagram" xmlns:o="urn:schemas-microsoft-com:office:office" xmlns:v="urn:schemas-microsoft-com:vml" xmlns:pvml="urn:schemas-microsoft-com:office:powerpoint" xmlns:com="http://schemas.openxmlformats.org/drawingml/2006/compatibility" xmlns:p14="http://schemas.microsoft.com/office/powerpoint/2010/main" xmlns:p15="http://schemas.microsoft.com/office/powerpoint/2012/main" xmlns:ahyp="http://schemas.microsoft.com/office/drawing/2018/hyperlinkcolor">
-  <p:cSld>
-    <p:spTree>
-      <p:nvGrpSpPr>
-        <p:cNvPr id="143" name="Shape 143"/>
-        <p:cNvGrpSpPr/>
-        <p:nvPr/>
-      </p:nvGrpSpPr>
-      <p:grpSpPr>
-        <a:xfrm>
-          <a:off x="0" y="0"/>
-          <a:ext cx="0" cy="0"/>
-          <a:chOff x="0" y="0"/>
-          <a:chExt cx="0" cy="0"/>
-        </a:xfrm>
-      </p:grpSpPr>
-      <p:sp>
-        <p:nvSpPr>
-          <p:cNvPr id="144" name="Google Shape;144;p30"/>
-          <p:cNvSpPr txBox="1"/>
-          <p:nvPr/>
-        </p:nvSpPr>
-        <p:spPr>
-          <a:xfrm>
-            <a:off x="217450" y="31658"/>
-            <a:ext cx="8676000" cy="5108700"/>
-          </a:xfrm>
-          <a:prstGeom prst="rect">
-            <a:avLst/>
-          </a:prstGeom>
-          <a:solidFill>
-            <a:srgbClr val="D0E0E3"/>
-          </a:solidFill>
-          <a:ln>
-            <a:noFill/>
-          </a:ln>
-        </p:spPr>
-        <p:txBody>
-          <a:bodyPr anchorCtr="0" anchor="t" bIns="91425" lIns="91425" spcFirstLastPara="1" rIns="91425" wrap="square" tIns="91425">
-            <a:spAutoFit/>
-          </a:bodyPr>
-          <a:lstStyle/>
-          <a:p>
-            <a:pPr indent="0" lvl="0" marL="0" rtl="0" algn="l">
-              <a:lnSpc>
-                <a:spcPct val="115000"/>
-              </a:lnSpc>
-              <a:spcBef>
-                <a:spcPts val="0"/>
-              </a:spcBef>
-              <a:spcAft>
-                <a:spcPts val="0"/>
-              </a:spcAft>
-              <a:buClr>
-                <a:schemeClr val="dk1"/>
-              </a:buClr>
-              <a:buSzPts val="1100"/>
-              <a:buFont typeface="Arial"/>
-              <a:buNone/>
-            </a:pPr>
-            <a:r>
-              <a:rPr lang="en" sz="1900">
-                <a:solidFill>
-                  <a:schemeClr val="dk1"/>
-                </a:solidFill>
-              </a:rPr>
-              <a:t>import numpy as np</a:t>
-            </a:r>
-            <a:endParaRPr sz="1900">
-              <a:solidFill>
-                <a:schemeClr val="dk1"/>
-              </a:solidFill>
-            </a:endParaRPr>
-          </a:p>
-          <a:p>
-            <a:pPr indent="0" lvl="0" marL="0" rtl="0" algn="l">
-              <a:lnSpc>
-                <a:spcPct val="115000"/>
-              </a:lnSpc>
-              <a:spcBef>
-                <a:spcPts val="0"/>
-              </a:spcBef>
-              <a:spcAft>
-                <a:spcPts val="0"/>
-              </a:spcAft>
-              <a:buClr>
-                <a:schemeClr val="dk1"/>
-              </a:buClr>
-              <a:buSzPts val="1100"/>
-              <a:buFont typeface="Arial"/>
-              <a:buNone/>
-            </a:pPr>
-            <a:r>
-              <a:rPr lang="en" sz="1900">
-                <a:solidFill>
-                  <a:schemeClr val="dk1"/>
-                </a:solidFill>
-              </a:rPr>
-              <a:t>from numba import jit</a:t>
-            </a:r>
-            <a:endParaRPr sz="1900">
-              <a:solidFill>
-                <a:schemeClr val="dk1"/>
-              </a:solidFill>
-            </a:endParaRPr>
-          </a:p>
-          <a:p>
-            <a:pPr indent="0" lvl="0" marL="0" rtl="0" algn="l">
-              <a:lnSpc>
-                <a:spcPct val="115000"/>
-              </a:lnSpc>
-              <a:spcBef>
-                <a:spcPts val="0"/>
-              </a:spcBef>
-              <a:spcAft>
-                <a:spcPts val="0"/>
-              </a:spcAft>
-              <a:buClr>
-                <a:schemeClr val="dk1"/>
-              </a:buClr>
-              <a:buSzPts val="1100"/>
-              <a:buFont typeface="Arial"/>
-              <a:buNone/>
-            </a:pPr>
-            <a:r>
-              <a:rPr lang="en" sz="1900">
-                <a:solidFill>
-                  <a:schemeClr val="dk1"/>
-                </a:solidFill>
-              </a:rPr>
-              <a:t>from numba import cuda</a:t>
-            </a:r>
-            <a:endParaRPr sz="1900">
-              <a:solidFill>
-                <a:schemeClr val="dk1"/>
-              </a:solidFill>
-            </a:endParaRPr>
-          </a:p>
-          <a:p>
-            <a:pPr indent="0" lvl="0" marL="0" rtl="0" algn="l">
-              <a:lnSpc>
-                <a:spcPct val="115000"/>
-              </a:lnSpc>
-              <a:spcBef>
-                <a:spcPts val="0"/>
-              </a:spcBef>
-              <a:spcAft>
-                <a:spcPts val="0"/>
-              </a:spcAft>
-              <a:buClr>
-                <a:schemeClr val="dk1"/>
-              </a:buClr>
-              <a:buSzPts val="1100"/>
-              <a:buFont typeface="Arial"/>
-              <a:buNone/>
-            </a:pPr>
-            <a:r>
-              <a:rPr lang="en" sz="1900">
-                <a:solidFill>
-                  <a:schemeClr val="dk1"/>
-                </a:solidFill>
-              </a:rPr>
-              <a:t>from time import  perf_counter_ns  as timer</a:t>
-            </a:r>
-            <a:endParaRPr sz="1900">
-              <a:solidFill>
-                <a:schemeClr val="dk1"/>
-              </a:solidFill>
-            </a:endParaRPr>
-          </a:p>
-          <a:p>
-            <a:pPr indent="0" lvl="0" marL="0" rtl="0" algn="l">
-              <a:lnSpc>
-                <a:spcPct val="115000"/>
-              </a:lnSpc>
-              <a:spcBef>
-                <a:spcPts val="0"/>
-              </a:spcBef>
-              <a:spcAft>
-                <a:spcPts val="0"/>
-              </a:spcAft>
-              <a:buNone/>
-            </a:pPr>
-            <a:r>
-              <a:rPr lang="en" sz="1900">
-                <a:solidFill>
-                  <a:schemeClr val="dk1"/>
-                </a:solidFill>
-              </a:rPr>
-              <a:t>from numba import cuda, float32</a:t>
-            </a:r>
-            <a:endParaRPr sz="1900">
-              <a:solidFill>
-                <a:schemeClr val="dk1"/>
-              </a:solidFill>
-            </a:endParaRPr>
-          </a:p>
-          <a:p>
-            <a:pPr indent="0" lvl="0" marL="0" rtl="0" algn="l">
-              <a:lnSpc>
-                <a:spcPct val="115000"/>
-              </a:lnSpc>
-              <a:spcBef>
-                <a:spcPts val="0"/>
-              </a:spcBef>
-              <a:spcAft>
-                <a:spcPts val="0"/>
-              </a:spcAft>
-              <a:buNone/>
-            </a:pPr>
-            <a:r>
-              <a:t/>
-            </a:r>
-            <a:endParaRPr sz="1900">
-              <a:solidFill>
-                <a:schemeClr val="dk1"/>
-              </a:solidFill>
-            </a:endParaRPr>
-          </a:p>
-          <a:p>
-            <a:pPr indent="0" lvl="0" marL="0" rtl="0" algn="l">
-              <a:lnSpc>
-                <a:spcPct val="115000"/>
-              </a:lnSpc>
-              <a:spcBef>
-                <a:spcPts val="0"/>
-              </a:spcBef>
-              <a:spcAft>
-                <a:spcPts val="0"/>
-              </a:spcAft>
-              <a:buNone/>
-            </a:pPr>
-            <a:r>
-              <a:rPr lang="en" sz="1900">
-                <a:solidFill>
-                  <a:schemeClr val="dk1"/>
-                </a:solidFill>
-              </a:rPr>
-              <a:t>@cuda.jit</a:t>
-            </a:r>
-            <a:r>
-              <a:rPr lang="en" sz="1900">
-                <a:solidFill>
-                  <a:schemeClr val="dk1"/>
-                </a:solidFill>
-                <a:highlight>
-                  <a:srgbClr val="FFF2CC"/>
-                </a:highlight>
-              </a:rPr>
-              <a:t>#(argtypes=[float32[:,:], float32[:,:], float32[:,:]])</a:t>
-            </a:r>
-            <a:endParaRPr sz="1900">
-              <a:solidFill>
-                <a:schemeClr val="dk1"/>
-              </a:solidFill>
-              <a:highlight>
-                <a:srgbClr val="FFF2CC"/>
-              </a:highlight>
-            </a:endParaRPr>
-          </a:p>
-          <a:p>
-            <a:pPr indent="0" lvl="0" marL="0" rtl="0" algn="l">
-              <a:lnSpc>
-                <a:spcPct val="115000"/>
-              </a:lnSpc>
-              <a:spcBef>
-                <a:spcPts val="0"/>
-              </a:spcBef>
-              <a:spcAft>
-                <a:spcPts val="0"/>
-              </a:spcAft>
-              <a:buNone/>
-            </a:pPr>
-            <a:r>
-              <a:rPr lang="en" sz="1900">
-                <a:solidFill>
-                  <a:schemeClr val="dk1"/>
-                </a:solidFill>
-              </a:rPr>
-              <a:t>def matmul(A, B, C):</a:t>
-            </a:r>
-            <a:endParaRPr sz="1900">
-              <a:solidFill>
-                <a:schemeClr val="dk1"/>
-              </a:solidFill>
-            </a:endParaRPr>
-          </a:p>
-          <a:p>
-            <a:pPr indent="0" lvl="0" marL="0" rtl="0" algn="l">
-              <a:lnSpc>
-                <a:spcPct val="115000"/>
-              </a:lnSpc>
-              <a:spcBef>
-                <a:spcPts val="0"/>
-              </a:spcBef>
-              <a:spcAft>
-                <a:spcPts val="0"/>
-              </a:spcAft>
-              <a:buNone/>
-            </a:pPr>
-            <a:r>
-              <a:rPr lang="en" sz="1900">
-                <a:solidFill>
-                  <a:schemeClr val="dk1"/>
-                </a:solidFill>
-              </a:rPr>
-              <a:t>   m,n = cuda.grid(2)</a:t>
-            </a:r>
-            <a:endParaRPr sz="1900">
-              <a:solidFill>
-                <a:schemeClr val="dk1"/>
-              </a:solidFill>
-            </a:endParaRPr>
-          </a:p>
-          <a:p>
-            <a:pPr indent="0" lvl="0" marL="0" rtl="0" algn="l">
-              <a:lnSpc>
-                <a:spcPct val="115000"/>
-              </a:lnSpc>
-              <a:spcBef>
-                <a:spcPts val="0"/>
-              </a:spcBef>
-              <a:spcAft>
-                <a:spcPts val="0"/>
-              </a:spcAft>
-              <a:buNone/>
-            </a:pPr>
-            <a:r>
-              <a:rPr lang="en" sz="1900">
-                <a:solidFill>
-                  <a:schemeClr val="dk1"/>
-                </a:solidFill>
-              </a:rPr>
-              <a:t>   if m &lt; C.shape[0] and n &lt; C.shape[1]:</a:t>
-            </a:r>
-            <a:endParaRPr sz="1900">
-              <a:solidFill>
-                <a:schemeClr val="dk1"/>
-              </a:solidFill>
-            </a:endParaRPr>
-          </a:p>
-          <a:p>
-            <a:pPr indent="0" lvl="0" marL="0" rtl="0" algn="l">
-              <a:lnSpc>
-                <a:spcPct val="115000"/>
-              </a:lnSpc>
-              <a:spcBef>
-                <a:spcPts val="0"/>
-              </a:spcBef>
-              <a:spcAft>
-                <a:spcPts val="0"/>
-              </a:spcAft>
-              <a:buNone/>
-            </a:pPr>
-            <a:r>
-              <a:rPr lang="en" sz="1900">
-                <a:solidFill>
-                  <a:schemeClr val="dk1"/>
-                </a:solidFill>
-              </a:rPr>
-              <a:t>       acc = 0.</a:t>
-            </a:r>
-            <a:endParaRPr sz="1900">
-              <a:solidFill>
-                <a:schemeClr val="dk1"/>
-              </a:solidFill>
-            </a:endParaRPr>
-          </a:p>
-          <a:p>
-            <a:pPr indent="0" lvl="0" marL="0" rtl="0" algn="l">
-              <a:lnSpc>
-                <a:spcPct val="115000"/>
-              </a:lnSpc>
-              <a:spcBef>
-                <a:spcPts val="0"/>
-              </a:spcBef>
-              <a:spcAft>
-                <a:spcPts val="0"/>
-              </a:spcAft>
-              <a:buNone/>
-            </a:pPr>
-            <a:r>
-              <a:rPr lang="en" sz="1900">
-                <a:solidFill>
-                  <a:schemeClr val="dk1"/>
-                </a:solidFill>
-              </a:rPr>
-              <a:t>       for k in range(A.shape[1]):</a:t>
-            </a:r>
-            <a:endParaRPr sz="1900">
-              <a:solidFill>
-                <a:schemeClr val="dk1"/>
-              </a:solidFill>
-            </a:endParaRPr>
-          </a:p>
-          <a:p>
-            <a:pPr indent="0" lvl="0" marL="0" rtl="0" algn="l">
-              <a:lnSpc>
-                <a:spcPct val="115000"/>
-              </a:lnSpc>
-              <a:spcBef>
-                <a:spcPts val="0"/>
-              </a:spcBef>
-              <a:spcAft>
-                <a:spcPts val="0"/>
-              </a:spcAft>
-              <a:buNone/>
-            </a:pPr>
-            <a:r>
-              <a:rPr lang="en" sz="1900">
-                <a:solidFill>
-                  <a:schemeClr val="dk1"/>
-                </a:solidFill>
-              </a:rPr>
-              <a:t>           acc += A[m, k] * B[k, n]</a:t>
-            </a:r>
-            <a:endParaRPr sz="1900">
-              <a:solidFill>
-                <a:schemeClr val="dk1"/>
-              </a:solidFill>
-            </a:endParaRPr>
-          </a:p>
-          <a:p>
-            <a:pPr indent="0" lvl="0" marL="0" rtl="0" algn="l">
-              <a:lnSpc>
-                <a:spcPct val="115000"/>
-              </a:lnSpc>
-              <a:spcBef>
-                <a:spcPts val="0"/>
-              </a:spcBef>
-              <a:spcAft>
-                <a:spcPts val="0"/>
-              </a:spcAft>
-              <a:buNone/>
-            </a:pPr>
-            <a:r>
-              <a:rPr lang="en" sz="1900">
-                <a:solidFill>
-                  <a:schemeClr val="dk1"/>
-                </a:solidFill>
-              </a:rPr>
-              <a:t>       C[m, n] = acc</a:t>
-            </a:r>
-            <a:endParaRPr sz="1900">
-              <a:solidFill>
-                <a:schemeClr val="dk1"/>
-              </a:solidFill>
-            </a:endParaRPr>
-          </a:p>
-          <a:p>
-            <a:pPr indent="0" lvl="0" marL="0" rtl="0" algn="l">
-              <a:lnSpc>
-                <a:spcPct val="115000"/>
-              </a:lnSpc>
-              <a:spcBef>
-                <a:spcPts val="0"/>
-              </a:spcBef>
-              <a:spcAft>
-                <a:spcPts val="0"/>
-              </a:spcAft>
-              <a:buClr>
-                <a:schemeClr val="dk1"/>
-              </a:buClr>
-              <a:buSzPts val="1100"/>
-              <a:buFont typeface="Arial"/>
-              <a:buNone/>
-            </a:pPr>
-            <a:r>
-              <a:rPr lang="en">
-                <a:solidFill>
-                  <a:schemeClr val="dk1"/>
-                </a:solidFill>
-              </a:rPr>
-              <a:t>      </a:t>
-            </a:r>
-            <a:endParaRPr sz="1900">
-              <a:solidFill>
-                <a:schemeClr val="dk1"/>
-              </a:solidFill>
-            </a:endParaRPr>
-          </a:p>
-        </p:txBody>
-      </p:sp>
-    </p:spTree>
-  </p:cSld>
-  <p:clrMapOvr>
-    <a:masterClrMapping/>
-  </p:clrMapOvr>
-</p:sld>
-</file>
-
-<file path=ppt/slides/slide16.xml><?xml version="1.0" encoding="utf-8"?>
-<p:sld xmlns:a="http://schemas.openxmlformats.org/drawingml/2006/main" xmlns:r="http://schemas.openxmlformats.org/officeDocument/2006/relationships" xmlns:mc="http://schemas.openxmlformats.org/markup-compatibility/2006" xmlns:mv="urn:schemas-microsoft-com:mac:vml" xmlns:p="http://schemas.openxmlformats.org/presentationml/2006/main" xmlns:c="http://schemas.openxmlformats.org/drawingml/2006/chart" xmlns:dgm="http://schemas.openxmlformats.org/drawingml/2006/diagram" xmlns:o="urn:schemas-microsoft-com:office:office" xmlns:v="urn:schemas-microsoft-com:vml" xmlns:pvml="urn:schemas-microsoft-com:office:powerpoint" xmlns:com="http://schemas.openxmlformats.org/drawingml/2006/compatibility" xmlns:p14="http://schemas.microsoft.com/office/powerpoint/2010/main" xmlns:p15="http://schemas.microsoft.com/office/powerpoint/2012/main" xmlns:ahyp="http://schemas.microsoft.com/office/drawing/2018/hyperlinkcolor">
-  <p:cSld>
-    <p:spTree>
-      <p:nvGrpSpPr>
-        <p:cNvPr id="148" name="Shape 148"/>
-        <p:cNvGrpSpPr/>
-        <p:nvPr/>
-      </p:nvGrpSpPr>
-      <p:grpSpPr>
-        <a:xfrm>
-          <a:off x="0" y="0"/>
-          <a:ext cx="0" cy="0"/>
-          <a:chOff x="0" y="0"/>
-          <a:chExt cx="0" cy="0"/>
-        </a:xfrm>
-      </p:grpSpPr>
-      <p:sp>
-        <p:nvSpPr>
-          <p:cNvPr id="149" name="Google Shape;149;p31"/>
-          <p:cNvSpPr txBox="1"/>
-          <p:nvPr/>
-        </p:nvSpPr>
-        <p:spPr>
-          <a:xfrm>
-            <a:off x="83725" y="100475"/>
-            <a:ext cx="8943300" cy="4973400"/>
-          </a:xfrm>
-          <a:prstGeom prst="rect">
-            <a:avLst/>
-          </a:prstGeom>
-          <a:solidFill>
-            <a:srgbClr val="D0E0E3"/>
-          </a:solidFill>
-          <a:ln>
-            <a:noFill/>
-          </a:ln>
-        </p:spPr>
-        <p:txBody>
-          <a:bodyPr anchorCtr="0" anchor="t" bIns="91425" lIns="91425" spcFirstLastPara="1" rIns="91425" wrap="square" tIns="91425">
-            <a:spAutoFit/>
-          </a:bodyPr>
-          <a:lstStyle/>
-          <a:p>
-            <a:pPr indent="0" lvl="0" marL="0" rtl="0" algn="l">
-              <a:spcBef>
-                <a:spcPts val="0"/>
-              </a:spcBef>
-              <a:spcAft>
-                <a:spcPts val="0"/>
-              </a:spcAft>
-              <a:buClr>
-                <a:schemeClr val="dk1"/>
-              </a:buClr>
-              <a:buSzPts val="1100"/>
-              <a:buFont typeface="Arial"/>
-              <a:buNone/>
-            </a:pPr>
-            <a:r>
-              <a:rPr lang="en" sz="1900"/>
-              <a:t>M=1024</a:t>
-            </a:r>
-            <a:endParaRPr sz="1900"/>
-          </a:p>
-          <a:p>
-            <a:pPr indent="0" lvl="0" marL="0" rtl="0" algn="l">
-              <a:spcBef>
-                <a:spcPts val="0"/>
-              </a:spcBef>
-              <a:spcAft>
-                <a:spcPts val="0"/>
-              </a:spcAft>
-              <a:buClr>
-                <a:schemeClr val="dk1"/>
-              </a:buClr>
-              <a:buSzPts val="1100"/>
-              <a:buFont typeface="Arial"/>
-              <a:buNone/>
-            </a:pPr>
-            <a:r>
-              <a:rPr lang="en" sz="1900"/>
-              <a:t>K=1024</a:t>
-            </a:r>
-            <a:endParaRPr sz="1900"/>
-          </a:p>
-          <a:p>
-            <a:pPr indent="0" lvl="0" marL="0" rtl="0" algn="l">
-              <a:spcBef>
-                <a:spcPts val="0"/>
-              </a:spcBef>
-              <a:spcAft>
-                <a:spcPts val="0"/>
-              </a:spcAft>
-              <a:buClr>
-                <a:schemeClr val="dk1"/>
-              </a:buClr>
-              <a:buSzPts val="1100"/>
-              <a:buFont typeface="Arial"/>
-              <a:buNone/>
-            </a:pPr>
-            <a:r>
-              <a:rPr lang="en" sz="1900"/>
-              <a:t>N=1024</a:t>
-            </a:r>
-            <a:endParaRPr sz="1900"/>
-          </a:p>
-          <a:p>
-            <a:pPr indent="0" lvl="0" marL="0" rtl="0" algn="l">
-              <a:spcBef>
-                <a:spcPts val="0"/>
-              </a:spcBef>
-              <a:spcAft>
-                <a:spcPts val="0"/>
-              </a:spcAft>
-              <a:buNone/>
-            </a:pPr>
-            <a:r>
-              <a:t/>
-            </a:r>
-            <a:endParaRPr/>
-          </a:p>
-          <a:p>
-            <a:pPr indent="0" lvl="0" marL="0" rtl="0" algn="l">
-              <a:spcBef>
-                <a:spcPts val="0"/>
-              </a:spcBef>
-              <a:spcAft>
-                <a:spcPts val="0"/>
-              </a:spcAft>
-              <a:buClr>
-                <a:schemeClr val="dk1"/>
-              </a:buClr>
-              <a:buSzPts val="1100"/>
-              <a:buFont typeface="Arial"/>
-              <a:buNone/>
-            </a:pPr>
-            <a:r>
-              <a:rPr lang="en" sz="1900"/>
-              <a:t>A=np.arange(M*K)</a:t>
-            </a:r>
-            <a:endParaRPr sz="1900"/>
-          </a:p>
-          <a:p>
-            <a:pPr indent="0" lvl="0" marL="0" rtl="0" algn="l">
-              <a:spcBef>
-                <a:spcPts val="0"/>
-              </a:spcBef>
-              <a:spcAft>
-                <a:spcPts val="0"/>
-              </a:spcAft>
-              <a:buClr>
-                <a:schemeClr val="dk1"/>
-              </a:buClr>
-              <a:buSzPts val="1100"/>
-              <a:buFont typeface="Arial"/>
-              <a:buNone/>
-            </a:pPr>
-            <a:r>
-              <a:rPr lang="en" sz="1900"/>
-              <a:t>A=A.reshape(M,K)</a:t>
-            </a:r>
-            <a:endParaRPr sz="1900"/>
-          </a:p>
-          <a:p>
-            <a:pPr indent="0" lvl="0" marL="0" rtl="0" algn="l">
-              <a:spcBef>
-                <a:spcPts val="0"/>
-              </a:spcBef>
-              <a:spcAft>
-                <a:spcPts val="0"/>
-              </a:spcAft>
-              <a:buClr>
-                <a:schemeClr val="dk1"/>
-              </a:buClr>
-              <a:buSzPts val="1100"/>
-              <a:buFont typeface="Arial"/>
-              <a:buNone/>
-            </a:pPr>
-            <a:r>
-              <a:rPr lang="en" sz="1900"/>
-              <a:t>B=np.ones((K,N))</a:t>
-            </a:r>
-            <a:endParaRPr sz="1900"/>
-          </a:p>
-          <a:p>
-            <a:pPr indent="0" lvl="0" marL="0" rtl="0" algn="l">
-              <a:spcBef>
-                <a:spcPts val="0"/>
-              </a:spcBef>
-              <a:spcAft>
-                <a:spcPts val="0"/>
-              </a:spcAft>
-              <a:buClr>
-                <a:schemeClr val="dk1"/>
-              </a:buClr>
-              <a:buSzPts val="1100"/>
-              <a:buFont typeface="Arial"/>
-              <a:buNone/>
-            </a:pPr>
-            <a:r>
-              <a:rPr lang="en" sz="1900"/>
-              <a:t>#C=np.zeros((M,N))</a:t>
-            </a:r>
-            <a:endParaRPr sz="1900"/>
-          </a:p>
-          <a:p>
-            <a:pPr indent="0" lvl="0" marL="0" rtl="0" algn="l">
-              <a:lnSpc>
-                <a:spcPct val="115000"/>
-              </a:lnSpc>
-              <a:spcBef>
-                <a:spcPts val="0"/>
-              </a:spcBef>
-              <a:spcAft>
-                <a:spcPts val="0"/>
-              </a:spcAft>
-              <a:buClr>
-                <a:schemeClr val="dk1"/>
-              </a:buClr>
-              <a:buSzPts val="1100"/>
-              <a:buFont typeface="Arial"/>
-              <a:buNone/>
-            </a:pPr>
-            <a:r>
-              <a:rPr lang="en" sz="1900"/>
-              <a:t>np.set_printoptions(formatter={'float': '{: 0.3g}'.format}) </a:t>
-            </a:r>
-            <a:endParaRPr sz="1900"/>
-          </a:p>
-          <a:p>
-            <a:pPr indent="0" lvl="0" marL="0" rtl="0" algn="l">
-              <a:spcBef>
-                <a:spcPts val="0"/>
-              </a:spcBef>
-              <a:spcAft>
-                <a:spcPts val="0"/>
-              </a:spcAft>
-              <a:buNone/>
-            </a:pPr>
-            <a:r>
-              <a:t/>
-            </a:r>
-            <a:endParaRPr/>
-          </a:p>
-          <a:p>
-            <a:pPr indent="0" lvl="0" marL="0" rtl="0" algn="l">
-              <a:lnSpc>
-                <a:spcPct val="115000"/>
-              </a:lnSpc>
-              <a:spcBef>
-                <a:spcPts val="0"/>
-              </a:spcBef>
-              <a:spcAft>
-                <a:spcPts val="0"/>
-              </a:spcAft>
-              <a:buClr>
-                <a:schemeClr val="dk1"/>
-              </a:buClr>
-              <a:buSzPts val="1100"/>
-              <a:buFont typeface="Arial"/>
-              <a:buNone/>
-            </a:pPr>
-            <a:r>
-              <a:rPr lang="en" sz="1900"/>
-              <a:t>start = timer()</a:t>
-            </a:r>
-            <a:endParaRPr sz="1900"/>
-          </a:p>
-          <a:p>
-            <a:pPr indent="0" lvl="0" marL="0" rtl="0" algn="l">
-              <a:lnSpc>
-                <a:spcPct val="115000"/>
-              </a:lnSpc>
-              <a:spcBef>
-                <a:spcPts val="0"/>
-              </a:spcBef>
-              <a:spcAft>
-                <a:spcPts val="0"/>
-              </a:spcAft>
-              <a:buClr>
-                <a:schemeClr val="dk1"/>
-              </a:buClr>
-              <a:buSzPts val="1100"/>
-              <a:buFont typeface="Arial"/>
-              <a:buNone/>
-            </a:pPr>
-            <a:r>
-              <a:rPr lang="en" sz="1900"/>
-              <a:t>C=np.matmul(A,B)</a:t>
-            </a:r>
-            <a:endParaRPr sz="1900"/>
-          </a:p>
-          <a:p>
-            <a:pPr indent="0" lvl="0" marL="0" rtl="0" algn="l">
-              <a:lnSpc>
-                <a:spcPct val="115000"/>
-              </a:lnSpc>
-              <a:spcBef>
-                <a:spcPts val="0"/>
-              </a:spcBef>
-              <a:spcAft>
-                <a:spcPts val="0"/>
-              </a:spcAft>
-              <a:buClr>
-                <a:schemeClr val="dk1"/>
-              </a:buClr>
-              <a:buSzPts val="1100"/>
-              <a:buFont typeface="Arial"/>
-              <a:buNone/>
-            </a:pPr>
-            <a:r>
-              <a:rPr lang="en" sz="1900"/>
-              <a:t>dt = timer() - start</a:t>
-            </a:r>
-            <a:endParaRPr sz="1900"/>
-          </a:p>
-          <a:p>
-            <a:pPr indent="0" lvl="0" marL="0" rtl="0" algn="l">
-              <a:lnSpc>
-                <a:spcPct val="115000"/>
-              </a:lnSpc>
-              <a:spcBef>
-                <a:spcPts val="0"/>
-              </a:spcBef>
-              <a:spcAft>
-                <a:spcPts val="0"/>
-              </a:spcAft>
-              <a:buClr>
-                <a:schemeClr val="dk1"/>
-              </a:buClr>
-              <a:buSzPts val="1100"/>
-              <a:buFont typeface="Arial"/>
-              <a:buNone/>
-            </a:pPr>
-            <a:r>
-              <a:rPr lang="en" sz="1900"/>
-              <a:t>dt=dt/1000000.0</a:t>
-            </a:r>
-            <a:endParaRPr sz="1900"/>
-          </a:p>
-          <a:p>
-            <a:pPr indent="0" lvl="0" marL="0" rtl="0" algn="l">
-              <a:lnSpc>
-                <a:spcPct val="115000"/>
-              </a:lnSpc>
-              <a:spcBef>
-                <a:spcPts val="0"/>
-              </a:spcBef>
-              <a:spcAft>
-                <a:spcPts val="0"/>
-              </a:spcAft>
-              <a:buClr>
-                <a:schemeClr val="dk1"/>
-              </a:buClr>
-              <a:buSzPts val="1100"/>
-              <a:buFont typeface="Arial"/>
-              <a:buNone/>
-            </a:pPr>
-            <a:r>
-              <a:rPr lang="en" sz="1900"/>
-              <a:t>print ("np.matmul time %f ms" % dt)</a:t>
-            </a:r>
-            <a:endParaRPr sz="1900"/>
-          </a:p>
-          <a:p>
-            <a:pPr indent="0" lvl="0" marL="0" rtl="0" algn="l">
-              <a:lnSpc>
-                <a:spcPct val="115000"/>
-              </a:lnSpc>
-              <a:spcBef>
-                <a:spcPts val="0"/>
-              </a:spcBef>
-              <a:spcAft>
-                <a:spcPts val="0"/>
-              </a:spcAft>
-              <a:buNone/>
-            </a:pPr>
-            <a:r>
-              <a:rPr lang="en" sz="1900"/>
-              <a:t>print(C)</a:t>
-            </a:r>
-            <a:endParaRPr/>
-          </a:p>
-        </p:txBody>
-      </p:sp>
-    </p:spTree>
-  </p:cSld>
-  <p:clrMapOvr>
-    <a:masterClrMapping/>
-  </p:clrMapOvr>
-</p:sld>
-</file>
-
-<file path=ppt/slides/slide17.xml><?xml version="1.0" encoding="utf-8"?>
-<p:sld xmlns:a="http://schemas.openxmlformats.org/drawingml/2006/main" xmlns:r="http://schemas.openxmlformats.org/officeDocument/2006/relationships" xmlns:mc="http://schemas.openxmlformats.org/markup-compatibility/2006" xmlns:mv="urn:schemas-microsoft-com:mac:vml" xmlns:p="http://schemas.openxmlformats.org/presentationml/2006/main" xmlns:c="http://schemas.openxmlformats.org/drawingml/2006/chart" xmlns:dgm="http://schemas.openxmlformats.org/drawingml/2006/diagram" xmlns:o="urn:schemas-microsoft-com:office:office" xmlns:v="urn:schemas-microsoft-com:vml" xmlns:pvml="urn:schemas-microsoft-com:office:powerpoint" xmlns:com="http://schemas.openxmlformats.org/drawingml/2006/compatibility" xmlns:p14="http://schemas.microsoft.com/office/powerpoint/2010/main" xmlns:p15="http://schemas.microsoft.com/office/powerpoint/2012/main" xmlns:ahyp="http://schemas.microsoft.com/office/drawing/2018/hyperlinkcolor">
-  <p:cSld>
-    <p:spTree>
-      <p:nvGrpSpPr>
-        <p:cNvPr id="153" name="Shape 153"/>
-        <p:cNvGrpSpPr/>
-        <p:nvPr/>
-      </p:nvGrpSpPr>
-      <p:grpSpPr>
-        <a:xfrm>
-          <a:off x="0" y="0"/>
-          <a:ext cx="0" cy="0"/>
-          <a:chOff x="0" y="0"/>
-          <a:chExt cx="0" cy="0"/>
-        </a:xfrm>
-      </p:grpSpPr>
-      <p:sp>
-        <p:nvSpPr>
-          <p:cNvPr id="154" name="Google Shape;154;p32"/>
-          <p:cNvSpPr txBox="1"/>
-          <p:nvPr/>
-        </p:nvSpPr>
-        <p:spPr>
-          <a:xfrm>
-            <a:off x="133875" y="719425"/>
-            <a:ext cx="8926800" cy="2754300"/>
-          </a:xfrm>
-          <a:prstGeom prst="rect">
-            <a:avLst/>
-          </a:prstGeom>
-          <a:solidFill>
-            <a:srgbClr val="D0E0E3"/>
-          </a:solidFill>
-          <a:ln>
-            <a:noFill/>
-          </a:ln>
-        </p:spPr>
-        <p:txBody>
-          <a:bodyPr anchorCtr="0" anchor="t" bIns="91425" lIns="91425" spcFirstLastPara="1" rIns="91425" wrap="square" tIns="91425">
-            <a:spAutoFit/>
-          </a:bodyPr>
-          <a:lstStyle/>
-          <a:p>
-            <a:pPr indent="0" lvl="0" marL="0" rtl="0" algn="l">
-              <a:lnSpc>
-                <a:spcPct val="115000"/>
-              </a:lnSpc>
-              <a:spcBef>
-                <a:spcPts val="0"/>
-              </a:spcBef>
-              <a:spcAft>
-                <a:spcPts val="0"/>
-              </a:spcAft>
-              <a:buClr>
-                <a:schemeClr val="dk1"/>
-              </a:buClr>
-              <a:buSzPts val="1100"/>
-              <a:buFont typeface="Arial"/>
-              <a:buNone/>
-            </a:pPr>
-            <a:r>
-              <a:rPr lang="en" sz="1900"/>
-              <a:t>A=np.float32(A)</a:t>
-            </a:r>
-            <a:endParaRPr sz="1900"/>
-          </a:p>
-          <a:p>
-            <a:pPr indent="0" lvl="0" marL="0" rtl="0" algn="l">
-              <a:lnSpc>
-                <a:spcPct val="115000"/>
-              </a:lnSpc>
-              <a:spcBef>
-                <a:spcPts val="0"/>
-              </a:spcBef>
-              <a:spcAft>
-                <a:spcPts val="0"/>
-              </a:spcAft>
-              <a:buClr>
-                <a:schemeClr val="dk1"/>
-              </a:buClr>
-              <a:buSzPts val="1100"/>
-              <a:buFont typeface="Arial"/>
-              <a:buNone/>
-            </a:pPr>
-            <a:r>
-              <a:rPr lang="en" sz="1900"/>
-              <a:t>B=np.float32(B)</a:t>
-            </a:r>
-            <a:endParaRPr sz="1900"/>
-          </a:p>
-          <a:p>
-            <a:pPr indent="0" lvl="0" marL="0" rtl="0" algn="l">
-              <a:lnSpc>
-                <a:spcPct val="115000"/>
-              </a:lnSpc>
-              <a:spcBef>
-                <a:spcPts val="0"/>
-              </a:spcBef>
-              <a:spcAft>
-                <a:spcPts val="0"/>
-              </a:spcAft>
-              <a:buClr>
-                <a:schemeClr val="dk1"/>
-              </a:buClr>
-              <a:buSzPts val="1100"/>
-              <a:buFont typeface="Arial"/>
-              <a:buNone/>
-            </a:pPr>
-            <a:r>
-              <a:rPr lang="en" sz="1900"/>
-              <a:t>C=np.float32(C)</a:t>
-            </a:r>
-            <a:endParaRPr sz="1900"/>
-          </a:p>
-          <a:p>
-            <a:pPr indent="0" lvl="0" marL="0" rtl="0" algn="l">
-              <a:lnSpc>
-                <a:spcPct val="115000"/>
-              </a:lnSpc>
-              <a:spcBef>
-                <a:spcPts val="0"/>
-              </a:spcBef>
-              <a:spcAft>
-                <a:spcPts val="0"/>
-              </a:spcAft>
-              <a:buClr>
-                <a:schemeClr val="dk1"/>
-              </a:buClr>
-              <a:buSzPts val="1100"/>
-              <a:buFont typeface="Arial"/>
-              <a:buNone/>
-            </a:pPr>
-            <a:r>
-              <a:t/>
-            </a:r>
-            <a:endParaRPr sz="1900"/>
-          </a:p>
-          <a:p>
-            <a:pPr indent="0" lvl="0" marL="0" rtl="0" algn="l">
-              <a:lnSpc>
-                <a:spcPct val="115000"/>
-              </a:lnSpc>
-              <a:spcBef>
-                <a:spcPts val="0"/>
-              </a:spcBef>
-              <a:spcAft>
-                <a:spcPts val="0"/>
-              </a:spcAft>
-              <a:buClr>
-                <a:schemeClr val="dk1"/>
-              </a:buClr>
-              <a:buSzPts val="1100"/>
-              <a:buFont typeface="Arial"/>
-              <a:buNone/>
-            </a:pPr>
-            <a:r>
-              <a:rPr lang="en" sz="1900"/>
-              <a:t>dA=cuda.to_device(A)</a:t>
-            </a:r>
-            <a:endParaRPr sz="1900"/>
-          </a:p>
-          <a:p>
-            <a:pPr indent="0" lvl="0" marL="0" rtl="0" algn="l">
-              <a:lnSpc>
-                <a:spcPct val="115000"/>
-              </a:lnSpc>
-              <a:spcBef>
-                <a:spcPts val="0"/>
-              </a:spcBef>
-              <a:spcAft>
-                <a:spcPts val="0"/>
-              </a:spcAft>
-              <a:buClr>
-                <a:schemeClr val="dk1"/>
-              </a:buClr>
-              <a:buSzPts val="1100"/>
-              <a:buFont typeface="Arial"/>
-              <a:buNone/>
-            </a:pPr>
-            <a:r>
-              <a:rPr lang="en" sz="1900"/>
-              <a:t>dB=cuda.to_device(B)</a:t>
-            </a:r>
-            <a:endParaRPr sz="1900"/>
-          </a:p>
-          <a:p>
-            <a:pPr indent="0" lvl="0" marL="0" rtl="0" algn="l">
-              <a:lnSpc>
-                <a:spcPct val="115000"/>
-              </a:lnSpc>
-              <a:spcBef>
-                <a:spcPts val="0"/>
-              </a:spcBef>
-              <a:spcAft>
-                <a:spcPts val="0"/>
-              </a:spcAft>
-              <a:buClr>
-                <a:schemeClr val="dk1"/>
-              </a:buClr>
-              <a:buSzPts val="1100"/>
-              <a:buFont typeface="Arial"/>
-              <a:buNone/>
-            </a:pPr>
-            <a:r>
-              <a:rPr lang="en" sz="1900"/>
-              <a:t>dC=cuda.to_device(C)</a:t>
-            </a:r>
-            <a:endParaRPr sz="1900"/>
-          </a:p>
-          <a:p>
-            <a:pPr indent="0" lvl="0" marL="0" rtl="0" algn="l">
-              <a:spcBef>
-                <a:spcPts val="0"/>
-              </a:spcBef>
-              <a:spcAft>
-                <a:spcPts val="0"/>
-              </a:spcAft>
-              <a:buNone/>
-            </a:pPr>
-            <a:r>
-              <a:t/>
-            </a:r>
-            <a:endParaRPr/>
-          </a:p>
-        </p:txBody>
-      </p:sp>
-    </p:spTree>
-  </p:cSld>
-  <p:clrMapOvr>
-    <a:masterClrMapping/>
-  </p:clrMapOvr>
-</p:sld>
-</file>
-
-<file path=ppt/slides/slide18.xml><?xml version="1.0" encoding="utf-8"?>
-<p:sld xmlns:a="http://schemas.openxmlformats.org/drawingml/2006/main" xmlns:r="http://schemas.openxmlformats.org/officeDocument/2006/relationships" xmlns:mc="http://schemas.openxmlformats.org/markup-compatibility/2006" xmlns:mv="urn:schemas-microsoft-com:mac:vml" xmlns:p="http://schemas.openxmlformats.org/presentationml/2006/main" xmlns:c="http://schemas.openxmlformats.org/drawingml/2006/chart" xmlns:dgm="http://schemas.openxmlformats.org/drawingml/2006/diagram" xmlns:o="urn:schemas-microsoft-com:office:office" xmlns:v="urn:schemas-microsoft-com:vml" xmlns:pvml="urn:schemas-microsoft-com:office:powerpoint" xmlns:com="http://schemas.openxmlformats.org/drawingml/2006/compatibility" xmlns:p14="http://schemas.microsoft.com/office/powerpoint/2010/main" xmlns:p15="http://schemas.microsoft.com/office/powerpoint/2012/main" xmlns:ahyp="http://schemas.microsoft.com/office/drawing/2018/hyperlinkcolor">
-  <p:cSld>
-    <p:spTree>
-      <p:nvGrpSpPr>
-        <p:cNvPr id="158" name="Shape 158"/>
-        <p:cNvGrpSpPr/>
-        <p:nvPr/>
-      </p:nvGrpSpPr>
-      <p:grpSpPr>
-        <a:xfrm>
-          <a:off x="0" y="0"/>
-          <a:ext cx="0" cy="0"/>
-          <a:chOff x="0" y="0"/>
-          <a:chExt cx="0" cy="0"/>
-        </a:xfrm>
-      </p:grpSpPr>
-      <p:sp>
-        <p:nvSpPr>
-          <p:cNvPr id="159" name="Google Shape;159;p33"/>
-          <p:cNvSpPr txBox="1"/>
-          <p:nvPr/>
-        </p:nvSpPr>
-        <p:spPr>
-          <a:xfrm>
-            <a:off x="100425" y="117200"/>
-            <a:ext cx="8910000" cy="3427200"/>
-          </a:xfrm>
-          <a:prstGeom prst="rect">
-            <a:avLst/>
-          </a:prstGeom>
-          <a:solidFill>
-            <a:srgbClr val="D0E0E3"/>
-          </a:solidFill>
-          <a:ln>
-            <a:noFill/>
-          </a:ln>
-        </p:spPr>
-        <p:txBody>
-          <a:bodyPr anchorCtr="0" anchor="t" bIns="91425" lIns="91425" spcFirstLastPara="1" rIns="91425" wrap="square" tIns="91425">
-            <a:spAutoFit/>
-          </a:bodyPr>
-          <a:lstStyle/>
-          <a:p>
-            <a:pPr indent="0" lvl="0" marL="0" rtl="0" algn="l">
-              <a:lnSpc>
-                <a:spcPct val="115000"/>
-              </a:lnSpc>
-              <a:spcBef>
-                <a:spcPts val="0"/>
-              </a:spcBef>
-              <a:spcAft>
-                <a:spcPts val="0"/>
-              </a:spcAft>
-              <a:buClr>
-                <a:schemeClr val="dk1"/>
-              </a:buClr>
-              <a:buSzPts val="1100"/>
-              <a:buFont typeface="Arial"/>
-              <a:buNone/>
-            </a:pPr>
-            <a:r>
-              <a:rPr lang="en" sz="1900">
-                <a:solidFill>
-                  <a:schemeClr val="dk1"/>
-                </a:solidFill>
-              </a:rPr>
-              <a:t>start = timer()</a:t>
-            </a:r>
-            <a:endParaRPr sz="1900">
-              <a:solidFill>
-                <a:schemeClr val="dk1"/>
-              </a:solidFill>
-            </a:endParaRPr>
-          </a:p>
-          <a:p>
-            <a:pPr indent="0" lvl="0" marL="0" rtl="0" algn="l">
-              <a:lnSpc>
-                <a:spcPct val="115000"/>
-              </a:lnSpc>
-              <a:spcBef>
-                <a:spcPts val="0"/>
-              </a:spcBef>
-              <a:spcAft>
-                <a:spcPts val="0"/>
-              </a:spcAft>
-              <a:buClr>
-                <a:schemeClr val="dk1"/>
-              </a:buClr>
-              <a:buSzPts val="1100"/>
-              <a:buFont typeface="Arial"/>
-              <a:buNone/>
-            </a:pPr>
-            <a:r>
-              <a:rPr lang="en" sz="1900">
-                <a:solidFill>
-                  <a:schemeClr val="dk1"/>
-                </a:solidFill>
-              </a:rPr>
-              <a:t>matmul[(64,64),(16,16)](dA,dB,dC)</a:t>
-            </a:r>
-            <a:endParaRPr sz="1900">
-              <a:solidFill>
-                <a:schemeClr val="dk1"/>
-              </a:solidFill>
-            </a:endParaRPr>
-          </a:p>
-          <a:p>
-            <a:pPr indent="0" lvl="0" marL="0" rtl="0" algn="l">
-              <a:lnSpc>
-                <a:spcPct val="115000"/>
-              </a:lnSpc>
-              <a:spcBef>
-                <a:spcPts val="0"/>
-              </a:spcBef>
-              <a:spcAft>
-                <a:spcPts val="0"/>
-              </a:spcAft>
-              <a:buClr>
-                <a:schemeClr val="dk1"/>
-              </a:buClr>
-              <a:buSzPts val="1100"/>
-              <a:buFont typeface="Arial"/>
-              <a:buNone/>
-            </a:pPr>
-            <a:r>
-              <a:rPr lang="en" sz="1900">
-                <a:solidFill>
-                  <a:schemeClr val="dk1"/>
-                </a:solidFill>
-              </a:rPr>
-              <a:t>cuda.synchronize()  </a:t>
-            </a:r>
-            <a:endParaRPr sz="1900">
-              <a:solidFill>
-                <a:schemeClr val="dk1"/>
-              </a:solidFill>
-            </a:endParaRPr>
-          </a:p>
-          <a:p>
-            <a:pPr indent="0" lvl="0" marL="0" rtl="0" algn="l">
-              <a:lnSpc>
-                <a:spcPct val="115000"/>
-              </a:lnSpc>
-              <a:spcBef>
-                <a:spcPts val="0"/>
-              </a:spcBef>
-              <a:spcAft>
-                <a:spcPts val="0"/>
-              </a:spcAft>
-              <a:buClr>
-                <a:schemeClr val="dk1"/>
-              </a:buClr>
-              <a:buSzPts val="1100"/>
-              <a:buFont typeface="Arial"/>
-              <a:buNone/>
-            </a:pPr>
-            <a:r>
-              <a:rPr lang="en" sz="1900">
-                <a:solidFill>
-                  <a:schemeClr val="dk1"/>
-                </a:solidFill>
-              </a:rPr>
-              <a:t>dt = timer() - start</a:t>
-            </a:r>
-            <a:endParaRPr sz="1900">
-              <a:solidFill>
-                <a:schemeClr val="dk1"/>
-              </a:solidFill>
-            </a:endParaRPr>
-          </a:p>
-          <a:p>
-            <a:pPr indent="0" lvl="0" marL="0" rtl="0" algn="l">
-              <a:lnSpc>
-                <a:spcPct val="115000"/>
-              </a:lnSpc>
-              <a:spcBef>
-                <a:spcPts val="0"/>
-              </a:spcBef>
-              <a:spcAft>
-                <a:spcPts val="0"/>
-              </a:spcAft>
-              <a:buClr>
-                <a:schemeClr val="dk1"/>
-              </a:buClr>
-              <a:buSzPts val="1100"/>
-              <a:buFont typeface="Arial"/>
-              <a:buNone/>
-            </a:pPr>
-            <a:r>
-              <a:t/>
-            </a:r>
-            <a:endParaRPr sz="1900">
-              <a:solidFill>
-                <a:schemeClr val="dk1"/>
-              </a:solidFill>
-            </a:endParaRPr>
-          </a:p>
-          <a:p>
-            <a:pPr indent="0" lvl="0" marL="0" rtl="0" algn="l">
-              <a:lnSpc>
-                <a:spcPct val="115000"/>
-              </a:lnSpc>
-              <a:spcBef>
-                <a:spcPts val="0"/>
-              </a:spcBef>
-              <a:spcAft>
-                <a:spcPts val="0"/>
-              </a:spcAft>
-              <a:buClr>
-                <a:schemeClr val="dk1"/>
-              </a:buClr>
-              <a:buSzPts val="1100"/>
-              <a:buFont typeface="Arial"/>
-              <a:buNone/>
-            </a:pPr>
-            <a:r>
-              <a:rPr lang="en" sz="1900">
-                <a:solidFill>
-                  <a:schemeClr val="dk1"/>
-                </a:solidFill>
-              </a:rPr>
-              <a:t>#dC.to_host()</a:t>
-            </a:r>
-            <a:endParaRPr sz="1900">
-              <a:solidFill>
-                <a:schemeClr val="dk1"/>
-              </a:solidFill>
-            </a:endParaRPr>
-          </a:p>
-          <a:p>
-            <a:pPr indent="0" lvl="0" marL="0" rtl="0" algn="l">
-              <a:lnSpc>
-                <a:spcPct val="115000"/>
-              </a:lnSpc>
-              <a:spcBef>
-                <a:spcPts val="0"/>
-              </a:spcBef>
-              <a:spcAft>
-                <a:spcPts val="0"/>
-              </a:spcAft>
-              <a:buNone/>
-            </a:pPr>
-            <a:r>
-              <a:rPr lang="en" sz="1900">
-                <a:solidFill>
-                  <a:schemeClr val="dk1"/>
-                </a:solidFill>
-              </a:rPr>
-              <a:t>dt=dt/1000000.0</a:t>
-            </a:r>
-            <a:endParaRPr sz="1900">
-              <a:solidFill>
-                <a:schemeClr val="dk1"/>
-              </a:solidFill>
-            </a:endParaRPr>
-          </a:p>
-          <a:p>
-            <a:pPr indent="0" lvl="0" marL="0" rtl="0" algn="l">
-              <a:lnSpc>
-                <a:spcPct val="115000"/>
-              </a:lnSpc>
-              <a:spcBef>
-                <a:spcPts val="0"/>
-              </a:spcBef>
-              <a:spcAft>
-                <a:spcPts val="0"/>
-              </a:spcAft>
-              <a:buClr>
-                <a:schemeClr val="dk1"/>
-              </a:buClr>
-              <a:buSzPts val="1100"/>
-              <a:buFont typeface="Arial"/>
-              <a:buNone/>
-            </a:pPr>
-            <a:r>
-              <a:rPr lang="en" sz="1900">
-                <a:solidFill>
-                  <a:schemeClr val="dk1"/>
-                </a:solidFill>
-              </a:rPr>
-              <a:t>print ("matmul time %f ms" % dt)</a:t>
-            </a:r>
-            <a:endParaRPr sz="1900">
-              <a:solidFill>
-                <a:schemeClr val="dk1"/>
-              </a:solidFill>
-            </a:endParaRPr>
-          </a:p>
-          <a:p>
-            <a:pPr indent="0" lvl="0" marL="0" rtl="0" algn="l">
-              <a:lnSpc>
-                <a:spcPct val="115000"/>
-              </a:lnSpc>
-              <a:spcBef>
-                <a:spcPts val="0"/>
-              </a:spcBef>
-              <a:spcAft>
-                <a:spcPts val="0"/>
-              </a:spcAft>
-              <a:buClr>
-                <a:schemeClr val="dk1"/>
-              </a:buClr>
-              <a:buSzPts val="1100"/>
-              <a:buFont typeface="Arial"/>
-              <a:buNone/>
-            </a:pPr>
-            <a:r>
-              <a:rPr lang="en" sz="1900">
-                <a:solidFill>
-                  <a:schemeClr val="dk1"/>
-                </a:solidFill>
-              </a:rPr>
-              <a:t>print(dC)</a:t>
-            </a:r>
-            <a:endParaRPr sz="1900">
-              <a:solidFill>
-                <a:schemeClr val="dk1"/>
-              </a:solidFill>
-            </a:endParaRPr>
-          </a:p>
-          <a:p>
-            <a:pPr indent="0" lvl="0" marL="0" rtl="0" algn="l">
-              <a:spcBef>
-                <a:spcPts val="0"/>
-              </a:spcBef>
-              <a:spcAft>
-                <a:spcPts val="0"/>
-              </a:spcAft>
-              <a:buNone/>
-            </a:pPr>
-            <a:r>
-              <a:t/>
-            </a:r>
-            <a:endParaRPr/>
-          </a:p>
-        </p:txBody>
-      </p:sp>
-    </p:spTree>
-  </p:cSld>
-  <p:clrMapOvr>
-    <a:masterClrMapping/>
-  </p:clrMapOvr>
-</p:sld>
-</file>
-
-<file path=ppt/slides/slide19.xml><?xml version="1.0" encoding="utf-8"?>
-<p:sld xmlns:a="http://schemas.openxmlformats.org/drawingml/2006/main" xmlns:r="http://schemas.openxmlformats.org/officeDocument/2006/relationships" xmlns:mc="http://schemas.openxmlformats.org/markup-compatibility/2006" xmlns:mv="urn:schemas-microsoft-com:mac:vml" xmlns:p="http://schemas.openxmlformats.org/presentationml/2006/main" xmlns:c="http://schemas.openxmlformats.org/drawingml/2006/chart" xmlns:dgm="http://schemas.openxmlformats.org/drawingml/2006/diagram" xmlns:o="urn:schemas-microsoft-com:office:office" xmlns:v="urn:schemas-microsoft-com:vml" xmlns:pvml="urn:schemas-microsoft-com:office:powerpoint" xmlns:com="http://schemas.openxmlformats.org/drawingml/2006/compatibility" xmlns:p14="http://schemas.microsoft.com/office/powerpoint/2010/main" xmlns:p15="http://schemas.microsoft.com/office/powerpoint/2012/main" xmlns:ahyp="http://schemas.microsoft.com/office/drawing/2018/hyperlinkcolor">
-  <p:cSld>
-    <p:spTree>
-      <p:nvGrpSpPr>
-        <p:cNvPr id="163" name="Shape 163"/>
-        <p:cNvGrpSpPr/>
-        <p:nvPr/>
-      </p:nvGrpSpPr>
-      <p:grpSpPr>
-        <a:xfrm>
-          <a:off x="0" y="0"/>
-          <a:ext cx="0" cy="0"/>
-          <a:chOff x="0" y="0"/>
-          <a:chExt cx="0" cy="0"/>
-        </a:xfrm>
-      </p:grpSpPr>
-      <p:sp>
-        <p:nvSpPr>
-          <p:cNvPr id="164" name="Google Shape;164;p34"/>
-          <p:cNvSpPr txBox="1"/>
-          <p:nvPr/>
-        </p:nvSpPr>
-        <p:spPr>
-          <a:xfrm>
-            <a:off x="184700" y="574775"/>
-            <a:ext cx="8775000" cy="3232500"/>
-          </a:xfrm>
-          <a:prstGeom prst="rect">
-            <a:avLst/>
-          </a:prstGeom>
-          <a:solidFill>
-            <a:srgbClr val="D9D9D9"/>
-          </a:solidFill>
-          <a:ln>
-            <a:noFill/>
-          </a:ln>
-        </p:spPr>
-        <p:txBody>
-          <a:bodyPr anchorCtr="0" anchor="t" bIns="91425" lIns="91425" spcFirstLastPara="1" rIns="91425" wrap="square" tIns="91425">
-            <a:spAutoFit/>
-          </a:bodyPr>
-          <a:lstStyle/>
-          <a:p>
-            <a:pPr indent="0" lvl="0" marL="0" rtl="0" algn="l">
-              <a:spcBef>
-                <a:spcPts val="0"/>
-              </a:spcBef>
-              <a:spcAft>
-                <a:spcPts val="0"/>
-              </a:spcAft>
-              <a:buClr>
-                <a:schemeClr val="dk1"/>
-              </a:buClr>
-              <a:buSzPts val="1100"/>
-              <a:buFont typeface="Arial"/>
-              <a:buNone/>
-            </a:pPr>
-            <a:r>
-              <a:rPr lang="en" sz="1800">
-                <a:solidFill>
-                  <a:schemeClr val="dk1"/>
-                </a:solidFill>
-                <a:highlight>
-                  <a:srgbClr val="D9D9D9"/>
-                </a:highlight>
-              </a:rPr>
-              <a:t>/Lab10&gt; python cuda-gemm3.py</a:t>
-            </a:r>
-            <a:endParaRPr sz="1800">
-              <a:solidFill>
-                <a:schemeClr val="dk1"/>
-              </a:solidFill>
-              <a:highlight>
-                <a:srgbClr val="D9D9D9"/>
-              </a:highlight>
-            </a:endParaRPr>
-          </a:p>
-          <a:p>
-            <a:pPr indent="0" lvl="0" marL="0" rtl="0" algn="l">
-              <a:spcBef>
-                <a:spcPts val="0"/>
-              </a:spcBef>
-              <a:spcAft>
-                <a:spcPts val="0"/>
-              </a:spcAft>
-              <a:buClr>
-                <a:schemeClr val="dk1"/>
-              </a:buClr>
-              <a:buSzPts val="1100"/>
-              <a:buFont typeface="Arial"/>
-              <a:buNone/>
-            </a:pPr>
-            <a:r>
-              <a:rPr b="1" lang="en" sz="1800">
-                <a:solidFill>
-                  <a:schemeClr val="dk1"/>
-                </a:solidFill>
-              </a:rPr>
-              <a:t>np.matmul time 20.236182 ms</a:t>
-            </a:r>
-            <a:endParaRPr b="1" sz="1800">
-              <a:solidFill>
-                <a:schemeClr val="dk1"/>
-              </a:solidFill>
-            </a:endParaRPr>
-          </a:p>
-          <a:p>
-            <a:pPr indent="0" lvl="0" marL="0" rtl="0" algn="l">
-              <a:spcBef>
-                <a:spcPts val="0"/>
-              </a:spcBef>
-              <a:spcAft>
-                <a:spcPts val="0"/>
-              </a:spcAft>
-              <a:buClr>
-                <a:schemeClr val="dk1"/>
-              </a:buClr>
-              <a:buSzPts val="1100"/>
-              <a:buFont typeface="Arial"/>
-              <a:buNone/>
-            </a:pPr>
-            <a:r>
-              <a:rPr lang="en" sz="1800">
-                <a:solidFill>
-                  <a:schemeClr val="dk1"/>
-                </a:solidFill>
-              </a:rPr>
-              <a:t>[[ 5.24e+05  5.24e+05  5.24e+05 ...  5.24e+05  5.24e+05  5.24e+05]</a:t>
-            </a:r>
-            <a:endParaRPr sz="1800">
-              <a:solidFill>
-                <a:schemeClr val="dk1"/>
-              </a:solidFill>
-            </a:endParaRPr>
-          </a:p>
-          <a:p>
-            <a:pPr indent="0" lvl="0" marL="0" rtl="0" algn="l">
-              <a:spcBef>
-                <a:spcPts val="0"/>
-              </a:spcBef>
-              <a:spcAft>
-                <a:spcPts val="0"/>
-              </a:spcAft>
-              <a:buClr>
-                <a:schemeClr val="dk1"/>
-              </a:buClr>
-              <a:buSzPts val="1100"/>
-              <a:buFont typeface="Arial"/>
-              <a:buNone/>
-            </a:pPr>
-            <a:r>
-              <a:rPr lang="en" sz="1800">
-                <a:solidFill>
-                  <a:schemeClr val="dk1"/>
-                </a:solidFill>
-              </a:rPr>
-              <a:t>[ 1.57e+06  1.57e+06  1.57e+06 ...  1.57e+06  1.57e+06  1.57e+06]</a:t>
-            </a:r>
-            <a:endParaRPr sz="1800">
-              <a:solidFill>
-                <a:schemeClr val="dk1"/>
-              </a:solidFill>
-            </a:endParaRPr>
-          </a:p>
-          <a:p>
-            <a:pPr indent="0" lvl="0" marL="0" rtl="0" algn="l">
-              <a:spcBef>
-                <a:spcPts val="0"/>
-              </a:spcBef>
-              <a:spcAft>
-                <a:spcPts val="0"/>
-              </a:spcAft>
-              <a:buClr>
-                <a:schemeClr val="dk1"/>
-              </a:buClr>
-              <a:buSzPts val="1100"/>
-              <a:buFont typeface="Arial"/>
-              <a:buNone/>
-            </a:pPr>
-            <a:r>
-              <a:rPr lang="en" sz="1800">
-                <a:solidFill>
-                  <a:schemeClr val="dk1"/>
-                </a:solidFill>
-              </a:rPr>
-              <a:t>...</a:t>
-            </a:r>
-            <a:endParaRPr sz="1800">
-              <a:solidFill>
-                <a:schemeClr val="dk1"/>
-              </a:solidFill>
-            </a:endParaRPr>
-          </a:p>
-          <a:p>
-            <a:pPr indent="0" lvl="0" marL="0" rtl="0" algn="l">
-              <a:spcBef>
-                <a:spcPts val="0"/>
-              </a:spcBef>
-              <a:spcAft>
-                <a:spcPts val="0"/>
-              </a:spcAft>
-              <a:buClr>
-                <a:schemeClr val="dk1"/>
-              </a:buClr>
-              <a:buSzPts val="1100"/>
-              <a:buFont typeface="Arial"/>
-              <a:buNone/>
-            </a:pPr>
-            <a:r>
-              <a:rPr lang="en" sz="1800">
-                <a:solidFill>
-                  <a:schemeClr val="dk1"/>
-                </a:solidFill>
-              </a:rPr>
-              <a:t>[ 1.07e+09  1.07e+09  1.07e+09 ...  1.07e+09  1.07e+09  1.07e+09]]</a:t>
-            </a:r>
-            <a:endParaRPr sz="1800">
-              <a:solidFill>
-                <a:schemeClr val="dk1"/>
-              </a:solidFill>
-            </a:endParaRPr>
-          </a:p>
-          <a:p>
-            <a:pPr indent="0" lvl="0" marL="0" rtl="0" algn="l">
-              <a:spcBef>
-                <a:spcPts val="0"/>
-              </a:spcBef>
-              <a:spcAft>
-                <a:spcPts val="0"/>
-              </a:spcAft>
-              <a:buClr>
-                <a:schemeClr val="dk1"/>
-              </a:buClr>
-              <a:buSzPts val="1100"/>
-              <a:buFont typeface="Arial"/>
-              <a:buNone/>
-            </a:pPr>
-            <a:r>
-              <a:rPr b="1" lang="en" sz="1800">
-                <a:solidFill>
-                  <a:schemeClr val="dk1"/>
-                </a:solidFill>
-              </a:rPr>
-              <a:t>matmul time 30.242027 ms</a:t>
-            </a:r>
-            <a:endParaRPr b="1" sz="1800">
-              <a:solidFill>
-                <a:schemeClr val="dk1"/>
-              </a:solidFill>
-            </a:endParaRPr>
-          </a:p>
-          <a:p>
-            <a:pPr indent="0" lvl="0" marL="0" rtl="0" algn="l">
-              <a:spcBef>
-                <a:spcPts val="0"/>
-              </a:spcBef>
-              <a:spcAft>
-                <a:spcPts val="0"/>
-              </a:spcAft>
-              <a:buClr>
-                <a:schemeClr val="dk1"/>
-              </a:buClr>
-              <a:buSzPts val="1100"/>
-              <a:buFont typeface="Arial"/>
-              <a:buNone/>
-            </a:pPr>
-            <a:r>
-              <a:rPr lang="en" sz="1800">
-                <a:solidFill>
-                  <a:schemeClr val="dk1"/>
-                </a:solidFill>
-              </a:rPr>
-              <a:t>[[ 5.24e+05  5.24e+05  5.24e+05 ...  5.24e+05  5.24e+05  5.24e+05]</a:t>
-            </a:r>
-            <a:endParaRPr sz="1800">
-              <a:solidFill>
-                <a:schemeClr val="dk1"/>
-              </a:solidFill>
-            </a:endParaRPr>
-          </a:p>
-          <a:p>
-            <a:pPr indent="0" lvl="0" marL="0" rtl="0" algn="l">
-              <a:spcBef>
-                <a:spcPts val="0"/>
-              </a:spcBef>
-              <a:spcAft>
-                <a:spcPts val="0"/>
-              </a:spcAft>
-              <a:buClr>
-                <a:schemeClr val="dk1"/>
-              </a:buClr>
-              <a:buSzPts val="1100"/>
-              <a:buFont typeface="Arial"/>
-              <a:buNone/>
-            </a:pPr>
-            <a:r>
-              <a:rPr lang="en" sz="1800">
-                <a:solidFill>
-                  <a:schemeClr val="dk1"/>
-                </a:solidFill>
-              </a:rPr>
-              <a:t>[ 1.57e+06  1.57e+06  1.57e+06 ...  1.57e+06  1.57e+06  1.57e+06]</a:t>
-            </a:r>
-            <a:endParaRPr sz="1800">
-              <a:solidFill>
-                <a:schemeClr val="dk1"/>
-              </a:solidFill>
-            </a:endParaRPr>
-          </a:p>
-          <a:p>
-            <a:pPr indent="0" lvl="0" marL="0" rtl="0" algn="l">
-              <a:spcBef>
-                <a:spcPts val="0"/>
-              </a:spcBef>
-              <a:spcAft>
-                <a:spcPts val="0"/>
-              </a:spcAft>
-              <a:buClr>
-                <a:schemeClr val="dk1"/>
-              </a:buClr>
-              <a:buSzPts val="1100"/>
-              <a:buFont typeface="Arial"/>
-              <a:buNone/>
-            </a:pPr>
-            <a:r>
-              <a:rPr lang="en" sz="1800">
-                <a:solidFill>
-                  <a:schemeClr val="dk1"/>
-                </a:solidFill>
-              </a:rPr>
-              <a:t>...</a:t>
-            </a:r>
-            <a:endParaRPr sz="1800">
-              <a:solidFill>
-                <a:schemeClr val="dk1"/>
-              </a:solidFill>
-            </a:endParaRPr>
-          </a:p>
-          <a:p>
-            <a:pPr indent="0" lvl="0" marL="0" rtl="0" algn="l">
-              <a:spcBef>
-                <a:spcPts val="0"/>
-              </a:spcBef>
-              <a:spcAft>
-                <a:spcPts val="0"/>
-              </a:spcAft>
-              <a:buClr>
-                <a:schemeClr val="dk1"/>
-              </a:buClr>
-              <a:buSzPts val="1100"/>
-              <a:buFont typeface="Arial"/>
-              <a:buNone/>
-            </a:pPr>
-            <a:r>
-              <a:rPr lang="en" sz="1800">
-                <a:solidFill>
-                  <a:schemeClr val="dk1"/>
-                </a:solidFill>
-              </a:rPr>
-              <a:t>[ 1.07e+09  1.07e+09  1.07e+09 ...  1.07e+09  1.07e+09  1.07e+09]]</a:t>
-            </a:r>
-            <a:endParaRPr sz="2100"/>
-          </a:p>
-        </p:txBody>
-      </p:sp>
-    </p:spTree>
-  </p:cSld>
-  <p:clrMapOvr>
-    <a:masterClrMapping/>
-  </p:clrMapOvr>
-</p:sld>
-</file>
-
 <file path=ppt/slides/slide2.xml><?xml version="1.0" encoding="utf-8"?>
 <p:sld xmlns:a="http://schemas.openxmlformats.org/drawingml/2006/main" xmlns:r="http://schemas.openxmlformats.org/officeDocument/2006/relationships" xmlns:mc="http://schemas.openxmlformats.org/markup-compatibility/2006" xmlns:mv="urn:schemas-microsoft-com:mac:vml" xmlns:p="http://schemas.openxmlformats.org/presentationml/2006/main" xmlns:c="http://schemas.openxmlformats.org/drawingml/2006/chart" xmlns:dgm="http://schemas.openxmlformats.org/drawingml/2006/diagram" xmlns:o="urn:schemas-microsoft-com:office:office" xmlns:v="urn:schemas-microsoft-com:vml" xmlns:pvml="urn:schemas-microsoft-com:office:powerpoint" xmlns:com="http://schemas.openxmlformats.org/drawingml/2006/compatibility" xmlns:p14="http://schemas.microsoft.com/office/powerpoint/2010/main" xmlns:p15="http://schemas.microsoft.com/office/powerpoint/2012/main" xmlns:ahyp="http://schemas.microsoft.com/office/drawing/2018/hyperlinkcolor">
   <p:cSld>
@@ -14772,306 +12332,6 @@
               <a:t>компилятором Numba</a:t>
             </a:r>
             <a:endParaRPr b="1" sz="2200"/>
-          </a:p>
-        </p:txBody>
-      </p:sp>
-    </p:spTree>
-  </p:cSld>
-  <p:clrMapOvr>
-    <a:masterClrMapping/>
-  </p:clrMapOvr>
-</p:sld>
-</file>
-
-<file path=ppt/slides/slide20.xml><?xml version="1.0" encoding="utf-8"?>
-<p:sld xmlns:a="http://schemas.openxmlformats.org/drawingml/2006/main" xmlns:r="http://schemas.openxmlformats.org/officeDocument/2006/relationships" xmlns:mc="http://schemas.openxmlformats.org/markup-compatibility/2006" xmlns:mv="urn:schemas-microsoft-com:mac:vml" xmlns:p="http://schemas.openxmlformats.org/presentationml/2006/main" xmlns:c="http://schemas.openxmlformats.org/drawingml/2006/chart" xmlns:dgm="http://schemas.openxmlformats.org/drawingml/2006/diagram" xmlns:o="urn:schemas-microsoft-com:office:office" xmlns:v="urn:schemas-microsoft-com:vml" xmlns:pvml="urn:schemas-microsoft-com:office:powerpoint" xmlns:com="http://schemas.openxmlformats.org/drawingml/2006/compatibility" xmlns:p14="http://schemas.microsoft.com/office/powerpoint/2010/main" xmlns:p15="http://schemas.microsoft.com/office/powerpoint/2012/main" xmlns:ahyp="http://schemas.microsoft.com/office/drawing/2018/hyperlinkcolor">
-  <p:cSld>
-    <p:spTree>
-      <p:nvGrpSpPr>
-        <p:cNvPr id="168" name="Shape 168"/>
-        <p:cNvGrpSpPr/>
-        <p:nvPr/>
-      </p:nvGrpSpPr>
-      <p:grpSpPr>
-        <a:xfrm>
-          <a:off x="0" y="0"/>
-          <a:ext cx="0" cy="0"/>
-          <a:chOff x="0" y="0"/>
-          <a:chExt cx="0" cy="0"/>
-        </a:xfrm>
-      </p:grpSpPr>
-      <p:sp>
-        <p:nvSpPr>
-          <p:cNvPr id="169" name="Google Shape;169;p35"/>
-          <p:cNvSpPr txBox="1"/>
-          <p:nvPr/>
-        </p:nvSpPr>
-        <p:spPr>
-          <a:xfrm>
-            <a:off x="134350" y="786600"/>
-            <a:ext cx="9009600" cy="2154900"/>
-          </a:xfrm>
-          <a:prstGeom prst="rect">
-            <a:avLst/>
-          </a:prstGeom>
-          <a:solidFill>
-            <a:srgbClr val="D9D9D9"/>
-          </a:solidFill>
-          <a:ln cap="flat" cmpd="sng" w="9525">
-            <a:solidFill>
-              <a:schemeClr val="dk1"/>
-            </a:solidFill>
-            <a:prstDash val="solid"/>
-            <a:round/>
-            <a:headEnd len="sm" w="sm" type="none"/>
-            <a:tailEnd len="sm" w="sm" type="none"/>
-          </a:ln>
-        </p:spPr>
-        <p:txBody>
-          <a:bodyPr anchorCtr="0" anchor="t" bIns="91425" lIns="91425" spcFirstLastPara="1" rIns="91425" wrap="square" tIns="91425">
-            <a:spAutoFit/>
-          </a:bodyPr>
-          <a:lstStyle/>
-          <a:p>
-            <a:pPr indent="0" lvl="0" marL="0" rtl="0" algn="l">
-              <a:spcBef>
-                <a:spcPts val="0"/>
-              </a:spcBef>
-              <a:spcAft>
-                <a:spcPts val="0"/>
-              </a:spcAft>
-              <a:buNone/>
-            </a:pPr>
-            <a:r>
-              <a:rPr lang="en" sz="1900">
-                <a:solidFill>
-                  <a:schemeClr val="dk1"/>
-                </a:solidFill>
-                <a:highlight>
-                  <a:schemeClr val="lt1"/>
-                </a:highlight>
-              </a:rPr>
-              <a:t>Type  </a:t>
-            </a:r>
-            <a:endParaRPr sz="1900">
-              <a:solidFill>
-                <a:schemeClr val="dk1"/>
-              </a:solidFill>
-              <a:highlight>
-                <a:schemeClr val="lt1"/>
-              </a:highlight>
-            </a:endParaRPr>
-          </a:p>
-          <a:p>
-            <a:pPr indent="0" lvl="0" marL="0" rtl="0" algn="l">
-              <a:spcBef>
-                <a:spcPts val="0"/>
-              </a:spcBef>
-              <a:spcAft>
-                <a:spcPts val="0"/>
-              </a:spcAft>
-              <a:buNone/>
-            </a:pPr>
-            <a:r>
-              <a:rPr lang="en" sz="1900">
-                <a:solidFill>
-                  <a:schemeClr val="dk1"/>
-                </a:solidFill>
-                <a:highlight>
-                  <a:schemeClr val="lt1"/>
-                </a:highlight>
-              </a:rPr>
-              <a:t>Time(%)   Time     Calls       Avg                Min           Max          Name</a:t>
-            </a:r>
-            <a:endParaRPr sz="1900">
-              <a:solidFill>
-                <a:schemeClr val="dk1"/>
-              </a:solidFill>
-              <a:highlight>
-                <a:schemeClr val="lt1"/>
-              </a:highlight>
-            </a:endParaRPr>
-          </a:p>
-          <a:p>
-            <a:pPr indent="0" lvl="0" marL="0" rtl="0" algn="l">
-              <a:spcBef>
-                <a:spcPts val="0"/>
-              </a:spcBef>
-              <a:spcAft>
-                <a:spcPts val="0"/>
-              </a:spcAft>
-              <a:buNone/>
-            </a:pPr>
-            <a:r>
-              <a:rPr lang="en" sz="1900">
-                <a:solidFill>
-                  <a:schemeClr val="dk1"/>
-                </a:solidFill>
-                <a:highlight>
-                  <a:srgbClr val="D9D9D9"/>
-                </a:highlight>
-              </a:rPr>
-              <a:t>GPU activities:   </a:t>
-            </a:r>
-            <a:endParaRPr sz="1900">
-              <a:solidFill>
-                <a:schemeClr val="dk1"/>
-              </a:solidFill>
-              <a:highlight>
-                <a:srgbClr val="D9D9D9"/>
-              </a:highlight>
-            </a:endParaRPr>
-          </a:p>
-          <a:p>
-            <a:pPr indent="0" lvl="0" marL="0" rtl="0" algn="l">
-              <a:spcBef>
-                <a:spcPts val="0"/>
-              </a:spcBef>
-              <a:spcAft>
-                <a:spcPts val="0"/>
-              </a:spcAft>
-              <a:buClr>
-                <a:schemeClr val="dk1"/>
-              </a:buClr>
-              <a:buSzPts val="1100"/>
-              <a:buFont typeface="Arial"/>
-              <a:buNone/>
-            </a:pPr>
-            <a:r>
-              <a:rPr lang="en" sz="1900">
-                <a:solidFill>
-                  <a:schemeClr val="dk1"/>
-                </a:solidFill>
-                <a:highlight>
-                  <a:srgbClr val="D9D9D9"/>
-                </a:highlight>
-              </a:rPr>
-              <a:t>49.23%  62.324ms   2       </a:t>
-            </a:r>
-            <a:r>
-              <a:rPr b="1" lang="en" sz="1900">
-                <a:solidFill>
-                  <a:schemeClr val="dk1"/>
-                </a:solidFill>
-                <a:highlight>
-                  <a:srgbClr val="D9D9D9"/>
-                </a:highlight>
-              </a:rPr>
-              <a:t>31.162ms</a:t>
-            </a:r>
-            <a:r>
-              <a:rPr lang="en" sz="1900">
-                <a:solidFill>
-                  <a:schemeClr val="dk1"/>
-                </a:solidFill>
-                <a:highlight>
-                  <a:srgbClr val="D9D9D9"/>
-                </a:highlight>
-              </a:rPr>
-              <a:t>    30.458ms    31.866ms  cudapy::__main__::</a:t>
-            </a:r>
-            <a:r>
-              <a:rPr b="1" lang="en" sz="1900">
-                <a:solidFill>
-                  <a:srgbClr val="FF0000"/>
-                </a:solidFill>
-                <a:highlight>
-                  <a:srgbClr val="D9D9D9"/>
-                </a:highlight>
-              </a:rPr>
-              <a:t>matmul</a:t>
-            </a:r>
-            <a:r>
-              <a:rPr lang="en" sz="1900">
-                <a:solidFill>
-                  <a:schemeClr val="dk1"/>
-                </a:solidFill>
-                <a:highlight>
-                  <a:srgbClr val="D9D9D9"/>
-                </a:highlight>
-              </a:rPr>
-              <a:t>$242(Array&lt;float, int=2, A, mutable, aligned&gt;, Array&lt;float, int=2, A, mutable, aligned&gt;, Array&lt;float, int=2, A, mutable, aligned&gt;)</a:t>
-            </a:r>
-            <a:endParaRPr sz="1900">
-              <a:solidFill>
-                <a:schemeClr val="dk1"/>
-              </a:solidFill>
-              <a:highlight>
-                <a:srgbClr val="D9D9D9"/>
-              </a:highlight>
-            </a:endParaRPr>
-          </a:p>
-          <a:p>
-            <a:pPr indent="0" lvl="0" marL="0" rtl="0" algn="l">
-              <a:spcBef>
-                <a:spcPts val="0"/>
-              </a:spcBef>
-              <a:spcAft>
-                <a:spcPts val="0"/>
-              </a:spcAft>
-              <a:buNone/>
-            </a:pPr>
-            <a:r>
-              <a:t/>
-            </a:r>
-            <a:endParaRPr/>
-          </a:p>
-        </p:txBody>
-      </p:sp>
-      <p:sp>
-        <p:nvSpPr>
-          <p:cNvPr id="170" name="Google Shape;170;p35"/>
-          <p:cNvSpPr txBox="1"/>
-          <p:nvPr/>
-        </p:nvSpPr>
-        <p:spPr>
-          <a:xfrm>
-            <a:off x="133875" y="100475"/>
-            <a:ext cx="8910000" cy="492600"/>
-          </a:xfrm>
-          <a:prstGeom prst="rect">
-            <a:avLst/>
-          </a:prstGeom>
-          <a:solidFill>
-            <a:srgbClr val="D9D9D9"/>
-          </a:solidFill>
-          <a:ln cap="flat" cmpd="sng" w="9525">
-            <a:solidFill>
-              <a:schemeClr val="dk1"/>
-            </a:solidFill>
-            <a:prstDash val="solid"/>
-            <a:round/>
-            <a:headEnd len="sm" w="sm" type="none"/>
-            <a:tailEnd len="sm" w="sm" type="none"/>
-          </a:ln>
-        </p:spPr>
-        <p:txBody>
-          <a:bodyPr anchorCtr="0" anchor="t" bIns="91425" lIns="91425" spcFirstLastPara="1" rIns="91425" wrap="square" tIns="91425">
-            <a:spAutoFit/>
-          </a:bodyPr>
-          <a:lstStyle/>
-          <a:p>
-            <a:pPr indent="0" lvl="0" marL="0" rtl="0" algn="l">
-              <a:spcBef>
-                <a:spcPts val="0"/>
-              </a:spcBef>
-              <a:spcAft>
-                <a:spcPts val="0"/>
-              </a:spcAft>
-              <a:buNone/>
-            </a:pPr>
-            <a:r>
-              <a:rPr lang="en" sz="2000">
-                <a:solidFill>
-                  <a:schemeClr val="dk1"/>
-                </a:solidFill>
-                <a:highlight>
-                  <a:srgbClr val="D9D9D9"/>
-                </a:highlight>
-              </a:rPr>
-              <a:t>/Lab10&gt; nvprof python cuda-gemm3.py</a:t>
-            </a:r>
-            <a:endParaRPr/>
           </a:p>
         </p:txBody>
       </p:sp>
@@ -17334,285 +14594,6 @@
 </file>
 
 <file path=ppt/theme/theme1.xml><?xml version="1.0" encoding="utf-8"?>
-<a:theme xmlns:a="http://schemas.openxmlformats.org/drawingml/2006/main" xmlns:r="http://schemas.openxmlformats.org/officeDocument/2006/relationships">
-  <a:themeElements>
-    <a:clrScheme name="Default">
-      <a:dk1>
-        <a:srgbClr val="000000"/>
-      </a:dk1>
-      <a:lt1>
-        <a:srgbClr val="FFFFFF"/>
-      </a:lt1>
-      <a:dk2>
-        <a:srgbClr val="158158"/>
-      </a:dk2>
-      <a:lt2>
-        <a:srgbClr val="F3F3F3"/>
-      </a:lt2>
-      <a:accent1>
-        <a:srgbClr val="058DC7"/>
-      </a:accent1>
-      <a:accent2>
-        <a:srgbClr val="50B432"/>
-      </a:accent2>
-      <a:accent3>
-        <a:srgbClr val="ED561B"/>
-      </a:accent3>
-      <a:accent4>
-        <a:srgbClr val="EDEF00"/>
-      </a:accent4>
-      <a:accent5>
-        <a:srgbClr val="24CBE5"/>
-      </a:accent5>
-      <a:accent6>
-        <a:srgbClr val="64E572"/>
-      </a:accent6>
-      <a:hlink>
-        <a:srgbClr val="2200CC"/>
-      </a:hlink>
-      <a:folHlink>
-        <a:srgbClr val="551A8B"/>
-      </a:folHlink>
-    </a:clrScheme>
-    <a:fontScheme name="Office">
-      <a:majorFont>
-        <a:latin typeface="Arial"/>
-        <a:ea typeface=""/>
-        <a:cs typeface=""/>
-        <a:font script="Jpan" typeface="ＭＳ Ｐゴシック"/>
-        <a:font script="Hang" typeface="맑은 고딕"/>
-        <a:font script="Hans" typeface="宋体"/>
-        <a:font script="Hant" typeface="新細明體"/>
-        <a:font script="Arab" typeface="Times New Roman"/>
-        <a:font script="Hebr" typeface="Times New Roman"/>
-        <a:font script="Thai" typeface="Angsana New"/>
-        <a:font script="Ethi" typeface="Nyala"/>
-        <a:font script="Beng" typeface="Vrinda"/>
-        <a:font script="Gujr" typeface="Shruti"/>
-        <a:font script="Khmr" typeface="MoolBoran"/>
-        <a:font script="Knda" typeface="Tunga"/>
-        <a:font script="Guru" typeface="Raavi"/>
-        <a:font script="Cans" typeface="Euphemia"/>
-        <a:font script="Cher" typeface="Plantagenet Cherokee"/>
-        <a:font script="Yiii" typeface="Microsoft Yi Baiti"/>
-        <a:font script="Tibt" typeface="Microsoft Himalaya"/>
-        <a:font script="Thaa" typeface="MV Boli"/>
-        <a:font script="Deva" typeface="Mangal"/>
-        <a:font script="Telu" typeface="Gautami"/>
-        <a:font script="Taml" typeface="Latha"/>
-        <a:font script="Syrc" typeface="Estrangelo Edessa"/>
-        <a:font script="Orya" typeface="Kalinga"/>
-        <a:font script="Mlym" typeface="Kartika"/>
-        <a:font script="Laoo" typeface="DokChampa"/>
-        <a:font script="Sinh" typeface="Iskoola Pota"/>
-        <a:font script="Mong" typeface="Mongolian Baiti"/>
-        <a:font script="Viet" typeface="Times New Roman"/>
-        <a:font script="Uigh" typeface="Microsoft Uighur"/>
-        <a:font script="Geor" typeface="Sylfaen"/>
-      </a:majorFont>
-      <a:minorFont>
-        <a:latin typeface="Arial"/>
-        <a:ea typeface=""/>
-        <a:cs typeface=""/>
-        <a:font script="Jpan" typeface="ＭＳ Ｐゴシック"/>
-        <a:font script="Hang" typeface="맑은 고딕"/>
-        <a:font script="Hans" typeface="宋体"/>
-        <a:font script="Hant" typeface="新細明體"/>
-        <a:font script="Arab" typeface="Arial"/>
-        <a:font script="Hebr" typeface="Arial"/>
-        <a:font script="Thai" typeface="Cordia New"/>
-        <a:font script="Ethi" typeface="Nyala"/>
-        <a:font script="Beng" typeface="Vrinda"/>
-        <a:font script="Gujr" typeface="Shruti"/>
-        <a:font script="Khmr" typeface="DaunPenh"/>
-        <a:font script="Knda" typeface="Tunga"/>
-        <a:font script="Guru" typeface="Raavi"/>
-        <a:font script="Cans" typeface="Euphemia"/>
-        <a:font script="Cher" typeface="Plantagenet Cherokee"/>
-        <a:font script="Yiii" typeface="Microsoft Yi Baiti"/>
-        <a:font script="Tibt" typeface="Microsoft Himalaya"/>
-        <a:font script="Thaa" typeface="MV Boli"/>
-        <a:font script="Deva" typeface="Mangal"/>
-        <a:font script="Telu" typeface="Gautami"/>
-        <a:font script="Taml" typeface="Latha"/>
-        <a:font script="Syrc" typeface="Estrangelo Edessa"/>
-        <a:font script="Orya" typeface="Kalinga"/>
-        <a:font script="Mlym" typeface="Kartika"/>
-        <a:font script="Laoo" typeface="DokChampa"/>
-        <a:font script="Sinh" typeface="Iskoola Pota"/>
-        <a:font script="Mong" typeface="Mongolian Baiti"/>
-        <a:font script="Viet" typeface="Arial"/>
-        <a:font script="Uigh" typeface="Microsoft Uighur"/>
-        <a:font script="Geor" typeface="Sylfaen"/>
-      </a:minorFont>
-    </a:fontScheme>
-    <a:fmtScheme name="Office">
-      <a:fillStyleLst>
-        <a:solidFill>
-          <a:schemeClr val="phClr"/>
-        </a:solidFill>
-        <a:gradFill rotWithShape="1">
-          <a:gsLst>
-            <a:gs pos="0">
-              <a:schemeClr val="phClr">
-                <a:tint val="50000"/>
-                <a:satMod val="300000"/>
-              </a:schemeClr>
-            </a:gs>
-            <a:gs pos="35000">
-              <a:schemeClr val="phClr">
-                <a:tint val="37000"/>
-                <a:satMod val="300000"/>
-              </a:schemeClr>
-            </a:gs>
-            <a:gs pos="100000">
-              <a:schemeClr val="phClr">
-                <a:tint val="15000"/>
-                <a:satMod val="350000"/>
-              </a:schemeClr>
-            </a:gs>
-          </a:gsLst>
-          <a:lin ang="16200000" scaled="1"/>
-        </a:gradFill>
-        <a:gradFill rotWithShape="1">
-          <a:gsLst>
-            <a:gs pos="0">
-              <a:schemeClr val="phClr">
-                <a:tint val="100000"/>
-                <a:shade val="100000"/>
-                <a:satMod val="130000"/>
-              </a:schemeClr>
-            </a:gs>
-            <a:gs pos="100000">
-              <a:schemeClr val="phClr">
-                <a:tint val="50000"/>
-                <a:shade val="100000"/>
-                <a:satMod val="350000"/>
-              </a:schemeClr>
-            </a:gs>
-          </a:gsLst>
-          <a:lin ang="16200000" scaled="0"/>
-        </a:gradFill>
-      </a:fillStyleLst>
-      <a:lnStyleLst>
-        <a:ln w="9525" cap="flat" cmpd="sng" algn="ctr">
-          <a:solidFill>
-            <a:schemeClr val="phClr">
-              <a:shade val="95000"/>
-              <a:satMod val="105000"/>
-            </a:schemeClr>
-          </a:solidFill>
-          <a:prstDash val="solid"/>
-        </a:ln>
-        <a:ln w="25400" cap="flat" cmpd="sng" algn="ctr">
-          <a:solidFill>
-            <a:schemeClr val="phClr"/>
-          </a:solidFill>
-          <a:prstDash val="solid"/>
-        </a:ln>
-        <a:ln w="38100" cap="flat" cmpd="sng" algn="ctr">
-          <a:solidFill>
-            <a:schemeClr val="phClr"/>
-          </a:solidFill>
-          <a:prstDash val="solid"/>
-        </a:ln>
-      </a:lnStyleLst>
-      <a:effectStyleLst>
-        <a:effectStyle>
-          <a:effectLst>
-            <a:outerShdw blurRad="40000" dist="20000" dir="5400000" rotWithShape="0">
-              <a:srgbClr val="000000">
-                <a:alpha val="38000"/>
-              </a:srgbClr>
-            </a:outerShdw>
-          </a:effectLst>
-        </a:effectStyle>
-        <a:effectStyle>
-          <a:effectLst>
-            <a:outerShdw blurRad="40000" dist="23000" dir="5400000" rotWithShape="0">
-              <a:srgbClr val="000000">
-                <a:alpha val="35000"/>
-              </a:srgbClr>
-            </a:outerShdw>
-          </a:effectLst>
-        </a:effectStyle>
-        <a:effectStyle>
-          <a:effectLst>
-            <a:outerShdw blurRad="40000" dist="23000" dir="5400000" rotWithShape="0">
-              <a:srgbClr val="000000">
-                <a:alpha val="35000"/>
-              </a:srgbClr>
-            </a:outerShdw>
-          </a:effectLst>
-          <a:scene3d>
-            <a:camera prst="orthographicFront">
-              <a:rot lat="0" lon="0" rev="0"/>
-            </a:camera>
-            <a:lightRig rig="threePt" dir="t">
-              <a:rot lat="0" lon="0" rev="1200000"/>
-            </a:lightRig>
-          </a:scene3d>
-          <a:sp3d>
-            <a:bevelT w="63500" h="25400"/>
-          </a:sp3d>
-        </a:effectStyle>
-      </a:effectStyleLst>
-      <a:bgFillStyleLst>
-        <a:solidFill>
-          <a:schemeClr val="phClr"/>
-        </a:solidFill>
-        <a:gradFill rotWithShape="1">
-          <a:gsLst>
-            <a:gs pos="0">
-              <a:schemeClr val="phClr">
-                <a:tint val="40000"/>
-                <a:satMod val="350000"/>
-              </a:schemeClr>
-            </a:gs>
-            <a:gs pos="40000">
-              <a:schemeClr val="phClr">
-                <a:tint val="45000"/>
-                <a:shade val="99000"/>
-                <a:satMod val="350000"/>
-              </a:schemeClr>
-            </a:gs>
-            <a:gs pos="100000">
-              <a:schemeClr val="phClr">
-                <a:shade val="20000"/>
-                <a:satMod val="255000"/>
-              </a:schemeClr>
-            </a:gs>
-          </a:gsLst>
-          <a:path path="circle">
-            <a:fillToRect l="50000" t="-80000" r="50000" b="180000"/>
-          </a:path>
-        </a:gradFill>
-        <a:gradFill rotWithShape="1">
-          <a:gsLst>
-            <a:gs pos="0">
-              <a:schemeClr val="phClr">
-                <a:tint val="80000"/>
-                <a:satMod val="300000"/>
-              </a:schemeClr>
-            </a:gs>
-            <a:gs pos="100000">
-              <a:schemeClr val="phClr">
-                <a:shade val="30000"/>
-                <a:satMod val="200000"/>
-              </a:schemeClr>
-            </a:gs>
-          </a:gsLst>
-          <a:path path="circle">
-            <a:fillToRect l="50000" t="50000" r="50000" b="50000"/>
-          </a:path>
-        </a:gradFill>
-      </a:bgFillStyleLst>
-    </a:fmtScheme>
-  </a:themeElements>
-</a:theme>
-</file>
-
-<file path=ppt/theme/theme2.xml><?xml version="1.0" encoding="utf-8"?>
 <a:theme xmlns:a="http://schemas.openxmlformats.org/drawingml/2006/main" xmlns:r="http://schemas.openxmlformats.org/officeDocument/2006/relationships" name="POI_THEME_TEMPLATE_DESIGN">
   <a:themeElements>
     <a:clrScheme name="POI_THEME_TEMPLATE_DESIGN">
@@ -17891,7 +14872,7 @@
 </a:theme>
 </file>
 
-<file path=ppt/theme/theme3.xml><?xml version="1.0" encoding="utf-8"?>
+<file path=ppt/theme/theme2.xml><?xml version="1.0" encoding="utf-8"?>
 <a:theme xmlns:a="http://schemas.openxmlformats.org/drawingml/2006/main" xmlns:r="http://schemas.openxmlformats.org/officeDocument/2006/relationships" name="Simple Light">
   <a:themeElements>
     <a:clrScheme name="Simple Light">
@@ -18168,4 +15149,283 @@
     </a:fmtScheme>
   </a:themeElements>
 </a:theme>
+</file>
+
+<file path=ppt/theme/theme3.xml><?xml version="1.0" encoding="utf-8"?>
+<a:theme xmlns:a="http://schemas.openxmlformats.org/drawingml/2006/main" xmlns:r="http://schemas.openxmlformats.org/officeDocument/2006/relationships">
+  <a:themeElements>
+    <a:clrScheme name="Default">
+      <a:dk1>
+        <a:srgbClr val="000000"/>
+      </a:dk1>
+      <a:lt1>
+        <a:srgbClr val="FFFFFF"/>
+      </a:lt1>
+      <a:dk2>
+        <a:srgbClr val="158158"/>
+      </a:dk2>
+      <a:lt2>
+        <a:srgbClr val="F3F3F3"/>
+      </a:lt2>
+      <a:accent1>
+        <a:srgbClr val="058DC7"/>
+      </a:accent1>
+      <a:accent2>
+        <a:srgbClr val="50B432"/>
+      </a:accent2>
+      <a:accent3>
+        <a:srgbClr val="ED561B"/>
+      </a:accent3>
+      <a:accent4>
+        <a:srgbClr val="EDEF00"/>
+      </a:accent4>
+      <a:accent5>
+        <a:srgbClr val="24CBE5"/>
+      </a:accent5>
+      <a:accent6>
+        <a:srgbClr val="64E572"/>
+      </a:accent6>
+      <a:hlink>
+        <a:srgbClr val="2200CC"/>
+      </a:hlink>
+      <a:folHlink>
+        <a:srgbClr val="551A8B"/>
+      </a:folHlink>
+    </a:clrScheme>
+    <a:fontScheme name="Office">
+      <a:majorFont>
+        <a:latin typeface="Arial"/>
+        <a:ea typeface=""/>
+        <a:cs typeface=""/>
+        <a:font script="Jpan" typeface="ＭＳ Ｐゴシック"/>
+        <a:font script="Hang" typeface="맑은 고딕"/>
+        <a:font script="Hans" typeface="宋体"/>
+        <a:font script="Hant" typeface="新細明體"/>
+        <a:font script="Arab" typeface="Times New Roman"/>
+        <a:font script="Hebr" typeface="Times New Roman"/>
+        <a:font script="Thai" typeface="Angsana New"/>
+        <a:font script="Ethi" typeface="Nyala"/>
+        <a:font script="Beng" typeface="Vrinda"/>
+        <a:font script="Gujr" typeface="Shruti"/>
+        <a:font script="Khmr" typeface="MoolBoran"/>
+        <a:font script="Knda" typeface="Tunga"/>
+        <a:font script="Guru" typeface="Raavi"/>
+        <a:font script="Cans" typeface="Euphemia"/>
+        <a:font script="Cher" typeface="Plantagenet Cherokee"/>
+        <a:font script="Yiii" typeface="Microsoft Yi Baiti"/>
+        <a:font script="Tibt" typeface="Microsoft Himalaya"/>
+        <a:font script="Thaa" typeface="MV Boli"/>
+        <a:font script="Deva" typeface="Mangal"/>
+        <a:font script="Telu" typeface="Gautami"/>
+        <a:font script="Taml" typeface="Latha"/>
+        <a:font script="Syrc" typeface="Estrangelo Edessa"/>
+        <a:font script="Orya" typeface="Kalinga"/>
+        <a:font script="Mlym" typeface="Kartika"/>
+        <a:font script="Laoo" typeface="DokChampa"/>
+        <a:font script="Sinh" typeface="Iskoola Pota"/>
+        <a:font script="Mong" typeface="Mongolian Baiti"/>
+        <a:font script="Viet" typeface="Times New Roman"/>
+        <a:font script="Uigh" typeface="Microsoft Uighur"/>
+        <a:font script="Geor" typeface="Sylfaen"/>
+      </a:majorFont>
+      <a:minorFont>
+        <a:latin typeface="Arial"/>
+        <a:ea typeface=""/>
+        <a:cs typeface=""/>
+        <a:font script="Jpan" typeface="ＭＳ Ｐゴシック"/>
+        <a:font script="Hang" typeface="맑은 고딕"/>
+        <a:font script="Hans" typeface="宋体"/>
+        <a:font script="Hant" typeface="新細明體"/>
+        <a:font script="Arab" typeface="Arial"/>
+        <a:font script="Hebr" typeface="Arial"/>
+        <a:font script="Thai" typeface="Cordia New"/>
+        <a:font script="Ethi" typeface="Nyala"/>
+        <a:font script="Beng" typeface="Vrinda"/>
+        <a:font script="Gujr" typeface="Shruti"/>
+        <a:font script="Khmr" typeface="DaunPenh"/>
+        <a:font script="Knda" typeface="Tunga"/>
+        <a:font script="Guru" typeface="Raavi"/>
+        <a:font script="Cans" typeface="Euphemia"/>
+        <a:font script="Cher" typeface="Plantagenet Cherokee"/>
+        <a:font script="Yiii" typeface="Microsoft Yi Baiti"/>
+        <a:font script="Tibt" typeface="Microsoft Himalaya"/>
+        <a:font script="Thaa" typeface="MV Boli"/>
+        <a:font script="Deva" typeface="Mangal"/>
+        <a:font script="Telu" typeface="Gautami"/>
+        <a:font script="Taml" typeface="Latha"/>
+        <a:font script="Syrc" typeface="Estrangelo Edessa"/>
+        <a:font script="Orya" typeface="Kalinga"/>
+        <a:font script="Mlym" typeface="Kartika"/>
+        <a:font script="Laoo" typeface="DokChampa"/>
+        <a:font script="Sinh" typeface="Iskoola Pota"/>
+        <a:font script="Mong" typeface="Mongolian Baiti"/>
+        <a:font script="Viet" typeface="Arial"/>
+        <a:font script="Uigh" typeface="Microsoft Uighur"/>
+        <a:font script="Geor" typeface="Sylfaen"/>
+      </a:minorFont>
+    </a:fontScheme>
+    <a:fmtScheme name="Office">
+      <a:fillStyleLst>
+        <a:solidFill>
+          <a:schemeClr val="phClr"/>
+        </a:solidFill>
+        <a:gradFill rotWithShape="1">
+          <a:gsLst>
+            <a:gs pos="0">
+              <a:schemeClr val="phClr">
+                <a:tint val="50000"/>
+                <a:satMod val="300000"/>
+              </a:schemeClr>
+            </a:gs>
+            <a:gs pos="35000">
+              <a:schemeClr val="phClr">
+                <a:tint val="37000"/>
+                <a:satMod val="300000"/>
+              </a:schemeClr>
+            </a:gs>
+            <a:gs pos="100000">
+              <a:schemeClr val="phClr">
+                <a:tint val="15000"/>
+                <a:satMod val="350000"/>
+              </a:schemeClr>
+            </a:gs>
+          </a:gsLst>
+          <a:lin ang="16200000" scaled="1"/>
+        </a:gradFill>
+        <a:gradFill rotWithShape="1">
+          <a:gsLst>
+            <a:gs pos="0">
+              <a:schemeClr val="phClr">
+                <a:tint val="100000"/>
+                <a:shade val="100000"/>
+                <a:satMod val="130000"/>
+              </a:schemeClr>
+            </a:gs>
+            <a:gs pos="100000">
+              <a:schemeClr val="phClr">
+                <a:tint val="50000"/>
+                <a:shade val="100000"/>
+                <a:satMod val="350000"/>
+              </a:schemeClr>
+            </a:gs>
+          </a:gsLst>
+          <a:lin ang="16200000" scaled="0"/>
+        </a:gradFill>
+      </a:fillStyleLst>
+      <a:lnStyleLst>
+        <a:ln w="9525" cap="flat" cmpd="sng" algn="ctr">
+          <a:solidFill>
+            <a:schemeClr val="phClr">
+              <a:shade val="95000"/>
+              <a:satMod val="105000"/>
+            </a:schemeClr>
+          </a:solidFill>
+          <a:prstDash val="solid"/>
+        </a:ln>
+        <a:ln w="25400" cap="flat" cmpd="sng" algn="ctr">
+          <a:solidFill>
+            <a:schemeClr val="phClr"/>
+          </a:solidFill>
+          <a:prstDash val="solid"/>
+        </a:ln>
+        <a:ln w="38100" cap="flat" cmpd="sng" algn="ctr">
+          <a:solidFill>
+            <a:schemeClr val="phClr"/>
+          </a:solidFill>
+          <a:prstDash val="solid"/>
+        </a:ln>
+      </a:lnStyleLst>
+      <a:effectStyleLst>
+        <a:effectStyle>
+          <a:effectLst>
+            <a:outerShdw blurRad="40000" dist="20000" dir="5400000" rotWithShape="0">
+              <a:srgbClr val="000000">
+                <a:alpha val="38000"/>
+              </a:srgbClr>
+            </a:outerShdw>
+          </a:effectLst>
+        </a:effectStyle>
+        <a:effectStyle>
+          <a:effectLst>
+            <a:outerShdw blurRad="40000" dist="23000" dir="5400000" rotWithShape="0">
+              <a:srgbClr val="000000">
+                <a:alpha val="35000"/>
+              </a:srgbClr>
+            </a:outerShdw>
+          </a:effectLst>
+        </a:effectStyle>
+        <a:effectStyle>
+          <a:effectLst>
+            <a:outerShdw blurRad="40000" dist="23000" dir="5400000" rotWithShape="0">
+              <a:srgbClr val="000000">
+                <a:alpha val="35000"/>
+              </a:srgbClr>
+            </a:outerShdw>
+          </a:effectLst>
+          <a:scene3d>
+            <a:camera prst="orthographicFront">
+              <a:rot lat="0" lon="0" rev="0"/>
+            </a:camera>
+            <a:lightRig rig="threePt" dir="t">
+              <a:rot lat="0" lon="0" rev="1200000"/>
+            </a:lightRig>
+          </a:scene3d>
+          <a:sp3d>
+            <a:bevelT w="63500" h="25400"/>
+          </a:sp3d>
+        </a:effectStyle>
+      </a:effectStyleLst>
+      <a:bgFillStyleLst>
+        <a:solidFill>
+          <a:schemeClr val="phClr"/>
+        </a:solidFill>
+        <a:gradFill rotWithShape="1">
+          <a:gsLst>
+            <a:gs pos="0">
+              <a:schemeClr val="phClr">
+                <a:tint val="40000"/>
+                <a:satMod val="350000"/>
+              </a:schemeClr>
+            </a:gs>
+            <a:gs pos="40000">
+              <a:schemeClr val="phClr">
+                <a:tint val="45000"/>
+                <a:shade val="99000"/>
+                <a:satMod val="350000"/>
+              </a:schemeClr>
+            </a:gs>
+            <a:gs pos="100000">
+              <a:schemeClr val="phClr">
+                <a:shade val="20000"/>
+                <a:satMod val="255000"/>
+              </a:schemeClr>
+            </a:gs>
+          </a:gsLst>
+          <a:path path="circle">
+            <a:fillToRect l="50000" t="-80000" r="50000" b="180000"/>
+          </a:path>
+        </a:gradFill>
+        <a:gradFill rotWithShape="1">
+          <a:gsLst>
+            <a:gs pos="0">
+              <a:schemeClr val="phClr">
+                <a:tint val="80000"/>
+                <a:satMod val="300000"/>
+              </a:schemeClr>
+            </a:gs>
+            <a:gs pos="100000">
+              <a:schemeClr val="phClr">
+                <a:shade val="30000"/>
+                <a:satMod val="200000"/>
+              </a:schemeClr>
+            </a:gs>
+          </a:gsLst>
+          <a:path path="circle">
+            <a:fillToRect l="50000" t="50000" r="50000" b="50000"/>
+          </a:path>
+        </a:gradFill>
+      </a:bgFillStyleLst>
+    </a:fmtScheme>
+  </a:themeElements>
+</a:theme>
 </file>